--- a/modules/module-01-industrial-demand-generation/delivery-pack/slide-decks/exports/lesson-05-content-engine-for-industrial-demand.pptx
+++ b/modules/module-01-industrial-demand-generation/delivery-pack/slide-decks/exports/lesson-05-content-engine-for-industrial-demand.pptx
@@ -2,27 +2,27 @@
 <file path=ppt/presentation.xml><?xml version="1.0" encoding="utf-8"?>
 <p:presentation xmlns:p="http://schemas.openxmlformats.org/presentationml/2006/main">
   <p:sldMasterIdLst>
-    <p:sldMasterId xmlns:r="http://schemas.openxmlformats.org/officeDocument/2006/relationships" id="2147483648" r:id="R76b8315454114ac2"/>
+    <p:sldMasterId xmlns:r="http://schemas.openxmlformats.org/officeDocument/2006/relationships" id="2147483648" r:id="Re18fdae1153d4adc"/>
   </p:sldMasterIdLst>
   <p:notesMasterIdLst>
-    <p:notesMasterId xmlns:r="http://schemas.openxmlformats.org/officeDocument/2006/relationships" r:id="Re96835e759864402"/>
+    <p:notesMasterId xmlns:r="http://schemas.openxmlformats.org/officeDocument/2006/relationships" r:id="Ra5465d9fa4064d98"/>
   </p:notesMasterIdLst>
   <p:sldIdLst>
-    <p:sldId xmlns:r="http://schemas.openxmlformats.org/officeDocument/2006/relationships" id="256" r:id="R3fe4ae9699584a6b"/>
-    <p:sldId xmlns:r="http://schemas.openxmlformats.org/officeDocument/2006/relationships" id="257" r:id="R56eee4dd9ac4407a"/>
-    <p:sldId xmlns:r="http://schemas.openxmlformats.org/officeDocument/2006/relationships" id="258" r:id="Rffaed5992e044997"/>
-    <p:sldId xmlns:r="http://schemas.openxmlformats.org/officeDocument/2006/relationships" id="259" r:id="Rcd2e0e59800347a3"/>
-    <p:sldId xmlns:r="http://schemas.openxmlformats.org/officeDocument/2006/relationships" id="260" r:id="R3bd82cbbddb64991"/>
-    <p:sldId xmlns:r="http://schemas.openxmlformats.org/officeDocument/2006/relationships" id="261" r:id="Ra5e1be78725b4bc5"/>
-    <p:sldId xmlns:r="http://schemas.openxmlformats.org/officeDocument/2006/relationships" id="262" r:id="Rd03e1b9a8db348ce"/>
-    <p:sldId xmlns:r="http://schemas.openxmlformats.org/officeDocument/2006/relationships" id="263" r:id="Rbe58df7bdde7439e"/>
-    <p:sldId xmlns:r="http://schemas.openxmlformats.org/officeDocument/2006/relationships" id="264" r:id="R91ea9aa251114c47"/>
-    <p:sldId xmlns:r="http://schemas.openxmlformats.org/officeDocument/2006/relationships" id="265" r:id="Re21f94297fa949bc"/>
-    <p:sldId xmlns:r="http://schemas.openxmlformats.org/officeDocument/2006/relationships" id="266" r:id="Rb0ac383c96f54644"/>
-    <p:sldId xmlns:r="http://schemas.openxmlformats.org/officeDocument/2006/relationships" id="267" r:id="Rc5a3d4f1b74f46ff"/>
-    <p:sldId xmlns:r="http://schemas.openxmlformats.org/officeDocument/2006/relationships" id="268" r:id="R096239fdff2a4c97"/>
-    <p:sldId xmlns:r="http://schemas.openxmlformats.org/officeDocument/2006/relationships" id="269" r:id="R5c90ad8853bd4773"/>
-    <p:sldId xmlns:r="http://schemas.openxmlformats.org/officeDocument/2006/relationships" id="270" r:id="Rb397570d63684b25"/>
+    <p:sldId xmlns:r="http://schemas.openxmlformats.org/officeDocument/2006/relationships" id="256" r:id="Rb5c81ddecdcb4ae6"/>
+    <p:sldId xmlns:r="http://schemas.openxmlformats.org/officeDocument/2006/relationships" id="257" r:id="Rf2fca6db0d0441d6"/>
+    <p:sldId xmlns:r="http://schemas.openxmlformats.org/officeDocument/2006/relationships" id="258" r:id="Rd27396cee43e46fe"/>
+    <p:sldId xmlns:r="http://schemas.openxmlformats.org/officeDocument/2006/relationships" id="259" r:id="R99588ec3da5c47b9"/>
+    <p:sldId xmlns:r="http://schemas.openxmlformats.org/officeDocument/2006/relationships" id="260" r:id="Ra17ef34085f1498c"/>
+    <p:sldId xmlns:r="http://schemas.openxmlformats.org/officeDocument/2006/relationships" id="261" r:id="R0001216222c74997"/>
+    <p:sldId xmlns:r="http://schemas.openxmlformats.org/officeDocument/2006/relationships" id="262" r:id="R11b2568b89c549ab"/>
+    <p:sldId xmlns:r="http://schemas.openxmlformats.org/officeDocument/2006/relationships" id="263" r:id="Rd4bee9cb3f3e4f53"/>
+    <p:sldId xmlns:r="http://schemas.openxmlformats.org/officeDocument/2006/relationships" id="264" r:id="R407c7fb5b54f4f4b"/>
+    <p:sldId xmlns:r="http://schemas.openxmlformats.org/officeDocument/2006/relationships" id="265" r:id="R2d6623d34f1e463b"/>
+    <p:sldId xmlns:r="http://schemas.openxmlformats.org/officeDocument/2006/relationships" id="266" r:id="R18f444f6eb704f56"/>
+    <p:sldId xmlns:r="http://schemas.openxmlformats.org/officeDocument/2006/relationships" id="267" r:id="R3e875d25137b4d1b"/>
+    <p:sldId xmlns:r="http://schemas.openxmlformats.org/officeDocument/2006/relationships" id="268" r:id="R26f89d5dd01749da"/>
+    <p:sldId xmlns:r="http://schemas.openxmlformats.org/officeDocument/2006/relationships" id="269" r:id="Rf5be713d5bda46dc"/>
+    <p:sldId xmlns:r="http://schemas.openxmlformats.org/officeDocument/2006/relationships" id="270" r:id="R811a16b3bc9541d2"/>
   </p:sldIdLst>
   <p:sldSz cx="12192000" cy="6858000"/>
   <p:notesSz cx="6858000" cy="9144000"/>
@@ -1493,7 +1493,7 @@
   </p:cSld>
   <p:clrMap bg1="lt1" tx1="dk1" bg2="lt2" tx2="dk2" accent1="accent1" accent2="accent2" accent3="accent3" accent4="accent4" accent5="accent5" accent6="accent6" hlink="hlink" folHlink="folHlink"/>
   <p:sldLayoutIdLst>
-    <p:sldLayoutId xmlns:r="http://schemas.openxmlformats.org/officeDocument/2006/relationships" id="2147483649" r:id="R1308712cb0e64f91"/>
+    <p:sldLayoutId xmlns:r="http://schemas.openxmlformats.org/officeDocument/2006/relationships" id="2147483649" r:id="R180af0139fdf45f9"/>
   </p:sldLayoutIdLst>
   <p:txStyles>
     <p:titleStyle>
@@ -1792,7 +1792,7 @@
           <p:cNvPr id="1" name="">
             <a:extLst xmlns:a="http://schemas.openxmlformats.org/drawingml/2006/main">
               <a:ext uri="{FF2B5EF4-FFF2-40B4-BE49-F238E27FC236}">
-                <a16:creationId xmlns:a16="http://schemas.microsoft.com/office/drawing/2014/main" id="{BBB723C2-E945-401F-97DB-BB52BEE77B34}"/>
+                <a16:creationId xmlns:a16="http://schemas.microsoft.com/office/drawing/2014/main" id="{74D8F947-9F19-4817-945B-B376CD1C5157}"/>
               </a:ext>
             </a:extLst>
           </p:cNvPr>
@@ -1827,7 +1827,7 @@
           <p:cNvPr id="2" name="">
             <a:extLst xmlns:a="http://schemas.openxmlformats.org/drawingml/2006/main">
               <a:ext uri="{FF2B5EF4-FFF2-40B4-BE49-F238E27FC236}">
-                <a16:creationId xmlns:a16="http://schemas.microsoft.com/office/drawing/2014/main" id="{C698E361-F698-48D3-8056-7BEC5F5D3F4B}"/>
+                <a16:creationId xmlns:a16="http://schemas.microsoft.com/office/drawing/2014/main" id="{D9A3B389-13C8-4262-A8E8-1FC646362714}"/>
               </a:ext>
             </a:extLst>
           </p:cNvPr>
@@ -1862,7 +1862,7 @@
           <p:cNvPr id="3" name="">
             <a:extLst xmlns:a="http://schemas.openxmlformats.org/drawingml/2006/main">
               <a:ext uri="{FF2B5EF4-FFF2-40B4-BE49-F238E27FC236}">
-                <a16:creationId xmlns:a16="http://schemas.microsoft.com/office/drawing/2014/main" id="{AC679CEF-F28B-4AAF-AD13-9351903A4841}"/>
+                <a16:creationId xmlns:a16="http://schemas.microsoft.com/office/drawing/2014/main" id="{54C8FC8D-39DD-48EE-A086-B763F9072548}"/>
               </a:ext>
             </a:extLst>
           </p:cNvPr>
@@ -1897,7 +1897,7 @@
           <p:cNvPr id="4" name="kicker-05-marker">
             <a:extLst xmlns:a="http://schemas.openxmlformats.org/drawingml/2006/main">
               <a:ext uri="{FF2B5EF4-FFF2-40B4-BE49-F238E27FC236}">
-                <a16:creationId xmlns:a16="http://schemas.microsoft.com/office/drawing/2014/main" id="{19A87A4A-8CDE-4959-A70F-AC48A74072B9}"/>
+                <a16:creationId xmlns:a16="http://schemas.microsoft.com/office/drawing/2014/main" id="{B51EC861-49A7-4C36-A31B-A942AD912B10}"/>
               </a:ext>
             </a:extLst>
           </p:cNvPr>
@@ -1932,7 +1932,7 @@
           <p:cNvPr id="5" name="kicker-05-label">
             <a:extLst xmlns:a="http://schemas.openxmlformats.org/drawingml/2006/main">
               <a:ext uri="{FF2B5EF4-FFF2-40B4-BE49-F238E27FC236}">
-                <a16:creationId xmlns:a16="http://schemas.microsoft.com/office/drawing/2014/main" id="{92F124C1-4A2A-414E-846F-77C3ABF210FB}"/>
+                <a16:creationId xmlns:a16="http://schemas.microsoft.com/office/drawing/2014/main" id="{B950252B-C1E0-4F88-B902-121C7B21BB98}"/>
               </a:ext>
             </a:extLst>
           </p:cNvPr>
@@ -1996,7 +1996,7 @@
           <p:cNvPr id="6" name="">
             <a:extLst xmlns:a="http://schemas.openxmlformats.org/drawingml/2006/main">
               <a:ext uri="{FF2B5EF4-FFF2-40B4-BE49-F238E27FC236}">
-                <a16:creationId xmlns:a16="http://schemas.microsoft.com/office/drawing/2014/main" id="{2B28B015-971C-44FE-AE89-C2ABA9AD6C4F}"/>
+                <a16:creationId xmlns:a16="http://schemas.microsoft.com/office/drawing/2014/main" id="{6B584BC1-28E1-402A-BB26-7391A7D4A3FF}"/>
               </a:ext>
             </a:extLst>
           </p:cNvPr>
@@ -2060,7 +2060,7 @@
           <p:cNvPr id="7" name="">
             <a:extLst xmlns:a="http://schemas.openxmlformats.org/drawingml/2006/main">
               <a:ext uri="{FF2B5EF4-FFF2-40B4-BE49-F238E27FC236}">
-                <a16:creationId xmlns:a16="http://schemas.microsoft.com/office/drawing/2014/main" id="{80A38645-54A8-4F30-8C3E-7069A8A1AF9F}"/>
+                <a16:creationId xmlns:a16="http://schemas.microsoft.com/office/drawing/2014/main" id="{A15860CD-DC06-44EB-A72D-C9E0E2C0AA0A}"/>
               </a:ext>
             </a:extLst>
           </p:cNvPr>
@@ -2124,7 +2124,7 @@
           <p:cNvPr id="8" name="">
             <a:extLst xmlns:a="http://schemas.openxmlformats.org/drawingml/2006/main">
               <a:ext uri="{FF2B5EF4-FFF2-40B4-BE49-F238E27FC236}">
-                <a16:creationId xmlns:a16="http://schemas.microsoft.com/office/drawing/2014/main" id="{68D66D4A-2EA2-4359-BA5C-A35FBD686A15}"/>
+                <a16:creationId xmlns:a16="http://schemas.microsoft.com/office/drawing/2014/main" id="{EF3FA57E-C081-43B6-8496-72594BCA8728}"/>
               </a:ext>
             </a:extLst>
           </p:cNvPr>
@@ -2157,7 +2157,7 @@
           <p:cNvPr id="9" name="">
             <a:extLst xmlns:a="http://schemas.openxmlformats.org/drawingml/2006/main">
               <a:ext uri="{FF2B5EF4-FFF2-40B4-BE49-F238E27FC236}">
-                <a16:creationId xmlns:a16="http://schemas.microsoft.com/office/drawing/2014/main" id="{9F908862-2274-4226-AE02-B55B37667068}"/>
+                <a16:creationId xmlns:a16="http://schemas.microsoft.com/office/drawing/2014/main" id="{F34116A9-1EBB-4E06-9FC7-473F732CB309}"/>
               </a:ext>
             </a:extLst>
           </p:cNvPr>
@@ -2221,7 +2221,7 @@
           <p:cNvPr id="10" name="">
             <a:extLst xmlns:a="http://schemas.openxmlformats.org/drawingml/2006/main">
               <a:ext uri="{FF2B5EF4-FFF2-40B4-BE49-F238E27FC236}">
-                <a16:creationId xmlns:a16="http://schemas.microsoft.com/office/drawing/2014/main" id="{9A1938C8-BCD9-41FE-92C0-FCA67B87657C}"/>
+                <a16:creationId xmlns:a16="http://schemas.microsoft.com/office/drawing/2014/main" id="{65237B8F-9487-4CE5-9147-02BD6A703B34}"/>
               </a:ext>
             </a:extLst>
           </p:cNvPr>
@@ -2254,7 +2254,7 @@
           <p:cNvPr id="11" name="">
             <a:extLst xmlns:a="http://schemas.openxmlformats.org/drawingml/2006/main">
               <a:ext uri="{FF2B5EF4-FFF2-40B4-BE49-F238E27FC236}">
-                <a16:creationId xmlns:a16="http://schemas.microsoft.com/office/drawing/2014/main" id="{443DF47F-6D4B-4F9A-ADFB-DF7310B99DEE}"/>
+                <a16:creationId xmlns:a16="http://schemas.microsoft.com/office/drawing/2014/main" id="{FE3B8578-9302-4C1B-9848-98B707525D31}"/>
               </a:ext>
             </a:extLst>
           </p:cNvPr>
@@ -2318,7 +2318,7 @@
           <p:cNvPr id="12" name="">
             <a:extLst xmlns:a="http://schemas.openxmlformats.org/drawingml/2006/main">
               <a:ext uri="{FF2B5EF4-FFF2-40B4-BE49-F238E27FC236}">
-                <a16:creationId xmlns:a16="http://schemas.microsoft.com/office/drawing/2014/main" id="{A2A11DBA-8C53-4515-8E7D-4C0E22C3332C}"/>
+                <a16:creationId xmlns:a16="http://schemas.microsoft.com/office/drawing/2014/main" id="{BF49F17D-312B-4D44-92AF-447E74702688}"/>
               </a:ext>
             </a:extLst>
           </p:cNvPr>
@@ -2351,7 +2351,7 @@
           <p:cNvPr id="13" name="">
             <a:extLst xmlns:a="http://schemas.openxmlformats.org/drawingml/2006/main">
               <a:ext uri="{FF2B5EF4-FFF2-40B4-BE49-F238E27FC236}">
-                <a16:creationId xmlns:a16="http://schemas.microsoft.com/office/drawing/2014/main" id="{D01AAE64-8557-4700-A6AE-131C440B955F}"/>
+                <a16:creationId xmlns:a16="http://schemas.microsoft.com/office/drawing/2014/main" id="{1C988DB5-488A-4842-9635-BBD22D1E859D}"/>
               </a:ext>
             </a:extLst>
           </p:cNvPr>
@@ -2415,7 +2415,7 @@
           <p:cNvPr id="14" name="">
             <a:extLst xmlns:a="http://schemas.openxmlformats.org/drawingml/2006/main">
               <a:ext uri="{FF2B5EF4-FFF2-40B4-BE49-F238E27FC236}">
-                <a16:creationId xmlns:a16="http://schemas.microsoft.com/office/drawing/2014/main" id="{E31CC90E-3AB8-4C87-82F7-E99CE56FC2B6}"/>
+                <a16:creationId xmlns:a16="http://schemas.microsoft.com/office/drawing/2014/main" id="{F9C9173F-D4FD-4D11-9645-BE87A151531D}"/>
               </a:ext>
             </a:extLst>
           </p:cNvPr>
@@ -2448,7 +2448,7 @@
           <p:cNvPr id="15" name="">
             <a:extLst xmlns:a="http://schemas.openxmlformats.org/drawingml/2006/main">
               <a:ext uri="{FF2B5EF4-FFF2-40B4-BE49-F238E27FC236}">
-                <a16:creationId xmlns:a16="http://schemas.microsoft.com/office/drawing/2014/main" id="{FE7D2099-4152-4064-9CC9-0A6B72EAAFAF}"/>
+                <a16:creationId xmlns:a16="http://schemas.microsoft.com/office/drawing/2014/main" id="{A7493688-1B6A-4572-BBFD-E2C4A2632F2C}"/>
               </a:ext>
             </a:extLst>
           </p:cNvPr>
@@ -2483,7 +2483,7 @@
           <p:cNvPr id="16" name="">
             <a:extLst xmlns:a="http://schemas.openxmlformats.org/drawingml/2006/main">
               <a:ext uri="{FF2B5EF4-FFF2-40B4-BE49-F238E27FC236}">
-                <a16:creationId xmlns:a16="http://schemas.microsoft.com/office/drawing/2014/main" id="{10DD2721-1161-4CC6-8345-A1E4E6797910}"/>
+                <a16:creationId xmlns:a16="http://schemas.microsoft.com/office/drawing/2014/main" id="{8CFDB192-D47C-4CE2-BB9D-4C82335037D6}"/>
               </a:ext>
             </a:extLst>
           </p:cNvPr>
@@ -2547,7 +2547,7 @@
           <p:cNvPr id="17" name="">
             <a:extLst xmlns:a="http://schemas.openxmlformats.org/drawingml/2006/main">
               <a:ext uri="{FF2B5EF4-FFF2-40B4-BE49-F238E27FC236}">
-                <a16:creationId xmlns:a16="http://schemas.microsoft.com/office/drawing/2014/main" id="{20AB733D-A17B-484A-9E6E-8406C1CCC113}"/>
+                <a16:creationId xmlns:a16="http://schemas.microsoft.com/office/drawing/2014/main" id="{53596D9F-9C71-4D02-B240-BDD6520225C5}"/>
               </a:ext>
             </a:extLst>
           </p:cNvPr>
@@ -2611,7 +2611,7 @@
           <p:cNvPr id="18" name="">
             <a:extLst xmlns:a="http://schemas.openxmlformats.org/drawingml/2006/main">
               <a:ext uri="{FF2B5EF4-FFF2-40B4-BE49-F238E27FC236}">
-                <a16:creationId xmlns:a16="http://schemas.microsoft.com/office/drawing/2014/main" id="{28DEF708-5DB6-44C5-9876-EA85BD8E35DE}"/>
+                <a16:creationId xmlns:a16="http://schemas.microsoft.com/office/drawing/2014/main" id="{25ADAF3D-584D-4227-AD6B-418588951CE1}"/>
               </a:ext>
             </a:extLst>
           </p:cNvPr>
@@ -2646,7 +2646,7 @@
           <p:cNvPr id="19" name="">
             <a:extLst xmlns:a="http://schemas.openxmlformats.org/drawingml/2006/main">
               <a:ext uri="{FF2B5EF4-FFF2-40B4-BE49-F238E27FC236}">
-                <a16:creationId xmlns:a16="http://schemas.microsoft.com/office/drawing/2014/main" id="{F8E0FC27-E8CE-476C-81C1-F47634564FE5}"/>
+                <a16:creationId xmlns:a16="http://schemas.microsoft.com/office/drawing/2014/main" id="{D788767A-1AD5-4381-A2CF-8467280EAD36}"/>
               </a:ext>
             </a:extLst>
           </p:cNvPr>
@@ -2710,7 +2710,7 @@
           <p:cNvPr id="20" name="">
             <a:extLst xmlns:a="http://schemas.openxmlformats.org/drawingml/2006/main">
               <a:ext uri="{FF2B5EF4-FFF2-40B4-BE49-F238E27FC236}">
-                <a16:creationId xmlns:a16="http://schemas.microsoft.com/office/drawing/2014/main" id="{38DE8BD9-21DE-4D30-9DBE-079A2E32D89C}"/>
+                <a16:creationId xmlns:a16="http://schemas.microsoft.com/office/drawing/2014/main" id="{CA28DFA3-7253-4C71-987F-C697254A99BA}"/>
               </a:ext>
             </a:extLst>
           </p:cNvPr>
@@ -2764,7 +2764,7 @@
                 <a:ea typeface="Aptos"/>
                 <a:cs typeface="Aptos"/>
               </a:rPr>
-              <a:t>Teach the operating decision, run the diagnostic, then force a usable artifact. The slide is a prompt, not the handout.</a:t>
+              <a:t>Teach the operating decision, run the diagnostic, then force a usable artifact. The slide is a teaching cue, not the handout.</a:t>
             </a:r>
           </a:p>
         </p:txBody>
@@ -2774,7 +2774,7 @@
           <p:cNvPr id="21" name="">
             <a:extLst xmlns:a="http://schemas.openxmlformats.org/drawingml/2006/main">
               <a:ext uri="{FF2B5EF4-FFF2-40B4-BE49-F238E27FC236}">
-                <a16:creationId xmlns:a16="http://schemas.microsoft.com/office/drawing/2014/main" id="{0B173F16-D883-4E3F-AD3F-09E47BF07F86}"/>
+                <a16:creationId xmlns:a16="http://schemas.microsoft.com/office/drawing/2014/main" id="{D3E1EF87-7219-4077-992F-F291BCC53489}"/>
               </a:ext>
             </a:extLst>
           </p:cNvPr>
@@ -2809,7 +2809,7 @@
           <p:cNvPr id="22" name="">
             <a:extLst xmlns:a="http://schemas.openxmlformats.org/drawingml/2006/main">
               <a:ext uri="{FF2B5EF4-FFF2-40B4-BE49-F238E27FC236}">
-                <a16:creationId xmlns:a16="http://schemas.microsoft.com/office/drawing/2014/main" id="{C6FD83E5-5D16-472E-B5A9-7DB415E0EE6C}"/>
+                <a16:creationId xmlns:a16="http://schemas.microsoft.com/office/drawing/2014/main" id="{3869BCE6-8C14-45DE-8950-F323570988A0}"/>
               </a:ext>
             </a:extLst>
           </p:cNvPr>
@@ -2873,7 +2873,7 @@
           <p:cNvPr id="23" name="">
             <a:extLst xmlns:a="http://schemas.openxmlformats.org/drawingml/2006/main">
               <a:ext uri="{FF2B5EF4-FFF2-40B4-BE49-F238E27FC236}">
-                <a16:creationId xmlns:a16="http://schemas.microsoft.com/office/drawing/2014/main" id="{97E1E75A-5ED5-4E65-BFA1-1C9BD49C58FA}"/>
+                <a16:creationId xmlns:a16="http://schemas.microsoft.com/office/drawing/2014/main" id="{C777D7DE-1E41-449E-9DE3-67B83F162634}"/>
               </a:ext>
             </a:extLst>
           </p:cNvPr>
@@ -2937,7 +2937,7 @@
           <p:cNvPr id="24" name="">
             <a:extLst xmlns:a="http://schemas.openxmlformats.org/drawingml/2006/main">
               <a:ext uri="{FF2B5EF4-FFF2-40B4-BE49-F238E27FC236}">
-                <a16:creationId xmlns:a16="http://schemas.microsoft.com/office/drawing/2014/main" id="{2E8CB0B5-6E74-458B-AF22-4C7ED132343D}"/>
+                <a16:creationId xmlns:a16="http://schemas.microsoft.com/office/drawing/2014/main" id="{78587D46-AB11-41FA-AFAA-AC1FD6038262}"/>
               </a:ext>
             </a:extLst>
           </p:cNvPr>
@@ -2972,7 +2972,7 @@
           <p:cNvPr id="25" name="">
             <a:extLst xmlns:a="http://schemas.openxmlformats.org/drawingml/2006/main">
               <a:ext uri="{FF2B5EF4-FFF2-40B4-BE49-F238E27FC236}">
-                <a16:creationId xmlns:a16="http://schemas.microsoft.com/office/drawing/2014/main" id="{C472BEA9-24AB-4E84-9218-C30F178E9B0E}"/>
+                <a16:creationId xmlns:a16="http://schemas.microsoft.com/office/drawing/2014/main" id="{D53438E5-EFCB-4C1E-8E70-2F5E5639C969}"/>
               </a:ext>
             </a:extLst>
           </p:cNvPr>
@@ -3036,7 +3036,7 @@
           <p:cNvPr id="26" name="">
             <a:extLst xmlns:a="http://schemas.openxmlformats.org/drawingml/2006/main">
               <a:ext uri="{FF2B5EF4-FFF2-40B4-BE49-F238E27FC236}">
-                <a16:creationId xmlns:a16="http://schemas.microsoft.com/office/drawing/2014/main" id="{C2E1BE59-6292-411D-848A-F7DAF75E4EE5}"/>
+                <a16:creationId xmlns:a16="http://schemas.microsoft.com/office/drawing/2014/main" id="{18D454A7-EF47-4A14-ACAE-85C00361AA9B}"/>
               </a:ext>
             </a:extLst>
           </p:cNvPr>
@@ -3100,7 +3100,7 @@
           <p:cNvPr id="27" name="">
             <a:extLst xmlns:a="http://schemas.openxmlformats.org/drawingml/2006/main">
               <a:ext uri="{FF2B5EF4-FFF2-40B4-BE49-F238E27FC236}">
-                <a16:creationId xmlns:a16="http://schemas.microsoft.com/office/drawing/2014/main" id="{7F3DF1EE-FA18-42E0-AE50-90BAD4CA5369}"/>
+                <a16:creationId xmlns:a16="http://schemas.microsoft.com/office/drawing/2014/main" id="{D7A831AF-933B-4C8D-B9CD-13033F922B58}"/>
               </a:ext>
             </a:extLst>
           </p:cNvPr>
@@ -3162,7 +3162,7 @@
     </p:spTree>
     <p:extLst>
       <p:ext uri="{BB962C8B-B14F-4D97-AF65-F5344CB8AC3E}">
-        <p14:creationId xmlns:p14="http://schemas.microsoft.com/office/powerpoint/2010/main" val="1924393361"/>
+        <p14:creationId xmlns:p14="http://schemas.microsoft.com/office/powerpoint/2010/main" val="995288077"/>
       </p:ext>
     </p:extLst>
   </p:cSld>
@@ -3186,7 +3186,7 @@
           <p:cNvPr id="1" name="">
             <a:extLst xmlns:a="http://schemas.openxmlformats.org/drawingml/2006/main">
               <a:ext uri="{FF2B5EF4-FFF2-40B4-BE49-F238E27FC236}">
-                <a16:creationId xmlns:a16="http://schemas.microsoft.com/office/drawing/2014/main" id="{C87CF08D-8A79-4E48-9347-0EE61F49B5AB}"/>
+                <a16:creationId xmlns:a16="http://schemas.microsoft.com/office/drawing/2014/main" id="{6E5BE2B3-AC30-441F-A84B-74A2C255DB0C}"/>
               </a:ext>
             </a:extLst>
           </p:cNvPr>
@@ -3221,7 +3221,7 @@
           <p:cNvPr id="2" name="">
             <a:extLst xmlns:a="http://schemas.openxmlformats.org/drawingml/2006/main">
               <a:ext uri="{FF2B5EF4-FFF2-40B4-BE49-F238E27FC236}">
-                <a16:creationId xmlns:a16="http://schemas.microsoft.com/office/drawing/2014/main" id="{213A81D1-3627-4F1F-A960-9895D3172752}"/>
+                <a16:creationId xmlns:a16="http://schemas.microsoft.com/office/drawing/2014/main" id="{9A40FFF7-E6AF-4CBB-A527-9F6C244E43B4}"/>
               </a:ext>
             </a:extLst>
           </p:cNvPr>
@@ -3256,7 +3256,7 @@
           <p:cNvPr id="3" name="">
             <a:extLst xmlns:a="http://schemas.openxmlformats.org/drawingml/2006/main">
               <a:ext uri="{FF2B5EF4-FFF2-40B4-BE49-F238E27FC236}">
-                <a16:creationId xmlns:a16="http://schemas.microsoft.com/office/drawing/2014/main" id="{C92BDA81-A5EC-400F-8362-3844F88E28A1}"/>
+                <a16:creationId xmlns:a16="http://schemas.microsoft.com/office/drawing/2014/main" id="{4827E11E-F072-475A-8DD9-2F941DF0E270}"/>
               </a:ext>
             </a:extLst>
           </p:cNvPr>
@@ -3291,7 +3291,7 @@
           <p:cNvPr id="4" name="kicker-05-marker">
             <a:extLst xmlns:a="http://schemas.openxmlformats.org/drawingml/2006/main">
               <a:ext uri="{FF2B5EF4-FFF2-40B4-BE49-F238E27FC236}">
-                <a16:creationId xmlns:a16="http://schemas.microsoft.com/office/drawing/2014/main" id="{6E343D3A-84A1-4B81-93A3-9B3454B0C40C}"/>
+                <a16:creationId xmlns:a16="http://schemas.microsoft.com/office/drawing/2014/main" id="{6BCB9CD1-98F4-4546-9CB7-1C9DE2B47056}"/>
               </a:ext>
             </a:extLst>
           </p:cNvPr>
@@ -3326,7 +3326,7 @@
           <p:cNvPr id="5" name="kicker-05-label">
             <a:extLst xmlns:a="http://schemas.openxmlformats.org/drawingml/2006/main">
               <a:ext uri="{FF2B5EF4-FFF2-40B4-BE49-F238E27FC236}">
-                <a16:creationId xmlns:a16="http://schemas.microsoft.com/office/drawing/2014/main" id="{06EA0D40-6192-47ED-A9FA-F9318F54939E}"/>
+                <a16:creationId xmlns:a16="http://schemas.microsoft.com/office/drawing/2014/main" id="{E202C0E3-2A2D-4249-B61F-8059FDAE9CA0}"/>
               </a:ext>
             </a:extLst>
           </p:cNvPr>
@@ -3380,7 +3380,7 @@
                 <a:ea typeface="Aptos"/>
                 <a:cs typeface="Aptos"/>
               </a:rPr>
-              <a:t>MODULE 1 / LESSON 05 / AI-ASSISTED EXERCISE</a:t>
+              <a:t>MODULE 1 / LESSON 05 / STRUCTURED DRAFTING DRILL</a:t>
             </a:r>
           </a:p>
         </p:txBody>
@@ -3390,7 +3390,7 @@
           <p:cNvPr id="6" name="">
             <a:extLst xmlns:a="http://schemas.openxmlformats.org/drawingml/2006/main">
               <a:ext uri="{FF2B5EF4-FFF2-40B4-BE49-F238E27FC236}">
-                <a16:creationId xmlns:a16="http://schemas.microsoft.com/office/drawing/2014/main" id="{90408E34-F58E-49A0-9CBF-50F526CCD99F}"/>
+                <a16:creationId xmlns:a16="http://schemas.microsoft.com/office/drawing/2014/main" id="{1F81E1FE-8EC1-4D70-B179-1170756D5F41}"/>
               </a:ext>
             </a:extLst>
           </p:cNvPr>
@@ -3444,7 +3444,7 @@
                 <a:ea typeface="Aptos Display"/>
                 <a:cs typeface="Aptos Display"/>
               </a:rPr>
-              <a:t>Use AI to structure the attempt, then make humans responsible for judgment.</a:t>
+              <a:t>Structure the first draft before the room critiques it.</a:t>
             </a:r>
           </a:p>
         </p:txBody>
@@ -3454,7 +3454,7 @@
           <p:cNvPr id="7" name="">
             <a:extLst xmlns:a="http://schemas.openxmlformats.org/drawingml/2006/main">
               <a:ext uri="{FF2B5EF4-FFF2-40B4-BE49-F238E27FC236}">
-                <a16:creationId xmlns:a16="http://schemas.microsoft.com/office/drawing/2014/main" id="{35B6F482-4319-42C4-B328-2B84383BC7A0}"/>
+                <a16:creationId xmlns:a16="http://schemas.microsoft.com/office/drawing/2014/main" id="{44A0E95F-5D57-49A1-9E60-59AB96AA41FA}"/>
               </a:ext>
             </a:extLst>
           </p:cNvPr>
@@ -3508,7 +3508,7 @@
                 <a:ea typeface="Aptos"/>
                 <a:cs typeface="Aptos"/>
               </a:rPr>
-              <a:t>The prompt is constrained by source, assumptions, output standard, and human validation.</a:t>
+              <a:t>The brief is constrained by source evidence, assumptions, output standard, and validation.</a:t>
             </a:r>
           </a:p>
         </p:txBody>
@@ -3518,7 +3518,7 @@
           <p:cNvPr id="8" name="">
             <a:extLst xmlns:a="http://schemas.openxmlformats.org/drawingml/2006/main">
               <a:ext uri="{FF2B5EF4-FFF2-40B4-BE49-F238E27FC236}">
-                <a16:creationId xmlns:a16="http://schemas.microsoft.com/office/drawing/2014/main" id="{B1D3E3E8-B845-4CF2-AF1F-C0310C5A9366}"/>
+                <a16:creationId xmlns:a16="http://schemas.microsoft.com/office/drawing/2014/main" id="{24385C98-B974-433E-A5AE-8B98F4D282E1}"/>
               </a:ext>
             </a:extLst>
           </p:cNvPr>
@@ -3553,7 +3553,7 @@
           <p:cNvPr id="9" name="">
             <a:extLst xmlns:a="http://schemas.openxmlformats.org/drawingml/2006/main">
               <a:ext uri="{FF2B5EF4-FFF2-40B4-BE49-F238E27FC236}">
-                <a16:creationId xmlns:a16="http://schemas.microsoft.com/office/drawing/2014/main" id="{4E29B481-2999-49B6-9854-36214171D8E9}"/>
+                <a16:creationId xmlns:a16="http://schemas.microsoft.com/office/drawing/2014/main" id="{BEDF9588-9259-41D8-84B4-BEDBDAD25E9C}"/>
               </a:ext>
             </a:extLst>
           </p:cNvPr>
@@ -3617,7 +3617,7 @@
           <p:cNvPr id="10" name="">
             <a:extLst xmlns:a="http://schemas.openxmlformats.org/drawingml/2006/main">
               <a:ext uri="{FF2B5EF4-FFF2-40B4-BE49-F238E27FC236}">
-                <a16:creationId xmlns:a16="http://schemas.microsoft.com/office/drawing/2014/main" id="{B53F7D86-9069-4E03-AF4F-EB10587B5103}"/>
+                <a16:creationId xmlns:a16="http://schemas.microsoft.com/office/drawing/2014/main" id="{4CA0F22E-94B9-4F31-BC79-E8EAE947E085}"/>
               </a:ext>
             </a:extLst>
           </p:cNvPr>
@@ -3681,7 +3681,7 @@
           <p:cNvPr id="11" name="">
             <a:extLst xmlns:a="http://schemas.openxmlformats.org/drawingml/2006/main">
               <a:ext uri="{FF2B5EF4-FFF2-40B4-BE49-F238E27FC236}">
-                <a16:creationId xmlns:a16="http://schemas.microsoft.com/office/drawing/2014/main" id="{53F8E6D7-120B-4879-9A14-6B052BE49FF2}"/>
+                <a16:creationId xmlns:a16="http://schemas.microsoft.com/office/drawing/2014/main" id="{D3AD908B-6029-4170-865C-79CE8CD3395C}"/>
               </a:ext>
             </a:extLst>
           </p:cNvPr>
@@ -3745,19 +3745,19 @@
           <p:cNvPr id="12" name="">
             <a:extLst xmlns:a="http://schemas.openxmlformats.org/drawingml/2006/main">
               <a:ext uri="{FF2B5EF4-FFF2-40B4-BE49-F238E27FC236}">
-                <a16:creationId xmlns:a16="http://schemas.microsoft.com/office/drawing/2014/main" id="{A94F707E-C008-46EA-88E7-3F3CA7981F4F}"/>
-              </a:ext>
-            </a:extLst>
-          </p:cNvPr>
-          <p:cNvSpPr>
-            <a:spLocks xmlns:a="http://schemas.openxmlformats.org/drawingml/2006/main" noGrp="1"/>
-          </p:cNvSpPr>
-          <p:nvPr/>
-        </p:nvSpPr>
-        <p:spPr>
-          <a:xfrm xmlns:a="http://schemas.openxmlformats.org/drawingml/2006/main">
-            <a:off x="228600" y="1809750"/>
-            <a:ext cx="11963400" cy="4591050"/>
+                <a16:creationId xmlns:a16="http://schemas.microsoft.com/office/drawing/2014/main" id="{6F44FE96-987E-4F63-A4B6-AFED014A602E}"/>
+              </a:ext>
+            </a:extLst>
+          </p:cNvPr>
+          <p:cNvSpPr>
+            <a:spLocks xmlns:a="http://schemas.openxmlformats.org/drawingml/2006/main" noGrp="1"/>
+          </p:cNvSpPr>
+          <p:nvPr/>
+        </p:nvSpPr>
+        <p:spPr>
+          <a:xfrm xmlns:a="http://schemas.openxmlformats.org/drawingml/2006/main">
+            <a:off x="0" y="1809750"/>
+            <a:ext cx="12192000" cy="4591050"/>
           </a:xfrm>
           <a:prstGeom xmlns:a="http://schemas.openxmlformats.org/drawingml/2006/main" prst="rect">
             <a:avLst/>
@@ -3765,11 +3765,9 @@
           <a:solidFill xmlns:a="http://schemas.openxmlformats.org/drawingml/2006/main">
             <a:srgbClr val="F5F6F2"/>
           </a:solidFill>
-          <a:ln xmlns:a="http://schemas.openxmlformats.org/drawingml/2006/main" w="0">
-            <a:solidFill>
-              <a:srgbClr val="000000">
-                <a:alpha val="0"/>
-              </a:srgbClr>
+          <a:ln xmlns:a="http://schemas.openxmlformats.org/drawingml/2006/main" w="9525">
+            <a:solidFill>
+              <a:srgbClr val="F5F6F2"/>
             </a:solidFill>
             <a:prstDash val="solid"/>
           </a:ln>
@@ -3780,29 +3778,29 @@
           <p:cNvPr id="13" name="">
             <a:extLst xmlns:a="http://schemas.openxmlformats.org/drawingml/2006/main">
               <a:ext uri="{FF2B5EF4-FFF2-40B4-BE49-F238E27FC236}">
-                <a16:creationId xmlns:a16="http://schemas.microsoft.com/office/drawing/2014/main" id="{641D46CC-F9E6-45E8-8B30-4E437053CF8B}"/>
-              </a:ext>
-            </a:extLst>
-          </p:cNvPr>
-          <p:cNvSpPr>
-            <a:spLocks xmlns:a="http://schemas.openxmlformats.org/drawingml/2006/main" noGrp="1"/>
-          </p:cNvSpPr>
-          <p:nvPr/>
-        </p:nvSpPr>
-        <p:spPr>
-          <a:xfrm xmlns:a="http://schemas.openxmlformats.org/drawingml/2006/main">
-            <a:off x="228600" y="1809750"/>
-            <a:ext cx="6096000" cy="4591050"/>
-          </a:xfrm>
-          <a:prstGeom xmlns:a="http://schemas.openxmlformats.org/drawingml/2006/main" prst="rect">
-            <a:avLst/>
-          </a:prstGeom>
-          <a:solidFill xmlns:a="http://schemas.openxmlformats.org/drawingml/2006/main">
-            <a:srgbClr val="12232B"/>
+                <a16:creationId xmlns:a16="http://schemas.microsoft.com/office/drawing/2014/main" id="{46D043FE-CF28-442E-8949-CDE996A6E60A}"/>
+              </a:ext>
+            </a:extLst>
+          </p:cNvPr>
+          <p:cNvSpPr>
+            <a:spLocks xmlns:a="http://schemas.openxmlformats.org/drawingml/2006/main" noGrp="1"/>
+          </p:cNvSpPr>
+          <p:nvPr/>
+        </p:nvSpPr>
+        <p:spPr>
+          <a:xfrm xmlns:a="http://schemas.openxmlformats.org/drawingml/2006/main">
+            <a:off x="514350" y="2038350"/>
+            <a:ext cx="5619750" cy="3181350"/>
+          </a:xfrm>
+          <a:prstGeom xmlns:a="http://schemas.openxmlformats.org/drawingml/2006/main" prst="rect">
+            <a:avLst/>
+          </a:prstGeom>
+          <a:solidFill xmlns:a="http://schemas.openxmlformats.org/drawingml/2006/main">
+            <a:srgbClr val="FFFFFF"/>
           </a:solidFill>
           <a:ln xmlns:a="http://schemas.openxmlformats.org/drawingml/2006/main" w="9525">
             <a:solidFill>
-              <a:srgbClr val="12232B"/>
+              <a:srgbClr val="D9DDD6"/>
             </a:solidFill>
             <a:prstDash val="solid"/>
           </a:ln>
@@ -3813,25 +3811,25 @@
           <p:cNvPr id="14" name="">
             <a:extLst xmlns:a="http://schemas.openxmlformats.org/drawingml/2006/main">
               <a:ext uri="{FF2B5EF4-FFF2-40B4-BE49-F238E27FC236}">
-                <a16:creationId xmlns:a16="http://schemas.microsoft.com/office/drawing/2014/main" id="{34CEF18D-5F5C-4DA3-8E0D-88AF537A61E8}"/>
-              </a:ext>
-            </a:extLst>
-          </p:cNvPr>
-          <p:cNvSpPr>
-            <a:spLocks xmlns:a="http://schemas.openxmlformats.org/drawingml/2006/main" noGrp="1"/>
-          </p:cNvSpPr>
-          <p:nvPr/>
-        </p:nvSpPr>
-        <p:spPr>
-          <a:xfrm xmlns:a="http://schemas.openxmlformats.org/drawingml/2006/main">
-            <a:off x="609600" y="2266950"/>
+                <a16:creationId xmlns:a16="http://schemas.microsoft.com/office/drawing/2014/main" id="{0D0375E6-6C78-41FE-8F62-CDCBF4BCAE7B}"/>
+              </a:ext>
+            </a:extLst>
+          </p:cNvPr>
+          <p:cNvSpPr>
+            <a:spLocks xmlns:a="http://schemas.openxmlformats.org/drawingml/2006/main" noGrp="1"/>
+          </p:cNvSpPr>
+          <p:nvPr/>
+        </p:nvSpPr>
+        <p:spPr>
+          <a:xfrm xmlns:a="http://schemas.openxmlformats.org/drawingml/2006/main">
+            <a:off x="819150" y="2419350"/>
             <a:ext cx="266700" cy="19050"/>
           </a:xfrm>
           <a:prstGeom xmlns:a="http://schemas.openxmlformats.org/drawingml/2006/main" prst="rect">
             <a:avLst/>
           </a:prstGeom>
           <a:solidFill xmlns:a="http://schemas.openxmlformats.org/drawingml/2006/main">
-            <a:srgbClr val="B7953B"/>
+            <a:srgbClr val="A85D2A"/>
           </a:solidFill>
           <a:ln xmlns:a="http://schemas.openxmlformats.org/drawingml/2006/main" w="0">
             <a:solidFill>
@@ -3848,18 +3846,18 @@
           <p:cNvPr id="15" name="">
             <a:extLst xmlns:a="http://schemas.openxmlformats.org/drawingml/2006/main">
               <a:ext uri="{FF2B5EF4-FFF2-40B4-BE49-F238E27FC236}">
-                <a16:creationId xmlns:a16="http://schemas.microsoft.com/office/drawing/2014/main" id="{E55CD7A4-0A61-42FC-A6C4-E6232C9AC62F}"/>
-              </a:ext>
-            </a:extLst>
-          </p:cNvPr>
-          <p:cNvSpPr>
-            <a:spLocks xmlns:a="http://schemas.openxmlformats.org/drawingml/2006/main" noGrp="1"/>
-          </p:cNvSpPr>
-          <p:nvPr/>
-        </p:nvSpPr>
-        <p:spPr>
-          <a:xfrm xmlns:a="http://schemas.openxmlformats.org/drawingml/2006/main">
-            <a:off x="971550" y="2190750"/>
+                <a16:creationId xmlns:a16="http://schemas.microsoft.com/office/drawing/2014/main" id="{FF674B88-20C8-4C80-BDCF-467ACBD62A31}"/>
+              </a:ext>
+            </a:extLst>
+          </p:cNvPr>
+          <p:cNvSpPr>
+            <a:spLocks xmlns:a="http://schemas.openxmlformats.org/drawingml/2006/main" noGrp="1"/>
+          </p:cNvSpPr>
+          <p:nvPr/>
+        </p:nvSpPr>
+        <p:spPr>
+          <a:xfrm xmlns:a="http://schemas.openxmlformats.org/drawingml/2006/main">
+            <a:off x="1181100" y="2343150"/>
             <a:ext cx="2476500" cy="171450"/>
           </a:xfrm>
           <a:prstGeom xmlns:a="http://schemas.openxmlformats.org/drawingml/2006/main" prst="rect">
@@ -3902,7 +3900,7 @@
                 <a:ea typeface="Aptos"/>
                 <a:cs typeface="Aptos"/>
               </a:rPr>
-              <a:t>PROMPT TO GIVE AI</a:t>
+              <a:t>DRAFTING BRIEF</a:t>
             </a:r>
           </a:p>
         </p:txBody>
@@ -3912,19 +3910,19 @@
           <p:cNvPr id="16" name="">
             <a:extLst xmlns:a="http://schemas.openxmlformats.org/drawingml/2006/main">
               <a:ext uri="{FF2B5EF4-FFF2-40B4-BE49-F238E27FC236}">
-                <a16:creationId xmlns:a16="http://schemas.microsoft.com/office/drawing/2014/main" id="{6307AB76-CA96-4504-82E1-E160C65CD9AF}"/>
-              </a:ext>
-            </a:extLst>
-          </p:cNvPr>
-          <p:cNvSpPr>
-            <a:spLocks xmlns:a="http://schemas.openxmlformats.org/drawingml/2006/main" noGrp="1"/>
-          </p:cNvSpPr>
-          <p:nvPr/>
-        </p:nvSpPr>
-        <p:spPr>
-          <a:xfrm xmlns:a="http://schemas.openxmlformats.org/drawingml/2006/main">
-            <a:off x="609600" y="2647950"/>
-            <a:ext cx="5048250" cy="2190750"/>
+                <a16:creationId xmlns:a16="http://schemas.microsoft.com/office/drawing/2014/main" id="{1A3CA163-534B-41AB-B032-9067461DCA37}"/>
+              </a:ext>
+            </a:extLst>
+          </p:cNvPr>
+          <p:cNvSpPr>
+            <a:spLocks xmlns:a="http://schemas.openxmlformats.org/drawingml/2006/main" noGrp="1"/>
+          </p:cNvSpPr>
+          <p:nvPr/>
+        </p:nvSpPr>
+        <p:spPr>
+          <a:xfrm xmlns:a="http://schemas.openxmlformats.org/drawingml/2006/main">
+            <a:off x="819150" y="2762250"/>
+            <a:ext cx="4610100" cy="1752600"/>
           </a:xfrm>
           <a:prstGeom xmlns:a="http://schemas.openxmlformats.org/drawingml/2006/main" prst="rect">
             <a:avLst/>
@@ -3948,9 +3946,240 @@
           <a:lstStyle xmlns:a="http://schemas.openxmlformats.org/drawingml/2006/main"/>
           <a:p xmlns:a="http://schemas.openxmlformats.org/drawingml/2006/main">
             <a:pPr algn="l">
+              <a:defRPr sz="1200" b="0">
+                <a:solidFill>
+                  <a:srgbClr val="172026"/>
+                </a:solidFill>
+                <a:latin typeface="Aptos"/>
+                <a:ea typeface="Aptos"/>
+                <a:cs typeface="Aptos"/>
+              </a:defRPr>
+            </a:pPr>
+            <a:r>
+              <a:rPr sz="1200" b="0">
+                <a:solidFill>
+                  <a:srgbClr val="172026"/>
+                </a:solidFill>
+                <a:latin typeface="Aptos"/>
+                <a:ea typeface="Aptos"/>
+                <a:cs typeface="Aptos"/>
+              </a:rPr>
+              <a:t>Turn the MOIN grid into a content plan. For each asset, name the buyer question, demand state, format, SME input, sales use, distribution path, signal design, and quality risk. Flag where human technical or field validation is required before drafting.</a:t>
+            </a:r>
+          </a:p>
+        </p:txBody>
+      </p:sp>
+      <p:sp>
+        <p:nvSpPr>
+          <p:cNvPr id="17" name="">
+            <a:extLst xmlns:a="http://schemas.openxmlformats.org/drawingml/2006/main">
+              <a:ext uri="{FF2B5EF4-FFF2-40B4-BE49-F238E27FC236}">
+                <a16:creationId xmlns:a16="http://schemas.microsoft.com/office/drawing/2014/main" id="{75DE0376-C2FB-4AB4-9B2F-F61F1B31CE93}"/>
+              </a:ext>
+            </a:extLst>
+          </p:cNvPr>
+          <p:cNvSpPr>
+            <a:spLocks xmlns:a="http://schemas.openxmlformats.org/drawingml/2006/main" noGrp="1"/>
+          </p:cNvSpPr>
+          <p:nvPr/>
+        </p:nvSpPr>
+        <p:spPr>
+          <a:xfrm xmlns:a="http://schemas.openxmlformats.org/drawingml/2006/main">
+            <a:off x="6496050" y="2038350"/>
+            <a:ext cx="4933950" cy="3181350"/>
+          </a:xfrm>
+          <a:prstGeom xmlns:a="http://schemas.openxmlformats.org/drawingml/2006/main" prst="rect">
+            <a:avLst/>
+          </a:prstGeom>
+          <a:solidFill xmlns:a="http://schemas.openxmlformats.org/drawingml/2006/main">
+            <a:srgbClr val="F9FAF7"/>
+          </a:solidFill>
+          <a:ln xmlns:a="http://schemas.openxmlformats.org/drawingml/2006/main" w="9525">
+            <a:solidFill>
+              <a:srgbClr val="D9DDD6"/>
+            </a:solidFill>
+            <a:prstDash val="solid"/>
+          </a:ln>
+        </p:spPr>
+      </p:sp>
+      <p:sp>
+        <p:nvSpPr>
+          <p:cNvPr id="18" name="">
+            <a:extLst xmlns:a="http://schemas.openxmlformats.org/drawingml/2006/main">
+              <a:ext uri="{FF2B5EF4-FFF2-40B4-BE49-F238E27FC236}">
+                <a16:creationId xmlns:a16="http://schemas.microsoft.com/office/drawing/2014/main" id="{61149B57-540E-465F-93BB-73917F68E329}"/>
+              </a:ext>
+            </a:extLst>
+          </p:cNvPr>
+          <p:cNvSpPr>
+            <a:spLocks xmlns:a="http://schemas.openxmlformats.org/drawingml/2006/main" noGrp="1"/>
+          </p:cNvSpPr>
+          <p:nvPr/>
+        </p:nvSpPr>
+        <p:spPr>
+          <a:xfrm xmlns:a="http://schemas.openxmlformats.org/drawingml/2006/main">
+            <a:off x="6819900" y="2419350"/>
+            <a:ext cx="266700" cy="19050"/>
+          </a:xfrm>
+          <a:prstGeom xmlns:a="http://schemas.openxmlformats.org/drawingml/2006/main" prst="rect">
+            <a:avLst/>
+          </a:prstGeom>
+          <a:solidFill xmlns:a="http://schemas.openxmlformats.org/drawingml/2006/main">
+            <a:srgbClr val="1D6072"/>
+          </a:solidFill>
+          <a:ln xmlns:a="http://schemas.openxmlformats.org/drawingml/2006/main" w="0">
+            <a:solidFill>
+              <a:srgbClr val="000000">
+                <a:alpha val="0"/>
+              </a:srgbClr>
+            </a:solidFill>
+            <a:prstDash val="solid"/>
+          </a:ln>
+        </p:spPr>
+      </p:sp>
+      <p:sp>
+        <p:nvSpPr>
+          <p:cNvPr id="19" name="">
+            <a:extLst xmlns:a="http://schemas.openxmlformats.org/drawingml/2006/main">
+              <a:ext uri="{FF2B5EF4-FFF2-40B4-BE49-F238E27FC236}">
+                <a16:creationId xmlns:a16="http://schemas.microsoft.com/office/drawing/2014/main" id="{B54D5D8A-0F4E-456C-9447-BB4518825537}"/>
+              </a:ext>
+            </a:extLst>
+          </p:cNvPr>
+          <p:cNvSpPr>
+            <a:spLocks xmlns:a="http://schemas.openxmlformats.org/drawingml/2006/main" noGrp="1"/>
+          </p:cNvSpPr>
+          <p:nvPr/>
+        </p:nvSpPr>
+        <p:spPr>
+          <a:xfrm xmlns:a="http://schemas.openxmlformats.org/drawingml/2006/main">
+            <a:off x="7181850" y="2343150"/>
+            <a:ext cx="2476500" cy="171450"/>
+          </a:xfrm>
+          <a:prstGeom xmlns:a="http://schemas.openxmlformats.org/drawingml/2006/main" prst="rect">
+            <a:avLst/>
+          </a:prstGeom>
+          <a:solidFill xmlns:a="http://schemas.openxmlformats.org/drawingml/2006/main">
+            <a:srgbClr val="000000">
+              <a:alpha val="0"/>
+            </a:srgbClr>
+          </a:solidFill>
+          <a:ln xmlns:a="http://schemas.openxmlformats.org/drawingml/2006/main" w="0">
+            <a:solidFill>
+              <a:srgbClr val="000000">
+                <a:alpha val="0"/>
+              </a:srgbClr>
+            </a:solidFill>
+            <a:prstDash val="solid"/>
+          </a:ln>
+        </p:spPr>
+        <p:txBody>
+          <a:bodyPr xmlns:a="http://schemas.openxmlformats.org/drawingml/2006/main" lIns="0" tIns="0" rIns="0" bIns="0" anchor="t"/>
+          <a:lstStyle xmlns:a="http://schemas.openxmlformats.org/drawingml/2006/main"/>
+          <a:p xmlns:a="http://schemas.openxmlformats.org/drawingml/2006/main">
+            <a:pPr algn="l">
+              <a:defRPr sz="750" b="1">
+                <a:solidFill>
+                  <a:srgbClr val="59646A"/>
+                </a:solidFill>
+                <a:latin typeface="Aptos"/>
+                <a:ea typeface="Aptos"/>
+                <a:cs typeface="Aptos"/>
+              </a:defRPr>
+            </a:pPr>
+            <a:r>
+              <a:rPr sz="750" b="1">
+                <a:solidFill>
+                  <a:srgbClr val="59646A"/>
+                </a:solidFill>
+                <a:latin typeface="Aptos"/>
+                <a:ea typeface="Aptos"/>
+                <a:cs typeface="Aptos"/>
+              </a:rPr>
+              <a:t>REQUIRED OUTPUT STANDARD</a:t>
+            </a:r>
+          </a:p>
+        </p:txBody>
+      </p:sp>
+      <p:sp>
+        <p:nvSpPr>
+          <p:cNvPr id="20" name="">
+            <a:extLst xmlns:a="http://schemas.openxmlformats.org/drawingml/2006/main">
+              <a:ext uri="{FF2B5EF4-FFF2-40B4-BE49-F238E27FC236}">
+                <a16:creationId xmlns:a16="http://schemas.microsoft.com/office/drawing/2014/main" id="{88D874B9-A0A2-4F63-9A51-2B78946207C4}"/>
+              </a:ext>
+            </a:extLst>
+          </p:cNvPr>
+          <p:cNvSpPr>
+            <a:spLocks xmlns:a="http://schemas.openxmlformats.org/drawingml/2006/main" noGrp="1"/>
+          </p:cNvSpPr>
+          <p:nvPr/>
+        </p:nvSpPr>
+        <p:spPr>
+          <a:xfrm xmlns:a="http://schemas.openxmlformats.org/drawingml/2006/main">
+            <a:off x="6819900" y="2847975"/>
+            <a:ext cx="57150" cy="57150"/>
+          </a:xfrm>
+          <a:prstGeom xmlns:a="http://schemas.openxmlformats.org/drawingml/2006/main" prst="rect">
+            <a:avLst/>
+          </a:prstGeom>
+          <a:solidFill xmlns:a="http://schemas.openxmlformats.org/drawingml/2006/main">
+            <a:srgbClr val="1D6072"/>
+          </a:solidFill>
+          <a:ln xmlns:a="http://schemas.openxmlformats.org/drawingml/2006/main" w="0">
+            <a:solidFill>
+              <a:srgbClr val="000000">
+                <a:alpha val="0"/>
+              </a:srgbClr>
+            </a:solidFill>
+            <a:prstDash val="solid"/>
+          </a:ln>
+        </p:spPr>
+      </p:sp>
+      <p:sp>
+        <p:nvSpPr>
+          <p:cNvPr id="21" name="">
+            <a:extLst xmlns:a="http://schemas.openxmlformats.org/drawingml/2006/main">
+              <a:ext uri="{FF2B5EF4-FFF2-40B4-BE49-F238E27FC236}">
+                <a16:creationId xmlns:a16="http://schemas.microsoft.com/office/drawing/2014/main" id="{A0D56725-54FC-4242-BFF8-BF8CFC61DA03}"/>
+              </a:ext>
+            </a:extLst>
+          </p:cNvPr>
+          <p:cNvSpPr>
+            <a:spLocks xmlns:a="http://schemas.openxmlformats.org/drawingml/2006/main" noGrp="1"/>
+          </p:cNvSpPr>
+          <p:nvPr/>
+        </p:nvSpPr>
+        <p:spPr>
+          <a:xfrm xmlns:a="http://schemas.openxmlformats.org/drawingml/2006/main">
+            <a:off x="6991350" y="2781300"/>
+            <a:ext cx="3619500" cy="438150"/>
+          </a:xfrm>
+          <a:prstGeom xmlns:a="http://schemas.openxmlformats.org/drawingml/2006/main" prst="rect">
+            <a:avLst/>
+          </a:prstGeom>
+          <a:solidFill xmlns:a="http://schemas.openxmlformats.org/drawingml/2006/main">
+            <a:srgbClr val="000000">
+              <a:alpha val="0"/>
+            </a:srgbClr>
+          </a:solidFill>
+          <a:ln xmlns:a="http://schemas.openxmlformats.org/drawingml/2006/main" w="0">
+            <a:solidFill>
+              <a:srgbClr val="000000">
+                <a:alpha val="0"/>
+              </a:srgbClr>
+            </a:solidFill>
+            <a:prstDash val="solid"/>
+          </a:ln>
+        </p:spPr>
+        <p:txBody>
+          <a:bodyPr xmlns:a="http://schemas.openxmlformats.org/drawingml/2006/main" lIns="0" tIns="0" rIns="0" bIns="0" anchor="t"/>
+          <a:lstStyle xmlns:a="http://schemas.openxmlformats.org/drawingml/2006/main"/>
+          <a:p xmlns:a="http://schemas.openxmlformats.org/drawingml/2006/main">
+            <a:pPr algn="l">
               <a:defRPr sz="1125" b="0">
                 <a:solidFill>
-                  <a:srgbClr val="FFFFFF"/>
+                  <a:srgbClr val="172026"/>
                 </a:solidFill>
                 <a:latin typeface="Aptos"/>
                 <a:ea typeface="Aptos"/>
@@ -3960,68 +4189,35 @@
             <a:r>
               <a:rPr sz="1125" b="0">
                 <a:solidFill>
-                  <a:srgbClr val="FFFFFF"/>
+                  <a:srgbClr val="172026"/>
                 </a:solidFill>
                 <a:latin typeface="Aptos"/>
                 <a:ea typeface="Aptos"/>
                 <a:cs typeface="Aptos"/>
               </a:rPr>
-              <a:t>Turn the MOIN grid into a content plan. For each asset, name the buyer question, demand state, format, SME input, sales use, distribution path, signal design, and quality risk. Flag where human technical or field validation is required before drafting.</a:t>
+              <a:t>Assets tied to role, question, and demand state</a:t>
             </a:r>
           </a:p>
         </p:txBody>
       </p:sp>
       <p:sp>
         <p:nvSpPr>
-          <p:cNvPr id="17" name="">
-            <a:extLst xmlns:a="http://schemas.openxmlformats.org/drawingml/2006/main">
-              <a:ext uri="{FF2B5EF4-FFF2-40B4-BE49-F238E27FC236}">
-                <a16:creationId xmlns:a16="http://schemas.microsoft.com/office/drawing/2014/main" id="{62E19D2A-26D5-433F-8E64-0B127E60513C}"/>
-              </a:ext>
-            </a:extLst>
-          </p:cNvPr>
-          <p:cNvSpPr>
-            <a:spLocks xmlns:a="http://schemas.openxmlformats.org/drawingml/2006/main" noGrp="1"/>
-          </p:cNvSpPr>
-          <p:nvPr/>
-        </p:nvSpPr>
-        <p:spPr>
-          <a:xfrm xmlns:a="http://schemas.openxmlformats.org/drawingml/2006/main">
-            <a:off x="6324600" y="1809750"/>
-            <a:ext cx="5867400" cy="4591050"/>
-          </a:xfrm>
-          <a:prstGeom xmlns:a="http://schemas.openxmlformats.org/drawingml/2006/main" prst="rect">
-            <a:avLst/>
-          </a:prstGeom>
-          <a:solidFill xmlns:a="http://schemas.openxmlformats.org/drawingml/2006/main">
-            <a:srgbClr val="FFFFFF"/>
-          </a:solidFill>
-          <a:ln xmlns:a="http://schemas.openxmlformats.org/drawingml/2006/main" w="9525">
-            <a:solidFill>
-              <a:srgbClr val="D9DDD6"/>
-            </a:solidFill>
-            <a:prstDash val="solid"/>
-          </a:ln>
-        </p:spPr>
-      </p:sp>
-      <p:sp>
-        <p:nvSpPr>
-          <p:cNvPr id="18" name="">
-            <a:extLst xmlns:a="http://schemas.openxmlformats.org/drawingml/2006/main">
-              <a:ext uri="{FF2B5EF4-FFF2-40B4-BE49-F238E27FC236}">
-                <a16:creationId xmlns:a16="http://schemas.microsoft.com/office/drawing/2014/main" id="{C1116466-6EE2-4E48-A55D-3C290B4D9B3E}"/>
-              </a:ext>
-            </a:extLst>
-          </p:cNvPr>
-          <p:cNvSpPr>
-            <a:spLocks xmlns:a="http://schemas.openxmlformats.org/drawingml/2006/main" noGrp="1"/>
-          </p:cNvSpPr>
-          <p:nvPr/>
-        </p:nvSpPr>
-        <p:spPr>
-          <a:xfrm xmlns:a="http://schemas.openxmlformats.org/drawingml/2006/main">
-            <a:off x="6705600" y="2266950"/>
-            <a:ext cx="266700" cy="19050"/>
+          <p:cNvPr id="22" name="">
+            <a:extLst xmlns:a="http://schemas.openxmlformats.org/drawingml/2006/main">
+              <a:ext uri="{FF2B5EF4-FFF2-40B4-BE49-F238E27FC236}">
+                <a16:creationId xmlns:a16="http://schemas.microsoft.com/office/drawing/2014/main" id="{DCB896E0-178D-44B1-B029-F1F4F191121F}"/>
+              </a:ext>
+            </a:extLst>
+          </p:cNvPr>
+          <p:cNvSpPr>
+            <a:spLocks xmlns:a="http://schemas.openxmlformats.org/drawingml/2006/main" noGrp="1"/>
+          </p:cNvSpPr>
+          <p:nvPr/>
+        </p:nvSpPr>
+        <p:spPr>
+          <a:xfrm xmlns:a="http://schemas.openxmlformats.org/drawingml/2006/main">
+            <a:off x="6819900" y="3324225"/>
+            <a:ext cx="57150" cy="57150"/>
           </a:xfrm>
           <a:prstGeom xmlns:a="http://schemas.openxmlformats.org/drawingml/2006/main" prst="rect">
             <a:avLst/>
@@ -4041,22 +4237,22 @@
       </p:sp>
       <p:sp>
         <p:nvSpPr>
-          <p:cNvPr id="19" name="">
-            <a:extLst xmlns:a="http://schemas.openxmlformats.org/drawingml/2006/main">
-              <a:ext uri="{FF2B5EF4-FFF2-40B4-BE49-F238E27FC236}">
-                <a16:creationId xmlns:a16="http://schemas.microsoft.com/office/drawing/2014/main" id="{D57E3662-1009-4235-AAE4-F7862947A935}"/>
-              </a:ext>
-            </a:extLst>
-          </p:cNvPr>
-          <p:cNvSpPr>
-            <a:spLocks xmlns:a="http://schemas.openxmlformats.org/drawingml/2006/main" noGrp="1"/>
-          </p:cNvSpPr>
-          <p:nvPr/>
-        </p:nvSpPr>
-        <p:spPr>
-          <a:xfrm xmlns:a="http://schemas.openxmlformats.org/drawingml/2006/main">
-            <a:off x="7067550" y="2190750"/>
-            <a:ext cx="2476500" cy="171450"/>
+          <p:cNvPr id="23" name="">
+            <a:extLst xmlns:a="http://schemas.openxmlformats.org/drawingml/2006/main">
+              <a:ext uri="{FF2B5EF4-FFF2-40B4-BE49-F238E27FC236}">
+                <a16:creationId xmlns:a16="http://schemas.microsoft.com/office/drawing/2014/main" id="{0854ED52-E2F5-4D7B-AAD2-45D0B58485A7}"/>
+              </a:ext>
+            </a:extLst>
+          </p:cNvPr>
+          <p:cNvSpPr>
+            <a:spLocks xmlns:a="http://schemas.openxmlformats.org/drawingml/2006/main" noGrp="1"/>
+          </p:cNvSpPr>
+          <p:nvPr/>
+        </p:nvSpPr>
+        <p:spPr>
+          <a:xfrm xmlns:a="http://schemas.openxmlformats.org/drawingml/2006/main">
+            <a:off x="6991350" y="3257550"/>
+            <a:ext cx="3619500" cy="438150"/>
           </a:xfrm>
           <a:prstGeom xmlns:a="http://schemas.openxmlformats.org/drawingml/2006/main" prst="rect">
             <a:avLst/>
@@ -4077,6 +4273,734 @@
         </p:spPr>
         <p:txBody>
           <a:bodyPr xmlns:a="http://schemas.openxmlformats.org/drawingml/2006/main" lIns="0" tIns="0" rIns="0" bIns="0" anchor="t"/>
+          <a:lstStyle xmlns:a="http://schemas.openxmlformats.org/drawingml/2006/main"/>
+          <a:p xmlns:a="http://schemas.openxmlformats.org/drawingml/2006/main">
+            <a:pPr algn="l">
+              <a:defRPr sz="1125" b="0">
+                <a:solidFill>
+                  <a:srgbClr val="172026"/>
+                </a:solidFill>
+                <a:latin typeface="Aptos"/>
+                <a:ea typeface="Aptos"/>
+                <a:cs typeface="Aptos"/>
+              </a:defRPr>
+            </a:pPr>
+            <a:r>
+              <a:rPr sz="1125" b="0">
+                <a:solidFill>
+                  <a:srgbClr val="172026"/>
+                </a:solidFill>
+                <a:latin typeface="Aptos"/>
+                <a:ea typeface="Aptos"/>
+                <a:cs typeface="Aptos"/>
+              </a:rPr>
+              <a:t>Specific SME input required</a:t>
+            </a:r>
+          </a:p>
+        </p:txBody>
+      </p:sp>
+      <p:sp>
+        <p:nvSpPr>
+          <p:cNvPr id="24" name="">
+            <a:extLst xmlns:a="http://schemas.openxmlformats.org/drawingml/2006/main">
+              <a:ext uri="{FF2B5EF4-FFF2-40B4-BE49-F238E27FC236}">
+                <a16:creationId xmlns:a16="http://schemas.microsoft.com/office/drawing/2014/main" id="{C6CB80F7-95DA-4A5D-97E5-A0B6AA77BE73}"/>
+              </a:ext>
+            </a:extLst>
+          </p:cNvPr>
+          <p:cNvSpPr>
+            <a:spLocks xmlns:a="http://schemas.openxmlformats.org/drawingml/2006/main" noGrp="1"/>
+          </p:cNvSpPr>
+          <p:nvPr/>
+        </p:nvSpPr>
+        <p:spPr>
+          <a:xfrm xmlns:a="http://schemas.openxmlformats.org/drawingml/2006/main">
+            <a:off x="6819900" y="3800475"/>
+            <a:ext cx="57150" cy="57150"/>
+          </a:xfrm>
+          <a:prstGeom xmlns:a="http://schemas.openxmlformats.org/drawingml/2006/main" prst="rect">
+            <a:avLst/>
+          </a:prstGeom>
+          <a:solidFill xmlns:a="http://schemas.openxmlformats.org/drawingml/2006/main">
+            <a:srgbClr val="1D6072"/>
+          </a:solidFill>
+          <a:ln xmlns:a="http://schemas.openxmlformats.org/drawingml/2006/main" w="0">
+            <a:solidFill>
+              <a:srgbClr val="000000">
+                <a:alpha val="0"/>
+              </a:srgbClr>
+            </a:solidFill>
+            <a:prstDash val="solid"/>
+          </a:ln>
+        </p:spPr>
+      </p:sp>
+      <p:sp>
+        <p:nvSpPr>
+          <p:cNvPr id="25" name="">
+            <a:extLst xmlns:a="http://schemas.openxmlformats.org/drawingml/2006/main">
+              <a:ext uri="{FF2B5EF4-FFF2-40B4-BE49-F238E27FC236}">
+                <a16:creationId xmlns:a16="http://schemas.microsoft.com/office/drawing/2014/main" id="{C982C0C3-473D-496D-96F5-6F0D24B1A4FE}"/>
+              </a:ext>
+            </a:extLst>
+          </p:cNvPr>
+          <p:cNvSpPr>
+            <a:spLocks xmlns:a="http://schemas.openxmlformats.org/drawingml/2006/main" noGrp="1"/>
+          </p:cNvSpPr>
+          <p:nvPr/>
+        </p:nvSpPr>
+        <p:spPr>
+          <a:xfrm xmlns:a="http://schemas.openxmlformats.org/drawingml/2006/main">
+            <a:off x="6991350" y="3733800"/>
+            <a:ext cx="3619500" cy="438150"/>
+          </a:xfrm>
+          <a:prstGeom xmlns:a="http://schemas.openxmlformats.org/drawingml/2006/main" prst="rect">
+            <a:avLst/>
+          </a:prstGeom>
+          <a:solidFill xmlns:a="http://schemas.openxmlformats.org/drawingml/2006/main">
+            <a:srgbClr val="000000">
+              <a:alpha val="0"/>
+            </a:srgbClr>
+          </a:solidFill>
+          <a:ln xmlns:a="http://schemas.openxmlformats.org/drawingml/2006/main" w="0">
+            <a:solidFill>
+              <a:srgbClr val="000000">
+                <a:alpha val="0"/>
+              </a:srgbClr>
+            </a:solidFill>
+            <a:prstDash val="solid"/>
+          </a:ln>
+        </p:spPr>
+        <p:txBody>
+          <a:bodyPr xmlns:a="http://schemas.openxmlformats.org/drawingml/2006/main" lIns="0" tIns="0" rIns="0" bIns="0" anchor="t"/>
+          <a:lstStyle xmlns:a="http://schemas.openxmlformats.org/drawingml/2006/main"/>
+          <a:p xmlns:a="http://schemas.openxmlformats.org/drawingml/2006/main">
+            <a:pPr algn="l">
+              <a:defRPr sz="1125" b="0">
+                <a:solidFill>
+                  <a:srgbClr val="172026"/>
+                </a:solidFill>
+                <a:latin typeface="Aptos"/>
+                <a:ea typeface="Aptos"/>
+                <a:cs typeface="Aptos"/>
+              </a:defRPr>
+            </a:pPr>
+            <a:r>
+              <a:rPr sz="1125" b="0">
+                <a:solidFill>
+                  <a:srgbClr val="172026"/>
+                </a:solidFill>
+                <a:latin typeface="Aptos"/>
+                <a:ea typeface="Aptos"/>
+                <a:cs typeface="Aptos"/>
+              </a:rPr>
+              <a:t>Sales use and account context</a:t>
+            </a:r>
+          </a:p>
+        </p:txBody>
+      </p:sp>
+      <p:sp>
+        <p:nvSpPr>
+          <p:cNvPr id="26" name="">
+            <a:extLst xmlns:a="http://schemas.openxmlformats.org/drawingml/2006/main">
+              <a:ext uri="{FF2B5EF4-FFF2-40B4-BE49-F238E27FC236}">
+                <a16:creationId xmlns:a16="http://schemas.microsoft.com/office/drawing/2014/main" id="{247E9491-9129-4A7D-84D5-D5E739C12151}"/>
+              </a:ext>
+            </a:extLst>
+          </p:cNvPr>
+          <p:cNvSpPr>
+            <a:spLocks xmlns:a="http://schemas.openxmlformats.org/drawingml/2006/main" noGrp="1"/>
+          </p:cNvSpPr>
+          <p:nvPr/>
+        </p:nvSpPr>
+        <p:spPr>
+          <a:xfrm xmlns:a="http://schemas.openxmlformats.org/drawingml/2006/main">
+            <a:off x="6819900" y="4276725"/>
+            <a:ext cx="57150" cy="57150"/>
+          </a:xfrm>
+          <a:prstGeom xmlns:a="http://schemas.openxmlformats.org/drawingml/2006/main" prst="rect">
+            <a:avLst/>
+          </a:prstGeom>
+          <a:solidFill xmlns:a="http://schemas.openxmlformats.org/drawingml/2006/main">
+            <a:srgbClr val="1D6072"/>
+          </a:solidFill>
+          <a:ln xmlns:a="http://schemas.openxmlformats.org/drawingml/2006/main" w="0">
+            <a:solidFill>
+              <a:srgbClr val="000000">
+                <a:alpha val="0"/>
+              </a:srgbClr>
+            </a:solidFill>
+            <a:prstDash val="solid"/>
+          </a:ln>
+        </p:spPr>
+      </p:sp>
+      <p:sp>
+        <p:nvSpPr>
+          <p:cNvPr id="27" name="">
+            <a:extLst xmlns:a="http://schemas.openxmlformats.org/drawingml/2006/main">
+              <a:ext uri="{FF2B5EF4-FFF2-40B4-BE49-F238E27FC236}">
+                <a16:creationId xmlns:a16="http://schemas.microsoft.com/office/drawing/2014/main" id="{A8A847DA-2090-4688-8091-C78B0664DC46}"/>
+              </a:ext>
+            </a:extLst>
+          </p:cNvPr>
+          <p:cNvSpPr>
+            <a:spLocks xmlns:a="http://schemas.openxmlformats.org/drawingml/2006/main" noGrp="1"/>
+          </p:cNvSpPr>
+          <p:nvPr/>
+        </p:nvSpPr>
+        <p:spPr>
+          <a:xfrm xmlns:a="http://schemas.openxmlformats.org/drawingml/2006/main">
+            <a:off x="6991350" y="4210050"/>
+            <a:ext cx="3619500" cy="438150"/>
+          </a:xfrm>
+          <a:prstGeom xmlns:a="http://schemas.openxmlformats.org/drawingml/2006/main" prst="rect">
+            <a:avLst/>
+          </a:prstGeom>
+          <a:solidFill xmlns:a="http://schemas.openxmlformats.org/drawingml/2006/main">
+            <a:srgbClr val="000000">
+              <a:alpha val="0"/>
+            </a:srgbClr>
+          </a:solidFill>
+          <a:ln xmlns:a="http://schemas.openxmlformats.org/drawingml/2006/main" w="0">
+            <a:solidFill>
+              <a:srgbClr val="000000">
+                <a:alpha val="0"/>
+              </a:srgbClr>
+            </a:solidFill>
+            <a:prstDash val="solid"/>
+          </a:ln>
+        </p:spPr>
+        <p:txBody>
+          <a:bodyPr xmlns:a="http://schemas.openxmlformats.org/drawingml/2006/main" lIns="0" tIns="0" rIns="0" bIns="0" anchor="t"/>
+          <a:lstStyle xmlns:a="http://schemas.openxmlformats.org/drawingml/2006/main"/>
+          <a:p xmlns:a="http://schemas.openxmlformats.org/drawingml/2006/main">
+            <a:pPr algn="l">
+              <a:defRPr sz="1125" b="0">
+                <a:solidFill>
+                  <a:srgbClr val="172026"/>
+                </a:solidFill>
+                <a:latin typeface="Aptos"/>
+                <a:ea typeface="Aptos"/>
+                <a:cs typeface="Aptos"/>
+              </a:defRPr>
+            </a:pPr>
+            <a:r>
+              <a:rPr sz="1125" b="0">
+                <a:solidFill>
+                  <a:srgbClr val="172026"/>
+                </a:solidFill>
+                <a:latin typeface="Aptos"/>
+                <a:ea typeface="Aptos"/>
+                <a:cs typeface="Aptos"/>
+              </a:rPr>
+              <a:t>Signal design and routing implication</a:t>
+            </a:r>
+          </a:p>
+        </p:txBody>
+      </p:sp>
+      <p:sp>
+        <p:nvSpPr>
+          <p:cNvPr id="28" name="">
+            <a:extLst xmlns:a="http://schemas.openxmlformats.org/drawingml/2006/main">
+              <a:ext uri="{FF2B5EF4-FFF2-40B4-BE49-F238E27FC236}">
+                <a16:creationId xmlns:a16="http://schemas.microsoft.com/office/drawing/2014/main" id="{89BEC654-10AD-49E0-B19D-F4518E481DB2}"/>
+              </a:ext>
+            </a:extLst>
+          </p:cNvPr>
+          <p:cNvSpPr>
+            <a:spLocks xmlns:a="http://schemas.openxmlformats.org/drawingml/2006/main" noGrp="1"/>
+          </p:cNvSpPr>
+          <p:nvPr/>
+        </p:nvSpPr>
+        <p:spPr>
+          <a:xfrm xmlns:a="http://schemas.openxmlformats.org/drawingml/2006/main">
+            <a:off x="6819900" y="4752975"/>
+            <a:ext cx="57150" cy="57150"/>
+          </a:xfrm>
+          <a:prstGeom xmlns:a="http://schemas.openxmlformats.org/drawingml/2006/main" prst="rect">
+            <a:avLst/>
+          </a:prstGeom>
+          <a:solidFill xmlns:a="http://schemas.openxmlformats.org/drawingml/2006/main">
+            <a:srgbClr val="1D6072"/>
+          </a:solidFill>
+          <a:ln xmlns:a="http://schemas.openxmlformats.org/drawingml/2006/main" w="0">
+            <a:solidFill>
+              <a:srgbClr val="000000">
+                <a:alpha val="0"/>
+              </a:srgbClr>
+            </a:solidFill>
+            <a:prstDash val="solid"/>
+          </a:ln>
+        </p:spPr>
+      </p:sp>
+      <p:sp>
+        <p:nvSpPr>
+          <p:cNvPr id="29" name="">
+            <a:extLst xmlns:a="http://schemas.openxmlformats.org/drawingml/2006/main">
+              <a:ext uri="{FF2B5EF4-FFF2-40B4-BE49-F238E27FC236}">
+                <a16:creationId xmlns:a16="http://schemas.microsoft.com/office/drawing/2014/main" id="{B3A97360-53F7-465D-94B3-5BCC356E1E50}"/>
+              </a:ext>
+            </a:extLst>
+          </p:cNvPr>
+          <p:cNvSpPr>
+            <a:spLocks xmlns:a="http://schemas.openxmlformats.org/drawingml/2006/main" noGrp="1"/>
+          </p:cNvSpPr>
+          <p:nvPr/>
+        </p:nvSpPr>
+        <p:spPr>
+          <a:xfrm xmlns:a="http://schemas.openxmlformats.org/drawingml/2006/main">
+            <a:off x="6991350" y="4686300"/>
+            <a:ext cx="3619500" cy="438150"/>
+          </a:xfrm>
+          <a:prstGeom xmlns:a="http://schemas.openxmlformats.org/drawingml/2006/main" prst="rect">
+            <a:avLst/>
+          </a:prstGeom>
+          <a:solidFill xmlns:a="http://schemas.openxmlformats.org/drawingml/2006/main">
+            <a:srgbClr val="000000">
+              <a:alpha val="0"/>
+            </a:srgbClr>
+          </a:solidFill>
+          <a:ln xmlns:a="http://schemas.openxmlformats.org/drawingml/2006/main" w="0">
+            <a:solidFill>
+              <a:srgbClr val="000000">
+                <a:alpha val="0"/>
+              </a:srgbClr>
+            </a:solidFill>
+            <a:prstDash val="solid"/>
+          </a:ln>
+        </p:spPr>
+        <p:txBody>
+          <a:bodyPr xmlns:a="http://schemas.openxmlformats.org/drawingml/2006/main" lIns="0" tIns="0" rIns="0" bIns="0" anchor="t"/>
+          <a:lstStyle xmlns:a="http://schemas.openxmlformats.org/drawingml/2006/main"/>
+          <a:p xmlns:a="http://schemas.openxmlformats.org/drawingml/2006/main">
+            <a:pPr algn="l">
+              <a:defRPr sz="1125" b="0">
+                <a:solidFill>
+                  <a:srgbClr val="172026"/>
+                </a:solidFill>
+                <a:latin typeface="Aptos"/>
+                <a:ea typeface="Aptos"/>
+                <a:cs typeface="Aptos"/>
+              </a:defRPr>
+            </a:pPr>
+            <a:r>
+              <a:rPr sz="1125" b="0">
+                <a:solidFill>
+                  <a:srgbClr val="172026"/>
+                </a:solidFill>
+                <a:latin typeface="Aptos"/>
+                <a:ea typeface="Aptos"/>
+                <a:cs typeface="Aptos"/>
+              </a:rPr>
+              <a:t>Distribution path and quality risk</a:t>
+            </a:r>
+          </a:p>
+        </p:txBody>
+      </p:sp>
+      <p:sp>
+        <p:nvSpPr>
+          <p:cNvPr id="30" name="">
+            <a:extLst xmlns:a="http://schemas.openxmlformats.org/drawingml/2006/main">
+              <a:ext uri="{FF2B5EF4-FFF2-40B4-BE49-F238E27FC236}">
+                <a16:creationId xmlns:a16="http://schemas.microsoft.com/office/drawing/2014/main" id="{3FA547A6-81B5-47E2-89F2-6938A0DF273B}"/>
+              </a:ext>
+            </a:extLst>
+          </p:cNvPr>
+          <p:cNvSpPr>
+            <a:spLocks xmlns:a="http://schemas.openxmlformats.org/drawingml/2006/main" noGrp="1"/>
+          </p:cNvSpPr>
+          <p:nvPr/>
+        </p:nvSpPr>
+        <p:spPr>
+          <a:xfrm xmlns:a="http://schemas.openxmlformats.org/drawingml/2006/main">
+            <a:off x="514350" y="6438900"/>
+            <a:ext cx="10915650" cy="9525"/>
+          </a:xfrm>
+          <a:prstGeom xmlns:a="http://schemas.openxmlformats.org/drawingml/2006/main" prst="rect">
+            <a:avLst/>
+          </a:prstGeom>
+          <a:solidFill xmlns:a="http://schemas.openxmlformats.org/drawingml/2006/main">
+            <a:srgbClr val="D9DDD6"/>
+          </a:solidFill>
+          <a:ln xmlns:a="http://schemas.openxmlformats.org/drawingml/2006/main" w="0">
+            <a:solidFill>
+              <a:srgbClr val="000000">
+                <a:alpha val="0"/>
+              </a:srgbClr>
+            </a:solidFill>
+            <a:prstDash val="solid"/>
+          </a:ln>
+        </p:spPr>
+      </p:sp>
+      <p:sp>
+        <p:nvSpPr>
+          <p:cNvPr id="31" name="">
+            <a:extLst xmlns:a="http://schemas.openxmlformats.org/drawingml/2006/main">
+              <a:ext uri="{FF2B5EF4-FFF2-40B4-BE49-F238E27FC236}">
+                <a16:creationId xmlns:a16="http://schemas.microsoft.com/office/drawing/2014/main" id="{E5FD3F07-000E-4962-AC21-8A5F8BF23F87}"/>
+              </a:ext>
+            </a:extLst>
+          </p:cNvPr>
+          <p:cNvSpPr>
+            <a:spLocks xmlns:a="http://schemas.openxmlformats.org/drawingml/2006/main" noGrp="1"/>
+          </p:cNvSpPr>
+          <p:nvPr/>
+        </p:nvSpPr>
+        <p:spPr>
+          <a:xfrm xmlns:a="http://schemas.openxmlformats.org/drawingml/2006/main">
+            <a:off x="514350" y="6553200"/>
+            <a:ext cx="5905500" cy="171450"/>
+          </a:xfrm>
+          <a:prstGeom xmlns:a="http://schemas.openxmlformats.org/drawingml/2006/main" prst="rect">
+            <a:avLst/>
+          </a:prstGeom>
+          <a:solidFill xmlns:a="http://schemas.openxmlformats.org/drawingml/2006/main">
+            <a:srgbClr val="000000">
+              <a:alpha val="0"/>
+            </a:srgbClr>
+          </a:solidFill>
+          <a:ln xmlns:a="http://schemas.openxmlformats.org/drawingml/2006/main" w="0">
+            <a:solidFill>
+              <a:srgbClr val="000000">
+                <a:alpha val="0"/>
+              </a:srgbClr>
+            </a:solidFill>
+            <a:prstDash val="solid"/>
+          </a:ln>
+        </p:spPr>
+        <p:txBody>
+          <a:bodyPr xmlns:a="http://schemas.openxmlformats.org/drawingml/2006/main" lIns="0" tIns="0" rIns="0" bIns="0" anchor="t"/>
+          <a:lstStyle xmlns:a="http://schemas.openxmlformats.org/drawingml/2006/main"/>
+          <a:p xmlns:a="http://schemas.openxmlformats.org/drawingml/2006/main">
+            <a:pPr algn="l">
+              <a:defRPr sz="675" b="0">
+                <a:solidFill>
+                  <a:srgbClr val="59646A"/>
+                </a:solidFill>
+                <a:latin typeface="Aptos"/>
+                <a:ea typeface="Aptos"/>
+                <a:cs typeface="Aptos"/>
+              </a:defRPr>
+            </a:pPr>
+            <a:r>
+              <a:rPr sz="675" b="0">
+                <a:solidFill>
+                  <a:srgbClr val="59646A"/>
+                </a:solidFill>
+                <a:latin typeface="Aptos"/>
+                <a:ea typeface="Aptos"/>
+                <a:cs typeface="Aptos"/>
+              </a:rPr>
+              <a:t>Lesson 05 - Content Engine For Industrial Demand</a:t>
+            </a:r>
+          </a:p>
+        </p:txBody>
+      </p:sp>
+      <p:sp>
+        <p:nvSpPr>
+          <p:cNvPr id="32" name="">
+            <a:extLst xmlns:a="http://schemas.openxmlformats.org/drawingml/2006/main">
+              <a:ext uri="{FF2B5EF4-FFF2-40B4-BE49-F238E27FC236}">
+                <a16:creationId xmlns:a16="http://schemas.microsoft.com/office/drawing/2014/main" id="{100D0C80-24F1-459D-BF39-9B1937F44419}"/>
+              </a:ext>
+            </a:extLst>
+          </p:cNvPr>
+          <p:cNvSpPr>
+            <a:spLocks xmlns:a="http://schemas.openxmlformats.org/drawingml/2006/main" noGrp="1"/>
+          </p:cNvSpPr>
+          <p:nvPr/>
+        </p:nvSpPr>
+        <p:spPr>
+          <a:xfrm xmlns:a="http://schemas.openxmlformats.org/drawingml/2006/main">
+            <a:off x="5334000" y="6553200"/>
+            <a:ext cx="4095750" cy="171450"/>
+          </a:xfrm>
+          <a:prstGeom xmlns:a="http://schemas.openxmlformats.org/drawingml/2006/main" prst="rect">
+            <a:avLst/>
+          </a:prstGeom>
+          <a:solidFill xmlns:a="http://schemas.openxmlformats.org/drawingml/2006/main">
+            <a:srgbClr val="000000">
+              <a:alpha val="0"/>
+            </a:srgbClr>
+          </a:solidFill>
+          <a:ln xmlns:a="http://schemas.openxmlformats.org/drawingml/2006/main" w="0">
+            <a:solidFill>
+              <a:srgbClr val="000000">
+                <a:alpha val="0"/>
+              </a:srgbClr>
+            </a:solidFill>
+            <a:prstDash val="solid"/>
+          </a:ln>
+        </p:spPr>
+        <p:txBody>
+          <a:bodyPr xmlns:a="http://schemas.openxmlformats.org/drawingml/2006/main" lIns="0" tIns="0" rIns="0" bIns="0" anchor="t"/>
+          <a:lstStyle xmlns:a="http://schemas.openxmlformats.org/drawingml/2006/main"/>
+          <a:p xmlns:a="http://schemas.openxmlformats.org/drawingml/2006/main">
+            <a:pPr algn="r">
+              <a:defRPr sz="600" b="0">
+                <a:solidFill>
+                  <a:srgbClr val="59646A"/>
+                </a:solidFill>
+                <a:latin typeface="Aptos"/>
+                <a:ea typeface="Aptos"/>
+                <a:cs typeface="Aptos"/>
+              </a:defRPr>
+            </a:pPr>
+            <a:r>
+              <a:rPr sz="600" b="0">
+                <a:solidFill>
+                  <a:srgbClr val="59646A"/>
+                </a:solidFill>
+                <a:latin typeface="Aptos"/>
+                <a:ea typeface="Aptos"/>
+                <a:cs typeface="Aptos"/>
+              </a:rPr>
+              <a:t>Source: modules/module-01-industrial-demand-generation/lessons/05-content-engine-for-industrial-demand.md @ 9e28222</a:t>
+            </a:r>
+          </a:p>
+        </p:txBody>
+      </p:sp>
+      <p:sp>
+        <p:nvSpPr>
+          <p:cNvPr id="33" name="">
+            <a:extLst xmlns:a="http://schemas.openxmlformats.org/drawingml/2006/main">
+              <a:ext uri="{FF2B5EF4-FFF2-40B4-BE49-F238E27FC236}">
+                <a16:creationId xmlns:a16="http://schemas.microsoft.com/office/drawing/2014/main" id="{EE6FF7F7-359E-4468-95CE-9CABA8A15DD9}"/>
+              </a:ext>
+            </a:extLst>
+          </p:cNvPr>
+          <p:cNvSpPr>
+            <a:spLocks xmlns:a="http://schemas.openxmlformats.org/drawingml/2006/main" noGrp="1"/>
+          </p:cNvSpPr>
+          <p:nvPr/>
+        </p:nvSpPr>
+        <p:spPr>
+          <a:xfrm xmlns:a="http://schemas.openxmlformats.org/drawingml/2006/main">
+            <a:off x="10668000" y="6553200"/>
+            <a:ext cx="762000" cy="171450"/>
+          </a:xfrm>
+          <a:prstGeom xmlns:a="http://schemas.openxmlformats.org/drawingml/2006/main" prst="rect">
+            <a:avLst/>
+          </a:prstGeom>
+          <a:solidFill xmlns:a="http://schemas.openxmlformats.org/drawingml/2006/main">
+            <a:srgbClr val="000000">
+              <a:alpha val="0"/>
+            </a:srgbClr>
+          </a:solidFill>
+          <a:ln xmlns:a="http://schemas.openxmlformats.org/drawingml/2006/main" w="0">
+            <a:solidFill>
+              <a:srgbClr val="000000">
+                <a:alpha val="0"/>
+              </a:srgbClr>
+            </a:solidFill>
+            <a:prstDash val="solid"/>
+          </a:ln>
+        </p:spPr>
+        <p:txBody>
+          <a:bodyPr xmlns:a="http://schemas.openxmlformats.org/drawingml/2006/main" lIns="0" tIns="0" rIns="0" bIns="0" anchor="t"/>
+          <a:lstStyle xmlns:a="http://schemas.openxmlformats.org/drawingml/2006/main"/>
+          <a:p xmlns:a="http://schemas.openxmlformats.org/drawingml/2006/main">
+            <a:pPr algn="r">
+              <a:defRPr sz="675" b="0">
+                <a:solidFill>
+                  <a:srgbClr val="59646A"/>
+                </a:solidFill>
+                <a:latin typeface="Aptos"/>
+                <a:ea typeface="Aptos"/>
+                <a:cs typeface="Aptos"/>
+              </a:defRPr>
+            </a:pPr>
+            <a:r>
+              <a:rPr sz="675" b="0">
+                <a:solidFill>
+                  <a:srgbClr val="59646A"/>
+                </a:solidFill>
+                <a:latin typeface="Aptos"/>
+                <a:ea typeface="Aptos"/>
+                <a:cs typeface="Aptos"/>
+              </a:rPr>
+              <a:t>10/15</a:t>
+            </a:r>
+          </a:p>
+        </p:txBody>
+      </p:sp>
+      <p:sp>
+        <p:nvSpPr>
+          <p:cNvPr id="34" name="">
+            <a:extLst xmlns:a="http://schemas.openxmlformats.org/drawingml/2006/main">
+              <a:ext uri="{FF2B5EF4-FFF2-40B4-BE49-F238E27FC236}">
+                <a16:creationId xmlns:a16="http://schemas.microsoft.com/office/drawing/2014/main" id="{468A8409-9700-4639-8D79-7DCCEACA65E4}"/>
+              </a:ext>
+            </a:extLst>
+          </p:cNvPr>
+          <p:cNvSpPr>
+            <a:spLocks xmlns:a="http://schemas.openxmlformats.org/drawingml/2006/main" noGrp="1"/>
+          </p:cNvSpPr>
+          <p:nvPr/>
+        </p:nvSpPr>
+        <p:spPr>
+          <a:xfrm xmlns:a="http://schemas.openxmlformats.org/drawingml/2006/main">
+            <a:off x="0" y="0"/>
+            <a:ext cx="12192000" cy="1809750"/>
+          </a:xfrm>
+          <a:prstGeom xmlns:a="http://schemas.openxmlformats.org/drawingml/2006/main" prst="rect">
+            <a:avLst/>
+          </a:prstGeom>
+          <a:solidFill xmlns:a="http://schemas.openxmlformats.org/drawingml/2006/main">
+            <a:srgbClr val="F5F6F2"/>
+          </a:solidFill>
+          <a:ln xmlns:a="http://schemas.openxmlformats.org/drawingml/2006/main" w="0">
+            <a:solidFill>
+              <a:srgbClr val="000000">
+                <a:alpha val="0"/>
+              </a:srgbClr>
+            </a:solidFill>
+            <a:prstDash val="solid"/>
+          </a:ln>
+        </p:spPr>
+      </p:sp>
+      <p:sp>
+        <p:nvSpPr>
+          <p:cNvPr id="35" name="">
+            <a:extLst xmlns:a="http://schemas.openxmlformats.org/drawingml/2006/main">
+              <a:ext uri="{FF2B5EF4-FFF2-40B4-BE49-F238E27FC236}">
+                <a16:creationId xmlns:a16="http://schemas.microsoft.com/office/drawing/2014/main" id="{E6A4F515-26F5-41A8-9A5C-1DEE7C08E01E}"/>
+              </a:ext>
+            </a:extLst>
+          </p:cNvPr>
+          <p:cNvSpPr>
+            <a:spLocks xmlns:a="http://schemas.openxmlformats.org/drawingml/2006/main" noGrp="1"/>
+          </p:cNvSpPr>
+          <p:nvPr/>
+        </p:nvSpPr>
+        <p:spPr>
+          <a:xfrm xmlns:a="http://schemas.openxmlformats.org/drawingml/2006/main">
+            <a:off x="0" y="0"/>
+            <a:ext cx="171450" cy="1809750"/>
+          </a:xfrm>
+          <a:prstGeom xmlns:a="http://schemas.openxmlformats.org/drawingml/2006/main" prst="rect">
+            <a:avLst/>
+          </a:prstGeom>
+          <a:solidFill xmlns:a="http://schemas.openxmlformats.org/drawingml/2006/main">
+            <a:srgbClr val="12232B"/>
+          </a:solidFill>
+          <a:ln xmlns:a="http://schemas.openxmlformats.org/drawingml/2006/main" w="0">
+            <a:solidFill>
+              <a:srgbClr val="000000">
+                <a:alpha val="0"/>
+              </a:srgbClr>
+            </a:solidFill>
+            <a:prstDash val="solid"/>
+          </a:ln>
+        </p:spPr>
+      </p:sp>
+      <p:sp>
+        <p:nvSpPr>
+          <p:cNvPr id="36" name="">
+            <a:extLst xmlns:a="http://schemas.openxmlformats.org/drawingml/2006/main">
+              <a:ext uri="{FF2B5EF4-FFF2-40B4-BE49-F238E27FC236}">
+                <a16:creationId xmlns:a16="http://schemas.microsoft.com/office/drawing/2014/main" id="{A3BA6D09-CED4-45AF-942D-17DD4FA28D97}"/>
+              </a:ext>
+            </a:extLst>
+          </p:cNvPr>
+          <p:cNvSpPr>
+            <a:spLocks xmlns:a="http://schemas.openxmlformats.org/drawingml/2006/main" noGrp="1"/>
+          </p:cNvSpPr>
+          <p:nvPr/>
+        </p:nvSpPr>
+        <p:spPr>
+          <a:xfrm xmlns:a="http://schemas.openxmlformats.org/drawingml/2006/main">
+            <a:off x="171450" y="0"/>
+            <a:ext cx="57150" cy="1809750"/>
+          </a:xfrm>
+          <a:prstGeom xmlns:a="http://schemas.openxmlformats.org/drawingml/2006/main" prst="rect">
+            <a:avLst/>
+          </a:prstGeom>
+          <a:solidFill xmlns:a="http://schemas.openxmlformats.org/drawingml/2006/main">
+            <a:srgbClr val="A85D2A"/>
+          </a:solidFill>
+          <a:ln xmlns:a="http://schemas.openxmlformats.org/drawingml/2006/main" w="0">
+            <a:solidFill>
+              <a:srgbClr val="000000">
+                <a:alpha val="0"/>
+              </a:srgbClr>
+            </a:solidFill>
+            <a:prstDash val="solid"/>
+          </a:ln>
+        </p:spPr>
+      </p:sp>
+      <p:sp>
+        <p:nvSpPr>
+          <p:cNvPr id="37" name="kicker-05-marker">
+            <a:extLst xmlns:a="http://schemas.openxmlformats.org/drawingml/2006/main">
+              <a:ext uri="{FF2B5EF4-FFF2-40B4-BE49-F238E27FC236}">
+                <a16:creationId xmlns:a16="http://schemas.microsoft.com/office/drawing/2014/main" id="{AB711375-75FE-44D1-8A0B-9F1CE9D4C8E3}"/>
+              </a:ext>
+            </a:extLst>
+          </p:cNvPr>
+          <p:cNvSpPr>
+            <a:spLocks xmlns:a="http://schemas.openxmlformats.org/drawingml/2006/main" noGrp="1"/>
+          </p:cNvSpPr>
+          <p:nvPr/>
+        </p:nvSpPr>
+        <p:spPr>
+          <a:xfrm xmlns:a="http://schemas.openxmlformats.org/drawingml/2006/main">
+            <a:off x="514350" y="390525"/>
+            <a:ext cx="76200" cy="76200"/>
+          </a:xfrm>
+          <a:prstGeom xmlns:a="http://schemas.openxmlformats.org/drawingml/2006/main" prst="rect">
+            <a:avLst/>
+          </a:prstGeom>
+          <a:solidFill xmlns:a="http://schemas.openxmlformats.org/drawingml/2006/main">
+            <a:srgbClr val="A85D2A"/>
+          </a:solidFill>
+          <a:ln xmlns:a="http://schemas.openxmlformats.org/drawingml/2006/main" w="0">
+            <a:solidFill>
+              <a:srgbClr val="000000">
+                <a:alpha val="0"/>
+              </a:srgbClr>
+            </a:solidFill>
+            <a:prstDash val="solid"/>
+          </a:ln>
+        </p:spPr>
+      </p:sp>
+      <p:sp>
+        <p:nvSpPr>
+          <p:cNvPr id="38" name="kicker-05-label">
+            <a:extLst xmlns:a="http://schemas.openxmlformats.org/drawingml/2006/main">
+              <a:ext uri="{FF2B5EF4-FFF2-40B4-BE49-F238E27FC236}">
+                <a16:creationId xmlns:a16="http://schemas.microsoft.com/office/drawing/2014/main" id="{49FD33ED-932C-4B30-85AC-823E9CEB40D5}"/>
+              </a:ext>
+            </a:extLst>
+          </p:cNvPr>
+          <p:cNvSpPr>
+            <a:spLocks xmlns:a="http://schemas.openxmlformats.org/drawingml/2006/main" noGrp="1"/>
+          </p:cNvSpPr>
+          <p:nvPr/>
+        </p:nvSpPr>
+        <p:spPr>
+          <a:xfrm xmlns:a="http://schemas.openxmlformats.org/drawingml/2006/main">
+            <a:off x="685800" y="323850"/>
+            <a:ext cx="7524750" cy="228600"/>
+          </a:xfrm>
+          <a:prstGeom xmlns:a="http://schemas.openxmlformats.org/drawingml/2006/main" prst="rect">
+            <a:avLst/>
+          </a:prstGeom>
+          <a:solidFill xmlns:a="http://schemas.openxmlformats.org/drawingml/2006/main">
+            <a:srgbClr val="000000">
+              <a:alpha val="0"/>
+            </a:srgbClr>
+          </a:solidFill>
+          <a:ln xmlns:a="http://schemas.openxmlformats.org/drawingml/2006/main" w="0">
+            <a:solidFill>
+              <a:srgbClr val="000000">
+                <a:alpha val="0"/>
+              </a:srgbClr>
+            </a:solidFill>
+            <a:prstDash val="solid"/>
+          </a:ln>
+        </p:spPr>
+        <p:txBody>
+          <a:bodyPr xmlns:a="http://schemas.openxmlformats.org/drawingml/2006/main" lIns="0" tIns="0" rIns="0" bIns="0" anchor="ctr"/>
           <a:lstStyle xmlns:a="http://schemas.openxmlformats.org/drawingml/2006/main"/>
           <a:p xmlns:a="http://schemas.openxmlformats.org/drawingml/2006/main">
             <a:pPr algn="l">
@@ -4098,943 +5022,17 @@
                 <a:ea typeface="Aptos"/>
                 <a:cs typeface="Aptos"/>
               </a:rPr>
-              <a:t>REQUIRED OUTPUT STANDARD</a:t>
+              <a:t>MODULE 1 / LESSON 05 / STRUCTURED DRAFTING DRILL</a:t>
             </a:r>
           </a:p>
         </p:txBody>
       </p:sp>
       <p:sp>
         <p:nvSpPr>
-          <p:cNvPr id="20" name="">
-            <a:extLst xmlns:a="http://schemas.openxmlformats.org/drawingml/2006/main">
-              <a:ext uri="{FF2B5EF4-FFF2-40B4-BE49-F238E27FC236}">
-                <a16:creationId xmlns:a16="http://schemas.microsoft.com/office/drawing/2014/main" id="{184401B3-B445-4170-A227-FFFAE6EE91DF}"/>
-              </a:ext>
-            </a:extLst>
-          </p:cNvPr>
-          <p:cNvSpPr>
-            <a:spLocks xmlns:a="http://schemas.openxmlformats.org/drawingml/2006/main" noGrp="1"/>
-          </p:cNvSpPr>
-          <p:nvPr/>
-        </p:nvSpPr>
-        <p:spPr>
-          <a:xfrm xmlns:a="http://schemas.openxmlformats.org/drawingml/2006/main">
-            <a:off x="6705600" y="2714625"/>
-            <a:ext cx="57150" cy="57150"/>
-          </a:xfrm>
-          <a:prstGeom xmlns:a="http://schemas.openxmlformats.org/drawingml/2006/main" prst="rect">
-            <a:avLst/>
-          </a:prstGeom>
-          <a:solidFill xmlns:a="http://schemas.openxmlformats.org/drawingml/2006/main">
-            <a:srgbClr val="1D6072"/>
-          </a:solidFill>
-          <a:ln xmlns:a="http://schemas.openxmlformats.org/drawingml/2006/main" w="0">
-            <a:solidFill>
-              <a:srgbClr val="000000">
-                <a:alpha val="0"/>
-              </a:srgbClr>
-            </a:solidFill>
-            <a:prstDash val="solid"/>
-          </a:ln>
-        </p:spPr>
-      </p:sp>
-      <p:sp>
-        <p:nvSpPr>
-          <p:cNvPr id="21" name="">
-            <a:extLst xmlns:a="http://schemas.openxmlformats.org/drawingml/2006/main">
-              <a:ext uri="{FF2B5EF4-FFF2-40B4-BE49-F238E27FC236}">
-                <a16:creationId xmlns:a16="http://schemas.microsoft.com/office/drawing/2014/main" id="{0AC650D1-FBA4-4AFF-8411-A43E4285E611}"/>
-              </a:ext>
-            </a:extLst>
-          </p:cNvPr>
-          <p:cNvSpPr>
-            <a:spLocks xmlns:a="http://schemas.openxmlformats.org/drawingml/2006/main" noGrp="1"/>
-          </p:cNvSpPr>
-          <p:nvPr/>
-        </p:nvSpPr>
-        <p:spPr>
-          <a:xfrm xmlns:a="http://schemas.openxmlformats.org/drawingml/2006/main">
-            <a:off x="6877050" y="2647950"/>
-            <a:ext cx="4210050" cy="438150"/>
-          </a:xfrm>
-          <a:prstGeom xmlns:a="http://schemas.openxmlformats.org/drawingml/2006/main" prst="rect">
-            <a:avLst/>
-          </a:prstGeom>
-          <a:solidFill xmlns:a="http://schemas.openxmlformats.org/drawingml/2006/main">
-            <a:srgbClr val="000000">
-              <a:alpha val="0"/>
-            </a:srgbClr>
-          </a:solidFill>
-          <a:ln xmlns:a="http://schemas.openxmlformats.org/drawingml/2006/main" w="0">
-            <a:solidFill>
-              <a:srgbClr val="000000">
-                <a:alpha val="0"/>
-              </a:srgbClr>
-            </a:solidFill>
-            <a:prstDash val="solid"/>
-          </a:ln>
-        </p:spPr>
-        <p:txBody>
-          <a:bodyPr xmlns:a="http://schemas.openxmlformats.org/drawingml/2006/main" lIns="0" tIns="0" rIns="0" bIns="0" anchor="t"/>
-          <a:lstStyle xmlns:a="http://schemas.openxmlformats.org/drawingml/2006/main"/>
-          <a:p xmlns:a="http://schemas.openxmlformats.org/drawingml/2006/main">
-            <a:pPr algn="l">
-              <a:defRPr sz="1125" b="0">
-                <a:solidFill>
-                  <a:srgbClr val="172026"/>
-                </a:solidFill>
-                <a:latin typeface="Aptos"/>
-                <a:ea typeface="Aptos"/>
-                <a:cs typeface="Aptos"/>
-              </a:defRPr>
-            </a:pPr>
-            <a:r>
-              <a:rPr sz="1125" b="0">
-                <a:solidFill>
-                  <a:srgbClr val="172026"/>
-                </a:solidFill>
-                <a:latin typeface="Aptos"/>
-                <a:ea typeface="Aptos"/>
-                <a:cs typeface="Aptos"/>
-              </a:rPr>
-              <a:t>Assets tied to role, question, and demand state</a:t>
-            </a:r>
-          </a:p>
-        </p:txBody>
-      </p:sp>
-      <p:sp>
-        <p:nvSpPr>
-          <p:cNvPr id="22" name="">
-            <a:extLst xmlns:a="http://schemas.openxmlformats.org/drawingml/2006/main">
-              <a:ext uri="{FF2B5EF4-FFF2-40B4-BE49-F238E27FC236}">
-                <a16:creationId xmlns:a16="http://schemas.microsoft.com/office/drawing/2014/main" id="{2B826F50-E3D2-441F-A2A4-BA113037EA41}"/>
-              </a:ext>
-            </a:extLst>
-          </p:cNvPr>
-          <p:cNvSpPr>
-            <a:spLocks xmlns:a="http://schemas.openxmlformats.org/drawingml/2006/main" noGrp="1"/>
-          </p:cNvSpPr>
-          <p:nvPr/>
-        </p:nvSpPr>
-        <p:spPr>
-          <a:xfrm xmlns:a="http://schemas.openxmlformats.org/drawingml/2006/main">
-            <a:off x="6705600" y="3190875"/>
-            <a:ext cx="57150" cy="57150"/>
-          </a:xfrm>
-          <a:prstGeom xmlns:a="http://schemas.openxmlformats.org/drawingml/2006/main" prst="rect">
-            <a:avLst/>
-          </a:prstGeom>
-          <a:solidFill xmlns:a="http://schemas.openxmlformats.org/drawingml/2006/main">
-            <a:srgbClr val="1D6072"/>
-          </a:solidFill>
-          <a:ln xmlns:a="http://schemas.openxmlformats.org/drawingml/2006/main" w="0">
-            <a:solidFill>
-              <a:srgbClr val="000000">
-                <a:alpha val="0"/>
-              </a:srgbClr>
-            </a:solidFill>
-            <a:prstDash val="solid"/>
-          </a:ln>
-        </p:spPr>
-      </p:sp>
-      <p:sp>
-        <p:nvSpPr>
-          <p:cNvPr id="23" name="">
-            <a:extLst xmlns:a="http://schemas.openxmlformats.org/drawingml/2006/main">
-              <a:ext uri="{FF2B5EF4-FFF2-40B4-BE49-F238E27FC236}">
-                <a16:creationId xmlns:a16="http://schemas.microsoft.com/office/drawing/2014/main" id="{9A4874BE-4BD0-46B2-ABF6-6070549581F6}"/>
-              </a:ext>
-            </a:extLst>
-          </p:cNvPr>
-          <p:cNvSpPr>
-            <a:spLocks xmlns:a="http://schemas.openxmlformats.org/drawingml/2006/main" noGrp="1"/>
-          </p:cNvSpPr>
-          <p:nvPr/>
-        </p:nvSpPr>
-        <p:spPr>
-          <a:xfrm xmlns:a="http://schemas.openxmlformats.org/drawingml/2006/main">
-            <a:off x="6877050" y="3124200"/>
-            <a:ext cx="4210050" cy="438150"/>
-          </a:xfrm>
-          <a:prstGeom xmlns:a="http://schemas.openxmlformats.org/drawingml/2006/main" prst="rect">
-            <a:avLst/>
-          </a:prstGeom>
-          <a:solidFill xmlns:a="http://schemas.openxmlformats.org/drawingml/2006/main">
-            <a:srgbClr val="000000">
-              <a:alpha val="0"/>
-            </a:srgbClr>
-          </a:solidFill>
-          <a:ln xmlns:a="http://schemas.openxmlformats.org/drawingml/2006/main" w="0">
-            <a:solidFill>
-              <a:srgbClr val="000000">
-                <a:alpha val="0"/>
-              </a:srgbClr>
-            </a:solidFill>
-            <a:prstDash val="solid"/>
-          </a:ln>
-        </p:spPr>
-        <p:txBody>
-          <a:bodyPr xmlns:a="http://schemas.openxmlformats.org/drawingml/2006/main" lIns="0" tIns="0" rIns="0" bIns="0" anchor="t"/>
-          <a:lstStyle xmlns:a="http://schemas.openxmlformats.org/drawingml/2006/main"/>
-          <a:p xmlns:a="http://schemas.openxmlformats.org/drawingml/2006/main">
-            <a:pPr algn="l">
-              <a:defRPr sz="1125" b="0">
-                <a:solidFill>
-                  <a:srgbClr val="172026"/>
-                </a:solidFill>
-                <a:latin typeface="Aptos"/>
-                <a:ea typeface="Aptos"/>
-                <a:cs typeface="Aptos"/>
-              </a:defRPr>
-            </a:pPr>
-            <a:r>
-              <a:rPr sz="1125" b="0">
-                <a:solidFill>
-                  <a:srgbClr val="172026"/>
-                </a:solidFill>
-                <a:latin typeface="Aptos"/>
-                <a:ea typeface="Aptos"/>
-                <a:cs typeface="Aptos"/>
-              </a:rPr>
-              <a:t>Specific SME input required</a:t>
-            </a:r>
-          </a:p>
-        </p:txBody>
-      </p:sp>
-      <p:sp>
-        <p:nvSpPr>
-          <p:cNvPr id="24" name="">
-            <a:extLst xmlns:a="http://schemas.openxmlformats.org/drawingml/2006/main">
-              <a:ext uri="{FF2B5EF4-FFF2-40B4-BE49-F238E27FC236}">
-                <a16:creationId xmlns:a16="http://schemas.microsoft.com/office/drawing/2014/main" id="{146D35A6-BD91-4183-AB0B-8E5A552EC372}"/>
-              </a:ext>
-            </a:extLst>
-          </p:cNvPr>
-          <p:cNvSpPr>
-            <a:spLocks xmlns:a="http://schemas.openxmlformats.org/drawingml/2006/main" noGrp="1"/>
-          </p:cNvSpPr>
-          <p:nvPr/>
-        </p:nvSpPr>
-        <p:spPr>
-          <a:xfrm xmlns:a="http://schemas.openxmlformats.org/drawingml/2006/main">
-            <a:off x="6705600" y="3667125"/>
-            <a:ext cx="57150" cy="57150"/>
-          </a:xfrm>
-          <a:prstGeom xmlns:a="http://schemas.openxmlformats.org/drawingml/2006/main" prst="rect">
-            <a:avLst/>
-          </a:prstGeom>
-          <a:solidFill xmlns:a="http://schemas.openxmlformats.org/drawingml/2006/main">
-            <a:srgbClr val="1D6072"/>
-          </a:solidFill>
-          <a:ln xmlns:a="http://schemas.openxmlformats.org/drawingml/2006/main" w="0">
-            <a:solidFill>
-              <a:srgbClr val="000000">
-                <a:alpha val="0"/>
-              </a:srgbClr>
-            </a:solidFill>
-            <a:prstDash val="solid"/>
-          </a:ln>
-        </p:spPr>
-      </p:sp>
-      <p:sp>
-        <p:nvSpPr>
-          <p:cNvPr id="25" name="">
-            <a:extLst xmlns:a="http://schemas.openxmlformats.org/drawingml/2006/main">
-              <a:ext uri="{FF2B5EF4-FFF2-40B4-BE49-F238E27FC236}">
-                <a16:creationId xmlns:a16="http://schemas.microsoft.com/office/drawing/2014/main" id="{A401A384-EB49-4DF2-869D-1024CCB82683}"/>
-              </a:ext>
-            </a:extLst>
-          </p:cNvPr>
-          <p:cNvSpPr>
-            <a:spLocks xmlns:a="http://schemas.openxmlformats.org/drawingml/2006/main" noGrp="1"/>
-          </p:cNvSpPr>
-          <p:nvPr/>
-        </p:nvSpPr>
-        <p:spPr>
-          <a:xfrm xmlns:a="http://schemas.openxmlformats.org/drawingml/2006/main">
-            <a:off x="6877050" y="3600450"/>
-            <a:ext cx="4210050" cy="438150"/>
-          </a:xfrm>
-          <a:prstGeom xmlns:a="http://schemas.openxmlformats.org/drawingml/2006/main" prst="rect">
-            <a:avLst/>
-          </a:prstGeom>
-          <a:solidFill xmlns:a="http://schemas.openxmlformats.org/drawingml/2006/main">
-            <a:srgbClr val="000000">
-              <a:alpha val="0"/>
-            </a:srgbClr>
-          </a:solidFill>
-          <a:ln xmlns:a="http://schemas.openxmlformats.org/drawingml/2006/main" w="0">
-            <a:solidFill>
-              <a:srgbClr val="000000">
-                <a:alpha val="0"/>
-              </a:srgbClr>
-            </a:solidFill>
-            <a:prstDash val="solid"/>
-          </a:ln>
-        </p:spPr>
-        <p:txBody>
-          <a:bodyPr xmlns:a="http://schemas.openxmlformats.org/drawingml/2006/main" lIns="0" tIns="0" rIns="0" bIns="0" anchor="t"/>
-          <a:lstStyle xmlns:a="http://schemas.openxmlformats.org/drawingml/2006/main"/>
-          <a:p xmlns:a="http://schemas.openxmlformats.org/drawingml/2006/main">
-            <a:pPr algn="l">
-              <a:defRPr sz="1125" b="0">
-                <a:solidFill>
-                  <a:srgbClr val="172026"/>
-                </a:solidFill>
-                <a:latin typeface="Aptos"/>
-                <a:ea typeface="Aptos"/>
-                <a:cs typeface="Aptos"/>
-              </a:defRPr>
-            </a:pPr>
-            <a:r>
-              <a:rPr sz="1125" b="0">
-                <a:solidFill>
-                  <a:srgbClr val="172026"/>
-                </a:solidFill>
-                <a:latin typeface="Aptos"/>
-                <a:ea typeface="Aptos"/>
-                <a:cs typeface="Aptos"/>
-              </a:rPr>
-              <a:t>Sales use and account context</a:t>
-            </a:r>
-          </a:p>
-        </p:txBody>
-      </p:sp>
-      <p:sp>
-        <p:nvSpPr>
-          <p:cNvPr id="26" name="">
-            <a:extLst xmlns:a="http://schemas.openxmlformats.org/drawingml/2006/main">
-              <a:ext uri="{FF2B5EF4-FFF2-40B4-BE49-F238E27FC236}">
-                <a16:creationId xmlns:a16="http://schemas.microsoft.com/office/drawing/2014/main" id="{6C5951F8-D6DB-4F34-992F-CFF820B6BFBA}"/>
-              </a:ext>
-            </a:extLst>
-          </p:cNvPr>
-          <p:cNvSpPr>
-            <a:spLocks xmlns:a="http://schemas.openxmlformats.org/drawingml/2006/main" noGrp="1"/>
-          </p:cNvSpPr>
-          <p:nvPr/>
-        </p:nvSpPr>
-        <p:spPr>
-          <a:xfrm xmlns:a="http://schemas.openxmlformats.org/drawingml/2006/main">
-            <a:off x="6705600" y="4143375"/>
-            <a:ext cx="57150" cy="57150"/>
-          </a:xfrm>
-          <a:prstGeom xmlns:a="http://schemas.openxmlformats.org/drawingml/2006/main" prst="rect">
-            <a:avLst/>
-          </a:prstGeom>
-          <a:solidFill xmlns:a="http://schemas.openxmlformats.org/drawingml/2006/main">
-            <a:srgbClr val="1D6072"/>
-          </a:solidFill>
-          <a:ln xmlns:a="http://schemas.openxmlformats.org/drawingml/2006/main" w="0">
-            <a:solidFill>
-              <a:srgbClr val="000000">
-                <a:alpha val="0"/>
-              </a:srgbClr>
-            </a:solidFill>
-            <a:prstDash val="solid"/>
-          </a:ln>
-        </p:spPr>
-      </p:sp>
-      <p:sp>
-        <p:nvSpPr>
-          <p:cNvPr id="27" name="">
-            <a:extLst xmlns:a="http://schemas.openxmlformats.org/drawingml/2006/main">
-              <a:ext uri="{FF2B5EF4-FFF2-40B4-BE49-F238E27FC236}">
-                <a16:creationId xmlns:a16="http://schemas.microsoft.com/office/drawing/2014/main" id="{E7CF74E0-E517-4766-8CEC-60D663B2BF3E}"/>
-              </a:ext>
-            </a:extLst>
-          </p:cNvPr>
-          <p:cNvSpPr>
-            <a:spLocks xmlns:a="http://schemas.openxmlformats.org/drawingml/2006/main" noGrp="1"/>
-          </p:cNvSpPr>
-          <p:nvPr/>
-        </p:nvSpPr>
-        <p:spPr>
-          <a:xfrm xmlns:a="http://schemas.openxmlformats.org/drawingml/2006/main">
-            <a:off x="6877050" y="4076700"/>
-            <a:ext cx="4210050" cy="438150"/>
-          </a:xfrm>
-          <a:prstGeom xmlns:a="http://schemas.openxmlformats.org/drawingml/2006/main" prst="rect">
-            <a:avLst/>
-          </a:prstGeom>
-          <a:solidFill xmlns:a="http://schemas.openxmlformats.org/drawingml/2006/main">
-            <a:srgbClr val="000000">
-              <a:alpha val="0"/>
-            </a:srgbClr>
-          </a:solidFill>
-          <a:ln xmlns:a="http://schemas.openxmlformats.org/drawingml/2006/main" w="0">
-            <a:solidFill>
-              <a:srgbClr val="000000">
-                <a:alpha val="0"/>
-              </a:srgbClr>
-            </a:solidFill>
-            <a:prstDash val="solid"/>
-          </a:ln>
-        </p:spPr>
-        <p:txBody>
-          <a:bodyPr xmlns:a="http://schemas.openxmlformats.org/drawingml/2006/main" lIns="0" tIns="0" rIns="0" bIns="0" anchor="t"/>
-          <a:lstStyle xmlns:a="http://schemas.openxmlformats.org/drawingml/2006/main"/>
-          <a:p xmlns:a="http://schemas.openxmlformats.org/drawingml/2006/main">
-            <a:pPr algn="l">
-              <a:defRPr sz="1125" b="0">
-                <a:solidFill>
-                  <a:srgbClr val="172026"/>
-                </a:solidFill>
-                <a:latin typeface="Aptos"/>
-                <a:ea typeface="Aptos"/>
-                <a:cs typeface="Aptos"/>
-              </a:defRPr>
-            </a:pPr>
-            <a:r>
-              <a:rPr sz="1125" b="0">
-                <a:solidFill>
-                  <a:srgbClr val="172026"/>
-                </a:solidFill>
-                <a:latin typeface="Aptos"/>
-                <a:ea typeface="Aptos"/>
-                <a:cs typeface="Aptos"/>
-              </a:rPr>
-              <a:t>Signal design and routing implication</a:t>
-            </a:r>
-          </a:p>
-        </p:txBody>
-      </p:sp>
-      <p:sp>
-        <p:nvSpPr>
-          <p:cNvPr id="28" name="">
-            <a:extLst xmlns:a="http://schemas.openxmlformats.org/drawingml/2006/main">
-              <a:ext uri="{FF2B5EF4-FFF2-40B4-BE49-F238E27FC236}">
-                <a16:creationId xmlns:a16="http://schemas.microsoft.com/office/drawing/2014/main" id="{E752A602-DDCF-42AE-97A9-2A2C4BC295E2}"/>
-              </a:ext>
-            </a:extLst>
-          </p:cNvPr>
-          <p:cNvSpPr>
-            <a:spLocks xmlns:a="http://schemas.openxmlformats.org/drawingml/2006/main" noGrp="1"/>
-          </p:cNvSpPr>
-          <p:nvPr/>
-        </p:nvSpPr>
-        <p:spPr>
-          <a:xfrm xmlns:a="http://schemas.openxmlformats.org/drawingml/2006/main">
-            <a:off x="6705600" y="4619625"/>
-            <a:ext cx="57150" cy="57150"/>
-          </a:xfrm>
-          <a:prstGeom xmlns:a="http://schemas.openxmlformats.org/drawingml/2006/main" prst="rect">
-            <a:avLst/>
-          </a:prstGeom>
-          <a:solidFill xmlns:a="http://schemas.openxmlformats.org/drawingml/2006/main">
-            <a:srgbClr val="1D6072"/>
-          </a:solidFill>
-          <a:ln xmlns:a="http://schemas.openxmlformats.org/drawingml/2006/main" w="0">
-            <a:solidFill>
-              <a:srgbClr val="000000">
-                <a:alpha val="0"/>
-              </a:srgbClr>
-            </a:solidFill>
-            <a:prstDash val="solid"/>
-          </a:ln>
-        </p:spPr>
-      </p:sp>
-      <p:sp>
-        <p:nvSpPr>
-          <p:cNvPr id="29" name="">
-            <a:extLst xmlns:a="http://schemas.openxmlformats.org/drawingml/2006/main">
-              <a:ext uri="{FF2B5EF4-FFF2-40B4-BE49-F238E27FC236}">
-                <a16:creationId xmlns:a16="http://schemas.microsoft.com/office/drawing/2014/main" id="{2343D6AC-68A0-4796-8E21-FCBE18E33D8F}"/>
-              </a:ext>
-            </a:extLst>
-          </p:cNvPr>
-          <p:cNvSpPr>
-            <a:spLocks xmlns:a="http://schemas.openxmlformats.org/drawingml/2006/main" noGrp="1"/>
-          </p:cNvSpPr>
-          <p:nvPr/>
-        </p:nvSpPr>
-        <p:spPr>
-          <a:xfrm xmlns:a="http://schemas.openxmlformats.org/drawingml/2006/main">
-            <a:off x="6877050" y="4552950"/>
-            <a:ext cx="4210050" cy="438150"/>
-          </a:xfrm>
-          <a:prstGeom xmlns:a="http://schemas.openxmlformats.org/drawingml/2006/main" prst="rect">
-            <a:avLst/>
-          </a:prstGeom>
-          <a:solidFill xmlns:a="http://schemas.openxmlformats.org/drawingml/2006/main">
-            <a:srgbClr val="000000">
-              <a:alpha val="0"/>
-            </a:srgbClr>
-          </a:solidFill>
-          <a:ln xmlns:a="http://schemas.openxmlformats.org/drawingml/2006/main" w="0">
-            <a:solidFill>
-              <a:srgbClr val="000000">
-                <a:alpha val="0"/>
-              </a:srgbClr>
-            </a:solidFill>
-            <a:prstDash val="solid"/>
-          </a:ln>
-        </p:spPr>
-        <p:txBody>
-          <a:bodyPr xmlns:a="http://schemas.openxmlformats.org/drawingml/2006/main" lIns="0" tIns="0" rIns="0" bIns="0" anchor="t"/>
-          <a:lstStyle xmlns:a="http://schemas.openxmlformats.org/drawingml/2006/main"/>
-          <a:p xmlns:a="http://schemas.openxmlformats.org/drawingml/2006/main">
-            <a:pPr algn="l">
-              <a:defRPr sz="1125" b="0">
-                <a:solidFill>
-                  <a:srgbClr val="172026"/>
-                </a:solidFill>
-                <a:latin typeface="Aptos"/>
-                <a:ea typeface="Aptos"/>
-                <a:cs typeface="Aptos"/>
-              </a:defRPr>
-            </a:pPr>
-            <a:r>
-              <a:rPr sz="1125" b="0">
-                <a:solidFill>
-                  <a:srgbClr val="172026"/>
-                </a:solidFill>
-                <a:latin typeface="Aptos"/>
-                <a:ea typeface="Aptos"/>
-                <a:cs typeface="Aptos"/>
-              </a:rPr>
-              <a:t>Distribution path and quality risk</a:t>
-            </a:r>
-          </a:p>
-        </p:txBody>
-      </p:sp>
-      <p:sp>
-        <p:nvSpPr>
-          <p:cNvPr id="30" name="">
-            <a:extLst xmlns:a="http://schemas.openxmlformats.org/drawingml/2006/main">
-              <a:ext uri="{FF2B5EF4-FFF2-40B4-BE49-F238E27FC236}">
-                <a16:creationId xmlns:a16="http://schemas.microsoft.com/office/drawing/2014/main" id="{AE83E186-96F8-4C87-93C8-8168405541D9}"/>
-              </a:ext>
-            </a:extLst>
-          </p:cNvPr>
-          <p:cNvSpPr>
-            <a:spLocks xmlns:a="http://schemas.openxmlformats.org/drawingml/2006/main" noGrp="1"/>
-          </p:cNvSpPr>
-          <p:nvPr/>
-        </p:nvSpPr>
-        <p:spPr>
-          <a:xfrm xmlns:a="http://schemas.openxmlformats.org/drawingml/2006/main">
-            <a:off x="514350" y="6438900"/>
-            <a:ext cx="10915650" cy="9525"/>
-          </a:xfrm>
-          <a:prstGeom xmlns:a="http://schemas.openxmlformats.org/drawingml/2006/main" prst="rect">
-            <a:avLst/>
-          </a:prstGeom>
-          <a:solidFill xmlns:a="http://schemas.openxmlformats.org/drawingml/2006/main">
-            <a:srgbClr val="D9DDD6"/>
-          </a:solidFill>
-          <a:ln xmlns:a="http://schemas.openxmlformats.org/drawingml/2006/main" w="0">
-            <a:solidFill>
-              <a:srgbClr val="000000">
-                <a:alpha val="0"/>
-              </a:srgbClr>
-            </a:solidFill>
-            <a:prstDash val="solid"/>
-          </a:ln>
-        </p:spPr>
-      </p:sp>
-      <p:sp>
-        <p:nvSpPr>
-          <p:cNvPr id="31" name="">
-            <a:extLst xmlns:a="http://schemas.openxmlformats.org/drawingml/2006/main">
-              <a:ext uri="{FF2B5EF4-FFF2-40B4-BE49-F238E27FC236}">
-                <a16:creationId xmlns:a16="http://schemas.microsoft.com/office/drawing/2014/main" id="{876A3D46-9EDA-41BC-A2F0-D1EFE194D002}"/>
-              </a:ext>
-            </a:extLst>
-          </p:cNvPr>
-          <p:cNvSpPr>
-            <a:spLocks xmlns:a="http://schemas.openxmlformats.org/drawingml/2006/main" noGrp="1"/>
-          </p:cNvSpPr>
-          <p:nvPr/>
-        </p:nvSpPr>
-        <p:spPr>
-          <a:xfrm xmlns:a="http://schemas.openxmlformats.org/drawingml/2006/main">
-            <a:off x="514350" y="6553200"/>
-            <a:ext cx="5905500" cy="171450"/>
-          </a:xfrm>
-          <a:prstGeom xmlns:a="http://schemas.openxmlformats.org/drawingml/2006/main" prst="rect">
-            <a:avLst/>
-          </a:prstGeom>
-          <a:solidFill xmlns:a="http://schemas.openxmlformats.org/drawingml/2006/main">
-            <a:srgbClr val="000000">
-              <a:alpha val="0"/>
-            </a:srgbClr>
-          </a:solidFill>
-          <a:ln xmlns:a="http://schemas.openxmlformats.org/drawingml/2006/main" w="0">
-            <a:solidFill>
-              <a:srgbClr val="000000">
-                <a:alpha val="0"/>
-              </a:srgbClr>
-            </a:solidFill>
-            <a:prstDash val="solid"/>
-          </a:ln>
-        </p:spPr>
-        <p:txBody>
-          <a:bodyPr xmlns:a="http://schemas.openxmlformats.org/drawingml/2006/main" lIns="0" tIns="0" rIns="0" bIns="0" anchor="t"/>
-          <a:lstStyle xmlns:a="http://schemas.openxmlformats.org/drawingml/2006/main"/>
-          <a:p xmlns:a="http://schemas.openxmlformats.org/drawingml/2006/main">
-            <a:pPr algn="l">
-              <a:defRPr sz="675" b="0">
-                <a:solidFill>
-                  <a:srgbClr val="59646A"/>
-                </a:solidFill>
-                <a:latin typeface="Aptos"/>
-                <a:ea typeface="Aptos"/>
-                <a:cs typeface="Aptos"/>
-              </a:defRPr>
-            </a:pPr>
-            <a:r>
-              <a:rPr sz="675" b="0">
-                <a:solidFill>
-                  <a:srgbClr val="59646A"/>
-                </a:solidFill>
-                <a:latin typeface="Aptos"/>
-                <a:ea typeface="Aptos"/>
-                <a:cs typeface="Aptos"/>
-              </a:rPr>
-              <a:t>Lesson 05 - Content Engine For Industrial Demand</a:t>
-            </a:r>
-          </a:p>
-        </p:txBody>
-      </p:sp>
-      <p:sp>
-        <p:nvSpPr>
-          <p:cNvPr id="32" name="">
-            <a:extLst xmlns:a="http://schemas.openxmlformats.org/drawingml/2006/main">
-              <a:ext uri="{FF2B5EF4-FFF2-40B4-BE49-F238E27FC236}">
-                <a16:creationId xmlns:a16="http://schemas.microsoft.com/office/drawing/2014/main" id="{70CF1FB3-0C91-429C-BF1F-7B85CA5EED41}"/>
-              </a:ext>
-            </a:extLst>
-          </p:cNvPr>
-          <p:cNvSpPr>
-            <a:spLocks xmlns:a="http://schemas.openxmlformats.org/drawingml/2006/main" noGrp="1"/>
-          </p:cNvSpPr>
-          <p:nvPr/>
-        </p:nvSpPr>
-        <p:spPr>
-          <a:xfrm xmlns:a="http://schemas.openxmlformats.org/drawingml/2006/main">
-            <a:off x="5334000" y="6553200"/>
-            <a:ext cx="4095750" cy="171450"/>
-          </a:xfrm>
-          <a:prstGeom xmlns:a="http://schemas.openxmlformats.org/drawingml/2006/main" prst="rect">
-            <a:avLst/>
-          </a:prstGeom>
-          <a:solidFill xmlns:a="http://schemas.openxmlformats.org/drawingml/2006/main">
-            <a:srgbClr val="000000">
-              <a:alpha val="0"/>
-            </a:srgbClr>
-          </a:solidFill>
-          <a:ln xmlns:a="http://schemas.openxmlformats.org/drawingml/2006/main" w="0">
-            <a:solidFill>
-              <a:srgbClr val="000000">
-                <a:alpha val="0"/>
-              </a:srgbClr>
-            </a:solidFill>
-            <a:prstDash val="solid"/>
-          </a:ln>
-        </p:spPr>
-        <p:txBody>
-          <a:bodyPr xmlns:a="http://schemas.openxmlformats.org/drawingml/2006/main" lIns="0" tIns="0" rIns="0" bIns="0" anchor="t"/>
-          <a:lstStyle xmlns:a="http://schemas.openxmlformats.org/drawingml/2006/main"/>
-          <a:p xmlns:a="http://schemas.openxmlformats.org/drawingml/2006/main">
-            <a:pPr algn="r">
-              <a:defRPr sz="600" b="0">
-                <a:solidFill>
-                  <a:srgbClr val="59646A"/>
-                </a:solidFill>
-                <a:latin typeface="Aptos"/>
-                <a:ea typeface="Aptos"/>
-                <a:cs typeface="Aptos"/>
-              </a:defRPr>
-            </a:pPr>
-            <a:r>
-              <a:rPr sz="600" b="0">
-                <a:solidFill>
-                  <a:srgbClr val="59646A"/>
-                </a:solidFill>
-                <a:latin typeface="Aptos"/>
-                <a:ea typeface="Aptos"/>
-                <a:cs typeface="Aptos"/>
-              </a:rPr>
-              <a:t>Source: modules/module-01-industrial-demand-generation/lessons/05-content-engine-for-industrial-demand.md @ 9e28222</a:t>
-            </a:r>
-          </a:p>
-        </p:txBody>
-      </p:sp>
-      <p:sp>
-        <p:nvSpPr>
-          <p:cNvPr id="33" name="">
-            <a:extLst xmlns:a="http://schemas.openxmlformats.org/drawingml/2006/main">
-              <a:ext uri="{FF2B5EF4-FFF2-40B4-BE49-F238E27FC236}">
-                <a16:creationId xmlns:a16="http://schemas.microsoft.com/office/drawing/2014/main" id="{5B772294-8502-4710-ADD5-01A65BBD9AFA}"/>
-              </a:ext>
-            </a:extLst>
-          </p:cNvPr>
-          <p:cNvSpPr>
-            <a:spLocks xmlns:a="http://schemas.openxmlformats.org/drawingml/2006/main" noGrp="1"/>
-          </p:cNvSpPr>
-          <p:nvPr/>
-        </p:nvSpPr>
-        <p:spPr>
-          <a:xfrm xmlns:a="http://schemas.openxmlformats.org/drawingml/2006/main">
-            <a:off x="10668000" y="6553200"/>
-            <a:ext cx="762000" cy="171450"/>
-          </a:xfrm>
-          <a:prstGeom xmlns:a="http://schemas.openxmlformats.org/drawingml/2006/main" prst="rect">
-            <a:avLst/>
-          </a:prstGeom>
-          <a:solidFill xmlns:a="http://schemas.openxmlformats.org/drawingml/2006/main">
-            <a:srgbClr val="000000">
-              <a:alpha val="0"/>
-            </a:srgbClr>
-          </a:solidFill>
-          <a:ln xmlns:a="http://schemas.openxmlformats.org/drawingml/2006/main" w="0">
-            <a:solidFill>
-              <a:srgbClr val="000000">
-                <a:alpha val="0"/>
-              </a:srgbClr>
-            </a:solidFill>
-            <a:prstDash val="solid"/>
-          </a:ln>
-        </p:spPr>
-        <p:txBody>
-          <a:bodyPr xmlns:a="http://schemas.openxmlformats.org/drawingml/2006/main" lIns="0" tIns="0" rIns="0" bIns="0" anchor="t"/>
-          <a:lstStyle xmlns:a="http://schemas.openxmlformats.org/drawingml/2006/main"/>
-          <a:p xmlns:a="http://schemas.openxmlformats.org/drawingml/2006/main">
-            <a:pPr algn="r">
-              <a:defRPr sz="675" b="0">
-                <a:solidFill>
-                  <a:srgbClr val="59646A"/>
-                </a:solidFill>
-                <a:latin typeface="Aptos"/>
-                <a:ea typeface="Aptos"/>
-                <a:cs typeface="Aptos"/>
-              </a:defRPr>
-            </a:pPr>
-            <a:r>
-              <a:rPr sz="675" b="0">
-                <a:solidFill>
-                  <a:srgbClr val="59646A"/>
-                </a:solidFill>
-                <a:latin typeface="Aptos"/>
-                <a:ea typeface="Aptos"/>
-                <a:cs typeface="Aptos"/>
-              </a:rPr>
-              <a:t>10/15</a:t>
-            </a:r>
-          </a:p>
-        </p:txBody>
-      </p:sp>
-      <p:sp>
-        <p:nvSpPr>
-          <p:cNvPr id="34" name="">
-            <a:extLst xmlns:a="http://schemas.openxmlformats.org/drawingml/2006/main">
-              <a:ext uri="{FF2B5EF4-FFF2-40B4-BE49-F238E27FC236}">
-                <a16:creationId xmlns:a16="http://schemas.microsoft.com/office/drawing/2014/main" id="{0764F592-386C-40B4-827C-2EC642AFBAF0}"/>
-              </a:ext>
-            </a:extLst>
-          </p:cNvPr>
-          <p:cNvSpPr>
-            <a:spLocks xmlns:a="http://schemas.openxmlformats.org/drawingml/2006/main" noGrp="1"/>
-          </p:cNvSpPr>
-          <p:nvPr/>
-        </p:nvSpPr>
-        <p:spPr>
-          <a:xfrm xmlns:a="http://schemas.openxmlformats.org/drawingml/2006/main">
-            <a:off x="0" y="0"/>
-            <a:ext cx="12192000" cy="1809750"/>
-          </a:xfrm>
-          <a:prstGeom xmlns:a="http://schemas.openxmlformats.org/drawingml/2006/main" prst="rect">
-            <a:avLst/>
-          </a:prstGeom>
-          <a:solidFill xmlns:a="http://schemas.openxmlformats.org/drawingml/2006/main">
-            <a:srgbClr val="F5F6F2"/>
-          </a:solidFill>
-          <a:ln xmlns:a="http://schemas.openxmlformats.org/drawingml/2006/main" w="0">
-            <a:solidFill>
-              <a:srgbClr val="000000">
-                <a:alpha val="0"/>
-              </a:srgbClr>
-            </a:solidFill>
-            <a:prstDash val="solid"/>
-          </a:ln>
-        </p:spPr>
-      </p:sp>
-      <p:sp>
-        <p:nvSpPr>
-          <p:cNvPr id="35" name="">
-            <a:extLst xmlns:a="http://schemas.openxmlformats.org/drawingml/2006/main">
-              <a:ext uri="{FF2B5EF4-FFF2-40B4-BE49-F238E27FC236}">
-                <a16:creationId xmlns:a16="http://schemas.microsoft.com/office/drawing/2014/main" id="{7084F76D-9440-46AD-A05A-BFB0B1B2DED7}"/>
-              </a:ext>
-            </a:extLst>
-          </p:cNvPr>
-          <p:cNvSpPr>
-            <a:spLocks xmlns:a="http://schemas.openxmlformats.org/drawingml/2006/main" noGrp="1"/>
-          </p:cNvSpPr>
-          <p:nvPr/>
-        </p:nvSpPr>
-        <p:spPr>
-          <a:xfrm xmlns:a="http://schemas.openxmlformats.org/drawingml/2006/main">
-            <a:off x="0" y="0"/>
-            <a:ext cx="171450" cy="1809750"/>
-          </a:xfrm>
-          <a:prstGeom xmlns:a="http://schemas.openxmlformats.org/drawingml/2006/main" prst="rect">
-            <a:avLst/>
-          </a:prstGeom>
-          <a:solidFill xmlns:a="http://schemas.openxmlformats.org/drawingml/2006/main">
-            <a:srgbClr val="12232B"/>
-          </a:solidFill>
-          <a:ln xmlns:a="http://schemas.openxmlformats.org/drawingml/2006/main" w="0">
-            <a:solidFill>
-              <a:srgbClr val="000000">
-                <a:alpha val="0"/>
-              </a:srgbClr>
-            </a:solidFill>
-            <a:prstDash val="solid"/>
-          </a:ln>
-        </p:spPr>
-      </p:sp>
-      <p:sp>
-        <p:nvSpPr>
-          <p:cNvPr id="36" name="">
-            <a:extLst xmlns:a="http://schemas.openxmlformats.org/drawingml/2006/main">
-              <a:ext uri="{FF2B5EF4-FFF2-40B4-BE49-F238E27FC236}">
-                <a16:creationId xmlns:a16="http://schemas.microsoft.com/office/drawing/2014/main" id="{EF81792F-EB33-41AF-BF01-E2C63CB87031}"/>
-              </a:ext>
-            </a:extLst>
-          </p:cNvPr>
-          <p:cNvSpPr>
-            <a:spLocks xmlns:a="http://schemas.openxmlformats.org/drawingml/2006/main" noGrp="1"/>
-          </p:cNvSpPr>
-          <p:nvPr/>
-        </p:nvSpPr>
-        <p:spPr>
-          <a:xfrm xmlns:a="http://schemas.openxmlformats.org/drawingml/2006/main">
-            <a:off x="171450" y="0"/>
-            <a:ext cx="57150" cy="1809750"/>
-          </a:xfrm>
-          <a:prstGeom xmlns:a="http://schemas.openxmlformats.org/drawingml/2006/main" prst="rect">
-            <a:avLst/>
-          </a:prstGeom>
-          <a:solidFill xmlns:a="http://schemas.openxmlformats.org/drawingml/2006/main">
-            <a:srgbClr val="A85D2A"/>
-          </a:solidFill>
-          <a:ln xmlns:a="http://schemas.openxmlformats.org/drawingml/2006/main" w="0">
-            <a:solidFill>
-              <a:srgbClr val="000000">
-                <a:alpha val="0"/>
-              </a:srgbClr>
-            </a:solidFill>
-            <a:prstDash val="solid"/>
-          </a:ln>
-        </p:spPr>
-      </p:sp>
-      <p:sp>
-        <p:nvSpPr>
-          <p:cNvPr id="37" name="kicker-05-marker">
-            <a:extLst xmlns:a="http://schemas.openxmlformats.org/drawingml/2006/main">
-              <a:ext uri="{FF2B5EF4-FFF2-40B4-BE49-F238E27FC236}">
-                <a16:creationId xmlns:a16="http://schemas.microsoft.com/office/drawing/2014/main" id="{EF36AFC5-22F2-4C45-A541-3C39FE3C3E74}"/>
-              </a:ext>
-            </a:extLst>
-          </p:cNvPr>
-          <p:cNvSpPr>
-            <a:spLocks xmlns:a="http://schemas.openxmlformats.org/drawingml/2006/main" noGrp="1"/>
-          </p:cNvSpPr>
-          <p:nvPr/>
-        </p:nvSpPr>
-        <p:spPr>
-          <a:xfrm xmlns:a="http://schemas.openxmlformats.org/drawingml/2006/main">
-            <a:off x="514350" y="390525"/>
-            <a:ext cx="76200" cy="76200"/>
-          </a:xfrm>
-          <a:prstGeom xmlns:a="http://schemas.openxmlformats.org/drawingml/2006/main" prst="rect">
-            <a:avLst/>
-          </a:prstGeom>
-          <a:solidFill xmlns:a="http://schemas.openxmlformats.org/drawingml/2006/main">
-            <a:srgbClr val="A85D2A"/>
-          </a:solidFill>
-          <a:ln xmlns:a="http://schemas.openxmlformats.org/drawingml/2006/main" w="0">
-            <a:solidFill>
-              <a:srgbClr val="000000">
-                <a:alpha val="0"/>
-              </a:srgbClr>
-            </a:solidFill>
-            <a:prstDash val="solid"/>
-          </a:ln>
-        </p:spPr>
-      </p:sp>
-      <p:sp>
-        <p:nvSpPr>
-          <p:cNvPr id="38" name="kicker-05-label">
-            <a:extLst xmlns:a="http://schemas.openxmlformats.org/drawingml/2006/main">
-              <a:ext uri="{FF2B5EF4-FFF2-40B4-BE49-F238E27FC236}">
-                <a16:creationId xmlns:a16="http://schemas.microsoft.com/office/drawing/2014/main" id="{5708A371-1008-459A-91D8-AD01D85A397F}"/>
-              </a:ext>
-            </a:extLst>
-          </p:cNvPr>
-          <p:cNvSpPr>
-            <a:spLocks xmlns:a="http://schemas.openxmlformats.org/drawingml/2006/main" noGrp="1"/>
-          </p:cNvSpPr>
-          <p:nvPr/>
-        </p:nvSpPr>
-        <p:spPr>
-          <a:xfrm xmlns:a="http://schemas.openxmlformats.org/drawingml/2006/main">
-            <a:off x="685800" y="323850"/>
-            <a:ext cx="7524750" cy="228600"/>
-          </a:xfrm>
-          <a:prstGeom xmlns:a="http://schemas.openxmlformats.org/drawingml/2006/main" prst="rect">
-            <a:avLst/>
-          </a:prstGeom>
-          <a:solidFill xmlns:a="http://schemas.openxmlformats.org/drawingml/2006/main">
-            <a:srgbClr val="000000">
-              <a:alpha val="0"/>
-            </a:srgbClr>
-          </a:solidFill>
-          <a:ln xmlns:a="http://schemas.openxmlformats.org/drawingml/2006/main" w="0">
-            <a:solidFill>
-              <a:srgbClr val="000000">
-                <a:alpha val="0"/>
-              </a:srgbClr>
-            </a:solidFill>
-            <a:prstDash val="solid"/>
-          </a:ln>
-        </p:spPr>
-        <p:txBody>
-          <a:bodyPr xmlns:a="http://schemas.openxmlformats.org/drawingml/2006/main" lIns="0" tIns="0" rIns="0" bIns="0" anchor="ctr"/>
-          <a:lstStyle xmlns:a="http://schemas.openxmlformats.org/drawingml/2006/main"/>
-          <a:p xmlns:a="http://schemas.openxmlformats.org/drawingml/2006/main">
-            <a:pPr algn="l">
-              <a:defRPr sz="750" b="1">
-                <a:solidFill>
-                  <a:srgbClr val="59646A"/>
-                </a:solidFill>
-                <a:latin typeface="Aptos"/>
-                <a:ea typeface="Aptos"/>
-                <a:cs typeface="Aptos"/>
-              </a:defRPr>
-            </a:pPr>
-            <a:r>
-              <a:rPr sz="750" b="1">
-                <a:solidFill>
-                  <a:srgbClr val="59646A"/>
-                </a:solidFill>
-                <a:latin typeface="Aptos"/>
-                <a:ea typeface="Aptos"/>
-                <a:cs typeface="Aptos"/>
-              </a:rPr>
-              <a:t>MODULE 1 / LESSON 05 / AI-ASSISTED EXERCISE</a:t>
-            </a:r>
-          </a:p>
-        </p:txBody>
-      </p:sp>
-      <p:sp>
-        <p:nvSpPr>
           <p:cNvPr id="39" name="">
             <a:extLst xmlns:a="http://schemas.openxmlformats.org/drawingml/2006/main">
               <a:ext uri="{FF2B5EF4-FFF2-40B4-BE49-F238E27FC236}">
-                <a16:creationId xmlns:a16="http://schemas.microsoft.com/office/drawing/2014/main" id="{3AD5F1BB-2220-41E3-8F80-873106E8ED6E}"/>
+                <a16:creationId xmlns:a16="http://schemas.microsoft.com/office/drawing/2014/main" id="{1F651936-FF73-45BC-8B6C-97169D17DF6A}"/>
               </a:ext>
             </a:extLst>
           </p:cNvPr>
@@ -5088,7 +5086,7 @@
                 <a:ea typeface="Aptos Display"/>
                 <a:cs typeface="Aptos Display"/>
               </a:rPr>
-              <a:t>Use AI to structure the attempt, then make humans responsible for judgment.</a:t>
+              <a:t>Structure the first draft before the room critiques it.</a:t>
             </a:r>
           </a:p>
         </p:txBody>
@@ -5098,7 +5096,7 @@
           <p:cNvPr id="40" name="">
             <a:extLst xmlns:a="http://schemas.openxmlformats.org/drawingml/2006/main">
               <a:ext uri="{FF2B5EF4-FFF2-40B4-BE49-F238E27FC236}">
-                <a16:creationId xmlns:a16="http://schemas.microsoft.com/office/drawing/2014/main" id="{FE890399-5FBE-4794-9679-EE0BFCFB351E}"/>
+                <a16:creationId xmlns:a16="http://schemas.microsoft.com/office/drawing/2014/main" id="{A13C39A5-56FC-4495-AAA6-A88659443C25}"/>
               </a:ext>
             </a:extLst>
           </p:cNvPr>
@@ -5152,7 +5150,7 @@
                 <a:ea typeface="Aptos"/>
                 <a:cs typeface="Aptos"/>
               </a:rPr>
-              <a:t>The prompt is constrained by source, assumptions, output standard, and human validation.</a:t>
+              <a:t>The brief is constrained by source evidence, assumptions, output standard, and validation.</a:t>
             </a:r>
           </a:p>
         </p:txBody>
@@ -5162,7 +5160,7 @@
           <p:cNvPr id="41" name="">
             <a:extLst xmlns:a="http://schemas.openxmlformats.org/drawingml/2006/main">
               <a:ext uri="{FF2B5EF4-FFF2-40B4-BE49-F238E27FC236}">
-                <a16:creationId xmlns:a16="http://schemas.microsoft.com/office/drawing/2014/main" id="{5D4D431B-01AD-4AD8-83F3-F36EB5CA45FB}"/>
+                <a16:creationId xmlns:a16="http://schemas.microsoft.com/office/drawing/2014/main" id="{77A7FD56-BEFD-4D38-9C48-85CA2978A258}"/>
               </a:ext>
             </a:extLst>
           </p:cNvPr>
@@ -5197,7 +5195,7 @@
           <p:cNvPr id="42" name="">
             <a:extLst xmlns:a="http://schemas.openxmlformats.org/drawingml/2006/main">
               <a:ext uri="{FF2B5EF4-FFF2-40B4-BE49-F238E27FC236}">
-                <a16:creationId xmlns:a16="http://schemas.microsoft.com/office/drawing/2014/main" id="{315624D2-C423-4F4A-8AC4-DB018D39D013}"/>
+                <a16:creationId xmlns:a16="http://schemas.microsoft.com/office/drawing/2014/main" id="{E1C15D9E-8E62-4885-8BDA-D7176828E65F}"/>
               </a:ext>
             </a:extLst>
           </p:cNvPr>
@@ -5232,7 +5230,7 @@
           <p:cNvPr id="43" name="">
             <a:extLst xmlns:a="http://schemas.openxmlformats.org/drawingml/2006/main">
               <a:ext uri="{FF2B5EF4-FFF2-40B4-BE49-F238E27FC236}">
-                <a16:creationId xmlns:a16="http://schemas.microsoft.com/office/drawing/2014/main" id="{5AF923BC-2BAC-46C6-A0B8-ADE43C94DD1F}"/>
+                <a16:creationId xmlns:a16="http://schemas.microsoft.com/office/drawing/2014/main" id="{1B8A65D5-33C3-47BB-9010-6BB2D4D02A64}"/>
               </a:ext>
             </a:extLst>
           </p:cNvPr>
@@ -5267,7 +5265,7 @@
           <p:cNvPr id="44" name="">
             <a:extLst xmlns:a="http://schemas.openxmlformats.org/drawingml/2006/main">
               <a:ext uri="{FF2B5EF4-FFF2-40B4-BE49-F238E27FC236}">
-                <a16:creationId xmlns:a16="http://schemas.microsoft.com/office/drawing/2014/main" id="{99CCFD9B-136C-4D8D-BD2B-B7C76864A0AD}"/>
+                <a16:creationId xmlns:a16="http://schemas.microsoft.com/office/drawing/2014/main" id="{88BC809D-485C-4D01-A8F5-FFC2682C00A9}"/>
               </a:ext>
             </a:extLst>
           </p:cNvPr>
@@ -5302,7 +5300,7 @@
           <p:cNvPr id="45" name="">
             <a:extLst xmlns:a="http://schemas.openxmlformats.org/drawingml/2006/main">
               <a:ext uri="{FF2B5EF4-FFF2-40B4-BE49-F238E27FC236}">
-                <a16:creationId xmlns:a16="http://schemas.microsoft.com/office/drawing/2014/main" id="{56ACF765-7460-4261-B929-211E97B52831}"/>
+                <a16:creationId xmlns:a16="http://schemas.microsoft.com/office/drawing/2014/main" id="{7FDFB447-4683-4A10-BD7E-56CE3A2E7890}"/>
               </a:ext>
             </a:extLst>
           </p:cNvPr>
@@ -5366,7 +5364,7 @@
           <p:cNvPr id="46" name="">
             <a:extLst xmlns:a="http://schemas.openxmlformats.org/drawingml/2006/main">
               <a:ext uri="{FF2B5EF4-FFF2-40B4-BE49-F238E27FC236}">
-                <a16:creationId xmlns:a16="http://schemas.microsoft.com/office/drawing/2014/main" id="{9CAD1A4D-1031-42DC-BA95-C29C8F8CC203}"/>
+                <a16:creationId xmlns:a16="http://schemas.microsoft.com/office/drawing/2014/main" id="{D12F7A23-F86C-46F9-9EDF-9BEC737E559A}"/>
               </a:ext>
             </a:extLst>
           </p:cNvPr>
@@ -5430,7 +5428,7 @@
           <p:cNvPr id="47" name="">
             <a:extLst xmlns:a="http://schemas.openxmlformats.org/drawingml/2006/main">
               <a:ext uri="{FF2B5EF4-FFF2-40B4-BE49-F238E27FC236}">
-                <a16:creationId xmlns:a16="http://schemas.microsoft.com/office/drawing/2014/main" id="{D47D83FE-02C0-4D30-AE7D-AE279954F791}"/>
+                <a16:creationId xmlns:a16="http://schemas.microsoft.com/office/drawing/2014/main" id="{DFCDE7E2-4A38-43DD-A573-ED197CD3B128}"/>
               </a:ext>
             </a:extLst>
           </p:cNvPr>
@@ -5492,7 +5490,7 @@
     </p:spTree>
     <p:extLst>
       <p:ext uri="{BB962C8B-B14F-4D97-AF65-F5344CB8AC3E}">
-        <p14:creationId xmlns:p14="http://schemas.microsoft.com/office/powerpoint/2010/main" val="176233740"/>
+        <p14:creationId xmlns:p14="http://schemas.microsoft.com/office/powerpoint/2010/main" val="1175525529"/>
       </p:ext>
     </p:extLst>
   </p:cSld>
@@ -5516,7 +5514,7 @@
           <p:cNvPr id="1" name="">
             <a:extLst xmlns:a="http://schemas.openxmlformats.org/drawingml/2006/main">
               <a:ext uri="{FF2B5EF4-FFF2-40B4-BE49-F238E27FC236}">
-                <a16:creationId xmlns:a16="http://schemas.microsoft.com/office/drawing/2014/main" id="{A062E189-F8A6-4894-A5EF-3A5C2893A48B}"/>
+                <a16:creationId xmlns:a16="http://schemas.microsoft.com/office/drawing/2014/main" id="{75E8B0F1-CEA5-4FCF-9C36-17C5850D4AE4}"/>
               </a:ext>
             </a:extLst>
           </p:cNvPr>
@@ -5551,7 +5549,7 @@
           <p:cNvPr id="2" name="">
             <a:extLst xmlns:a="http://schemas.openxmlformats.org/drawingml/2006/main">
               <a:ext uri="{FF2B5EF4-FFF2-40B4-BE49-F238E27FC236}">
-                <a16:creationId xmlns:a16="http://schemas.microsoft.com/office/drawing/2014/main" id="{DCBAFA56-00EF-4AAC-95D2-DB32E4668CE7}"/>
+                <a16:creationId xmlns:a16="http://schemas.microsoft.com/office/drawing/2014/main" id="{2FB905BD-EC8E-482D-9F34-614DCD83DCDC}"/>
               </a:ext>
             </a:extLst>
           </p:cNvPr>
@@ -5586,7 +5584,7 @@
           <p:cNvPr id="3" name="">
             <a:extLst xmlns:a="http://schemas.openxmlformats.org/drawingml/2006/main">
               <a:ext uri="{FF2B5EF4-FFF2-40B4-BE49-F238E27FC236}">
-                <a16:creationId xmlns:a16="http://schemas.microsoft.com/office/drawing/2014/main" id="{8A7AA15A-797E-497C-B568-E2134C1B3AC5}"/>
+                <a16:creationId xmlns:a16="http://schemas.microsoft.com/office/drawing/2014/main" id="{2E6BDFC2-6186-4988-BC9E-FDC2F9CB0704}"/>
               </a:ext>
             </a:extLst>
           </p:cNvPr>
@@ -5621,7 +5619,7 @@
           <p:cNvPr id="4" name="kicker-05-marker">
             <a:extLst xmlns:a="http://schemas.openxmlformats.org/drawingml/2006/main">
               <a:ext uri="{FF2B5EF4-FFF2-40B4-BE49-F238E27FC236}">
-                <a16:creationId xmlns:a16="http://schemas.microsoft.com/office/drawing/2014/main" id="{854CFEC2-593F-4186-ACBD-8DB092C5A51C}"/>
+                <a16:creationId xmlns:a16="http://schemas.microsoft.com/office/drawing/2014/main" id="{73F64479-2D0B-4F86-BC37-6CC9AFA6AAD8}"/>
               </a:ext>
             </a:extLst>
           </p:cNvPr>
@@ -5656,7 +5654,7 @@
           <p:cNvPr id="5" name="kicker-05-label">
             <a:extLst xmlns:a="http://schemas.openxmlformats.org/drawingml/2006/main">
               <a:ext uri="{FF2B5EF4-FFF2-40B4-BE49-F238E27FC236}">
-                <a16:creationId xmlns:a16="http://schemas.microsoft.com/office/drawing/2014/main" id="{5FAB3ECA-1627-4371-A1EE-9A1BA6C06202}"/>
+                <a16:creationId xmlns:a16="http://schemas.microsoft.com/office/drawing/2014/main" id="{D60732B3-3D5B-4393-BEBD-7132133E46AF}"/>
               </a:ext>
             </a:extLst>
           </p:cNvPr>
@@ -5710,7 +5708,7 @@
                 <a:ea typeface="Aptos"/>
                 <a:cs typeface="Aptos"/>
               </a:rPr>
-              <a:t>MODULE 1 / LESSON 05 / HUMAN CORRECTION</a:t>
+              <a:t>MODULE 1 / LESSON 05 / QUALITY CONTROL</a:t>
             </a:r>
           </a:p>
         </p:txBody>
@@ -5720,7 +5718,7 @@
           <p:cNvPr id="6" name="">
             <a:extLst xmlns:a="http://schemas.openxmlformats.org/drawingml/2006/main">
               <a:ext uri="{FF2B5EF4-FFF2-40B4-BE49-F238E27FC236}">
-                <a16:creationId xmlns:a16="http://schemas.microsoft.com/office/drawing/2014/main" id="{0438A5F6-B9D9-4D4D-A8D4-25733D3390A6}"/>
+                <a16:creationId xmlns:a16="http://schemas.microsoft.com/office/drawing/2014/main" id="{B93B07E3-84A7-4659-BD1B-87EACB96CB41}"/>
               </a:ext>
             </a:extLst>
           </p:cNvPr>
@@ -5774,7 +5772,7 @@
                 <a:ea typeface="Aptos Display"/>
                 <a:cs typeface="Aptos Display"/>
               </a:rPr>
-              <a:t>AI can draft structure. Humans must repair industrial reality.</a:t>
+              <a:t>Reject weak artifacts before they become operating practice.</a:t>
             </a:r>
           </a:p>
         </p:txBody>
@@ -5784,7 +5782,7 @@
           <p:cNvPr id="7" name="">
             <a:extLst xmlns:a="http://schemas.openxmlformats.org/drawingml/2006/main">
               <a:ext uri="{FF2B5EF4-FFF2-40B4-BE49-F238E27FC236}">
-                <a16:creationId xmlns:a16="http://schemas.microsoft.com/office/drawing/2014/main" id="{D44637A7-DCE6-4C37-BD0F-707EEDCE93F8}"/>
+                <a16:creationId xmlns:a16="http://schemas.microsoft.com/office/drawing/2014/main" id="{3F625D12-CD3D-4118-9DB0-F940CFF33941}"/>
               </a:ext>
             </a:extLst>
           </p:cNvPr>
@@ -5848,7 +5846,7 @@
           <p:cNvPr id="8" name="">
             <a:extLst xmlns:a="http://schemas.openxmlformats.org/drawingml/2006/main">
               <a:ext uri="{FF2B5EF4-FFF2-40B4-BE49-F238E27FC236}">
-                <a16:creationId xmlns:a16="http://schemas.microsoft.com/office/drawing/2014/main" id="{EB5D8C07-4AFB-4492-8685-86A1C4B681B8}"/>
+                <a16:creationId xmlns:a16="http://schemas.microsoft.com/office/drawing/2014/main" id="{1F6ECB31-28CB-4846-8FF8-B475281AB928}"/>
               </a:ext>
             </a:extLst>
           </p:cNvPr>
@@ -5883,7 +5881,7 @@
           <p:cNvPr id="9" name="">
             <a:extLst xmlns:a="http://schemas.openxmlformats.org/drawingml/2006/main">
               <a:ext uri="{FF2B5EF4-FFF2-40B4-BE49-F238E27FC236}">
-                <a16:creationId xmlns:a16="http://schemas.microsoft.com/office/drawing/2014/main" id="{7CA895E6-A0AA-43FD-80EB-F7CAA89BDDCE}"/>
+                <a16:creationId xmlns:a16="http://schemas.microsoft.com/office/drawing/2014/main" id="{E03443B1-899B-4399-AFA1-596336406ED8}"/>
               </a:ext>
             </a:extLst>
           </p:cNvPr>
@@ -5947,7 +5945,7 @@
           <p:cNvPr id="10" name="">
             <a:extLst xmlns:a="http://schemas.openxmlformats.org/drawingml/2006/main">
               <a:ext uri="{FF2B5EF4-FFF2-40B4-BE49-F238E27FC236}">
-                <a16:creationId xmlns:a16="http://schemas.microsoft.com/office/drawing/2014/main" id="{7DF859FA-3ABB-44E3-909E-EE3147EE6777}"/>
+                <a16:creationId xmlns:a16="http://schemas.microsoft.com/office/drawing/2014/main" id="{BE48C0D8-9363-47A0-804B-D0BFFE7F2F1A}"/>
               </a:ext>
             </a:extLst>
           </p:cNvPr>
@@ -6011,7 +6009,7 @@
           <p:cNvPr id="11" name="">
             <a:extLst xmlns:a="http://schemas.openxmlformats.org/drawingml/2006/main">
               <a:ext uri="{FF2B5EF4-FFF2-40B4-BE49-F238E27FC236}">
-                <a16:creationId xmlns:a16="http://schemas.microsoft.com/office/drawing/2014/main" id="{CCD98BBC-A43E-4508-8269-B66AB57FE85A}"/>
+                <a16:creationId xmlns:a16="http://schemas.microsoft.com/office/drawing/2014/main" id="{6818A8D9-E6C7-4B53-9D31-46435CA8BC17}"/>
               </a:ext>
             </a:extLst>
           </p:cNvPr>
@@ -6075,7 +6073,7 @@
           <p:cNvPr id="12" name="">
             <a:extLst xmlns:a="http://schemas.openxmlformats.org/drawingml/2006/main">
               <a:ext uri="{FF2B5EF4-FFF2-40B4-BE49-F238E27FC236}">
-                <a16:creationId xmlns:a16="http://schemas.microsoft.com/office/drawing/2014/main" id="{304B4CB8-0CB9-4B54-A98B-E29638909A9D}"/>
+                <a16:creationId xmlns:a16="http://schemas.microsoft.com/office/drawing/2014/main" id="{6427FA2C-A57B-4E7D-8FC6-7403E2CFD864}"/>
               </a:ext>
             </a:extLst>
           </p:cNvPr>
@@ -6110,7 +6108,7 @@
           <p:cNvPr id="13" name="">
             <a:extLst xmlns:a="http://schemas.openxmlformats.org/drawingml/2006/main">
               <a:ext uri="{FF2B5EF4-FFF2-40B4-BE49-F238E27FC236}">
-                <a16:creationId xmlns:a16="http://schemas.microsoft.com/office/drawing/2014/main" id="{E673BEF5-E49F-41A4-AE8F-C081A83472B5}"/>
+                <a16:creationId xmlns:a16="http://schemas.microsoft.com/office/drawing/2014/main" id="{DB5E92F9-10DE-4DCF-93A4-40BC9816224B}"/>
               </a:ext>
             </a:extLst>
           </p:cNvPr>
@@ -6143,7 +6141,7 @@
           <p:cNvPr id="14" name="">
             <a:extLst xmlns:a="http://schemas.openxmlformats.org/drawingml/2006/main">
               <a:ext uri="{FF2B5EF4-FFF2-40B4-BE49-F238E27FC236}">
-                <a16:creationId xmlns:a16="http://schemas.microsoft.com/office/drawing/2014/main" id="{DA5C010A-A993-4329-91BC-01ABFD831115}"/>
+                <a16:creationId xmlns:a16="http://schemas.microsoft.com/office/drawing/2014/main" id="{B4B18F32-BBB7-47E3-9A66-8BB6CFC3F9CC}"/>
               </a:ext>
             </a:extLst>
           </p:cNvPr>
@@ -6178,7 +6176,7 @@
           <p:cNvPr id="15" name="">
             <a:extLst xmlns:a="http://schemas.openxmlformats.org/drawingml/2006/main">
               <a:ext uri="{FF2B5EF4-FFF2-40B4-BE49-F238E27FC236}">
-                <a16:creationId xmlns:a16="http://schemas.microsoft.com/office/drawing/2014/main" id="{0C12FAB9-7373-44FF-9A84-9352EF60C708}"/>
+                <a16:creationId xmlns:a16="http://schemas.microsoft.com/office/drawing/2014/main" id="{B323EE4C-45B9-47AC-971F-9506F3DEB8FC}"/>
               </a:ext>
             </a:extLst>
           </p:cNvPr>
@@ -6232,7 +6230,7 @@
                 <a:ea typeface="Aptos"/>
                 <a:cs typeface="Aptos"/>
               </a:rPr>
-              <a:t>REJECT OR REPAIR WHEN AI OUTPUT...</a:t>
+              <a:t>REJECT OR REPAIR WHEN THE ARTIFACT...</a:t>
             </a:r>
           </a:p>
         </p:txBody>
@@ -6242,7 +6240,7 @@
           <p:cNvPr id="16" name="">
             <a:extLst xmlns:a="http://schemas.openxmlformats.org/drawingml/2006/main">
               <a:ext uri="{FF2B5EF4-FFF2-40B4-BE49-F238E27FC236}">
-                <a16:creationId xmlns:a16="http://schemas.microsoft.com/office/drawing/2014/main" id="{C9BEAB73-D0E1-4C92-A6A0-2F46A621070B}"/>
+                <a16:creationId xmlns:a16="http://schemas.microsoft.com/office/drawing/2014/main" id="{FD24FEB7-549F-4973-8AD8-ACFF6762D6E6}"/>
               </a:ext>
             </a:extLst>
           </p:cNvPr>
@@ -6277,7 +6275,7 @@
           <p:cNvPr id="17" name="">
             <a:extLst xmlns:a="http://schemas.openxmlformats.org/drawingml/2006/main">
               <a:ext uri="{FF2B5EF4-FFF2-40B4-BE49-F238E27FC236}">
-                <a16:creationId xmlns:a16="http://schemas.microsoft.com/office/drawing/2014/main" id="{6B8B576A-F588-43E5-B146-4682363A45AD}"/>
+                <a16:creationId xmlns:a16="http://schemas.microsoft.com/office/drawing/2014/main" id="{506ECFF7-C515-4D08-BB95-4CB9613C81D8}"/>
               </a:ext>
             </a:extLst>
           </p:cNvPr>
@@ -6341,7 +6339,7 @@
           <p:cNvPr id="18" name="">
             <a:extLst xmlns:a="http://schemas.openxmlformats.org/drawingml/2006/main">
               <a:ext uri="{FF2B5EF4-FFF2-40B4-BE49-F238E27FC236}">
-                <a16:creationId xmlns:a16="http://schemas.microsoft.com/office/drawing/2014/main" id="{8802A612-FF2C-4D7B-837D-E79E1B31F333}"/>
+                <a16:creationId xmlns:a16="http://schemas.microsoft.com/office/drawing/2014/main" id="{AB7B4FDC-7C78-47D5-A42F-003CE74A8AB3}"/>
               </a:ext>
             </a:extLst>
           </p:cNvPr>
@@ -6376,7 +6374,7 @@
           <p:cNvPr id="19" name="">
             <a:extLst xmlns:a="http://schemas.openxmlformats.org/drawingml/2006/main">
               <a:ext uri="{FF2B5EF4-FFF2-40B4-BE49-F238E27FC236}">
-                <a16:creationId xmlns:a16="http://schemas.microsoft.com/office/drawing/2014/main" id="{F6E3AB38-5135-46E2-8E0A-9FECE3A5B427}"/>
+                <a16:creationId xmlns:a16="http://schemas.microsoft.com/office/drawing/2014/main" id="{C2D27123-36B0-49D5-B17E-E3C1840BD9FB}"/>
               </a:ext>
             </a:extLst>
           </p:cNvPr>
@@ -6440,7 +6438,7 @@
           <p:cNvPr id="20" name="">
             <a:extLst xmlns:a="http://schemas.openxmlformats.org/drawingml/2006/main">
               <a:ext uri="{FF2B5EF4-FFF2-40B4-BE49-F238E27FC236}">
-                <a16:creationId xmlns:a16="http://schemas.microsoft.com/office/drawing/2014/main" id="{4A73A508-0395-4C54-A01C-CD6B2D765B17}"/>
+                <a16:creationId xmlns:a16="http://schemas.microsoft.com/office/drawing/2014/main" id="{A902B642-1AE2-476C-926A-1C02BBE23232}"/>
               </a:ext>
             </a:extLst>
           </p:cNvPr>
@@ -6475,7 +6473,7 @@
           <p:cNvPr id="21" name="">
             <a:extLst xmlns:a="http://schemas.openxmlformats.org/drawingml/2006/main">
               <a:ext uri="{FF2B5EF4-FFF2-40B4-BE49-F238E27FC236}">
-                <a16:creationId xmlns:a16="http://schemas.microsoft.com/office/drawing/2014/main" id="{1DD73907-55C7-4226-AD02-8112C1A628C3}"/>
+                <a16:creationId xmlns:a16="http://schemas.microsoft.com/office/drawing/2014/main" id="{029E7985-ECDB-4EF8-A33C-C620D28037E4}"/>
               </a:ext>
             </a:extLst>
           </p:cNvPr>
@@ -6539,7 +6537,7 @@
           <p:cNvPr id="22" name="">
             <a:extLst xmlns:a="http://schemas.openxmlformats.org/drawingml/2006/main">
               <a:ext uri="{FF2B5EF4-FFF2-40B4-BE49-F238E27FC236}">
-                <a16:creationId xmlns:a16="http://schemas.microsoft.com/office/drawing/2014/main" id="{DA1686B0-9FD4-45DD-AB2F-50A5372E0DC4}"/>
+                <a16:creationId xmlns:a16="http://schemas.microsoft.com/office/drawing/2014/main" id="{3563E423-C104-4949-9CE7-29E7AE124129}"/>
               </a:ext>
             </a:extLst>
           </p:cNvPr>
@@ -6574,7 +6572,7 @@
           <p:cNvPr id="23" name="">
             <a:extLst xmlns:a="http://schemas.openxmlformats.org/drawingml/2006/main">
               <a:ext uri="{FF2B5EF4-FFF2-40B4-BE49-F238E27FC236}">
-                <a16:creationId xmlns:a16="http://schemas.microsoft.com/office/drawing/2014/main" id="{82938E9A-4A0F-411D-8728-0C043F87691B}"/>
+                <a16:creationId xmlns:a16="http://schemas.microsoft.com/office/drawing/2014/main" id="{6CC7222C-BA52-4026-A1AD-F09BEF04BAAB}"/>
               </a:ext>
             </a:extLst>
           </p:cNvPr>
@@ -6638,7 +6636,7 @@
           <p:cNvPr id="24" name="">
             <a:extLst xmlns:a="http://schemas.openxmlformats.org/drawingml/2006/main">
               <a:ext uri="{FF2B5EF4-FFF2-40B4-BE49-F238E27FC236}">
-                <a16:creationId xmlns:a16="http://schemas.microsoft.com/office/drawing/2014/main" id="{A5A13E86-0353-4EC7-A00A-B59ECBED3966}"/>
+                <a16:creationId xmlns:a16="http://schemas.microsoft.com/office/drawing/2014/main" id="{A44A6E94-59AB-4464-92A7-CA7B6A4A2FAD}"/>
               </a:ext>
             </a:extLst>
           </p:cNvPr>
@@ -6673,7 +6671,7 @@
           <p:cNvPr id="25" name="">
             <a:extLst xmlns:a="http://schemas.openxmlformats.org/drawingml/2006/main">
               <a:ext uri="{FF2B5EF4-FFF2-40B4-BE49-F238E27FC236}">
-                <a16:creationId xmlns:a16="http://schemas.microsoft.com/office/drawing/2014/main" id="{F094206B-5356-4E6A-9BDD-330D25E8281C}"/>
+                <a16:creationId xmlns:a16="http://schemas.microsoft.com/office/drawing/2014/main" id="{72763B7D-D4F1-4914-965A-B0EFCE6967FB}"/>
               </a:ext>
             </a:extLst>
           </p:cNvPr>
@@ -6737,7 +6735,7 @@
           <p:cNvPr id="26" name="">
             <a:extLst xmlns:a="http://schemas.openxmlformats.org/drawingml/2006/main">
               <a:ext uri="{FF2B5EF4-FFF2-40B4-BE49-F238E27FC236}">
-                <a16:creationId xmlns:a16="http://schemas.microsoft.com/office/drawing/2014/main" id="{45D81AE9-158F-4551-9997-4E455B1DEB6C}"/>
+                <a16:creationId xmlns:a16="http://schemas.microsoft.com/office/drawing/2014/main" id="{21EF044C-34D2-453A-83F2-1BD0EFFF808A}"/>
               </a:ext>
             </a:extLst>
           </p:cNvPr>
@@ -6772,7 +6770,7 @@
           <p:cNvPr id="27" name="">
             <a:extLst xmlns:a="http://schemas.openxmlformats.org/drawingml/2006/main">
               <a:ext uri="{FF2B5EF4-FFF2-40B4-BE49-F238E27FC236}">
-                <a16:creationId xmlns:a16="http://schemas.microsoft.com/office/drawing/2014/main" id="{9CD49941-66A2-466D-8B36-3B02D3A4BB9B}"/>
+                <a16:creationId xmlns:a16="http://schemas.microsoft.com/office/drawing/2014/main" id="{E6B07281-F00D-453D-B674-16494F73A504}"/>
               </a:ext>
             </a:extLst>
           </p:cNvPr>
@@ -6826,7 +6824,7 @@
                 <a:ea typeface="Aptos"/>
                 <a:cs typeface="Aptos"/>
               </a:rPr>
-              <a:t>Reject AI-generated technical claims without SME validation.</a:t>
+              <a:t>Reject technical claims without SME validation.</a:t>
             </a:r>
           </a:p>
         </p:txBody>
@@ -6836,7 +6834,7 @@
           <p:cNvPr id="28" name="">
             <a:extLst xmlns:a="http://schemas.openxmlformats.org/drawingml/2006/main">
               <a:ext uri="{FF2B5EF4-FFF2-40B4-BE49-F238E27FC236}">
-                <a16:creationId xmlns:a16="http://schemas.microsoft.com/office/drawing/2014/main" id="{76046219-0E8A-4698-82F8-7F9CA602A134}"/>
+                <a16:creationId xmlns:a16="http://schemas.microsoft.com/office/drawing/2014/main" id="{643C5DDD-4693-47C3-BAC3-65B089B0B856}"/>
               </a:ext>
             </a:extLst>
           </p:cNvPr>
@@ -6869,7 +6867,7 @@
           <p:cNvPr id="29" name="">
             <a:extLst xmlns:a="http://schemas.openxmlformats.org/drawingml/2006/main">
               <a:ext uri="{FF2B5EF4-FFF2-40B4-BE49-F238E27FC236}">
-                <a16:creationId xmlns:a16="http://schemas.microsoft.com/office/drawing/2014/main" id="{2A12E3FC-3837-4067-9133-8ECD7A46F19B}"/>
+                <a16:creationId xmlns:a16="http://schemas.microsoft.com/office/drawing/2014/main" id="{616569D2-B991-4737-B6B7-3D75D8AAD2A9}"/>
               </a:ext>
             </a:extLst>
           </p:cNvPr>
@@ -6904,7 +6902,7 @@
           <p:cNvPr id="30" name="">
             <a:extLst xmlns:a="http://schemas.openxmlformats.org/drawingml/2006/main">
               <a:ext uri="{FF2B5EF4-FFF2-40B4-BE49-F238E27FC236}">
-                <a16:creationId xmlns:a16="http://schemas.microsoft.com/office/drawing/2014/main" id="{70B31192-D9E1-4914-AD2C-7573D9FAA267}"/>
+                <a16:creationId xmlns:a16="http://schemas.microsoft.com/office/drawing/2014/main" id="{9B1F4994-42C0-4BBC-AA48-E3BC5B32CA28}"/>
               </a:ext>
             </a:extLst>
           </p:cNvPr>
@@ -6968,7 +6966,7 @@
           <p:cNvPr id="31" name="">
             <a:extLst xmlns:a="http://schemas.openxmlformats.org/drawingml/2006/main">
               <a:ext uri="{FF2B5EF4-FFF2-40B4-BE49-F238E27FC236}">
-                <a16:creationId xmlns:a16="http://schemas.microsoft.com/office/drawing/2014/main" id="{865BF684-D24A-41D0-8DE8-296A509A7B41}"/>
+                <a16:creationId xmlns:a16="http://schemas.microsoft.com/office/drawing/2014/main" id="{FBBDA76E-42E0-4190-8E72-0825C99DE564}"/>
               </a:ext>
             </a:extLst>
           </p:cNvPr>
@@ -7032,7 +7030,7 @@
           <p:cNvPr id="32" name="">
             <a:extLst xmlns:a="http://schemas.openxmlformats.org/drawingml/2006/main">
               <a:ext uri="{FF2B5EF4-FFF2-40B4-BE49-F238E27FC236}">
-                <a16:creationId xmlns:a16="http://schemas.microsoft.com/office/drawing/2014/main" id="{91E27B34-4BB5-4AF5-9CBA-291CE1092D42}"/>
+                <a16:creationId xmlns:a16="http://schemas.microsoft.com/office/drawing/2014/main" id="{0E29F5FD-EFF0-40B5-ADAB-DA64EDD66D5D}"/>
               </a:ext>
             </a:extLst>
           </p:cNvPr>
@@ -7065,7 +7063,7 @@
           <p:cNvPr id="33" name="">
             <a:extLst xmlns:a="http://schemas.openxmlformats.org/drawingml/2006/main">
               <a:ext uri="{FF2B5EF4-FFF2-40B4-BE49-F238E27FC236}">
-                <a16:creationId xmlns:a16="http://schemas.microsoft.com/office/drawing/2014/main" id="{7F20F792-7448-450D-9655-39378AB1480C}"/>
+                <a16:creationId xmlns:a16="http://schemas.microsoft.com/office/drawing/2014/main" id="{5703A06A-D410-4D02-A734-03B5F080CE25}"/>
               </a:ext>
             </a:extLst>
           </p:cNvPr>
@@ -7129,7 +7127,7 @@
           <p:cNvPr id="34" name="">
             <a:extLst xmlns:a="http://schemas.openxmlformats.org/drawingml/2006/main">
               <a:ext uri="{FF2B5EF4-FFF2-40B4-BE49-F238E27FC236}">
-                <a16:creationId xmlns:a16="http://schemas.microsoft.com/office/drawing/2014/main" id="{4ACE79C8-D985-4095-A8BF-72AD95AF7079}"/>
+                <a16:creationId xmlns:a16="http://schemas.microsoft.com/office/drawing/2014/main" id="{9A1D1A95-2775-4498-B3FB-127E68D26B68}"/>
               </a:ext>
             </a:extLst>
           </p:cNvPr>
@@ -7183,7 +7181,7 @@
                 <a:ea typeface="Aptos"/>
                 <a:cs typeface="Aptos"/>
               </a:rPr>
-              <a:t>Ask what the AI is guessing.</a:t>
+              <a:t>Ask what the artifact assumes.</a:t>
             </a:r>
           </a:p>
         </p:txBody>
@@ -7193,7 +7191,7 @@
           <p:cNvPr id="35" name="">
             <a:extLst xmlns:a="http://schemas.openxmlformats.org/drawingml/2006/main">
               <a:ext uri="{FF2B5EF4-FFF2-40B4-BE49-F238E27FC236}">
-                <a16:creationId xmlns:a16="http://schemas.microsoft.com/office/drawing/2014/main" id="{DE38F3EE-744E-4FCB-805F-047172CDEE44}"/>
+                <a16:creationId xmlns:a16="http://schemas.microsoft.com/office/drawing/2014/main" id="{416167F0-E1C2-4FAC-8390-1FD967F0F2A2}"/>
               </a:ext>
             </a:extLst>
           </p:cNvPr>
@@ -7228,7 +7226,7 @@
           <p:cNvPr id="36" name="">
             <a:extLst xmlns:a="http://schemas.openxmlformats.org/drawingml/2006/main">
               <a:ext uri="{FF2B5EF4-FFF2-40B4-BE49-F238E27FC236}">
-                <a16:creationId xmlns:a16="http://schemas.microsoft.com/office/drawing/2014/main" id="{AE94BF14-6366-47CF-93AB-923B615EFB9E}"/>
+                <a16:creationId xmlns:a16="http://schemas.microsoft.com/office/drawing/2014/main" id="{AD3D751C-CF9C-4ADB-B84B-5B316B247D4D}"/>
               </a:ext>
             </a:extLst>
           </p:cNvPr>
@@ -7292,7 +7290,7 @@
           <p:cNvPr id="37" name="">
             <a:extLst xmlns:a="http://schemas.openxmlformats.org/drawingml/2006/main">
               <a:ext uri="{FF2B5EF4-FFF2-40B4-BE49-F238E27FC236}">
-                <a16:creationId xmlns:a16="http://schemas.microsoft.com/office/drawing/2014/main" id="{52069264-768B-4173-A6BA-F4CE7C71F6A4}"/>
+                <a16:creationId xmlns:a16="http://schemas.microsoft.com/office/drawing/2014/main" id="{C3AD5DF7-E902-4D8E-B58A-A9F3E961DFC3}"/>
               </a:ext>
             </a:extLst>
           </p:cNvPr>
@@ -7356,7 +7354,7 @@
           <p:cNvPr id="38" name="">
             <a:extLst xmlns:a="http://schemas.openxmlformats.org/drawingml/2006/main">
               <a:ext uri="{FF2B5EF4-FFF2-40B4-BE49-F238E27FC236}">
-                <a16:creationId xmlns:a16="http://schemas.microsoft.com/office/drawing/2014/main" id="{84663713-03DD-4A16-9C8A-8A5F8A0CBB14}"/>
+                <a16:creationId xmlns:a16="http://schemas.microsoft.com/office/drawing/2014/main" id="{A722A20C-F915-4992-A4FB-FC7EDC2B970F}"/>
               </a:ext>
             </a:extLst>
           </p:cNvPr>
@@ -7420,7 +7418,7 @@
           <p:cNvPr id="39" name="">
             <a:extLst xmlns:a="http://schemas.openxmlformats.org/drawingml/2006/main">
               <a:ext uri="{FF2B5EF4-FFF2-40B4-BE49-F238E27FC236}">
-                <a16:creationId xmlns:a16="http://schemas.microsoft.com/office/drawing/2014/main" id="{9F7C8C42-26C8-461C-B15C-EB0E64535A53}"/>
+                <a16:creationId xmlns:a16="http://schemas.microsoft.com/office/drawing/2014/main" id="{02036298-7E76-4B1B-9AC4-7DC94B7AE2E4}"/>
               </a:ext>
             </a:extLst>
           </p:cNvPr>
@@ -7455,7 +7453,7 @@
           <p:cNvPr id="40" name="">
             <a:extLst xmlns:a="http://schemas.openxmlformats.org/drawingml/2006/main">
               <a:ext uri="{FF2B5EF4-FFF2-40B4-BE49-F238E27FC236}">
-                <a16:creationId xmlns:a16="http://schemas.microsoft.com/office/drawing/2014/main" id="{253CEACF-2A36-4247-BE25-25E7D112064A}"/>
+                <a16:creationId xmlns:a16="http://schemas.microsoft.com/office/drawing/2014/main" id="{ABCD869D-DE02-4349-A645-28E5A7E0FD67}"/>
               </a:ext>
             </a:extLst>
           </p:cNvPr>
@@ -7490,7 +7488,7 @@
           <p:cNvPr id="41" name="">
             <a:extLst xmlns:a="http://schemas.openxmlformats.org/drawingml/2006/main">
               <a:ext uri="{FF2B5EF4-FFF2-40B4-BE49-F238E27FC236}">
-                <a16:creationId xmlns:a16="http://schemas.microsoft.com/office/drawing/2014/main" id="{175C42E8-E4B9-428C-8A39-5682E581AA03}"/>
+                <a16:creationId xmlns:a16="http://schemas.microsoft.com/office/drawing/2014/main" id="{70B4A3E0-EE28-4A09-8F08-5E8D36B4C469}"/>
               </a:ext>
             </a:extLst>
           </p:cNvPr>
@@ -7525,7 +7523,7 @@
           <p:cNvPr id="42" name="kicker-05-marker">
             <a:extLst xmlns:a="http://schemas.openxmlformats.org/drawingml/2006/main">
               <a:ext uri="{FF2B5EF4-FFF2-40B4-BE49-F238E27FC236}">
-                <a16:creationId xmlns:a16="http://schemas.microsoft.com/office/drawing/2014/main" id="{7B1C325D-E91E-408A-A237-F7B03D11B1D2}"/>
+                <a16:creationId xmlns:a16="http://schemas.microsoft.com/office/drawing/2014/main" id="{22DFADAF-5AFF-44B8-A8F5-A695A89788C5}"/>
               </a:ext>
             </a:extLst>
           </p:cNvPr>
@@ -7560,7 +7558,7 @@
           <p:cNvPr id="43" name="kicker-05-label">
             <a:extLst xmlns:a="http://schemas.openxmlformats.org/drawingml/2006/main">
               <a:ext uri="{FF2B5EF4-FFF2-40B4-BE49-F238E27FC236}">
-                <a16:creationId xmlns:a16="http://schemas.microsoft.com/office/drawing/2014/main" id="{3CB38748-E14D-427D-81F3-48FB7BDDC4DC}"/>
+                <a16:creationId xmlns:a16="http://schemas.microsoft.com/office/drawing/2014/main" id="{CDC21299-54AA-4C83-A4E9-742FFA3DD0B4}"/>
               </a:ext>
             </a:extLst>
           </p:cNvPr>
@@ -7614,7 +7612,7 @@
                 <a:ea typeface="Aptos"/>
                 <a:cs typeface="Aptos"/>
               </a:rPr>
-              <a:t>MODULE 1 / LESSON 05 / HUMAN CORRECTION</a:t>
+              <a:t>MODULE 1 / LESSON 05 / QUALITY CONTROL</a:t>
             </a:r>
           </a:p>
         </p:txBody>
@@ -7624,7 +7622,7 @@
           <p:cNvPr id="44" name="">
             <a:extLst xmlns:a="http://schemas.openxmlformats.org/drawingml/2006/main">
               <a:ext uri="{FF2B5EF4-FFF2-40B4-BE49-F238E27FC236}">
-                <a16:creationId xmlns:a16="http://schemas.microsoft.com/office/drawing/2014/main" id="{E7847915-DD1A-4ED0-B4CC-6DD11652743B}"/>
+                <a16:creationId xmlns:a16="http://schemas.microsoft.com/office/drawing/2014/main" id="{CF045311-ED1A-4930-8318-D3E4F36B4F2D}"/>
               </a:ext>
             </a:extLst>
           </p:cNvPr>
@@ -7678,7 +7676,7 @@
                 <a:ea typeface="Aptos Display"/>
                 <a:cs typeface="Aptos Display"/>
               </a:rPr>
-              <a:t>AI can draft structure. Humans must repair industrial reality.</a:t>
+              <a:t>Reject weak artifacts before they become operating practice.</a:t>
             </a:r>
           </a:p>
         </p:txBody>
@@ -7688,7 +7686,7 @@
           <p:cNvPr id="45" name="">
             <a:extLst xmlns:a="http://schemas.openxmlformats.org/drawingml/2006/main">
               <a:ext uri="{FF2B5EF4-FFF2-40B4-BE49-F238E27FC236}">
-                <a16:creationId xmlns:a16="http://schemas.microsoft.com/office/drawing/2014/main" id="{3DC0FC0D-216C-46E7-9A76-8EA04E0537A4}"/>
+                <a16:creationId xmlns:a16="http://schemas.microsoft.com/office/drawing/2014/main" id="{7CB52A39-E2CE-48CD-8D37-92C3CB86F429}"/>
               </a:ext>
             </a:extLst>
           </p:cNvPr>
@@ -7752,7 +7750,7 @@
           <p:cNvPr id="46" name="">
             <a:extLst xmlns:a="http://schemas.openxmlformats.org/drawingml/2006/main">
               <a:ext uri="{FF2B5EF4-FFF2-40B4-BE49-F238E27FC236}">
-                <a16:creationId xmlns:a16="http://schemas.microsoft.com/office/drawing/2014/main" id="{38D2042E-249F-4AFE-B4DB-3E06ACB454EB}"/>
+                <a16:creationId xmlns:a16="http://schemas.microsoft.com/office/drawing/2014/main" id="{E06D752A-A5C1-4E5E-95C0-E5AAFB5F6D3C}"/>
               </a:ext>
             </a:extLst>
           </p:cNvPr>
@@ -7787,7 +7785,7 @@
           <p:cNvPr id="47" name="">
             <a:extLst xmlns:a="http://schemas.openxmlformats.org/drawingml/2006/main">
               <a:ext uri="{FF2B5EF4-FFF2-40B4-BE49-F238E27FC236}">
-                <a16:creationId xmlns:a16="http://schemas.microsoft.com/office/drawing/2014/main" id="{48A28E07-3830-4555-968D-DF116E9775A8}"/>
+                <a16:creationId xmlns:a16="http://schemas.microsoft.com/office/drawing/2014/main" id="{160E76D0-9029-4409-B135-D270A8904520}"/>
               </a:ext>
             </a:extLst>
           </p:cNvPr>
@@ -7822,7 +7820,7 @@
           <p:cNvPr id="48" name="">
             <a:extLst xmlns:a="http://schemas.openxmlformats.org/drawingml/2006/main">
               <a:ext uri="{FF2B5EF4-FFF2-40B4-BE49-F238E27FC236}">
-                <a16:creationId xmlns:a16="http://schemas.microsoft.com/office/drawing/2014/main" id="{6B2C149D-3EB6-473D-BEAB-C35C2CD4E514}"/>
+                <a16:creationId xmlns:a16="http://schemas.microsoft.com/office/drawing/2014/main" id="{AF5CE07B-272F-42C5-A9AE-DB222A9A76A7}"/>
               </a:ext>
             </a:extLst>
           </p:cNvPr>
@@ -7857,7 +7855,7 @@
           <p:cNvPr id="49" name="">
             <a:extLst xmlns:a="http://schemas.openxmlformats.org/drawingml/2006/main">
               <a:ext uri="{FF2B5EF4-FFF2-40B4-BE49-F238E27FC236}">
-                <a16:creationId xmlns:a16="http://schemas.microsoft.com/office/drawing/2014/main" id="{41135EC3-BA13-4E6A-A996-37671C96A4AA}"/>
+                <a16:creationId xmlns:a16="http://schemas.microsoft.com/office/drawing/2014/main" id="{26ACA967-D72B-408F-872E-F17248D174F9}"/>
               </a:ext>
             </a:extLst>
           </p:cNvPr>
@@ -7892,7 +7890,7 @@
           <p:cNvPr id="50" name="">
             <a:extLst xmlns:a="http://schemas.openxmlformats.org/drawingml/2006/main">
               <a:ext uri="{FF2B5EF4-FFF2-40B4-BE49-F238E27FC236}">
-                <a16:creationId xmlns:a16="http://schemas.microsoft.com/office/drawing/2014/main" id="{7F4795A3-CB15-49AD-914A-7D20043FDE47}"/>
+                <a16:creationId xmlns:a16="http://schemas.microsoft.com/office/drawing/2014/main" id="{BE77F1E2-0D19-4AC4-87EC-585B7AE9947E}"/>
               </a:ext>
             </a:extLst>
           </p:cNvPr>
@@ -7956,7 +7954,7 @@
           <p:cNvPr id="51" name="">
             <a:extLst xmlns:a="http://schemas.openxmlformats.org/drawingml/2006/main">
               <a:ext uri="{FF2B5EF4-FFF2-40B4-BE49-F238E27FC236}">
-                <a16:creationId xmlns:a16="http://schemas.microsoft.com/office/drawing/2014/main" id="{05A39E1B-555C-403F-A1F0-4A14133E36A2}"/>
+                <a16:creationId xmlns:a16="http://schemas.microsoft.com/office/drawing/2014/main" id="{7DDFD5A3-F84F-4527-B911-0F5FCA224360}"/>
               </a:ext>
             </a:extLst>
           </p:cNvPr>
@@ -8020,7 +8018,7 @@
           <p:cNvPr id="52" name="">
             <a:extLst xmlns:a="http://schemas.openxmlformats.org/drawingml/2006/main">
               <a:ext uri="{FF2B5EF4-FFF2-40B4-BE49-F238E27FC236}">
-                <a16:creationId xmlns:a16="http://schemas.microsoft.com/office/drawing/2014/main" id="{612F6297-B2F4-4969-91C7-0225B91C5A4B}"/>
+                <a16:creationId xmlns:a16="http://schemas.microsoft.com/office/drawing/2014/main" id="{FC566EE1-3AE8-4E38-AE59-5052BFB10BC1}"/>
               </a:ext>
             </a:extLst>
           </p:cNvPr>
@@ -8082,7 +8080,7 @@
     </p:spTree>
     <p:extLst>
       <p:ext uri="{BB962C8B-B14F-4D97-AF65-F5344CB8AC3E}">
-        <p14:creationId xmlns:p14="http://schemas.microsoft.com/office/powerpoint/2010/main" val="1694157537"/>
+        <p14:creationId xmlns:p14="http://schemas.microsoft.com/office/powerpoint/2010/main" val="684465137"/>
       </p:ext>
     </p:extLst>
   </p:cSld>
@@ -8106,7 +8104,7 @@
           <p:cNvPr id="1" name="">
             <a:extLst xmlns:a="http://schemas.openxmlformats.org/drawingml/2006/main">
               <a:ext uri="{FF2B5EF4-FFF2-40B4-BE49-F238E27FC236}">
-                <a16:creationId xmlns:a16="http://schemas.microsoft.com/office/drawing/2014/main" id="{E715AA81-64FF-4E9E-A9D1-08E253F7FB0B}"/>
+                <a16:creationId xmlns:a16="http://schemas.microsoft.com/office/drawing/2014/main" id="{322B0D9F-5FE0-403C-A40F-7363662BDBA1}"/>
               </a:ext>
             </a:extLst>
           </p:cNvPr>
@@ -8141,7 +8139,7 @@
           <p:cNvPr id="2" name="">
             <a:extLst xmlns:a="http://schemas.openxmlformats.org/drawingml/2006/main">
               <a:ext uri="{FF2B5EF4-FFF2-40B4-BE49-F238E27FC236}">
-                <a16:creationId xmlns:a16="http://schemas.microsoft.com/office/drawing/2014/main" id="{DF27C26B-8E20-48C7-BAA8-800FA9257578}"/>
+                <a16:creationId xmlns:a16="http://schemas.microsoft.com/office/drawing/2014/main" id="{1E07756F-A074-4BC7-84DD-A8DE49A37158}"/>
               </a:ext>
             </a:extLst>
           </p:cNvPr>
@@ -8176,7 +8174,7 @@
           <p:cNvPr id="3" name="">
             <a:extLst xmlns:a="http://schemas.openxmlformats.org/drawingml/2006/main">
               <a:ext uri="{FF2B5EF4-FFF2-40B4-BE49-F238E27FC236}">
-                <a16:creationId xmlns:a16="http://schemas.microsoft.com/office/drawing/2014/main" id="{EA737139-8374-404F-8C25-0BD6A7B29937}"/>
+                <a16:creationId xmlns:a16="http://schemas.microsoft.com/office/drawing/2014/main" id="{044896E8-5ADA-4542-9756-3EC32C1190F9}"/>
               </a:ext>
             </a:extLst>
           </p:cNvPr>
@@ -8211,7 +8209,7 @@
           <p:cNvPr id="4" name="kicker-05-marker">
             <a:extLst xmlns:a="http://schemas.openxmlformats.org/drawingml/2006/main">
               <a:ext uri="{FF2B5EF4-FFF2-40B4-BE49-F238E27FC236}">
-                <a16:creationId xmlns:a16="http://schemas.microsoft.com/office/drawing/2014/main" id="{DF65A9DA-F725-43BE-BF8E-B27FA7E104B1}"/>
+                <a16:creationId xmlns:a16="http://schemas.microsoft.com/office/drawing/2014/main" id="{BB103700-8F3E-4FE7-A513-8955BB6DC9C2}"/>
               </a:ext>
             </a:extLst>
           </p:cNvPr>
@@ -8246,7 +8244,7 @@
           <p:cNvPr id="5" name="kicker-05-label">
             <a:extLst xmlns:a="http://schemas.openxmlformats.org/drawingml/2006/main">
               <a:ext uri="{FF2B5EF4-FFF2-40B4-BE49-F238E27FC236}">
-                <a16:creationId xmlns:a16="http://schemas.microsoft.com/office/drawing/2014/main" id="{054CEE22-D8AC-49B8-ABA5-EE304A21CE39}"/>
+                <a16:creationId xmlns:a16="http://schemas.microsoft.com/office/drawing/2014/main" id="{BD48D61F-2297-4369-A890-51B8BBFF2334}"/>
               </a:ext>
             </a:extLst>
           </p:cNvPr>
@@ -8310,7 +8308,7 @@
           <p:cNvPr id="6" name="">
             <a:extLst xmlns:a="http://schemas.openxmlformats.org/drawingml/2006/main">
               <a:ext uri="{FF2B5EF4-FFF2-40B4-BE49-F238E27FC236}">
-                <a16:creationId xmlns:a16="http://schemas.microsoft.com/office/drawing/2014/main" id="{CAE3E5BB-00F4-4982-98F5-8EDA6CF68654}"/>
+                <a16:creationId xmlns:a16="http://schemas.microsoft.com/office/drawing/2014/main" id="{982A9DA4-6767-4054-97D5-B77335B34C25}"/>
               </a:ext>
             </a:extLst>
           </p:cNvPr>
@@ -8374,7 +8372,7 @@
           <p:cNvPr id="7" name="">
             <a:extLst xmlns:a="http://schemas.openxmlformats.org/drawingml/2006/main">
               <a:ext uri="{FF2B5EF4-FFF2-40B4-BE49-F238E27FC236}">
-                <a16:creationId xmlns:a16="http://schemas.microsoft.com/office/drawing/2014/main" id="{FAFDB875-D91E-4D5A-A0AE-01DB32DC0994}"/>
+                <a16:creationId xmlns:a16="http://schemas.microsoft.com/office/drawing/2014/main" id="{9D749B3D-FC8D-4F1F-8F1C-EFDE2402B1ED}"/>
               </a:ext>
             </a:extLst>
           </p:cNvPr>
@@ -8438,7 +8436,7 @@
           <p:cNvPr id="8" name="">
             <a:extLst xmlns:a="http://schemas.openxmlformats.org/drawingml/2006/main">
               <a:ext uri="{FF2B5EF4-FFF2-40B4-BE49-F238E27FC236}">
-                <a16:creationId xmlns:a16="http://schemas.microsoft.com/office/drawing/2014/main" id="{E557C068-EFB7-4FFA-BEF5-F4DD1C651F52}"/>
+                <a16:creationId xmlns:a16="http://schemas.microsoft.com/office/drawing/2014/main" id="{167293BD-94C4-4BF0-879F-D92C1C552F7E}"/>
               </a:ext>
             </a:extLst>
           </p:cNvPr>
@@ -8473,7 +8471,7 @@
           <p:cNvPr id="9" name="">
             <a:extLst xmlns:a="http://schemas.openxmlformats.org/drawingml/2006/main">
               <a:ext uri="{FF2B5EF4-FFF2-40B4-BE49-F238E27FC236}">
-                <a16:creationId xmlns:a16="http://schemas.microsoft.com/office/drawing/2014/main" id="{ACEDED9E-1EC6-4996-BD27-4454C5917012}"/>
+                <a16:creationId xmlns:a16="http://schemas.microsoft.com/office/drawing/2014/main" id="{46DD3A3A-3FB3-4B9D-8810-00FAF067329B}"/>
               </a:ext>
             </a:extLst>
           </p:cNvPr>
@@ -8537,7 +8535,7 @@
           <p:cNvPr id="10" name="">
             <a:extLst xmlns:a="http://schemas.openxmlformats.org/drawingml/2006/main">
               <a:ext uri="{FF2B5EF4-FFF2-40B4-BE49-F238E27FC236}">
-                <a16:creationId xmlns:a16="http://schemas.microsoft.com/office/drawing/2014/main" id="{EEB829D9-9B6A-4801-A955-9D09C5C825B4}"/>
+                <a16:creationId xmlns:a16="http://schemas.microsoft.com/office/drawing/2014/main" id="{263A21BB-8960-479E-87B4-3D97DA25978D}"/>
               </a:ext>
             </a:extLst>
           </p:cNvPr>
@@ -8601,7 +8599,7 @@
           <p:cNvPr id="11" name="">
             <a:extLst xmlns:a="http://schemas.openxmlformats.org/drawingml/2006/main">
               <a:ext uri="{FF2B5EF4-FFF2-40B4-BE49-F238E27FC236}">
-                <a16:creationId xmlns:a16="http://schemas.microsoft.com/office/drawing/2014/main" id="{1FD5ECBF-A2CF-4D57-AC6C-F31C4E0F3076}"/>
+                <a16:creationId xmlns:a16="http://schemas.microsoft.com/office/drawing/2014/main" id="{2793DEFD-47DB-4D3E-8DDC-5E0C6982C547}"/>
               </a:ext>
             </a:extLst>
           </p:cNvPr>
@@ -8665,7 +8663,7 @@
           <p:cNvPr id="12" name="">
             <a:extLst xmlns:a="http://schemas.openxmlformats.org/drawingml/2006/main">
               <a:ext uri="{FF2B5EF4-FFF2-40B4-BE49-F238E27FC236}">
-                <a16:creationId xmlns:a16="http://schemas.microsoft.com/office/drawing/2014/main" id="{33733F30-A57A-4B4C-BE98-C710BE862DC0}"/>
+                <a16:creationId xmlns:a16="http://schemas.microsoft.com/office/drawing/2014/main" id="{B598E216-2E4A-403D-A11B-118BD3CBC7D2}"/>
               </a:ext>
             </a:extLst>
           </p:cNvPr>
@@ -8698,7 +8696,7 @@
           <p:cNvPr id="13" name="">
             <a:extLst xmlns:a="http://schemas.openxmlformats.org/drawingml/2006/main">
               <a:ext uri="{FF2B5EF4-FFF2-40B4-BE49-F238E27FC236}">
-                <a16:creationId xmlns:a16="http://schemas.microsoft.com/office/drawing/2014/main" id="{D01EBE5A-D144-4910-AA23-C50BE1B833DA}"/>
+                <a16:creationId xmlns:a16="http://schemas.microsoft.com/office/drawing/2014/main" id="{839689C4-C874-41EF-8346-1F566A89C252}"/>
               </a:ext>
             </a:extLst>
           </p:cNvPr>
@@ -8733,7 +8731,7 @@
           <p:cNvPr id="14" name="">
             <a:extLst xmlns:a="http://schemas.openxmlformats.org/drawingml/2006/main">
               <a:ext uri="{FF2B5EF4-FFF2-40B4-BE49-F238E27FC236}">
-                <a16:creationId xmlns:a16="http://schemas.microsoft.com/office/drawing/2014/main" id="{ECC54373-08F6-47E5-A44B-DB99AA7A7A7F}"/>
+                <a16:creationId xmlns:a16="http://schemas.microsoft.com/office/drawing/2014/main" id="{893966A2-616B-42DF-94A8-285EA8C7D31B}"/>
               </a:ext>
             </a:extLst>
           </p:cNvPr>
@@ -8797,7 +8795,7 @@
           <p:cNvPr id="15" name="">
             <a:extLst xmlns:a="http://schemas.openxmlformats.org/drawingml/2006/main">
               <a:ext uri="{FF2B5EF4-FFF2-40B4-BE49-F238E27FC236}">
-                <a16:creationId xmlns:a16="http://schemas.microsoft.com/office/drawing/2014/main" id="{E288B804-AA37-4445-A64C-AC754F70A3F2}"/>
+                <a16:creationId xmlns:a16="http://schemas.microsoft.com/office/drawing/2014/main" id="{0DCB1989-379B-46F0-AA74-5ED01E42C05C}"/>
               </a:ext>
             </a:extLst>
           </p:cNvPr>
@@ -8830,7 +8828,7 @@
           <p:cNvPr id="16" name="">
             <a:extLst xmlns:a="http://schemas.openxmlformats.org/drawingml/2006/main">
               <a:ext uri="{FF2B5EF4-FFF2-40B4-BE49-F238E27FC236}">
-                <a16:creationId xmlns:a16="http://schemas.microsoft.com/office/drawing/2014/main" id="{D31724B4-DA74-4E90-909A-49A661A2E836}"/>
+                <a16:creationId xmlns:a16="http://schemas.microsoft.com/office/drawing/2014/main" id="{3A560A32-08AA-48DA-A223-A2CE8CD03592}"/>
               </a:ext>
             </a:extLst>
           </p:cNvPr>
@@ -8865,7 +8863,7 @@
           <p:cNvPr id="17" name="">
             <a:extLst xmlns:a="http://schemas.openxmlformats.org/drawingml/2006/main">
               <a:ext uri="{FF2B5EF4-FFF2-40B4-BE49-F238E27FC236}">
-                <a16:creationId xmlns:a16="http://schemas.microsoft.com/office/drawing/2014/main" id="{860AAE2F-3B86-4DC7-9F6D-7B86524070AE}"/>
+                <a16:creationId xmlns:a16="http://schemas.microsoft.com/office/drawing/2014/main" id="{A2329DFC-6E6D-466D-814F-0EF472907182}"/>
               </a:ext>
             </a:extLst>
           </p:cNvPr>
@@ -8929,7 +8927,7 @@
           <p:cNvPr id="18" name="">
             <a:extLst xmlns:a="http://schemas.openxmlformats.org/drawingml/2006/main">
               <a:ext uri="{FF2B5EF4-FFF2-40B4-BE49-F238E27FC236}">
-                <a16:creationId xmlns:a16="http://schemas.microsoft.com/office/drawing/2014/main" id="{7B53A558-E20B-46FE-A896-6980F66F1D2C}"/>
+                <a16:creationId xmlns:a16="http://schemas.microsoft.com/office/drawing/2014/main" id="{49237F2B-74AF-43CB-A623-120F8E066846}"/>
               </a:ext>
             </a:extLst>
           </p:cNvPr>
@@ -8962,7 +8960,7 @@
           <p:cNvPr id="19" name="">
             <a:extLst xmlns:a="http://schemas.openxmlformats.org/drawingml/2006/main">
               <a:ext uri="{FF2B5EF4-FFF2-40B4-BE49-F238E27FC236}">
-                <a16:creationId xmlns:a16="http://schemas.microsoft.com/office/drawing/2014/main" id="{10F1A40A-7BA6-4DE9-BF10-1A853A7C50D7}"/>
+                <a16:creationId xmlns:a16="http://schemas.microsoft.com/office/drawing/2014/main" id="{42F78CBC-13C3-42FA-9B98-7AF2602C50E1}"/>
               </a:ext>
             </a:extLst>
           </p:cNvPr>
@@ -8997,7 +8995,7 @@
           <p:cNvPr id="20" name="">
             <a:extLst xmlns:a="http://schemas.openxmlformats.org/drawingml/2006/main">
               <a:ext uri="{FF2B5EF4-FFF2-40B4-BE49-F238E27FC236}">
-                <a16:creationId xmlns:a16="http://schemas.microsoft.com/office/drawing/2014/main" id="{DBC53605-1D91-48F7-A501-E5B0AD6402BF}"/>
+                <a16:creationId xmlns:a16="http://schemas.microsoft.com/office/drawing/2014/main" id="{2344D7F9-23F3-4293-8089-1FF066C7B2A2}"/>
               </a:ext>
             </a:extLst>
           </p:cNvPr>
@@ -9061,7 +9059,7 @@
           <p:cNvPr id="21" name="">
             <a:extLst xmlns:a="http://schemas.openxmlformats.org/drawingml/2006/main">
               <a:ext uri="{FF2B5EF4-FFF2-40B4-BE49-F238E27FC236}">
-                <a16:creationId xmlns:a16="http://schemas.microsoft.com/office/drawing/2014/main" id="{0251E93F-B928-4F30-9C2B-283CEC193981}"/>
+                <a16:creationId xmlns:a16="http://schemas.microsoft.com/office/drawing/2014/main" id="{BD7E832D-1CA9-426A-80EA-D8B4857168D1}"/>
               </a:ext>
             </a:extLst>
           </p:cNvPr>
@@ -9094,7 +9092,7 @@
           <p:cNvPr id="22" name="">
             <a:extLst xmlns:a="http://schemas.openxmlformats.org/drawingml/2006/main">
               <a:ext uri="{FF2B5EF4-FFF2-40B4-BE49-F238E27FC236}">
-                <a16:creationId xmlns:a16="http://schemas.microsoft.com/office/drawing/2014/main" id="{2067F71F-8CD2-4EA5-89D4-490FC460C3B5}"/>
+                <a16:creationId xmlns:a16="http://schemas.microsoft.com/office/drawing/2014/main" id="{6539FF9E-54C9-4966-9192-BBFEF1F68B87}"/>
               </a:ext>
             </a:extLst>
           </p:cNvPr>
@@ -9129,7 +9127,7 @@
           <p:cNvPr id="23" name="">
             <a:extLst xmlns:a="http://schemas.openxmlformats.org/drawingml/2006/main">
               <a:ext uri="{FF2B5EF4-FFF2-40B4-BE49-F238E27FC236}">
-                <a16:creationId xmlns:a16="http://schemas.microsoft.com/office/drawing/2014/main" id="{9FB49C6F-3B44-4EA9-AD50-3678B04453FA}"/>
+                <a16:creationId xmlns:a16="http://schemas.microsoft.com/office/drawing/2014/main" id="{4090BE06-73AA-488E-A063-85ECB2DE9DF0}"/>
               </a:ext>
             </a:extLst>
           </p:cNvPr>
@@ -9193,7 +9191,7 @@
           <p:cNvPr id="24" name="">
             <a:extLst xmlns:a="http://schemas.openxmlformats.org/drawingml/2006/main">
               <a:ext uri="{FF2B5EF4-FFF2-40B4-BE49-F238E27FC236}">
-                <a16:creationId xmlns:a16="http://schemas.microsoft.com/office/drawing/2014/main" id="{7E808B78-C380-40EA-9E25-689142814272}"/>
+                <a16:creationId xmlns:a16="http://schemas.microsoft.com/office/drawing/2014/main" id="{1FBF19E4-CDF0-49A2-9198-20506DAAC61F}"/>
               </a:ext>
             </a:extLst>
           </p:cNvPr>
@@ -9226,7 +9224,7 @@
           <p:cNvPr id="25" name="">
             <a:extLst xmlns:a="http://schemas.openxmlformats.org/drawingml/2006/main">
               <a:ext uri="{FF2B5EF4-FFF2-40B4-BE49-F238E27FC236}">
-                <a16:creationId xmlns:a16="http://schemas.microsoft.com/office/drawing/2014/main" id="{C48E0A36-9BB4-4DB0-91D8-FE50A60CAE5C}"/>
+                <a16:creationId xmlns:a16="http://schemas.microsoft.com/office/drawing/2014/main" id="{588AFEBD-C783-4095-AE46-E9211CBD0C77}"/>
               </a:ext>
             </a:extLst>
           </p:cNvPr>
@@ -9261,7 +9259,7 @@
           <p:cNvPr id="26" name="">
             <a:extLst xmlns:a="http://schemas.openxmlformats.org/drawingml/2006/main">
               <a:ext uri="{FF2B5EF4-FFF2-40B4-BE49-F238E27FC236}">
-                <a16:creationId xmlns:a16="http://schemas.microsoft.com/office/drawing/2014/main" id="{2B7002F8-CB25-463F-88E0-97437886F177}"/>
+                <a16:creationId xmlns:a16="http://schemas.microsoft.com/office/drawing/2014/main" id="{4549708B-06DA-47E5-BA68-AC167E8C331C}"/>
               </a:ext>
             </a:extLst>
           </p:cNvPr>
@@ -9325,7 +9323,7 @@
           <p:cNvPr id="27" name="">
             <a:extLst xmlns:a="http://schemas.openxmlformats.org/drawingml/2006/main">
               <a:ext uri="{FF2B5EF4-FFF2-40B4-BE49-F238E27FC236}">
-                <a16:creationId xmlns:a16="http://schemas.microsoft.com/office/drawing/2014/main" id="{23470356-44D8-47F6-983F-9EE25B2A1CB0}"/>
+                <a16:creationId xmlns:a16="http://schemas.microsoft.com/office/drawing/2014/main" id="{B944DF1C-FACC-432D-BBD5-04F8F41513E3}"/>
               </a:ext>
             </a:extLst>
           </p:cNvPr>
@@ -9358,7 +9356,7 @@
           <p:cNvPr id="28" name="">
             <a:extLst xmlns:a="http://schemas.openxmlformats.org/drawingml/2006/main">
               <a:ext uri="{FF2B5EF4-FFF2-40B4-BE49-F238E27FC236}">
-                <a16:creationId xmlns:a16="http://schemas.microsoft.com/office/drawing/2014/main" id="{0994457D-3F67-4412-816B-88D9033AA962}"/>
+                <a16:creationId xmlns:a16="http://schemas.microsoft.com/office/drawing/2014/main" id="{122A1070-71E9-452A-AB93-85044DEFC853}"/>
               </a:ext>
             </a:extLst>
           </p:cNvPr>
@@ -9393,7 +9391,7 @@
           <p:cNvPr id="29" name="">
             <a:extLst xmlns:a="http://schemas.openxmlformats.org/drawingml/2006/main">
               <a:ext uri="{FF2B5EF4-FFF2-40B4-BE49-F238E27FC236}">
-                <a16:creationId xmlns:a16="http://schemas.microsoft.com/office/drawing/2014/main" id="{890A4D87-7ED8-4E05-A27F-BFBD26DE9B4A}"/>
+                <a16:creationId xmlns:a16="http://schemas.microsoft.com/office/drawing/2014/main" id="{3F3CAE18-BF14-4FAA-9FDE-AA6551C48F84}"/>
               </a:ext>
             </a:extLst>
           </p:cNvPr>
@@ -9457,7 +9455,7 @@
           <p:cNvPr id="30" name="">
             <a:extLst xmlns:a="http://schemas.openxmlformats.org/drawingml/2006/main">
               <a:ext uri="{FF2B5EF4-FFF2-40B4-BE49-F238E27FC236}">
-                <a16:creationId xmlns:a16="http://schemas.microsoft.com/office/drawing/2014/main" id="{C56F5FDB-311B-4E21-84FF-91F5F80A7BFD}"/>
+                <a16:creationId xmlns:a16="http://schemas.microsoft.com/office/drawing/2014/main" id="{CDDC29A4-0494-449A-9646-E9A5C20B769A}"/>
               </a:ext>
             </a:extLst>
           </p:cNvPr>
@@ -9490,7 +9488,7 @@
           <p:cNvPr id="31" name="">
             <a:extLst xmlns:a="http://schemas.openxmlformats.org/drawingml/2006/main">
               <a:ext uri="{FF2B5EF4-FFF2-40B4-BE49-F238E27FC236}">
-                <a16:creationId xmlns:a16="http://schemas.microsoft.com/office/drawing/2014/main" id="{E2B4F877-1B28-46A8-A617-A1F73CC42E12}"/>
+                <a16:creationId xmlns:a16="http://schemas.microsoft.com/office/drawing/2014/main" id="{66F3189C-B882-44C1-82BA-E199AE73B8EF}"/>
               </a:ext>
             </a:extLst>
           </p:cNvPr>
@@ -9525,7 +9523,7 @@
           <p:cNvPr id="32" name="">
             <a:extLst xmlns:a="http://schemas.openxmlformats.org/drawingml/2006/main">
               <a:ext uri="{FF2B5EF4-FFF2-40B4-BE49-F238E27FC236}">
-                <a16:creationId xmlns:a16="http://schemas.microsoft.com/office/drawing/2014/main" id="{C3BEA916-7E66-43F1-8B2D-76FA8DFA8AD4}"/>
+                <a16:creationId xmlns:a16="http://schemas.microsoft.com/office/drawing/2014/main" id="{0F6BD05E-0C76-4104-97B2-2E3165AF8C54}"/>
               </a:ext>
             </a:extLst>
           </p:cNvPr>
@@ -9589,7 +9587,7 @@
           <p:cNvPr id="33" name="">
             <a:extLst xmlns:a="http://schemas.openxmlformats.org/drawingml/2006/main">
               <a:ext uri="{FF2B5EF4-FFF2-40B4-BE49-F238E27FC236}">
-                <a16:creationId xmlns:a16="http://schemas.microsoft.com/office/drawing/2014/main" id="{7C474441-06D7-482A-A34B-2B54B757129B}"/>
+                <a16:creationId xmlns:a16="http://schemas.microsoft.com/office/drawing/2014/main" id="{FA0DE43E-F099-40D6-8D66-F253D8ACB857}"/>
               </a:ext>
             </a:extLst>
           </p:cNvPr>
@@ -9622,7 +9620,7 @@
           <p:cNvPr id="34" name="">
             <a:extLst xmlns:a="http://schemas.openxmlformats.org/drawingml/2006/main">
               <a:ext uri="{FF2B5EF4-FFF2-40B4-BE49-F238E27FC236}">
-                <a16:creationId xmlns:a16="http://schemas.microsoft.com/office/drawing/2014/main" id="{7FA4A450-E3C5-47C0-87C6-A505187779D6}"/>
+                <a16:creationId xmlns:a16="http://schemas.microsoft.com/office/drawing/2014/main" id="{4A603D02-65FD-4C2A-9D4D-936FC374E1D6}"/>
               </a:ext>
             </a:extLst>
           </p:cNvPr>
@@ -9657,7 +9655,7 @@
           <p:cNvPr id="35" name="">
             <a:extLst xmlns:a="http://schemas.openxmlformats.org/drawingml/2006/main">
               <a:ext uri="{FF2B5EF4-FFF2-40B4-BE49-F238E27FC236}">
-                <a16:creationId xmlns:a16="http://schemas.microsoft.com/office/drawing/2014/main" id="{37E06B85-02E2-4D3A-B014-B81100033AB7}"/>
+                <a16:creationId xmlns:a16="http://schemas.microsoft.com/office/drawing/2014/main" id="{C45960A2-EE99-4B92-9E32-BC3E265FC451}"/>
               </a:ext>
             </a:extLst>
           </p:cNvPr>
@@ -9721,7 +9719,7 @@
           <p:cNvPr id="36" name="">
             <a:extLst xmlns:a="http://schemas.openxmlformats.org/drawingml/2006/main">
               <a:ext uri="{FF2B5EF4-FFF2-40B4-BE49-F238E27FC236}">
-                <a16:creationId xmlns:a16="http://schemas.microsoft.com/office/drawing/2014/main" id="{E5EB1FA0-4BE9-4B44-9594-2974E7A739CF}"/>
+                <a16:creationId xmlns:a16="http://schemas.microsoft.com/office/drawing/2014/main" id="{C297E145-BBBB-483F-9432-D564A0AEE064}"/>
               </a:ext>
             </a:extLst>
           </p:cNvPr>
@@ -9754,7 +9752,7 @@
           <p:cNvPr id="37" name="">
             <a:extLst xmlns:a="http://schemas.openxmlformats.org/drawingml/2006/main">
               <a:ext uri="{FF2B5EF4-FFF2-40B4-BE49-F238E27FC236}">
-                <a16:creationId xmlns:a16="http://schemas.microsoft.com/office/drawing/2014/main" id="{AD1344C4-8EDB-4567-B87E-ABED46E8D81B}"/>
+                <a16:creationId xmlns:a16="http://schemas.microsoft.com/office/drawing/2014/main" id="{0D0E5142-F7AA-4CB1-A298-4CB66B0ABDA0}"/>
               </a:ext>
             </a:extLst>
           </p:cNvPr>
@@ -9818,7 +9816,7 @@
           <p:cNvPr id="38" name="">
             <a:extLst xmlns:a="http://schemas.openxmlformats.org/drawingml/2006/main">
               <a:ext uri="{FF2B5EF4-FFF2-40B4-BE49-F238E27FC236}">
-                <a16:creationId xmlns:a16="http://schemas.microsoft.com/office/drawing/2014/main" id="{27F6027A-797E-436D-9374-58E2E8BED421}"/>
+                <a16:creationId xmlns:a16="http://schemas.microsoft.com/office/drawing/2014/main" id="{A601BA07-21AF-46FB-8817-FADD1D171C70}"/>
               </a:ext>
             </a:extLst>
           </p:cNvPr>
@@ -9882,7 +9880,7 @@
           <p:cNvPr id="39" name="">
             <a:extLst xmlns:a="http://schemas.openxmlformats.org/drawingml/2006/main">
               <a:ext uri="{FF2B5EF4-FFF2-40B4-BE49-F238E27FC236}">
-                <a16:creationId xmlns:a16="http://schemas.microsoft.com/office/drawing/2014/main" id="{2437660D-A9F8-4884-917C-7622D0FA911F}"/>
+                <a16:creationId xmlns:a16="http://schemas.microsoft.com/office/drawing/2014/main" id="{2CA731F1-9521-42AF-8E75-F0D72A092700}"/>
               </a:ext>
             </a:extLst>
           </p:cNvPr>
@@ -9917,7 +9915,7 @@
           <p:cNvPr id="40" name="">
             <a:extLst xmlns:a="http://schemas.openxmlformats.org/drawingml/2006/main">
               <a:ext uri="{FF2B5EF4-FFF2-40B4-BE49-F238E27FC236}">
-                <a16:creationId xmlns:a16="http://schemas.microsoft.com/office/drawing/2014/main" id="{C67B174A-CF41-443F-B728-EB7A597DBA23}"/>
+                <a16:creationId xmlns:a16="http://schemas.microsoft.com/office/drawing/2014/main" id="{C50E6D84-358B-42C9-8411-858094B21DCC}"/>
               </a:ext>
             </a:extLst>
           </p:cNvPr>
@@ -9981,7 +9979,7 @@
           <p:cNvPr id="41" name="">
             <a:extLst xmlns:a="http://schemas.openxmlformats.org/drawingml/2006/main">
               <a:ext uri="{FF2B5EF4-FFF2-40B4-BE49-F238E27FC236}">
-                <a16:creationId xmlns:a16="http://schemas.microsoft.com/office/drawing/2014/main" id="{0892791E-841D-4064-A59E-7496D9942EE2}"/>
+                <a16:creationId xmlns:a16="http://schemas.microsoft.com/office/drawing/2014/main" id="{2749A35D-77F3-4F95-B50E-E4BFDA6AE3E8}"/>
               </a:ext>
             </a:extLst>
           </p:cNvPr>
@@ -10045,7 +10043,7 @@
           <p:cNvPr id="42" name="">
             <a:extLst xmlns:a="http://schemas.openxmlformats.org/drawingml/2006/main">
               <a:ext uri="{FF2B5EF4-FFF2-40B4-BE49-F238E27FC236}">
-                <a16:creationId xmlns:a16="http://schemas.microsoft.com/office/drawing/2014/main" id="{AB4FA139-C28F-48E8-B71B-26CE9C370968}"/>
+                <a16:creationId xmlns:a16="http://schemas.microsoft.com/office/drawing/2014/main" id="{1F00FF56-4CAB-45D4-A9C3-E2AAED2988E2}"/>
               </a:ext>
             </a:extLst>
           </p:cNvPr>
@@ -10107,7 +10105,7 @@
     </p:spTree>
     <p:extLst>
       <p:ext uri="{BB962C8B-B14F-4D97-AF65-F5344CB8AC3E}">
-        <p14:creationId xmlns:p14="http://schemas.microsoft.com/office/powerpoint/2010/main" val="261190339"/>
+        <p14:creationId xmlns:p14="http://schemas.microsoft.com/office/powerpoint/2010/main" val="1242796361"/>
       </p:ext>
     </p:extLst>
   </p:cSld>
@@ -10131,7 +10129,7 @@
           <p:cNvPr id="1" name="">
             <a:extLst xmlns:a="http://schemas.openxmlformats.org/drawingml/2006/main">
               <a:ext uri="{FF2B5EF4-FFF2-40B4-BE49-F238E27FC236}">
-                <a16:creationId xmlns:a16="http://schemas.microsoft.com/office/drawing/2014/main" id="{4EE9DE70-31D4-4A9E-B059-A4B8AEEDCADB}"/>
+                <a16:creationId xmlns:a16="http://schemas.microsoft.com/office/drawing/2014/main" id="{876C1DE5-136C-4798-B5D9-235EC1169EA3}"/>
               </a:ext>
             </a:extLst>
           </p:cNvPr>
@@ -10166,7 +10164,7 @@
           <p:cNvPr id="2" name="">
             <a:extLst xmlns:a="http://schemas.openxmlformats.org/drawingml/2006/main">
               <a:ext uri="{FF2B5EF4-FFF2-40B4-BE49-F238E27FC236}">
-                <a16:creationId xmlns:a16="http://schemas.microsoft.com/office/drawing/2014/main" id="{CB8889B9-87E9-4E60-AB8F-5EF862927365}"/>
+                <a16:creationId xmlns:a16="http://schemas.microsoft.com/office/drawing/2014/main" id="{DDA5D0D9-3DB3-4D12-BC48-CFF031730701}"/>
               </a:ext>
             </a:extLst>
           </p:cNvPr>
@@ -10201,7 +10199,7 @@
           <p:cNvPr id="3" name="">
             <a:extLst xmlns:a="http://schemas.openxmlformats.org/drawingml/2006/main">
               <a:ext uri="{FF2B5EF4-FFF2-40B4-BE49-F238E27FC236}">
-                <a16:creationId xmlns:a16="http://schemas.microsoft.com/office/drawing/2014/main" id="{1D3410ED-484B-46CE-B112-C8FC9B1BF321}"/>
+                <a16:creationId xmlns:a16="http://schemas.microsoft.com/office/drawing/2014/main" id="{A168DC28-C13C-4694-B1BE-C1B3598684B2}"/>
               </a:ext>
             </a:extLst>
           </p:cNvPr>
@@ -10236,7 +10234,7 @@
           <p:cNvPr id="4" name="kicker-05-marker">
             <a:extLst xmlns:a="http://schemas.openxmlformats.org/drawingml/2006/main">
               <a:ext uri="{FF2B5EF4-FFF2-40B4-BE49-F238E27FC236}">
-                <a16:creationId xmlns:a16="http://schemas.microsoft.com/office/drawing/2014/main" id="{1206A1E9-EC9F-40C7-8031-9154004220C0}"/>
+                <a16:creationId xmlns:a16="http://schemas.microsoft.com/office/drawing/2014/main" id="{3ECF84D1-63B1-4E68-82F1-9B5461DCB36E}"/>
               </a:ext>
             </a:extLst>
           </p:cNvPr>
@@ -10271,7 +10269,7 @@
           <p:cNvPr id="5" name="kicker-05-label">
             <a:extLst xmlns:a="http://schemas.openxmlformats.org/drawingml/2006/main">
               <a:ext uri="{FF2B5EF4-FFF2-40B4-BE49-F238E27FC236}">
-                <a16:creationId xmlns:a16="http://schemas.microsoft.com/office/drawing/2014/main" id="{A9BD4D04-BF51-42A7-8316-CE33843E69F2}"/>
+                <a16:creationId xmlns:a16="http://schemas.microsoft.com/office/drawing/2014/main" id="{2513E147-69FA-4090-8039-25ACEFFB7090}"/>
               </a:ext>
             </a:extLst>
           </p:cNvPr>
@@ -10335,7 +10333,7 @@
           <p:cNvPr id="6" name="">
             <a:extLst xmlns:a="http://schemas.openxmlformats.org/drawingml/2006/main">
               <a:ext uri="{FF2B5EF4-FFF2-40B4-BE49-F238E27FC236}">
-                <a16:creationId xmlns:a16="http://schemas.microsoft.com/office/drawing/2014/main" id="{EB531003-E4AA-4FF9-809A-766C5CE8CE5D}"/>
+                <a16:creationId xmlns:a16="http://schemas.microsoft.com/office/drawing/2014/main" id="{8DE12782-807E-48CA-BC60-380A4F638FBC}"/>
               </a:ext>
             </a:extLst>
           </p:cNvPr>
@@ -10399,7 +10397,7 @@
           <p:cNvPr id="7" name="">
             <a:extLst xmlns:a="http://schemas.openxmlformats.org/drawingml/2006/main">
               <a:ext uri="{FF2B5EF4-FFF2-40B4-BE49-F238E27FC236}">
-                <a16:creationId xmlns:a16="http://schemas.microsoft.com/office/drawing/2014/main" id="{CEF964F5-8C66-4912-A655-435F604AE44E}"/>
+                <a16:creationId xmlns:a16="http://schemas.microsoft.com/office/drawing/2014/main" id="{498034B1-4399-48C5-8FD8-A6573848A683}"/>
               </a:ext>
             </a:extLst>
           </p:cNvPr>
@@ -10463,7 +10461,7 @@
           <p:cNvPr id="8" name="">
             <a:extLst xmlns:a="http://schemas.openxmlformats.org/drawingml/2006/main">
               <a:ext uri="{FF2B5EF4-FFF2-40B4-BE49-F238E27FC236}">
-                <a16:creationId xmlns:a16="http://schemas.microsoft.com/office/drawing/2014/main" id="{8A17064E-A128-4300-AD6B-D40C80EA1934}"/>
+                <a16:creationId xmlns:a16="http://schemas.microsoft.com/office/drawing/2014/main" id="{4A4F4598-311C-41AA-8F2A-4A2FDEB7DF43}"/>
               </a:ext>
             </a:extLst>
           </p:cNvPr>
@@ -10498,7 +10496,7 @@
           <p:cNvPr id="9" name="">
             <a:extLst xmlns:a="http://schemas.openxmlformats.org/drawingml/2006/main">
               <a:ext uri="{FF2B5EF4-FFF2-40B4-BE49-F238E27FC236}">
-                <a16:creationId xmlns:a16="http://schemas.microsoft.com/office/drawing/2014/main" id="{5CE5AD9B-F048-4104-BBCB-470CC8DE5FB5}"/>
+                <a16:creationId xmlns:a16="http://schemas.microsoft.com/office/drawing/2014/main" id="{84C364B8-7638-407C-9570-C97BD171AA20}"/>
               </a:ext>
             </a:extLst>
           </p:cNvPr>
@@ -10562,7 +10560,7 @@
           <p:cNvPr id="10" name="">
             <a:extLst xmlns:a="http://schemas.openxmlformats.org/drawingml/2006/main">
               <a:ext uri="{FF2B5EF4-FFF2-40B4-BE49-F238E27FC236}">
-                <a16:creationId xmlns:a16="http://schemas.microsoft.com/office/drawing/2014/main" id="{6EDFA889-7C6E-435B-8CBC-21CB1C2B9774}"/>
+                <a16:creationId xmlns:a16="http://schemas.microsoft.com/office/drawing/2014/main" id="{03911499-B00E-4C08-99AC-8FB8ABBE11D2}"/>
               </a:ext>
             </a:extLst>
           </p:cNvPr>
@@ -10626,7 +10624,7 @@
           <p:cNvPr id="11" name="">
             <a:extLst xmlns:a="http://schemas.openxmlformats.org/drawingml/2006/main">
               <a:ext uri="{FF2B5EF4-FFF2-40B4-BE49-F238E27FC236}">
-                <a16:creationId xmlns:a16="http://schemas.microsoft.com/office/drawing/2014/main" id="{892C18CB-CDD2-4059-9632-9DF6068405A2}"/>
+                <a16:creationId xmlns:a16="http://schemas.microsoft.com/office/drawing/2014/main" id="{50E48DC2-93B3-4733-8CBC-A281D18BF02A}"/>
               </a:ext>
             </a:extLst>
           </p:cNvPr>
@@ -10690,7 +10688,7 @@
           <p:cNvPr id="12" name="">
             <a:extLst xmlns:a="http://schemas.openxmlformats.org/drawingml/2006/main">
               <a:ext uri="{FF2B5EF4-FFF2-40B4-BE49-F238E27FC236}">
-                <a16:creationId xmlns:a16="http://schemas.microsoft.com/office/drawing/2014/main" id="{548DBD6D-FD86-445F-BBF2-B31A74A76377}"/>
+                <a16:creationId xmlns:a16="http://schemas.microsoft.com/office/drawing/2014/main" id="{83E40F63-B37F-47F4-98A9-81D68CA5840B}"/>
               </a:ext>
             </a:extLst>
           </p:cNvPr>
@@ -10725,7 +10723,7 @@
           <p:cNvPr id="13" name="">
             <a:extLst xmlns:a="http://schemas.openxmlformats.org/drawingml/2006/main">
               <a:ext uri="{FF2B5EF4-FFF2-40B4-BE49-F238E27FC236}">
-                <a16:creationId xmlns:a16="http://schemas.microsoft.com/office/drawing/2014/main" id="{E937B373-269B-43CB-A471-164958E12850}"/>
+                <a16:creationId xmlns:a16="http://schemas.microsoft.com/office/drawing/2014/main" id="{0D5F02B0-D3F2-4B58-9907-F4E32A92E49A}"/>
               </a:ext>
             </a:extLst>
           </p:cNvPr>
@@ -10758,7 +10756,7 @@
           <p:cNvPr id="14" name="">
             <a:extLst xmlns:a="http://schemas.openxmlformats.org/drawingml/2006/main">
               <a:ext uri="{FF2B5EF4-FFF2-40B4-BE49-F238E27FC236}">
-                <a16:creationId xmlns:a16="http://schemas.microsoft.com/office/drawing/2014/main" id="{9C6F36D8-D1F1-4AC4-A657-2F19B5B9EA2C}"/>
+                <a16:creationId xmlns:a16="http://schemas.microsoft.com/office/drawing/2014/main" id="{E98E3CA1-74E2-474A-AD9D-8C58C0C12E0B}"/>
               </a:ext>
             </a:extLst>
           </p:cNvPr>
@@ -10791,7 +10789,7 @@
           <p:cNvPr id="15" name="">
             <a:extLst xmlns:a="http://schemas.openxmlformats.org/drawingml/2006/main">
               <a:ext uri="{FF2B5EF4-FFF2-40B4-BE49-F238E27FC236}">
-                <a16:creationId xmlns:a16="http://schemas.microsoft.com/office/drawing/2014/main" id="{FCD670C4-6D08-4F84-9263-845C4D014989}"/>
+                <a16:creationId xmlns:a16="http://schemas.microsoft.com/office/drawing/2014/main" id="{EA38955C-C634-4375-BE45-DC8909B8E724}"/>
               </a:ext>
             </a:extLst>
           </p:cNvPr>
@@ -10855,7 +10853,7 @@
           <p:cNvPr id="16" name="">
             <a:extLst xmlns:a="http://schemas.openxmlformats.org/drawingml/2006/main">
               <a:ext uri="{FF2B5EF4-FFF2-40B4-BE49-F238E27FC236}">
-                <a16:creationId xmlns:a16="http://schemas.microsoft.com/office/drawing/2014/main" id="{B87F6AF8-4A68-4F80-AFAF-D46850C308E0}"/>
+                <a16:creationId xmlns:a16="http://schemas.microsoft.com/office/drawing/2014/main" id="{CFBFEA4C-F3D0-4723-98CB-1B8A61B23120}"/>
               </a:ext>
             </a:extLst>
           </p:cNvPr>
@@ -10919,7 +10917,7 @@
           <p:cNvPr id="17" name="">
             <a:extLst xmlns:a="http://schemas.openxmlformats.org/drawingml/2006/main">
               <a:ext uri="{FF2B5EF4-FFF2-40B4-BE49-F238E27FC236}">
-                <a16:creationId xmlns:a16="http://schemas.microsoft.com/office/drawing/2014/main" id="{04B851B1-BBF2-4E74-8507-2BAC5600B8D4}"/>
+                <a16:creationId xmlns:a16="http://schemas.microsoft.com/office/drawing/2014/main" id="{F964271C-4ED4-466A-86F2-2839DA96962E}"/>
               </a:ext>
             </a:extLst>
           </p:cNvPr>
@@ -10983,7 +10981,7 @@
           <p:cNvPr id="18" name="">
             <a:extLst xmlns:a="http://schemas.openxmlformats.org/drawingml/2006/main">
               <a:ext uri="{FF2B5EF4-FFF2-40B4-BE49-F238E27FC236}">
-                <a16:creationId xmlns:a16="http://schemas.microsoft.com/office/drawing/2014/main" id="{900C9E0D-6372-4170-9CF9-C59816DD1AE2}"/>
+                <a16:creationId xmlns:a16="http://schemas.microsoft.com/office/drawing/2014/main" id="{D412358B-F610-422C-AAB0-2A5CD32481D1}"/>
               </a:ext>
             </a:extLst>
           </p:cNvPr>
@@ -11018,7 +11016,7 @@
           <p:cNvPr id="19" name="">
             <a:extLst xmlns:a="http://schemas.openxmlformats.org/drawingml/2006/main">
               <a:ext uri="{FF2B5EF4-FFF2-40B4-BE49-F238E27FC236}">
-                <a16:creationId xmlns:a16="http://schemas.microsoft.com/office/drawing/2014/main" id="{6498685D-0AC4-446A-BDE6-1E5DD94ED6B5}"/>
+                <a16:creationId xmlns:a16="http://schemas.microsoft.com/office/drawing/2014/main" id="{0C89C20F-DF35-472C-86DA-A58B2CFDF2F3}"/>
               </a:ext>
             </a:extLst>
           </p:cNvPr>
@@ -11082,7 +11080,7 @@
           <p:cNvPr id="20" name="">
             <a:extLst xmlns:a="http://schemas.openxmlformats.org/drawingml/2006/main">
               <a:ext uri="{FF2B5EF4-FFF2-40B4-BE49-F238E27FC236}">
-                <a16:creationId xmlns:a16="http://schemas.microsoft.com/office/drawing/2014/main" id="{861FDCF1-0F80-4671-AF6D-3E184677547D}"/>
+                <a16:creationId xmlns:a16="http://schemas.microsoft.com/office/drawing/2014/main" id="{5BD14957-8C8D-46F1-97B1-1A66FE074B6A}"/>
               </a:ext>
             </a:extLst>
           </p:cNvPr>
@@ -11146,7 +11144,7 @@
           <p:cNvPr id="21" name="">
             <a:extLst xmlns:a="http://schemas.openxmlformats.org/drawingml/2006/main">
               <a:ext uri="{FF2B5EF4-FFF2-40B4-BE49-F238E27FC236}">
-                <a16:creationId xmlns:a16="http://schemas.microsoft.com/office/drawing/2014/main" id="{8FA6E2B3-F898-462F-B3DB-0899758944A7}"/>
+                <a16:creationId xmlns:a16="http://schemas.microsoft.com/office/drawing/2014/main" id="{FC902C3B-3A20-40B1-87D1-4109F92A3A15}"/>
               </a:ext>
             </a:extLst>
           </p:cNvPr>
@@ -11210,7 +11208,7 @@
           <p:cNvPr id="22" name="">
             <a:extLst xmlns:a="http://schemas.openxmlformats.org/drawingml/2006/main">
               <a:ext uri="{FF2B5EF4-FFF2-40B4-BE49-F238E27FC236}">
-                <a16:creationId xmlns:a16="http://schemas.microsoft.com/office/drawing/2014/main" id="{C41966A0-C0D1-4DF2-BC37-080DFE7BA8E3}"/>
+                <a16:creationId xmlns:a16="http://schemas.microsoft.com/office/drawing/2014/main" id="{FC8543CB-A41F-481F-AA47-BB8CE4421782}"/>
               </a:ext>
             </a:extLst>
           </p:cNvPr>
@@ -11245,7 +11243,7 @@
           <p:cNvPr id="23" name="">
             <a:extLst xmlns:a="http://schemas.openxmlformats.org/drawingml/2006/main">
               <a:ext uri="{FF2B5EF4-FFF2-40B4-BE49-F238E27FC236}">
-                <a16:creationId xmlns:a16="http://schemas.microsoft.com/office/drawing/2014/main" id="{CFCA23A6-13F0-4A1D-838A-A71AD1C88D5F}"/>
+                <a16:creationId xmlns:a16="http://schemas.microsoft.com/office/drawing/2014/main" id="{08E0686E-F8A7-4578-8107-42E123762268}"/>
               </a:ext>
             </a:extLst>
           </p:cNvPr>
@@ -11280,7 +11278,7 @@
           <p:cNvPr id="24" name="">
             <a:extLst xmlns:a="http://schemas.openxmlformats.org/drawingml/2006/main">
               <a:ext uri="{FF2B5EF4-FFF2-40B4-BE49-F238E27FC236}">
-                <a16:creationId xmlns:a16="http://schemas.microsoft.com/office/drawing/2014/main" id="{985E7D9B-3F95-4148-9D7E-0A88CC018BAF}"/>
+                <a16:creationId xmlns:a16="http://schemas.microsoft.com/office/drawing/2014/main" id="{3560758C-1E7E-44E7-9F01-4DD1C4C54CBF}"/>
               </a:ext>
             </a:extLst>
           </p:cNvPr>
@@ -11344,7 +11342,7 @@
           <p:cNvPr id="25" name="">
             <a:extLst xmlns:a="http://schemas.openxmlformats.org/drawingml/2006/main">
               <a:ext uri="{FF2B5EF4-FFF2-40B4-BE49-F238E27FC236}">
-                <a16:creationId xmlns:a16="http://schemas.microsoft.com/office/drawing/2014/main" id="{52525F02-08E7-4809-A24C-267FCBBD760F}"/>
+                <a16:creationId xmlns:a16="http://schemas.microsoft.com/office/drawing/2014/main" id="{F02ED61A-E372-4CB9-B2FC-A5DE09DC2F76}"/>
               </a:ext>
             </a:extLst>
           </p:cNvPr>
@@ -11408,7 +11406,7 @@
           <p:cNvPr id="26" name="">
             <a:extLst xmlns:a="http://schemas.openxmlformats.org/drawingml/2006/main">
               <a:ext uri="{FF2B5EF4-FFF2-40B4-BE49-F238E27FC236}">
-                <a16:creationId xmlns:a16="http://schemas.microsoft.com/office/drawing/2014/main" id="{28C9DE18-EC2E-41AA-B975-FB8B34289C50}"/>
+                <a16:creationId xmlns:a16="http://schemas.microsoft.com/office/drawing/2014/main" id="{1001398F-5E4C-4EFC-9811-26EE56672D8F}"/>
               </a:ext>
             </a:extLst>
           </p:cNvPr>
@@ -11472,7 +11470,7 @@
           <p:cNvPr id="27" name="">
             <a:extLst xmlns:a="http://schemas.openxmlformats.org/drawingml/2006/main">
               <a:ext uri="{FF2B5EF4-FFF2-40B4-BE49-F238E27FC236}">
-                <a16:creationId xmlns:a16="http://schemas.microsoft.com/office/drawing/2014/main" id="{64BAE7C9-2D22-499A-A8A9-CAF222AD7344}"/>
+                <a16:creationId xmlns:a16="http://schemas.microsoft.com/office/drawing/2014/main" id="{10F52A68-8811-47E9-8B9C-F6ED065DBEB6}"/>
               </a:ext>
             </a:extLst>
           </p:cNvPr>
@@ -11507,7 +11505,7 @@
           <p:cNvPr id="28" name="">
             <a:extLst xmlns:a="http://schemas.openxmlformats.org/drawingml/2006/main">
               <a:ext uri="{FF2B5EF4-FFF2-40B4-BE49-F238E27FC236}">
-                <a16:creationId xmlns:a16="http://schemas.microsoft.com/office/drawing/2014/main" id="{7180F2FB-A1EC-489A-9448-F1586C89DFDA}"/>
+                <a16:creationId xmlns:a16="http://schemas.microsoft.com/office/drawing/2014/main" id="{641C8A2E-BC5A-4985-81B9-7511F76BF9FE}"/>
               </a:ext>
             </a:extLst>
           </p:cNvPr>
@@ -11561,7 +11559,7 @@
                 <a:ea typeface="Aptos"/>
                 <a:cs typeface="Aptos"/>
               </a:rPr>
-              <a:t>AI filler</a:t>
+              <a:t>Generic filler</a:t>
             </a:r>
           </a:p>
         </p:txBody>
@@ -11571,7 +11569,7 @@
           <p:cNvPr id="29" name="">
             <a:extLst xmlns:a="http://schemas.openxmlformats.org/drawingml/2006/main">
               <a:ext uri="{FF2B5EF4-FFF2-40B4-BE49-F238E27FC236}">
-                <a16:creationId xmlns:a16="http://schemas.microsoft.com/office/drawing/2014/main" id="{E2EE053E-1549-4A7B-AE0B-7B16B12AF92A}"/>
+                <a16:creationId xmlns:a16="http://schemas.microsoft.com/office/drawing/2014/main" id="{4E0A8A2B-2D5F-43B2-93E1-69B7A1C58D8A}"/>
               </a:ext>
             </a:extLst>
           </p:cNvPr>
@@ -11635,7 +11633,7 @@
           <p:cNvPr id="30" name="">
             <a:extLst xmlns:a="http://schemas.openxmlformats.org/drawingml/2006/main">
               <a:ext uri="{FF2B5EF4-FFF2-40B4-BE49-F238E27FC236}">
-                <a16:creationId xmlns:a16="http://schemas.microsoft.com/office/drawing/2014/main" id="{0741F4EE-025E-435E-B60B-02D45BF28CC5}"/>
+                <a16:creationId xmlns:a16="http://schemas.microsoft.com/office/drawing/2014/main" id="{B0A64644-4FC1-4C06-8A26-51B086131B5A}"/>
               </a:ext>
             </a:extLst>
           </p:cNvPr>
@@ -11699,7 +11697,7 @@
           <p:cNvPr id="31" name="">
             <a:extLst xmlns:a="http://schemas.openxmlformats.org/drawingml/2006/main">
               <a:ext uri="{FF2B5EF4-FFF2-40B4-BE49-F238E27FC236}">
-                <a16:creationId xmlns:a16="http://schemas.microsoft.com/office/drawing/2014/main" id="{C3B78821-3386-4B8D-A798-E9562CCEB88F}"/>
+                <a16:creationId xmlns:a16="http://schemas.microsoft.com/office/drawing/2014/main" id="{BA5107D8-2EAF-4D77-8555-B3CE7044313A}"/>
               </a:ext>
             </a:extLst>
           </p:cNvPr>
@@ -11734,7 +11732,7 @@
           <p:cNvPr id="32" name="">
             <a:extLst xmlns:a="http://schemas.openxmlformats.org/drawingml/2006/main">
               <a:ext uri="{FF2B5EF4-FFF2-40B4-BE49-F238E27FC236}">
-                <a16:creationId xmlns:a16="http://schemas.microsoft.com/office/drawing/2014/main" id="{E61DD558-1ECA-4347-932F-552E425C2F9C}"/>
+                <a16:creationId xmlns:a16="http://schemas.microsoft.com/office/drawing/2014/main" id="{B1214127-9A46-4012-94A2-60BFAAD057B8}"/>
               </a:ext>
             </a:extLst>
           </p:cNvPr>
@@ -11769,7 +11767,7 @@
           <p:cNvPr id="33" name="">
             <a:extLst xmlns:a="http://schemas.openxmlformats.org/drawingml/2006/main">
               <a:ext uri="{FF2B5EF4-FFF2-40B4-BE49-F238E27FC236}">
-                <a16:creationId xmlns:a16="http://schemas.microsoft.com/office/drawing/2014/main" id="{E7BBF63F-5395-4098-9655-03ABF5D8DFEC}"/>
+                <a16:creationId xmlns:a16="http://schemas.microsoft.com/office/drawing/2014/main" id="{B6661A84-FB8A-45E7-9ABE-7A364DCB48D9}"/>
               </a:ext>
             </a:extLst>
           </p:cNvPr>
@@ -11833,7 +11831,7 @@
           <p:cNvPr id="34" name="">
             <a:extLst xmlns:a="http://schemas.openxmlformats.org/drawingml/2006/main">
               <a:ext uri="{FF2B5EF4-FFF2-40B4-BE49-F238E27FC236}">
-                <a16:creationId xmlns:a16="http://schemas.microsoft.com/office/drawing/2014/main" id="{D82C18FF-0BD8-4A3E-A876-FAB7736651CB}"/>
+                <a16:creationId xmlns:a16="http://schemas.microsoft.com/office/drawing/2014/main" id="{9277BCF7-EE19-4838-8C12-E268DBFA627E}"/>
               </a:ext>
             </a:extLst>
           </p:cNvPr>
@@ -11897,7 +11895,7 @@
           <p:cNvPr id="35" name="">
             <a:extLst xmlns:a="http://schemas.openxmlformats.org/drawingml/2006/main">
               <a:ext uri="{FF2B5EF4-FFF2-40B4-BE49-F238E27FC236}">
-                <a16:creationId xmlns:a16="http://schemas.microsoft.com/office/drawing/2014/main" id="{5CB10618-B209-407E-96AE-20350157668A}"/>
+                <a16:creationId xmlns:a16="http://schemas.microsoft.com/office/drawing/2014/main" id="{AA76F4F8-8102-4212-86F9-DEEB331DF0B6}"/>
               </a:ext>
             </a:extLst>
           </p:cNvPr>
@@ -11961,7 +11959,7 @@
           <p:cNvPr id="36" name="">
             <a:extLst xmlns:a="http://schemas.openxmlformats.org/drawingml/2006/main">
               <a:ext uri="{FF2B5EF4-FFF2-40B4-BE49-F238E27FC236}">
-                <a16:creationId xmlns:a16="http://schemas.microsoft.com/office/drawing/2014/main" id="{8B648D92-97F7-459E-AE0D-7C8C4A2CA31B}"/>
+                <a16:creationId xmlns:a16="http://schemas.microsoft.com/office/drawing/2014/main" id="{84A5FD48-2734-43D3-A403-8738ADB8F9FB}"/>
               </a:ext>
             </a:extLst>
           </p:cNvPr>
@@ -11996,7 +11994,7 @@
           <p:cNvPr id="37" name="">
             <a:extLst xmlns:a="http://schemas.openxmlformats.org/drawingml/2006/main">
               <a:ext uri="{FF2B5EF4-FFF2-40B4-BE49-F238E27FC236}">
-                <a16:creationId xmlns:a16="http://schemas.microsoft.com/office/drawing/2014/main" id="{C380236C-2970-4B96-8755-B18AA9661B5D}"/>
+                <a16:creationId xmlns:a16="http://schemas.microsoft.com/office/drawing/2014/main" id="{9EAA00EE-2B41-4FFE-A607-D9B5003AB1D5}"/>
               </a:ext>
             </a:extLst>
           </p:cNvPr>
@@ -12060,7 +12058,7 @@
           <p:cNvPr id="38" name="">
             <a:extLst xmlns:a="http://schemas.openxmlformats.org/drawingml/2006/main">
               <a:ext uri="{FF2B5EF4-FFF2-40B4-BE49-F238E27FC236}">
-                <a16:creationId xmlns:a16="http://schemas.microsoft.com/office/drawing/2014/main" id="{411199B6-28FF-4B2A-BFF1-5A554167F68D}"/>
+                <a16:creationId xmlns:a16="http://schemas.microsoft.com/office/drawing/2014/main" id="{FD6C090A-D1B7-4A41-B822-0B42F1B37511}"/>
               </a:ext>
             </a:extLst>
           </p:cNvPr>
@@ -12124,7 +12122,7 @@
           <p:cNvPr id="39" name="">
             <a:extLst xmlns:a="http://schemas.openxmlformats.org/drawingml/2006/main">
               <a:ext uri="{FF2B5EF4-FFF2-40B4-BE49-F238E27FC236}">
-                <a16:creationId xmlns:a16="http://schemas.microsoft.com/office/drawing/2014/main" id="{73187595-E401-4B68-AEDB-D359C02F4CE1}"/>
+                <a16:creationId xmlns:a16="http://schemas.microsoft.com/office/drawing/2014/main" id="{A2138189-59FB-4570-9317-F758A8F49845}"/>
               </a:ext>
             </a:extLst>
           </p:cNvPr>
@@ -12188,7 +12186,7 @@
           <p:cNvPr id="40" name="">
             <a:extLst xmlns:a="http://schemas.openxmlformats.org/drawingml/2006/main">
               <a:ext uri="{FF2B5EF4-FFF2-40B4-BE49-F238E27FC236}">
-                <a16:creationId xmlns:a16="http://schemas.microsoft.com/office/drawing/2014/main" id="{988350D0-9FE7-4DF5-8F3E-2A134C532006}"/>
+                <a16:creationId xmlns:a16="http://schemas.microsoft.com/office/drawing/2014/main" id="{AB15FCCA-0DFD-48AA-B5BB-638BDADF159C}"/>
               </a:ext>
             </a:extLst>
           </p:cNvPr>
@@ -12223,7 +12221,7 @@
           <p:cNvPr id="41" name="">
             <a:extLst xmlns:a="http://schemas.openxmlformats.org/drawingml/2006/main">
               <a:ext uri="{FF2B5EF4-FFF2-40B4-BE49-F238E27FC236}">
-                <a16:creationId xmlns:a16="http://schemas.microsoft.com/office/drawing/2014/main" id="{AC286A58-3705-4638-8D17-6307FEC8C931}"/>
+                <a16:creationId xmlns:a16="http://schemas.microsoft.com/office/drawing/2014/main" id="{3D59B2A5-4965-4BE3-A39C-8FF18ACEC3B0}"/>
               </a:ext>
             </a:extLst>
           </p:cNvPr>
@@ -12258,7 +12256,7 @@
           <p:cNvPr id="42" name="">
             <a:extLst xmlns:a="http://schemas.openxmlformats.org/drawingml/2006/main">
               <a:ext uri="{FF2B5EF4-FFF2-40B4-BE49-F238E27FC236}">
-                <a16:creationId xmlns:a16="http://schemas.microsoft.com/office/drawing/2014/main" id="{43318015-C5DB-4919-962A-7DD08C47212F}"/>
+                <a16:creationId xmlns:a16="http://schemas.microsoft.com/office/drawing/2014/main" id="{AC0CEA7A-4D6D-47F3-9583-0CD232B9E898}"/>
               </a:ext>
             </a:extLst>
           </p:cNvPr>
@@ -12293,7 +12291,7 @@
           <p:cNvPr id="43" name="kicker-05-marker">
             <a:extLst xmlns:a="http://schemas.openxmlformats.org/drawingml/2006/main">
               <a:ext uri="{FF2B5EF4-FFF2-40B4-BE49-F238E27FC236}">
-                <a16:creationId xmlns:a16="http://schemas.microsoft.com/office/drawing/2014/main" id="{D7A40CDC-61D9-49D7-8B0B-C00BAF549036}"/>
+                <a16:creationId xmlns:a16="http://schemas.microsoft.com/office/drawing/2014/main" id="{8BA2E8B7-1AC5-4E05-8B2A-649BD6353ADF}"/>
               </a:ext>
             </a:extLst>
           </p:cNvPr>
@@ -12328,7 +12326,7 @@
           <p:cNvPr id="44" name="kicker-05-label">
             <a:extLst xmlns:a="http://schemas.openxmlformats.org/drawingml/2006/main">
               <a:ext uri="{FF2B5EF4-FFF2-40B4-BE49-F238E27FC236}">
-                <a16:creationId xmlns:a16="http://schemas.microsoft.com/office/drawing/2014/main" id="{7D150CCA-4361-4F4A-9524-D507CC5D328A}"/>
+                <a16:creationId xmlns:a16="http://schemas.microsoft.com/office/drawing/2014/main" id="{4339B627-2208-4BAB-870F-F1120FDA132C}"/>
               </a:ext>
             </a:extLst>
           </p:cNvPr>
@@ -12392,7 +12390,7 @@
           <p:cNvPr id="45" name="">
             <a:extLst xmlns:a="http://schemas.openxmlformats.org/drawingml/2006/main">
               <a:ext uri="{FF2B5EF4-FFF2-40B4-BE49-F238E27FC236}">
-                <a16:creationId xmlns:a16="http://schemas.microsoft.com/office/drawing/2014/main" id="{C047BBF7-7738-4A6B-8C6D-06CF3FB25719}"/>
+                <a16:creationId xmlns:a16="http://schemas.microsoft.com/office/drawing/2014/main" id="{A2E24EF7-D588-4AD5-B0EC-BAB6AA951428}"/>
               </a:ext>
             </a:extLst>
           </p:cNvPr>
@@ -12456,7 +12454,7 @@
           <p:cNvPr id="46" name="">
             <a:extLst xmlns:a="http://schemas.openxmlformats.org/drawingml/2006/main">
               <a:ext uri="{FF2B5EF4-FFF2-40B4-BE49-F238E27FC236}">
-                <a16:creationId xmlns:a16="http://schemas.microsoft.com/office/drawing/2014/main" id="{994D16B9-4043-49F1-B68E-3712A0033926}"/>
+                <a16:creationId xmlns:a16="http://schemas.microsoft.com/office/drawing/2014/main" id="{9E35452F-EADC-493A-B563-CC4993C7C58F}"/>
               </a:ext>
             </a:extLst>
           </p:cNvPr>
@@ -12520,7 +12518,7 @@
           <p:cNvPr id="47" name="">
             <a:extLst xmlns:a="http://schemas.openxmlformats.org/drawingml/2006/main">
               <a:ext uri="{FF2B5EF4-FFF2-40B4-BE49-F238E27FC236}">
-                <a16:creationId xmlns:a16="http://schemas.microsoft.com/office/drawing/2014/main" id="{785E8688-0360-4B2D-8813-24E60CDEDA61}"/>
+                <a16:creationId xmlns:a16="http://schemas.microsoft.com/office/drawing/2014/main" id="{7B694A1E-4FD6-4FB2-8ADD-A12B671CA49A}"/>
               </a:ext>
             </a:extLst>
           </p:cNvPr>
@@ -12555,7 +12553,7 @@
           <p:cNvPr id="48" name="">
             <a:extLst xmlns:a="http://schemas.openxmlformats.org/drawingml/2006/main">
               <a:ext uri="{FF2B5EF4-FFF2-40B4-BE49-F238E27FC236}">
-                <a16:creationId xmlns:a16="http://schemas.microsoft.com/office/drawing/2014/main" id="{4AF9620D-EC1D-4EF5-AEDA-4D6FB3ED2120}"/>
+                <a16:creationId xmlns:a16="http://schemas.microsoft.com/office/drawing/2014/main" id="{10AAD6BF-A624-4171-8B62-8BCE9859DAA1}"/>
               </a:ext>
             </a:extLst>
           </p:cNvPr>
@@ -12590,7 +12588,7 @@
           <p:cNvPr id="49" name="">
             <a:extLst xmlns:a="http://schemas.openxmlformats.org/drawingml/2006/main">
               <a:ext uri="{FF2B5EF4-FFF2-40B4-BE49-F238E27FC236}">
-                <a16:creationId xmlns:a16="http://schemas.microsoft.com/office/drawing/2014/main" id="{E0BDEF7D-5800-4757-8692-6577F77012C9}"/>
+                <a16:creationId xmlns:a16="http://schemas.microsoft.com/office/drawing/2014/main" id="{B0A3D82D-491E-4E4B-A05F-B85F12FBF4EC}"/>
               </a:ext>
             </a:extLst>
           </p:cNvPr>
@@ -12625,7 +12623,7 @@
           <p:cNvPr id="50" name="">
             <a:extLst xmlns:a="http://schemas.openxmlformats.org/drawingml/2006/main">
               <a:ext uri="{FF2B5EF4-FFF2-40B4-BE49-F238E27FC236}">
-                <a16:creationId xmlns:a16="http://schemas.microsoft.com/office/drawing/2014/main" id="{133746F5-2B27-4D96-8BCB-128CFC4859F3}"/>
+                <a16:creationId xmlns:a16="http://schemas.microsoft.com/office/drawing/2014/main" id="{F9EC9A36-412C-49A8-85E5-EA0EFE42CC8A}"/>
               </a:ext>
             </a:extLst>
           </p:cNvPr>
@@ -12660,7 +12658,7 @@
           <p:cNvPr id="51" name="">
             <a:extLst xmlns:a="http://schemas.openxmlformats.org/drawingml/2006/main">
               <a:ext uri="{FF2B5EF4-FFF2-40B4-BE49-F238E27FC236}">
-                <a16:creationId xmlns:a16="http://schemas.microsoft.com/office/drawing/2014/main" id="{DD607BF6-DED6-4F73-B8BB-FDE1D261A206}"/>
+                <a16:creationId xmlns:a16="http://schemas.microsoft.com/office/drawing/2014/main" id="{ED7C09A0-B94D-469D-97D2-C4CDB16187A9}"/>
               </a:ext>
             </a:extLst>
           </p:cNvPr>
@@ -12724,7 +12722,7 @@
           <p:cNvPr id="52" name="">
             <a:extLst xmlns:a="http://schemas.openxmlformats.org/drawingml/2006/main">
               <a:ext uri="{FF2B5EF4-FFF2-40B4-BE49-F238E27FC236}">
-                <a16:creationId xmlns:a16="http://schemas.microsoft.com/office/drawing/2014/main" id="{0E119A5C-9CC3-40FD-A029-5C546A933CBD}"/>
+                <a16:creationId xmlns:a16="http://schemas.microsoft.com/office/drawing/2014/main" id="{170AC013-920D-4884-9F87-086A17686888}"/>
               </a:ext>
             </a:extLst>
           </p:cNvPr>
@@ -12788,7 +12786,7 @@
           <p:cNvPr id="53" name="">
             <a:extLst xmlns:a="http://schemas.openxmlformats.org/drawingml/2006/main">
               <a:ext uri="{FF2B5EF4-FFF2-40B4-BE49-F238E27FC236}">
-                <a16:creationId xmlns:a16="http://schemas.microsoft.com/office/drawing/2014/main" id="{4B2A73F2-235E-4EC5-B3A8-FF31048101F7}"/>
+                <a16:creationId xmlns:a16="http://schemas.microsoft.com/office/drawing/2014/main" id="{98E5F0D5-24F5-491E-912E-45BAD79AB4C1}"/>
               </a:ext>
             </a:extLst>
           </p:cNvPr>
@@ -12850,7 +12848,7 @@
     </p:spTree>
     <p:extLst>
       <p:ext uri="{BB962C8B-B14F-4D97-AF65-F5344CB8AC3E}">
-        <p14:creationId xmlns:p14="http://schemas.microsoft.com/office/powerpoint/2010/main" val="392748535"/>
+        <p14:creationId xmlns:p14="http://schemas.microsoft.com/office/powerpoint/2010/main" val="521686523"/>
       </p:ext>
     </p:extLst>
   </p:cSld>
@@ -12874,7 +12872,7 @@
           <p:cNvPr id="1" name="">
             <a:extLst xmlns:a="http://schemas.openxmlformats.org/drawingml/2006/main">
               <a:ext uri="{FF2B5EF4-FFF2-40B4-BE49-F238E27FC236}">
-                <a16:creationId xmlns:a16="http://schemas.microsoft.com/office/drawing/2014/main" id="{F9CA645F-95DA-4199-932E-8C598B40AA6D}"/>
+                <a16:creationId xmlns:a16="http://schemas.microsoft.com/office/drawing/2014/main" id="{C2834AA0-FBFA-4B60-8645-008134369078}"/>
               </a:ext>
             </a:extLst>
           </p:cNvPr>
@@ -12909,7 +12907,7 @@
           <p:cNvPr id="2" name="">
             <a:extLst xmlns:a="http://schemas.openxmlformats.org/drawingml/2006/main">
               <a:ext uri="{FF2B5EF4-FFF2-40B4-BE49-F238E27FC236}">
-                <a16:creationId xmlns:a16="http://schemas.microsoft.com/office/drawing/2014/main" id="{B9FDA40C-CDD5-4142-940D-2BCB0AC013A1}"/>
+                <a16:creationId xmlns:a16="http://schemas.microsoft.com/office/drawing/2014/main" id="{4F45890B-2422-483B-9228-E1C80F2E8EFF}"/>
               </a:ext>
             </a:extLst>
           </p:cNvPr>
@@ -12944,7 +12942,7 @@
           <p:cNvPr id="3" name="">
             <a:extLst xmlns:a="http://schemas.openxmlformats.org/drawingml/2006/main">
               <a:ext uri="{FF2B5EF4-FFF2-40B4-BE49-F238E27FC236}">
-                <a16:creationId xmlns:a16="http://schemas.microsoft.com/office/drawing/2014/main" id="{FE19AE55-71F4-45A3-99E7-AEA109081D06}"/>
+                <a16:creationId xmlns:a16="http://schemas.microsoft.com/office/drawing/2014/main" id="{5A2EB878-C11B-4E4D-8A1D-2A77C47074D9}"/>
               </a:ext>
             </a:extLst>
           </p:cNvPr>
@@ -12979,7 +12977,7 @@
           <p:cNvPr id="4" name="kicker-05-marker">
             <a:extLst xmlns:a="http://schemas.openxmlformats.org/drawingml/2006/main">
               <a:ext uri="{FF2B5EF4-FFF2-40B4-BE49-F238E27FC236}">
-                <a16:creationId xmlns:a16="http://schemas.microsoft.com/office/drawing/2014/main" id="{D9BBAE92-C7F3-46E6-9DC3-931DB0BC0BA2}"/>
+                <a16:creationId xmlns:a16="http://schemas.microsoft.com/office/drawing/2014/main" id="{40B48E76-DE4F-4930-91F1-F24F96FFFE21}"/>
               </a:ext>
             </a:extLst>
           </p:cNvPr>
@@ -13014,7 +13012,7 @@
           <p:cNvPr id="5" name="kicker-05-label">
             <a:extLst xmlns:a="http://schemas.openxmlformats.org/drawingml/2006/main">
               <a:ext uri="{FF2B5EF4-FFF2-40B4-BE49-F238E27FC236}">
-                <a16:creationId xmlns:a16="http://schemas.microsoft.com/office/drawing/2014/main" id="{429A5657-618D-4928-8ABE-46B157D6EF28}"/>
+                <a16:creationId xmlns:a16="http://schemas.microsoft.com/office/drawing/2014/main" id="{CAAD1861-0E05-4CD7-907C-FC6DC818A8FE}"/>
               </a:ext>
             </a:extLst>
           </p:cNvPr>
@@ -13078,7 +13076,7 @@
           <p:cNvPr id="6" name="">
             <a:extLst xmlns:a="http://schemas.openxmlformats.org/drawingml/2006/main">
               <a:ext uri="{FF2B5EF4-FFF2-40B4-BE49-F238E27FC236}">
-                <a16:creationId xmlns:a16="http://schemas.microsoft.com/office/drawing/2014/main" id="{8061765F-7125-4D78-BE59-C59A4F5D621B}"/>
+                <a16:creationId xmlns:a16="http://schemas.microsoft.com/office/drawing/2014/main" id="{EEF10B62-6350-48C7-AD9B-85E30CB880D6}"/>
               </a:ext>
             </a:extLst>
           </p:cNvPr>
@@ -13142,7 +13140,7 @@
           <p:cNvPr id="7" name="">
             <a:extLst xmlns:a="http://schemas.openxmlformats.org/drawingml/2006/main">
               <a:ext uri="{FF2B5EF4-FFF2-40B4-BE49-F238E27FC236}">
-                <a16:creationId xmlns:a16="http://schemas.microsoft.com/office/drawing/2014/main" id="{F73F9E0A-59E5-4F64-9955-023B21A177AB}"/>
+                <a16:creationId xmlns:a16="http://schemas.microsoft.com/office/drawing/2014/main" id="{06A80773-2A8B-4563-83DE-F9C419C7D1DC}"/>
               </a:ext>
             </a:extLst>
           </p:cNvPr>
@@ -13206,7 +13204,7 @@
           <p:cNvPr id="8" name="">
             <a:extLst xmlns:a="http://schemas.openxmlformats.org/drawingml/2006/main">
               <a:ext uri="{FF2B5EF4-FFF2-40B4-BE49-F238E27FC236}">
-                <a16:creationId xmlns:a16="http://schemas.microsoft.com/office/drawing/2014/main" id="{30E2D7F7-7FCD-4DA3-94D7-E0FCD74BD330}"/>
+                <a16:creationId xmlns:a16="http://schemas.microsoft.com/office/drawing/2014/main" id="{2741BFB3-3477-4124-AFE0-B00ED6E3FDD8}"/>
               </a:ext>
             </a:extLst>
           </p:cNvPr>
@@ -13241,7 +13239,7 @@
           <p:cNvPr id="9" name="">
             <a:extLst xmlns:a="http://schemas.openxmlformats.org/drawingml/2006/main">
               <a:ext uri="{FF2B5EF4-FFF2-40B4-BE49-F238E27FC236}">
-                <a16:creationId xmlns:a16="http://schemas.microsoft.com/office/drawing/2014/main" id="{10557BF4-C9BE-438B-9BBF-FEDF1923213D}"/>
+                <a16:creationId xmlns:a16="http://schemas.microsoft.com/office/drawing/2014/main" id="{4D900D37-7E44-4649-944B-AFE204C04D8A}"/>
               </a:ext>
             </a:extLst>
           </p:cNvPr>
@@ -13305,7 +13303,7 @@
           <p:cNvPr id="10" name="">
             <a:extLst xmlns:a="http://schemas.openxmlformats.org/drawingml/2006/main">
               <a:ext uri="{FF2B5EF4-FFF2-40B4-BE49-F238E27FC236}">
-                <a16:creationId xmlns:a16="http://schemas.microsoft.com/office/drawing/2014/main" id="{1F5F420A-F72B-4753-8799-9B756168514B}"/>
+                <a16:creationId xmlns:a16="http://schemas.microsoft.com/office/drawing/2014/main" id="{DB544E9B-4A3B-49A7-B1F9-24D69AE502E8}"/>
               </a:ext>
             </a:extLst>
           </p:cNvPr>
@@ -13369,7 +13367,7 @@
           <p:cNvPr id="11" name="">
             <a:extLst xmlns:a="http://schemas.openxmlformats.org/drawingml/2006/main">
               <a:ext uri="{FF2B5EF4-FFF2-40B4-BE49-F238E27FC236}">
-                <a16:creationId xmlns:a16="http://schemas.microsoft.com/office/drawing/2014/main" id="{3FEF4555-AB5E-45EE-B8D5-07465FD0941D}"/>
+                <a16:creationId xmlns:a16="http://schemas.microsoft.com/office/drawing/2014/main" id="{6DD3A162-0F64-452C-98B2-72F8948528FE}"/>
               </a:ext>
             </a:extLst>
           </p:cNvPr>
@@ -13433,7 +13431,7 @@
           <p:cNvPr id="12" name="">
             <a:extLst xmlns:a="http://schemas.openxmlformats.org/drawingml/2006/main">
               <a:ext uri="{FF2B5EF4-FFF2-40B4-BE49-F238E27FC236}">
-                <a16:creationId xmlns:a16="http://schemas.microsoft.com/office/drawing/2014/main" id="{1F6589E7-1B02-4C14-B266-E923521B45BC}"/>
+                <a16:creationId xmlns:a16="http://schemas.microsoft.com/office/drawing/2014/main" id="{AFBD0882-5B9C-4034-A1E3-85709BA4DD7E}"/>
               </a:ext>
             </a:extLst>
           </p:cNvPr>
@@ -13468,7 +13466,7 @@
           <p:cNvPr id="13" name="">
             <a:extLst xmlns:a="http://schemas.openxmlformats.org/drawingml/2006/main">
               <a:ext uri="{FF2B5EF4-FFF2-40B4-BE49-F238E27FC236}">
-                <a16:creationId xmlns:a16="http://schemas.microsoft.com/office/drawing/2014/main" id="{10395AC7-14E3-47F6-A112-A91D8C35B33F}"/>
+                <a16:creationId xmlns:a16="http://schemas.microsoft.com/office/drawing/2014/main" id="{72458C32-6C8F-4AB6-92BF-C555C1E55713}"/>
               </a:ext>
             </a:extLst>
           </p:cNvPr>
@@ -13501,7 +13499,7 @@
           <p:cNvPr id="14" name="">
             <a:extLst xmlns:a="http://schemas.openxmlformats.org/drawingml/2006/main">
               <a:ext uri="{FF2B5EF4-FFF2-40B4-BE49-F238E27FC236}">
-                <a16:creationId xmlns:a16="http://schemas.microsoft.com/office/drawing/2014/main" id="{6C4F9631-9DA4-4652-9C58-251E52450C40}"/>
+                <a16:creationId xmlns:a16="http://schemas.microsoft.com/office/drawing/2014/main" id="{BA1ACEDC-C0E8-4F94-BBA8-A4D09487B074}"/>
               </a:ext>
             </a:extLst>
           </p:cNvPr>
@@ -13536,7 +13534,7 @@
           <p:cNvPr id="15" name="">
             <a:extLst xmlns:a="http://schemas.openxmlformats.org/drawingml/2006/main">
               <a:ext uri="{FF2B5EF4-FFF2-40B4-BE49-F238E27FC236}">
-                <a16:creationId xmlns:a16="http://schemas.microsoft.com/office/drawing/2014/main" id="{FB419D8E-7B8E-4D72-8249-0C3C0535C9A7}"/>
+                <a16:creationId xmlns:a16="http://schemas.microsoft.com/office/drawing/2014/main" id="{0EB035BB-AE29-434A-9201-33BB24F0AF31}"/>
               </a:ext>
             </a:extLst>
           </p:cNvPr>
@@ -13600,7 +13598,7 @@
           <p:cNvPr id="16" name="">
             <a:extLst xmlns:a="http://schemas.openxmlformats.org/drawingml/2006/main">
               <a:ext uri="{FF2B5EF4-FFF2-40B4-BE49-F238E27FC236}">
-                <a16:creationId xmlns:a16="http://schemas.microsoft.com/office/drawing/2014/main" id="{F6E82322-DE5B-4CED-84CB-1D6E83764D99}"/>
+                <a16:creationId xmlns:a16="http://schemas.microsoft.com/office/drawing/2014/main" id="{62C4B9C6-6E35-4593-B998-EBB7694C2459}"/>
               </a:ext>
             </a:extLst>
           </p:cNvPr>
@@ -13635,7 +13633,7 @@
           <p:cNvPr id="17" name="">
             <a:extLst xmlns:a="http://schemas.openxmlformats.org/drawingml/2006/main">
               <a:ext uri="{FF2B5EF4-FFF2-40B4-BE49-F238E27FC236}">
-                <a16:creationId xmlns:a16="http://schemas.microsoft.com/office/drawing/2014/main" id="{B611F852-FA4F-4DF5-A70D-8F45A45F797C}"/>
+                <a16:creationId xmlns:a16="http://schemas.microsoft.com/office/drawing/2014/main" id="{16623CCB-D91D-418E-9CB8-0AF6B96C6013}"/>
               </a:ext>
             </a:extLst>
           </p:cNvPr>
@@ -13699,7 +13697,7 @@
           <p:cNvPr id="18" name="">
             <a:extLst xmlns:a="http://schemas.openxmlformats.org/drawingml/2006/main">
               <a:ext uri="{FF2B5EF4-FFF2-40B4-BE49-F238E27FC236}">
-                <a16:creationId xmlns:a16="http://schemas.microsoft.com/office/drawing/2014/main" id="{691D8CE2-805F-44C5-A653-9E66175AD525}"/>
+                <a16:creationId xmlns:a16="http://schemas.microsoft.com/office/drawing/2014/main" id="{5992C764-CA35-4A04-905C-25111DBC51D8}"/>
               </a:ext>
             </a:extLst>
           </p:cNvPr>
@@ -13734,7 +13732,7 @@
           <p:cNvPr id="19" name="">
             <a:extLst xmlns:a="http://schemas.openxmlformats.org/drawingml/2006/main">
               <a:ext uri="{FF2B5EF4-FFF2-40B4-BE49-F238E27FC236}">
-                <a16:creationId xmlns:a16="http://schemas.microsoft.com/office/drawing/2014/main" id="{4B39A470-2EFB-4BE2-9A21-12ED14CB176C}"/>
+                <a16:creationId xmlns:a16="http://schemas.microsoft.com/office/drawing/2014/main" id="{789E595A-E4DE-43F5-B827-0EF48F81B113}"/>
               </a:ext>
             </a:extLst>
           </p:cNvPr>
@@ -13798,7 +13796,7 @@
           <p:cNvPr id="20" name="">
             <a:extLst xmlns:a="http://schemas.openxmlformats.org/drawingml/2006/main">
               <a:ext uri="{FF2B5EF4-FFF2-40B4-BE49-F238E27FC236}">
-                <a16:creationId xmlns:a16="http://schemas.microsoft.com/office/drawing/2014/main" id="{02912A3D-9B20-4E36-A172-BA75357D9B22}"/>
+                <a16:creationId xmlns:a16="http://schemas.microsoft.com/office/drawing/2014/main" id="{9E3C4969-6043-4482-91C5-684AAAE31455}"/>
               </a:ext>
             </a:extLst>
           </p:cNvPr>
@@ -13833,7 +13831,7 @@
           <p:cNvPr id="21" name="">
             <a:extLst xmlns:a="http://schemas.openxmlformats.org/drawingml/2006/main">
               <a:ext uri="{FF2B5EF4-FFF2-40B4-BE49-F238E27FC236}">
-                <a16:creationId xmlns:a16="http://schemas.microsoft.com/office/drawing/2014/main" id="{DE4269EE-32BE-4510-BA0A-6DF4C381D39F}"/>
+                <a16:creationId xmlns:a16="http://schemas.microsoft.com/office/drawing/2014/main" id="{35E25CAF-6F60-4C0A-A7CE-9AE8AB998972}"/>
               </a:ext>
             </a:extLst>
           </p:cNvPr>
@@ -13897,7 +13895,7 @@
           <p:cNvPr id="22" name="">
             <a:extLst xmlns:a="http://schemas.openxmlformats.org/drawingml/2006/main">
               <a:ext uri="{FF2B5EF4-FFF2-40B4-BE49-F238E27FC236}">
-                <a16:creationId xmlns:a16="http://schemas.microsoft.com/office/drawing/2014/main" id="{12B83728-37E5-4788-8279-227242A8633D}"/>
+                <a16:creationId xmlns:a16="http://schemas.microsoft.com/office/drawing/2014/main" id="{6A1B9925-08A7-43B3-83A6-22282AFCA4A9}"/>
               </a:ext>
             </a:extLst>
           </p:cNvPr>
@@ -13932,7 +13930,7 @@
           <p:cNvPr id="23" name="">
             <a:extLst xmlns:a="http://schemas.openxmlformats.org/drawingml/2006/main">
               <a:ext uri="{FF2B5EF4-FFF2-40B4-BE49-F238E27FC236}">
-                <a16:creationId xmlns:a16="http://schemas.microsoft.com/office/drawing/2014/main" id="{6470285B-CF0A-47B4-93F5-DF8033A21C5F}"/>
+                <a16:creationId xmlns:a16="http://schemas.microsoft.com/office/drawing/2014/main" id="{21AD502A-1D2B-4412-BEAA-C26334829EDA}"/>
               </a:ext>
             </a:extLst>
           </p:cNvPr>
@@ -13996,7 +13994,7 @@
           <p:cNvPr id="24" name="">
             <a:extLst xmlns:a="http://schemas.openxmlformats.org/drawingml/2006/main">
               <a:ext uri="{FF2B5EF4-FFF2-40B4-BE49-F238E27FC236}">
-                <a16:creationId xmlns:a16="http://schemas.microsoft.com/office/drawing/2014/main" id="{18CD366D-190C-4F9D-A868-790E792B30F8}"/>
+                <a16:creationId xmlns:a16="http://schemas.microsoft.com/office/drawing/2014/main" id="{4EBD896D-9297-4F0D-BF5F-46E4278140F1}"/>
               </a:ext>
             </a:extLst>
           </p:cNvPr>
@@ -14031,7 +14029,7 @@
           <p:cNvPr id="25" name="">
             <a:extLst xmlns:a="http://schemas.openxmlformats.org/drawingml/2006/main">
               <a:ext uri="{FF2B5EF4-FFF2-40B4-BE49-F238E27FC236}">
-                <a16:creationId xmlns:a16="http://schemas.microsoft.com/office/drawing/2014/main" id="{D19B8796-C54C-4805-A8FD-3EFFA763DF56}"/>
+                <a16:creationId xmlns:a16="http://schemas.microsoft.com/office/drawing/2014/main" id="{9E54A2C9-AED2-4892-BD92-528AD48AB716}"/>
               </a:ext>
             </a:extLst>
           </p:cNvPr>
@@ -14095,7 +14093,7 @@
           <p:cNvPr id="26" name="">
             <a:extLst xmlns:a="http://schemas.openxmlformats.org/drawingml/2006/main">
               <a:ext uri="{FF2B5EF4-FFF2-40B4-BE49-F238E27FC236}">
-                <a16:creationId xmlns:a16="http://schemas.microsoft.com/office/drawing/2014/main" id="{A1669295-4439-4523-BF76-1632C0CEDC25}"/>
+                <a16:creationId xmlns:a16="http://schemas.microsoft.com/office/drawing/2014/main" id="{7063BE8E-6174-4B2D-9A49-623F1ED7E199}"/>
               </a:ext>
             </a:extLst>
           </p:cNvPr>
@@ -14130,7 +14128,7 @@
           <p:cNvPr id="27" name="">
             <a:extLst xmlns:a="http://schemas.openxmlformats.org/drawingml/2006/main">
               <a:ext uri="{FF2B5EF4-FFF2-40B4-BE49-F238E27FC236}">
-                <a16:creationId xmlns:a16="http://schemas.microsoft.com/office/drawing/2014/main" id="{9598D8C9-5FA1-4406-8639-AF5B07D0EB98}"/>
+                <a16:creationId xmlns:a16="http://schemas.microsoft.com/office/drawing/2014/main" id="{A617B038-77B9-45F8-A14C-5D5EC725310A}"/>
               </a:ext>
             </a:extLst>
           </p:cNvPr>
@@ -14194,7 +14192,7 @@
           <p:cNvPr id="28" name="">
             <a:extLst xmlns:a="http://schemas.openxmlformats.org/drawingml/2006/main">
               <a:ext uri="{FF2B5EF4-FFF2-40B4-BE49-F238E27FC236}">
-                <a16:creationId xmlns:a16="http://schemas.microsoft.com/office/drawing/2014/main" id="{40792188-8245-431E-AF1B-40BAD210B07A}"/>
+                <a16:creationId xmlns:a16="http://schemas.microsoft.com/office/drawing/2014/main" id="{E85AED36-3824-4FAD-AAA4-F10D8D4E3986}"/>
               </a:ext>
             </a:extLst>
           </p:cNvPr>
@@ -14229,7 +14227,7 @@
           <p:cNvPr id="29" name="">
             <a:extLst xmlns:a="http://schemas.openxmlformats.org/drawingml/2006/main">
               <a:ext uri="{FF2B5EF4-FFF2-40B4-BE49-F238E27FC236}">
-                <a16:creationId xmlns:a16="http://schemas.microsoft.com/office/drawing/2014/main" id="{EA1D0F4C-F3E9-4E8C-A6E0-1EB866E7A603}"/>
+                <a16:creationId xmlns:a16="http://schemas.microsoft.com/office/drawing/2014/main" id="{8D989438-63E3-4D06-A861-7497E2E67C5E}"/>
               </a:ext>
             </a:extLst>
           </p:cNvPr>
@@ -14293,7 +14291,7 @@
           <p:cNvPr id="30" name="">
             <a:extLst xmlns:a="http://schemas.openxmlformats.org/drawingml/2006/main">
               <a:ext uri="{FF2B5EF4-FFF2-40B4-BE49-F238E27FC236}">
-                <a16:creationId xmlns:a16="http://schemas.microsoft.com/office/drawing/2014/main" id="{204B3DF4-537C-44B2-8F35-574FAFDE6B35}"/>
+                <a16:creationId xmlns:a16="http://schemas.microsoft.com/office/drawing/2014/main" id="{AEA58859-158A-434D-A14D-AC7D45A7CC18}"/>
               </a:ext>
             </a:extLst>
           </p:cNvPr>
@@ -14326,7 +14324,7 @@
           <p:cNvPr id="31" name="">
             <a:extLst xmlns:a="http://schemas.openxmlformats.org/drawingml/2006/main">
               <a:ext uri="{FF2B5EF4-FFF2-40B4-BE49-F238E27FC236}">
-                <a16:creationId xmlns:a16="http://schemas.microsoft.com/office/drawing/2014/main" id="{D9225FE7-D012-4F9D-9DD8-BFDCB5EE63B5}"/>
+                <a16:creationId xmlns:a16="http://schemas.microsoft.com/office/drawing/2014/main" id="{6F145B2F-5BD8-4485-B1C8-2AE945E683D3}"/>
               </a:ext>
             </a:extLst>
           </p:cNvPr>
@@ -14361,7 +14359,7 @@
           <p:cNvPr id="32" name="">
             <a:extLst xmlns:a="http://schemas.openxmlformats.org/drawingml/2006/main">
               <a:ext uri="{FF2B5EF4-FFF2-40B4-BE49-F238E27FC236}">
-                <a16:creationId xmlns:a16="http://schemas.microsoft.com/office/drawing/2014/main" id="{8079119E-2809-4AC6-9CBB-6289C7657EB9}"/>
+                <a16:creationId xmlns:a16="http://schemas.microsoft.com/office/drawing/2014/main" id="{786B7AA3-E731-4DE4-B355-1EAA46731EF2}"/>
               </a:ext>
             </a:extLst>
           </p:cNvPr>
@@ -14425,7 +14423,7 @@
           <p:cNvPr id="33" name="">
             <a:extLst xmlns:a="http://schemas.openxmlformats.org/drawingml/2006/main">
               <a:ext uri="{FF2B5EF4-FFF2-40B4-BE49-F238E27FC236}">
-                <a16:creationId xmlns:a16="http://schemas.microsoft.com/office/drawing/2014/main" id="{4C73410B-4113-44B8-B271-C5E7BCB7135D}"/>
+                <a16:creationId xmlns:a16="http://schemas.microsoft.com/office/drawing/2014/main" id="{4E84E6ED-4A96-4FF9-8C6F-EDFC24C9FE51}"/>
               </a:ext>
             </a:extLst>
           </p:cNvPr>
@@ -14479,7 +14477,7 @@
                 <a:ea typeface="Aptos Display"/>
                 <a:cs typeface="Aptos Display"/>
               </a:rPr>
-              <a:t>The artifact passes only if sales, marketing, RevOps, leadership, and an AI agent could inspect it and know what to do next.</a:t>
+              <a:t>The artifact passes only if sales, marketing, RevOps, and leadership can inspect it and know what to do next.</a:t>
             </a:r>
           </a:p>
         </p:txBody>
@@ -14489,7 +14487,7 @@
           <p:cNvPr id="34" name="">
             <a:extLst xmlns:a="http://schemas.openxmlformats.org/drawingml/2006/main">
               <a:ext uri="{FF2B5EF4-FFF2-40B4-BE49-F238E27FC236}">
-                <a16:creationId xmlns:a16="http://schemas.microsoft.com/office/drawing/2014/main" id="{CE060954-54A5-49C6-94EE-1286970DFA3F}"/>
+                <a16:creationId xmlns:a16="http://schemas.microsoft.com/office/drawing/2014/main" id="{E6E04A13-B165-4AE7-A7C1-BAC2046D490A}"/>
               </a:ext>
             </a:extLst>
           </p:cNvPr>
@@ -14553,7 +14551,7 @@
           <p:cNvPr id="35" name="">
             <a:extLst xmlns:a="http://schemas.openxmlformats.org/drawingml/2006/main">
               <a:ext uri="{FF2B5EF4-FFF2-40B4-BE49-F238E27FC236}">
-                <a16:creationId xmlns:a16="http://schemas.microsoft.com/office/drawing/2014/main" id="{B18A56E2-758E-43CC-82E5-F38767FE1492}"/>
+                <a16:creationId xmlns:a16="http://schemas.microsoft.com/office/drawing/2014/main" id="{069140A6-208A-4434-A94E-2E4DC4CB2B6A}"/>
               </a:ext>
             </a:extLst>
           </p:cNvPr>
@@ -14588,7 +14586,7 @@
           <p:cNvPr id="36" name="">
             <a:extLst xmlns:a="http://schemas.openxmlformats.org/drawingml/2006/main">
               <a:ext uri="{FF2B5EF4-FFF2-40B4-BE49-F238E27FC236}">
-                <a16:creationId xmlns:a16="http://schemas.microsoft.com/office/drawing/2014/main" id="{BB50BBB1-D4E6-4C6B-9BCB-4C9D39B04CD1}"/>
+                <a16:creationId xmlns:a16="http://schemas.microsoft.com/office/drawing/2014/main" id="{6ADB33C7-8E05-4DF8-B7C9-67D5E34AADE9}"/>
               </a:ext>
             </a:extLst>
           </p:cNvPr>
@@ -14652,7 +14650,7 @@
           <p:cNvPr id="37" name="">
             <a:extLst xmlns:a="http://schemas.openxmlformats.org/drawingml/2006/main">
               <a:ext uri="{FF2B5EF4-FFF2-40B4-BE49-F238E27FC236}">
-                <a16:creationId xmlns:a16="http://schemas.microsoft.com/office/drawing/2014/main" id="{B4258A00-6DE3-4F6E-A658-A6B1BBD1D5CA}"/>
+                <a16:creationId xmlns:a16="http://schemas.microsoft.com/office/drawing/2014/main" id="{F20E506C-F7A2-4E20-929C-2B25E4175597}"/>
               </a:ext>
             </a:extLst>
           </p:cNvPr>
@@ -14716,7 +14714,7 @@
           <p:cNvPr id="38" name="">
             <a:extLst xmlns:a="http://schemas.openxmlformats.org/drawingml/2006/main">
               <a:ext uri="{FF2B5EF4-FFF2-40B4-BE49-F238E27FC236}">
-                <a16:creationId xmlns:a16="http://schemas.microsoft.com/office/drawing/2014/main" id="{5C8FC19E-D2DC-43DC-BAB4-C70098D22012}"/>
+                <a16:creationId xmlns:a16="http://schemas.microsoft.com/office/drawing/2014/main" id="{64673C73-5527-4C1E-8CB1-170642DD748F}"/>
               </a:ext>
             </a:extLst>
           </p:cNvPr>
@@ -14780,7 +14778,7 @@
           <p:cNvPr id="39" name="">
             <a:extLst xmlns:a="http://schemas.openxmlformats.org/drawingml/2006/main">
               <a:ext uri="{FF2B5EF4-FFF2-40B4-BE49-F238E27FC236}">
-                <a16:creationId xmlns:a16="http://schemas.microsoft.com/office/drawing/2014/main" id="{4CFC494B-A87D-4D1B-B2ED-0D762F6DEB56}"/>
+                <a16:creationId xmlns:a16="http://schemas.microsoft.com/office/drawing/2014/main" id="{A6443FF8-F65C-4EBB-AE2E-26C8B866CA36}"/>
               </a:ext>
             </a:extLst>
           </p:cNvPr>
@@ -14815,7 +14813,7 @@
           <p:cNvPr id="40" name="">
             <a:extLst xmlns:a="http://schemas.openxmlformats.org/drawingml/2006/main">
               <a:ext uri="{FF2B5EF4-FFF2-40B4-BE49-F238E27FC236}">
-                <a16:creationId xmlns:a16="http://schemas.microsoft.com/office/drawing/2014/main" id="{173684F0-37F7-42EA-A9F0-50D4B0BA8800}"/>
+                <a16:creationId xmlns:a16="http://schemas.microsoft.com/office/drawing/2014/main" id="{FF64F389-7522-4400-A644-11C5424BD8F8}"/>
               </a:ext>
             </a:extLst>
           </p:cNvPr>
@@ -14850,7 +14848,7 @@
           <p:cNvPr id="41" name="">
             <a:extLst xmlns:a="http://schemas.openxmlformats.org/drawingml/2006/main">
               <a:ext uri="{FF2B5EF4-FFF2-40B4-BE49-F238E27FC236}">
-                <a16:creationId xmlns:a16="http://schemas.microsoft.com/office/drawing/2014/main" id="{29D3DE65-C0B6-4179-88B8-CA1980CB07A0}"/>
+                <a16:creationId xmlns:a16="http://schemas.microsoft.com/office/drawing/2014/main" id="{34536148-F713-47CD-87A0-037CE7D0C9E5}"/>
               </a:ext>
             </a:extLst>
           </p:cNvPr>
@@ -14885,7 +14883,7 @@
           <p:cNvPr id="42" name="kicker-05-marker">
             <a:extLst xmlns:a="http://schemas.openxmlformats.org/drawingml/2006/main">
               <a:ext uri="{FF2B5EF4-FFF2-40B4-BE49-F238E27FC236}">
-                <a16:creationId xmlns:a16="http://schemas.microsoft.com/office/drawing/2014/main" id="{0A61972A-2119-4859-B03C-FBB59C617BC0}"/>
+                <a16:creationId xmlns:a16="http://schemas.microsoft.com/office/drawing/2014/main" id="{3A8B528D-2217-48C6-9A3D-0D521BCD46ED}"/>
               </a:ext>
             </a:extLst>
           </p:cNvPr>
@@ -14920,7 +14918,7 @@
           <p:cNvPr id="43" name="kicker-05-label">
             <a:extLst xmlns:a="http://schemas.openxmlformats.org/drawingml/2006/main">
               <a:ext uri="{FF2B5EF4-FFF2-40B4-BE49-F238E27FC236}">
-                <a16:creationId xmlns:a16="http://schemas.microsoft.com/office/drawing/2014/main" id="{EB1EC08C-98CD-457A-82FE-D66B2F39C510}"/>
+                <a16:creationId xmlns:a16="http://schemas.microsoft.com/office/drawing/2014/main" id="{A13D73F3-8E69-4C62-BC0A-9A3897A146AD}"/>
               </a:ext>
             </a:extLst>
           </p:cNvPr>
@@ -14984,7 +14982,7 @@
           <p:cNvPr id="44" name="">
             <a:extLst xmlns:a="http://schemas.openxmlformats.org/drawingml/2006/main">
               <a:ext uri="{FF2B5EF4-FFF2-40B4-BE49-F238E27FC236}">
-                <a16:creationId xmlns:a16="http://schemas.microsoft.com/office/drawing/2014/main" id="{D0B2C860-C463-4E45-A5EC-86829B969B7D}"/>
+                <a16:creationId xmlns:a16="http://schemas.microsoft.com/office/drawing/2014/main" id="{A29B1FAA-99BE-4FA2-87C9-24ED03A7270F}"/>
               </a:ext>
             </a:extLst>
           </p:cNvPr>
@@ -15048,7 +15046,7 @@
           <p:cNvPr id="45" name="">
             <a:extLst xmlns:a="http://schemas.openxmlformats.org/drawingml/2006/main">
               <a:ext uri="{FF2B5EF4-FFF2-40B4-BE49-F238E27FC236}">
-                <a16:creationId xmlns:a16="http://schemas.microsoft.com/office/drawing/2014/main" id="{92F65B01-2E46-47A4-8888-5AF7BB97A4C5}"/>
+                <a16:creationId xmlns:a16="http://schemas.microsoft.com/office/drawing/2014/main" id="{BB705332-EEA0-4D3D-9E0E-46B51C9A1E9B}"/>
               </a:ext>
             </a:extLst>
           </p:cNvPr>
@@ -15112,7 +15110,7 @@
           <p:cNvPr id="46" name="">
             <a:extLst xmlns:a="http://schemas.openxmlformats.org/drawingml/2006/main">
               <a:ext uri="{FF2B5EF4-FFF2-40B4-BE49-F238E27FC236}">
-                <a16:creationId xmlns:a16="http://schemas.microsoft.com/office/drawing/2014/main" id="{D142C5F5-B554-4A49-9725-25E580A84648}"/>
+                <a16:creationId xmlns:a16="http://schemas.microsoft.com/office/drawing/2014/main" id="{E22DF95B-6562-48B8-9A6F-8AB12992FC6C}"/>
               </a:ext>
             </a:extLst>
           </p:cNvPr>
@@ -15147,7 +15145,7 @@
           <p:cNvPr id="47" name="">
             <a:extLst xmlns:a="http://schemas.openxmlformats.org/drawingml/2006/main">
               <a:ext uri="{FF2B5EF4-FFF2-40B4-BE49-F238E27FC236}">
-                <a16:creationId xmlns:a16="http://schemas.microsoft.com/office/drawing/2014/main" id="{50A33501-1520-4610-9151-A2A5668E7D8A}"/>
+                <a16:creationId xmlns:a16="http://schemas.microsoft.com/office/drawing/2014/main" id="{C944B4FF-1B3A-43B6-878B-C5F2BF761D35}"/>
               </a:ext>
             </a:extLst>
           </p:cNvPr>
@@ -15182,7 +15180,7 @@
           <p:cNvPr id="48" name="">
             <a:extLst xmlns:a="http://schemas.openxmlformats.org/drawingml/2006/main">
               <a:ext uri="{FF2B5EF4-FFF2-40B4-BE49-F238E27FC236}">
-                <a16:creationId xmlns:a16="http://schemas.microsoft.com/office/drawing/2014/main" id="{62B5FD8D-C874-48DC-98EB-33A9EED69EE4}"/>
+                <a16:creationId xmlns:a16="http://schemas.microsoft.com/office/drawing/2014/main" id="{BDDB03EB-5559-4DDA-B4C0-E8E196FB60AF}"/>
               </a:ext>
             </a:extLst>
           </p:cNvPr>
@@ -15217,7 +15215,7 @@
           <p:cNvPr id="49" name="">
             <a:extLst xmlns:a="http://schemas.openxmlformats.org/drawingml/2006/main">
               <a:ext uri="{FF2B5EF4-FFF2-40B4-BE49-F238E27FC236}">
-                <a16:creationId xmlns:a16="http://schemas.microsoft.com/office/drawing/2014/main" id="{CB82209C-1873-4FE1-BBE5-5341ADA169BA}"/>
+                <a16:creationId xmlns:a16="http://schemas.microsoft.com/office/drawing/2014/main" id="{21732C41-63E5-4318-865C-E367C5AABA4E}"/>
               </a:ext>
             </a:extLst>
           </p:cNvPr>
@@ -15252,7 +15250,7 @@
           <p:cNvPr id="50" name="">
             <a:extLst xmlns:a="http://schemas.openxmlformats.org/drawingml/2006/main">
               <a:ext uri="{FF2B5EF4-FFF2-40B4-BE49-F238E27FC236}">
-                <a16:creationId xmlns:a16="http://schemas.microsoft.com/office/drawing/2014/main" id="{AB8C8CDF-5B4F-4774-89C8-40A431F169AF}"/>
+                <a16:creationId xmlns:a16="http://schemas.microsoft.com/office/drawing/2014/main" id="{65FCA0D8-84F6-43EE-90A2-99A90D8E418C}"/>
               </a:ext>
             </a:extLst>
           </p:cNvPr>
@@ -15316,7 +15314,7 @@
           <p:cNvPr id="51" name="">
             <a:extLst xmlns:a="http://schemas.openxmlformats.org/drawingml/2006/main">
               <a:ext uri="{FF2B5EF4-FFF2-40B4-BE49-F238E27FC236}">
-                <a16:creationId xmlns:a16="http://schemas.microsoft.com/office/drawing/2014/main" id="{287907EA-9C4A-4519-9430-B7F7A93EE185}"/>
+                <a16:creationId xmlns:a16="http://schemas.microsoft.com/office/drawing/2014/main" id="{F2CF669E-F6BE-4E8E-B9C2-DA3263B4F090}"/>
               </a:ext>
             </a:extLst>
           </p:cNvPr>
@@ -15380,7 +15378,7 @@
           <p:cNvPr id="52" name="">
             <a:extLst xmlns:a="http://schemas.openxmlformats.org/drawingml/2006/main">
               <a:ext uri="{FF2B5EF4-FFF2-40B4-BE49-F238E27FC236}">
-                <a16:creationId xmlns:a16="http://schemas.microsoft.com/office/drawing/2014/main" id="{F7836C1F-0DAF-4D70-9203-767265A4CB65}"/>
+                <a16:creationId xmlns:a16="http://schemas.microsoft.com/office/drawing/2014/main" id="{FDF4B5AD-7EB2-4A7A-A7D4-8BE80EF91E71}"/>
               </a:ext>
             </a:extLst>
           </p:cNvPr>
@@ -15442,7 +15440,7 @@
     </p:spTree>
     <p:extLst>
       <p:ext uri="{BB962C8B-B14F-4D97-AF65-F5344CB8AC3E}">
-        <p14:creationId xmlns:p14="http://schemas.microsoft.com/office/powerpoint/2010/main" val="236595757"/>
+        <p14:creationId xmlns:p14="http://schemas.microsoft.com/office/powerpoint/2010/main" val="728973564"/>
       </p:ext>
     </p:extLst>
   </p:cSld>
@@ -15466,7 +15464,7 @@
           <p:cNvPr id="1" name="">
             <a:extLst xmlns:a="http://schemas.openxmlformats.org/drawingml/2006/main">
               <a:ext uri="{FF2B5EF4-FFF2-40B4-BE49-F238E27FC236}">
-                <a16:creationId xmlns:a16="http://schemas.microsoft.com/office/drawing/2014/main" id="{0A91CA1F-4FBF-4FE3-A996-EB7A65B39D0B}"/>
+                <a16:creationId xmlns:a16="http://schemas.microsoft.com/office/drawing/2014/main" id="{3F80B1F9-6B62-4EE8-80AA-BD5739C18898}"/>
               </a:ext>
             </a:extLst>
           </p:cNvPr>
@@ -15501,7 +15499,7 @@
           <p:cNvPr id="2" name="">
             <a:extLst xmlns:a="http://schemas.openxmlformats.org/drawingml/2006/main">
               <a:ext uri="{FF2B5EF4-FFF2-40B4-BE49-F238E27FC236}">
-                <a16:creationId xmlns:a16="http://schemas.microsoft.com/office/drawing/2014/main" id="{880D3138-1F02-48FD-AD99-B11F59B9DAB2}"/>
+                <a16:creationId xmlns:a16="http://schemas.microsoft.com/office/drawing/2014/main" id="{E458F242-AC69-4830-B03F-B718643F006C}"/>
               </a:ext>
             </a:extLst>
           </p:cNvPr>
@@ -15536,7 +15534,7 @@
           <p:cNvPr id="3" name="">
             <a:extLst xmlns:a="http://schemas.openxmlformats.org/drawingml/2006/main">
               <a:ext uri="{FF2B5EF4-FFF2-40B4-BE49-F238E27FC236}">
-                <a16:creationId xmlns:a16="http://schemas.microsoft.com/office/drawing/2014/main" id="{A81DE8FF-5338-4BC9-9B91-290DE44D84F8}"/>
+                <a16:creationId xmlns:a16="http://schemas.microsoft.com/office/drawing/2014/main" id="{BD05CCFF-930B-406A-8B9B-B65B7FCF32E4}"/>
               </a:ext>
             </a:extLst>
           </p:cNvPr>
@@ -15571,7 +15569,7 @@
           <p:cNvPr id="4" name="kicker-05-marker">
             <a:extLst xmlns:a="http://schemas.openxmlformats.org/drawingml/2006/main">
               <a:ext uri="{FF2B5EF4-FFF2-40B4-BE49-F238E27FC236}">
-                <a16:creationId xmlns:a16="http://schemas.microsoft.com/office/drawing/2014/main" id="{2674BF38-B03D-4C54-A11E-7F6488D15978}"/>
+                <a16:creationId xmlns:a16="http://schemas.microsoft.com/office/drawing/2014/main" id="{A73329AC-D306-4ED9-B493-3991E99768A0}"/>
               </a:ext>
             </a:extLst>
           </p:cNvPr>
@@ -15606,7 +15604,7 @@
           <p:cNvPr id="5" name="kicker-05-label">
             <a:extLst xmlns:a="http://schemas.openxmlformats.org/drawingml/2006/main">
               <a:ext uri="{FF2B5EF4-FFF2-40B4-BE49-F238E27FC236}">
-                <a16:creationId xmlns:a16="http://schemas.microsoft.com/office/drawing/2014/main" id="{DF298468-57A9-4041-AFA6-5DD849A63C59}"/>
+                <a16:creationId xmlns:a16="http://schemas.microsoft.com/office/drawing/2014/main" id="{B984D0CE-2B81-4AB9-9D05-351061F1C23A}"/>
               </a:ext>
             </a:extLst>
           </p:cNvPr>
@@ -15670,7 +15668,7 @@
           <p:cNvPr id="6" name="">
             <a:extLst xmlns:a="http://schemas.openxmlformats.org/drawingml/2006/main">
               <a:ext uri="{FF2B5EF4-FFF2-40B4-BE49-F238E27FC236}">
-                <a16:creationId xmlns:a16="http://schemas.microsoft.com/office/drawing/2014/main" id="{DF834653-9F1C-4711-BB73-632D8973EE7A}"/>
+                <a16:creationId xmlns:a16="http://schemas.microsoft.com/office/drawing/2014/main" id="{319F386D-555E-4C2F-853A-43016A6D1218}"/>
               </a:ext>
             </a:extLst>
           </p:cNvPr>
@@ -15734,7 +15732,7 @@
           <p:cNvPr id="7" name="">
             <a:extLst xmlns:a="http://schemas.openxmlformats.org/drawingml/2006/main">
               <a:ext uri="{FF2B5EF4-FFF2-40B4-BE49-F238E27FC236}">
-                <a16:creationId xmlns:a16="http://schemas.microsoft.com/office/drawing/2014/main" id="{A2A512E9-0E0A-4E53-9E92-825914EF5D42}"/>
+                <a16:creationId xmlns:a16="http://schemas.microsoft.com/office/drawing/2014/main" id="{D27191D0-6A9F-463D-9A96-51AEC8A09413}"/>
               </a:ext>
             </a:extLst>
           </p:cNvPr>
@@ -15767,7 +15765,7 @@
           <p:cNvPr id="8" name="">
             <a:extLst xmlns:a="http://schemas.openxmlformats.org/drawingml/2006/main">
               <a:ext uri="{FF2B5EF4-FFF2-40B4-BE49-F238E27FC236}">
-                <a16:creationId xmlns:a16="http://schemas.microsoft.com/office/drawing/2014/main" id="{2DE7365C-2C8A-4AA5-B8CC-87ED3DDA5C6D}"/>
+                <a16:creationId xmlns:a16="http://schemas.microsoft.com/office/drawing/2014/main" id="{454C6157-32DB-4D70-B2DD-B65DC6B45F5C}"/>
               </a:ext>
             </a:extLst>
           </p:cNvPr>
@@ -15802,7 +15800,7 @@
           <p:cNvPr id="9" name="">
             <a:extLst xmlns:a="http://schemas.openxmlformats.org/drawingml/2006/main">
               <a:ext uri="{FF2B5EF4-FFF2-40B4-BE49-F238E27FC236}">
-                <a16:creationId xmlns:a16="http://schemas.microsoft.com/office/drawing/2014/main" id="{8116FF45-76E6-4ACB-9B4D-681B9BE90E79}"/>
+                <a16:creationId xmlns:a16="http://schemas.microsoft.com/office/drawing/2014/main" id="{832E7E0C-C603-484D-99B9-EDB4E75325EF}"/>
               </a:ext>
             </a:extLst>
           </p:cNvPr>
@@ -15866,7 +15864,7 @@
           <p:cNvPr id="10" name="">
             <a:extLst xmlns:a="http://schemas.openxmlformats.org/drawingml/2006/main">
               <a:ext uri="{FF2B5EF4-FFF2-40B4-BE49-F238E27FC236}">
-                <a16:creationId xmlns:a16="http://schemas.microsoft.com/office/drawing/2014/main" id="{9AC234C0-EA57-4DA4-BA71-F41CD59D9249}"/>
+                <a16:creationId xmlns:a16="http://schemas.microsoft.com/office/drawing/2014/main" id="{7ACE3AE4-F23F-42A5-9CA0-08699159BCF0}"/>
               </a:ext>
             </a:extLst>
           </p:cNvPr>
@@ -15930,7 +15928,7 @@
           <p:cNvPr id="11" name="">
             <a:extLst xmlns:a="http://schemas.openxmlformats.org/drawingml/2006/main">
               <a:ext uri="{FF2B5EF4-FFF2-40B4-BE49-F238E27FC236}">
-                <a16:creationId xmlns:a16="http://schemas.microsoft.com/office/drawing/2014/main" id="{C89488ED-DF02-4FE5-A0D6-0F899455AE57}"/>
+                <a16:creationId xmlns:a16="http://schemas.microsoft.com/office/drawing/2014/main" id="{37875A7E-D177-43B5-A782-AF80D239DCB8}"/>
               </a:ext>
             </a:extLst>
           </p:cNvPr>
@@ -15963,7 +15961,7 @@
           <p:cNvPr id="12" name="">
             <a:extLst xmlns:a="http://schemas.openxmlformats.org/drawingml/2006/main">
               <a:ext uri="{FF2B5EF4-FFF2-40B4-BE49-F238E27FC236}">
-                <a16:creationId xmlns:a16="http://schemas.microsoft.com/office/drawing/2014/main" id="{1955C68E-F6F6-4611-943B-C7273EF9FA03}"/>
+                <a16:creationId xmlns:a16="http://schemas.microsoft.com/office/drawing/2014/main" id="{A4B27E9C-9DDC-4E61-AD98-6E9536E358D1}"/>
               </a:ext>
             </a:extLst>
           </p:cNvPr>
@@ -15998,7 +15996,7 @@
           <p:cNvPr id="13" name="">
             <a:extLst xmlns:a="http://schemas.openxmlformats.org/drawingml/2006/main">
               <a:ext uri="{FF2B5EF4-FFF2-40B4-BE49-F238E27FC236}">
-                <a16:creationId xmlns:a16="http://schemas.microsoft.com/office/drawing/2014/main" id="{CF94BA38-77BF-48F2-A94E-A88C2D882044}"/>
+                <a16:creationId xmlns:a16="http://schemas.microsoft.com/office/drawing/2014/main" id="{3DCA9670-D174-4074-8EA4-A044610AD49D}"/>
               </a:ext>
             </a:extLst>
           </p:cNvPr>
@@ -16062,7 +16060,7 @@
           <p:cNvPr id="14" name="">
             <a:extLst xmlns:a="http://schemas.openxmlformats.org/drawingml/2006/main">
               <a:ext uri="{FF2B5EF4-FFF2-40B4-BE49-F238E27FC236}">
-                <a16:creationId xmlns:a16="http://schemas.microsoft.com/office/drawing/2014/main" id="{5C6CAA01-E022-4F33-8745-3819476436D5}"/>
+                <a16:creationId xmlns:a16="http://schemas.microsoft.com/office/drawing/2014/main" id="{982A7FE3-CC86-46B0-8497-08B86EDEC284}"/>
               </a:ext>
             </a:extLst>
           </p:cNvPr>
@@ -16126,7 +16124,7 @@
           <p:cNvPr id="15" name="">
             <a:extLst xmlns:a="http://schemas.openxmlformats.org/drawingml/2006/main">
               <a:ext uri="{FF2B5EF4-FFF2-40B4-BE49-F238E27FC236}">
-                <a16:creationId xmlns:a16="http://schemas.microsoft.com/office/drawing/2014/main" id="{DE041A58-C5F6-488A-ACDB-41EB2478C426}"/>
+                <a16:creationId xmlns:a16="http://schemas.microsoft.com/office/drawing/2014/main" id="{BB6C2519-B729-4B35-9425-481131159849}"/>
               </a:ext>
             </a:extLst>
           </p:cNvPr>
@@ -16159,7 +16157,7 @@
           <p:cNvPr id="16" name="">
             <a:extLst xmlns:a="http://schemas.openxmlformats.org/drawingml/2006/main">
               <a:ext uri="{FF2B5EF4-FFF2-40B4-BE49-F238E27FC236}">
-                <a16:creationId xmlns:a16="http://schemas.microsoft.com/office/drawing/2014/main" id="{D77ACC72-0021-4031-B1C5-D4B698E43F5E}"/>
+                <a16:creationId xmlns:a16="http://schemas.microsoft.com/office/drawing/2014/main" id="{3059E7ED-C620-4A10-AE3A-801771FC127E}"/>
               </a:ext>
             </a:extLst>
           </p:cNvPr>
@@ -16213,7 +16211,7 @@
                 <a:ea typeface="Aptos"/>
                 <a:cs typeface="Aptos"/>
               </a:rPr>
-              <a:t>Recurring instructor check: sales impact / signal / RevOps field / buyer content / AI risk / industrial failure mode</a:t>
+              <a:t>Recurring instructor check: sales impact / signal / RevOps field / buyer content / review risk / industrial failure mode</a:t>
             </a:r>
           </a:p>
         </p:txBody>
@@ -16223,7 +16221,7 @@
           <p:cNvPr id="17" name="">
             <a:extLst xmlns:a="http://schemas.openxmlformats.org/drawingml/2006/main">
               <a:ext uri="{FF2B5EF4-FFF2-40B4-BE49-F238E27FC236}">
-                <a16:creationId xmlns:a16="http://schemas.microsoft.com/office/drawing/2014/main" id="{74154C38-6FBB-499B-A584-37507B81854E}"/>
+                <a16:creationId xmlns:a16="http://schemas.microsoft.com/office/drawing/2014/main" id="{2FBF14F0-38F4-4978-9309-A856A3143333}"/>
               </a:ext>
             </a:extLst>
           </p:cNvPr>
@@ -16258,7 +16256,7 @@
           <p:cNvPr id="18" name="">
             <a:extLst xmlns:a="http://schemas.openxmlformats.org/drawingml/2006/main">
               <a:ext uri="{FF2B5EF4-FFF2-40B4-BE49-F238E27FC236}">
-                <a16:creationId xmlns:a16="http://schemas.microsoft.com/office/drawing/2014/main" id="{24F5063C-68FE-44FF-B865-ACC112F7336C}"/>
+                <a16:creationId xmlns:a16="http://schemas.microsoft.com/office/drawing/2014/main" id="{745F8662-5074-4F9E-AFD3-D9C78608C90F}"/>
               </a:ext>
             </a:extLst>
           </p:cNvPr>
@@ -16322,7 +16320,7 @@
           <p:cNvPr id="19" name="">
             <a:extLst xmlns:a="http://schemas.openxmlformats.org/drawingml/2006/main">
               <a:ext uri="{FF2B5EF4-FFF2-40B4-BE49-F238E27FC236}">
-                <a16:creationId xmlns:a16="http://schemas.microsoft.com/office/drawing/2014/main" id="{842408DF-DDBA-4D25-A69E-5EBD17A5C180}"/>
+                <a16:creationId xmlns:a16="http://schemas.microsoft.com/office/drawing/2014/main" id="{5903B3EC-0A80-45F8-A146-DADDCA3D406B}"/>
               </a:ext>
             </a:extLst>
           </p:cNvPr>
@@ -16386,7 +16384,7 @@
           <p:cNvPr id="20" name="">
             <a:extLst xmlns:a="http://schemas.openxmlformats.org/drawingml/2006/main">
               <a:ext uri="{FF2B5EF4-FFF2-40B4-BE49-F238E27FC236}">
-                <a16:creationId xmlns:a16="http://schemas.microsoft.com/office/drawing/2014/main" id="{1820D0D0-5C29-450D-9252-0D99D0C7A853}"/>
+                <a16:creationId xmlns:a16="http://schemas.microsoft.com/office/drawing/2014/main" id="{86C59249-8870-4C9D-A4D7-6404AC4C56D1}"/>
               </a:ext>
             </a:extLst>
           </p:cNvPr>
@@ -16448,7 +16446,7 @@
     </p:spTree>
     <p:extLst>
       <p:ext uri="{BB962C8B-B14F-4D97-AF65-F5344CB8AC3E}">
-        <p14:creationId xmlns:p14="http://schemas.microsoft.com/office/powerpoint/2010/main" val="1795136742"/>
+        <p14:creationId xmlns:p14="http://schemas.microsoft.com/office/powerpoint/2010/main" val="1543033310"/>
       </p:ext>
     </p:extLst>
   </p:cSld>
@@ -16472,7 +16470,7 @@
           <p:cNvPr id="1" name="">
             <a:extLst xmlns:a="http://schemas.openxmlformats.org/drawingml/2006/main">
               <a:ext uri="{FF2B5EF4-FFF2-40B4-BE49-F238E27FC236}">
-                <a16:creationId xmlns:a16="http://schemas.microsoft.com/office/drawing/2014/main" id="{85960E54-AF60-4177-98DA-582942E6D55B}"/>
+                <a16:creationId xmlns:a16="http://schemas.microsoft.com/office/drawing/2014/main" id="{2C08BCA4-EABD-4886-8761-27B762DBB6C0}"/>
               </a:ext>
             </a:extLst>
           </p:cNvPr>
@@ -16507,7 +16505,7 @@
           <p:cNvPr id="2" name="">
             <a:extLst xmlns:a="http://schemas.openxmlformats.org/drawingml/2006/main">
               <a:ext uri="{FF2B5EF4-FFF2-40B4-BE49-F238E27FC236}">
-                <a16:creationId xmlns:a16="http://schemas.microsoft.com/office/drawing/2014/main" id="{91DAAC57-8F75-4BE9-9BBD-EE1B70FF1F28}"/>
+                <a16:creationId xmlns:a16="http://schemas.microsoft.com/office/drawing/2014/main" id="{487541EF-F179-4C0F-B7F9-A7E50421F4EF}"/>
               </a:ext>
             </a:extLst>
           </p:cNvPr>
@@ -16542,7 +16540,7 @@
           <p:cNvPr id="3" name="">
             <a:extLst xmlns:a="http://schemas.openxmlformats.org/drawingml/2006/main">
               <a:ext uri="{FF2B5EF4-FFF2-40B4-BE49-F238E27FC236}">
-                <a16:creationId xmlns:a16="http://schemas.microsoft.com/office/drawing/2014/main" id="{645D7E37-7C41-4907-96F5-13CDF5B105AA}"/>
+                <a16:creationId xmlns:a16="http://schemas.microsoft.com/office/drawing/2014/main" id="{9454AC85-F883-4842-A328-CEAA8464EEC4}"/>
               </a:ext>
             </a:extLst>
           </p:cNvPr>
@@ -16577,7 +16575,7 @@
           <p:cNvPr id="4" name="kicker-05-marker">
             <a:extLst xmlns:a="http://schemas.openxmlformats.org/drawingml/2006/main">
               <a:ext uri="{FF2B5EF4-FFF2-40B4-BE49-F238E27FC236}">
-                <a16:creationId xmlns:a16="http://schemas.microsoft.com/office/drawing/2014/main" id="{F5511C96-3ECD-4DA5-998E-3CD3627BDFFA}"/>
+                <a16:creationId xmlns:a16="http://schemas.microsoft.com/office/drawing/2014/main" id="{C11AFA27-3906-4E6E-830C-FD61508819E6}"/>
               </a:ext>
             </a:extLst>
           </p:cNvPr>
@@ -16612,7 +16610,7 @@
           <p:cNvPr id="5" name="kicker-05-label">
             <a:extLst xmlns:a="http://schemas.openxmlformats.org/drawingml/2006/main">
               <a:ext uri="{FF2B5EF4-FFF2-40B4-BE49-F238E27FC236}">
-                <a16:creationId xmlns:a16="http://schemas.microsoft.com/office/drawing/2014/main" id="{42BB7D1D-FB50-4F31-B96D-9AFD2A488F4B}"/>
+                <a16:creationId xmlns:a16="http://schemas.microsoft.com/office/drawing/2014/main" id="{8135E594-A928-4AAA-9C5A-1B11E37B750C}"/>
               </a:ext>
             </a:extLst>
           </p:cNvPr>
@@ -16676,7 +16674,7 @@
           <p:cNvPr id="6" name="">
             <a:extLst xmlns:a="http://schemas.openxmlformats.org/drawingml/2006/main">
               <a:ext uri="{FF2B5EF4-FFF2-40B4-BE49-F238E27FC236}">
-                <a16:creationId xmlns:a16="http://schemas.microsoft.com/office/drawing/2014/main" id="{9BE99462-683C-429F-A982-4EDB315580EB}"/>
+                <a16:creationId xmlns:a16="http://schemas.microsoft.com/office/drawing/2014/main" id="{3664EEE6-8799-4094-948F-5700E9346415}"/>
               </a:ext>
             </a:extLst>
           </p:cNvPr>
@@ -16740,7 +16738,7 @@
           <p:cNvPr id="7" name="">
             <a:extLst xmlns:a="http://schemas.openxmlformats.org/drawingml/2006/main">
               <a:ext uri="{FF2B5EF4-FFF2-40B4-BE49-F238E27FC236}">
-                <a16:creationId xmlns:a16="http://schemas.microsoft.com/office/drawing/2014/main" id="{54AE44E2-FE34-4267-A818-987E9FDBB318}"/>
+                <a16:creationId xmlns:a16="http://schemas.microsoft.com/office/drawing/2014/main" id="{51CC0BE3-B620-4699-A1B4-2FE2A5E24A8F}"/>
               </a:ext>
             </a:extLst>
           </p:cNvPr>
@@ -16804,7 +16802,7 @@
           <p:cNvPr id="8" name="">
             <a:extLst xmlns:a="http://schemas.openxmlformats.org/drawingml/2006/main">
               <a:ext uri="{FF2B5EF4-FFF2-40B4-BE49-F238E27FC236}">
-                <a16:creationId xmlns:a16="http://schemas.microsoft.com/office/drawing/2014/main" id="{BA3F2B45-ECBB-4189-B02C-5BCF86D4061E}"/>
+                <a16:creationId xmlns:a16="http://schemas.microsoft.com/office/drawing/2014/main" id="{326E50E5-583A-46AE-BF67-99BE1CC0B980}"/>
               </a:ext>
             </a:extLst>
           </p:cNvPr>
@@ -16839,7 +16837,7 @@
           <p:cNvPr id="9" name="">
             <a:extLst xmlns:a="http://schemas.openxmlformats.org/drawingml/2006/main">
               <a:ext uri="{FF2B5EF4-FFF2-40B4-BE49-F238E27FC236}">
-                <a16:creationId xmlns:a16="http://schemas.microsoft.com/office/drawing/2014/main" id="{870C20A5-22C0-44D5-A1E8-63A075CAC72E}"/>
+                <a16:creationId xmlns:a16="http://schemas.microsoft.com/office/drawing/2014/main" id="{DDDB9BFC-F1E3-479A-AB51-81C896F06DB8}"/>
               </a:ext>
             </a:extLst>
           </p:cNvPr>
@@ -16903,7 +16901,7 @@
           <p:cNvPr id="10" name="">
             <a:extLst xmlns:a="http://schemas.openxmlformats.org/drawingml/2006/main">
               <a:ext uri="{FF2B5EF4-FFF2-40B4-BE49-F238E27FC236}">
-                <a16:creationId xmlns:a16="http://schemas.microsoft.com/office/drawing/2014/main" id="{BFF2C6AB-1318-44FD-9464-B58E7BABD103}"/>
+                <a16:creationId xmlns:a16="http://schemas.microsoft.com/office/drawing/2014/main" id="{7763F44C-5FF3-448B-8C73-6933E109D3D0}"/>
               </a:ext>
             </a:extLst>
           </p:cNvPr>
@@ -16967,7 +16965,7 @@
           <p:cNvPr id="11" name="">
             <a:extLst xmlns:a="http://schemas.openxmlformats.org/drawingml/2006/main">
               <a:ext uri="{FF2B5EF4-FFF2-40B4-BE49-F238E27FC236}">
-                <a16:creationId xmlns:a16="http://schemas.microsoft.com/office/drawing/2014/main" id="{8626D193-9FD6-4F5D-AA70-51D087D61421}"/>
+                <a16:creationId xmlns:a16="http://schemas.microsoft.com/office/drawing/2014/main" id="{6E68B99A-9C2B-414F-9C19-D2B656CA1C34}"/>
               </a:ext>
             </a:extLst>
           </p:cNvPr>
@@ -17031,7 +17029,7 @@
           <p:cNvPr id="12" name="">
             <a:extLst xmlns:a="http://schemas.openxmlformats.org/drawingml/2006/main">
               <a:ext uri="{FF2B5EF4-FFF2-40B4-BE49-F238E27FC236}">
-                <a16:creationId xmlns:a16="http://schemas.microsoft.com/office/drawing/2014/main" id="{8009EFDD-5124-46DE-ABB6-AB877EFB99F3}"/>
+                <a16:creationId xmlns:a16="http://schemas.microsoft.com/office/drawing/2014/main" id="{719AEDD4-BD39-483C-B778-1440E1AC8E67}"/>
               </a:ext>
             </a:extLst>
           </p:cNvPr>
@@ -17064,7 +17062,7 @@
           <p:cNvPr id="13" name="">
             <a:extLst xmlns:a="http://schemas.openxmlformats.org/drawingml/2006/main">
               <a:ext uri="{FF2B5EF4-FFF2-40B4-BE49-F238E27FC236}">
-                <a16:creationId xmlns:a16="http://schemas.microsoft.com/office/drawing/2014/main" id="{ACDDCB0B-1377-4D72-819D-D5814745F440}"/>
+                <a16:creationId xmlns:a16="http://schemas.microsoft.com/office/drawing/2014/main" id="{CEF4C307-A1C1-48AD-9C42-A51A0EEA11EF}"/>
               </a:ext>
             </a:extLst>
           </p:cNvPr>
@@ -17128,7 +17126,7 @@
           <p:cNvPr id="14" name="">
             <a:extLst xmlns:a="http://schemas.openxmlformats.org/drawingml/2006/main">
               <a:ext uri="{FF2B5EF4-FFF2-40B4-BE49-F238E27FC236}">
-                <a16:creationId xmlns:a16="http://schemas.microsoft.com/office/drawing/2014/main" id="{14E2E883-DF08-49FC-9141-7858E727BFFA}"/>
+                <a16:creationId xmlns:a16="http://schemas.microsoft.com/office/drawing/2014/main" id="{F2A3D2A2-5979-48F0-A211-252AFFBC1EEF}"/>
               </a:ext>
             </a:extLst>
           </p:cNvPr>
@@ -17163,7 +17161,7 @@
           <p:cNvPr id="15" name="">
             <a:extLst xmlns:a="http://schemas.openxmlformats.org/drawingml/2006/main">
               <a:ext uri="{FF2B5EF4-FFF2-40B4-BE49-F238E27FC236}">
-                <a16:creationId xmlns:a16="http://schemas.microsoft.com/office/drawing/2014/main" id="{1E6B58AD-B22D-43C9-B022-5CF123B2A954}"/>
+                <a16:creationId xmlns:a16="http://schemas.microsoft.com/office/drawing/2014/main" id="{F0F73084-643F-4DCF-8433-47244D2F04EA}"/>
               </a:ext>
             </a:extLst>
           </p:cNvPr>
@@ -17227,7 +17225,7 @@
           <p:cNvPr id="16" name="">
             <a:extLst xmlns:a="http://schemas.openxmlformats.org/drawingml/2006/main">
               <a:ext uri="{FF2B5EF4-FFF2-40B4-BE49-F238E27FC236}">
-                <a16:creationId xmlns:a16="http://schemas.microsoft.com/office/drawing/2014/main" id="{79B9F8FD-C4C8-4657-A50F-6AE20EB6B36A}"/>
+                <a16:creationId xmlns:a16="http://schemas.microsoft.com/office/drawing/2014/main" id="{CF388127-6E47-4792-A525-963A8FC1FAFF}"/>
               </a:ext>
             </a:extLst>
           </p:cNvPr>
@@ -17260,7 +17258,7 @@
           <p:cNvPr id="17" name="">
             <a:extLst xmlns:a="http://schemas.openxmlformats.org/drawingml/2006/main">
               <a:ext uri="{FF2B5EF4-FFF2-40B4-BE49-F238E27FC236}">
-                <a16:creationId xmlns:a16="http://schemas.microsoft.com/office/drawing/2014/main" id="{0DA4D7D2-CB39-4906-8E09-5BEABD33A021}"/>
+                <a16:creationId xmlns:a16="http://schemas.microsoft.com/office/drawing/2014/main" id="{320164D4-DC02-4095-A8D7-9697B7FF9B81}"/>
               </a:ext>
             </a:extLst>
           </p:cNvPr>
@@ -17295,7 +17293,7 @@
           <p:cNvPr id="18" name="">
             <a:extLst xmlns:a="http://schemas.openxmlformats.org/drawingml/2006/main">
               <a:ext uri="{FF2B5EF4-FFF2-40B4-BE49-F238E27FC236}">
-                <a16:creationId xmlns:a16="http://schemas.microsoft.com/office/drawing/2014/main" id="{258695D3-737F-4D79-A6F8-2FE9981DD5C2}"/>
+                <a16:creationId xmlns:a16="http://schemas.microsoft.com/office/drawing/2014/main" id="{30CFA0A2-2A84-47B8-BE08-2730F3338830}"/>
               </a:ext>
             </a:extLst>
           </p:cNvPr>
@@ -17359,7 +17357,7 @@
           <p:cNvPr id="19" name="">
             <a:extLst xmlns:a="http://schemas.openxmlformats.org/drawingml/2006/main">
               <a:ext uri="{FF2B5EF4-FFF2-40B4-BE49-F238E27FC236}">
-                <a16:creationId xmlns:a16="http://schemas.microsoft.com/office/drawing/2014/main" id="{FCF17A75-F994-46E2-B229-F6F534B7A90D}"/>
+                <a16:creationId xmlns:a16="http://schemas.microsoft.com/office/drawing/2014/main" id="{DC224684-1B1F-4ECB-8A6F-3A4C938048D3}"/>
               </a:ext>
             </a:extLst>
           </p:cNvPr>
@@ -17394,7 +17392,7 @@
           <p:cNvPr id="20" name="">
             <a:extLst xmlns:a="http://schemas.openxmlformats.org/drawingml/2006/main">
               <a:ext uri="{FF2B5EF4-FFF2-40B4-BE49-F238E27FC236}">
-                <a16:creationId xmlns:a16="http://schemas.microsoft.com/office/drawing/2014/main" id="{561D36DF-739B-407E-9252-CF86DF071794}"/>
+                <a16:creationId xmlns:a16="http://schemas.microsoft.com/office/drawing/2014/main" id="{3588AD94-88E3-49E6-A9EF-AA0C27028665}"/>
               </a:ext>
             </a:extLst>
           </p:cNvPr>
@@ -17458,7 +17456,7 @@
           <p:cNvPr id="21" name="">
             <a:extLst xmlns:a="http://schemas.openxmlformats.org/drawingml/2006/main">
               <a:ext uri="{FF2B5EF4-FFF2-40B4-BE49-F238E27FC236}">
-                <a16:creationId xmlns:a16="http://schemas.microsoft.com/office/drawing/2014/main" id="{C146BBF8-EC43-48E4-8D61-E34BD2D880C3}"/>
+                <a16:creationId xmlns:a16="http://schemas.microsoft.com/office/drawing/2014/main" id="{428FA756-2498-4FDB-8202-CC3439BCC9CA}"/>
               </a:ext>
             </a:extLst>
           </p:cNvPr>
@@ -17493,7 +17491,7 @@
           <p:cNvPr id="22" name="">
             <a:extLst xmlns:a="http://schemas.openxmlformats.org/drawingml/2006/main">
               <a:ext uri="{FF2B5EF4-FFF2-40B4-BE49-F238E27FC236}">
-                <a16:creationId xmlns:a16="http://schemas.microsoft.com/office/drawing/2014/main" id="{C0BBC270-74D6-44FC-8953-441BED9AFC1C}"/>
+                <a16:creationId xmlns:a16="http://schemas.microsoft.com/office/drawing/2014/main" id="{07FB2318-9BFD-4576-B537-2652051FFDBB}"/>
               </a:ext>
             </a:extLst>
           </p:cNvPr>
@@ -17557,7 +17555,7 @@
           <p:cNvPr id="23" name="">
             <a:extLst xmlns:a="http://schemas.openxmlformats.org/drawingml/2006/main">
               <a:ext uri="{FF2B5EF4-FFF2-40B4-BE49-F238E27FC236}">
-                <a16:creationId xmlns:a16="http://schemas.microsoft.com/office/drawing/2014/main" id="{48B9F36C-F315-4F2A-A2F1-6CB624E9ECB6}"/>
+                <a16:creationId xmlns:a16="http://schemas.microsoft.com/office/drawing/2014/main" id="{8B0AC17C-FF0A-4E87-A878-CC43C366939D}"/>
               </a:ext>
             </a:extLst>
           </p:cNvPr>
@@ -17592,7 +17590,7 @@
           <p:cNvPr id="24" name="">
             <a:extLst xmlns:a="http://schemas.openxmlformats.org/drawingml/2006/main">
               <a:ext uri="{FF2B5EF4-FFF2-40B4-BE49-F238E27FC236}">
-                <a16:creationId xmlns:a16="http://schemas.microsoft.com/office/drawing/2014/main" id="{2C99AF2B-97F8-4EAE-9E4E-F8731A1D2576}"/>
+                <a16:creationId xmlns:a16="http://schemas.microsoft.com/office/drawing/2014/main" id="{4FE61B84-5560-4C34-9332-B01B48FC87C8}"/>
               </a:ext>
             </a:extLst>
           </p:cNvPr>
@@ -17646,7 +17644,7 @@
                 <a:ea typeface="Aptos"/>
                 <a:cs typeface="Aptos"/>
               </a:rPr>
-              <a:t>Keep AI useful but subordinate to human correction.</a:t>
+              <a:t>Keep first drafts subordinate to human correction.</a:t>
             </a:r>
           </a:p>
         </p:txBody>
@@ -17656,7 +17654,7 @@
           <p:cNvPr id="25" name="">
             <a:extLst xmlns:a="http://schemas.openxmlformats.org/drawingml/2006/main">
               <a:ext uri="{FF2B5EF4-FFF2-40B4-BE49-F238E27FC236}">
-                <a16:creationId xmlns:a16="http://schemas.microsoft.com/office/drawing/2014/main" id="{C93A7BD3-4F79-4862-8A62-40F32E0AC919}"/>
+                <a16:creationId xmlns:a16="http://schemas.microsoft.com/office/drawing/2014/main" id="{A762F44D-5B10-46F0-8DAF-7FDD05545BCC}"/>
               </a:ext>
             </a:extLst>
           </p:cNvPr>
@@ -17691,7 +17689,7 @@
           <p:cNvPr id="26" name="">
             <a:extLst xmlns:a="http://schemas.openxmlformats.org/drawingml/2006/main">
               <a:ext uri="{FF2B5EF4-FFF2-40B4-BE49-F238E27FC236}">
-                <a16:creationId xmlns:a16="http://schemas.microsoft.com/office/drawing/2014/main" id="{AC6D85CD-C0E6-42E4-AC01-F4E7286D6F6E}"/>
+                <a16:creationId xmlns:a16="http://schemas.microsoft.com/office/drawing/2014/main" id="{61F1D523-5B1B-4BA0-AEAA-77C449BC1C66}"/>
               </a:ext>
             </a:extLst>
           </p:cNvPr>
@@ -17755,7 +17753,7 @@
           <p:cNvPr id="27" name="">
             <a:extLst xmlns:a="http://schemas.openxmlformats.org/drawingml/2006/main">
               <a:ext uri="{FF2B5EF4-FFF2-40B4-BE49-F238E27FC236}">
-                <a16:creationId xmlns:a16="http://schemas.microsoft.com/office/drawing/2014/main" id="{3CB8A34B-2E1D-45B8-AD3D-B2E69D0A54BF}"/>
+                <a16:creationId xmlns:a16="http://schemas.microsoft.com/office/drawing/2014/main" id="{787E2E7A-D5B1-47E4-9025-2FB30FE36A11}"/>
               </a:ext>
             </a:extLst>
           </p:cNvPr>
@@ -17790,7 +17788,7 @@
           <p:cNvPr id="28" name="">
             <a:extLst xmlns:a="http://schemas.openxmlformats.org/drawingml/2006/main">
               <a:ext uri="{FF2B5EF4-FFF2-40B4-BE49-F238E27FC236}">
-                <a16:creationId xmlns:a16="http://schemas.microsoft.com/office/drawing/2014/main" id="{90468A41-71E7-4323-8DB0-16EE7564EDA2}"/>
+                <a16:creationId xmlns:a16="http://schemas.microsoft.com/office/drawing/2014/main" id="{9D356B69-33DD-4707-BB91-D252A6A803C9}"/>
               </a:ext>
             </a:extLst>
           </p:cNvPr>
@@ -17854,7 +17852,7 @@
           <p:cNvPr id="29" name="">
             <a:extLst xmlns:a="http://schemas.openxmlformats.org/drawingml/2006/main">
               <a:ext uri="{FF2B5EF4-FFF2-40B4-BE49-F238E27FC236}">
-                <a16:creationId xmlns:a16="http://schemas.microsoft.com/office/drawing/2014/main" id="{B9DC07CA-06BF-42D9-A61E-D7BFAD97E77E}"/>
+                <a16:creationId xmlns:a16="http://schemas.microsoft.com/office/drawing/2014/main" id="{C805C649-F61C-4BE7-965D-74FB088ED77E}"/>
               </a:ext>
             </a:extLst>
           </p:cNvPr>
@@ -17918,7 +17916,7 @@
           <p:cNvPr id="30" name="">
             <a:extLst xmlns:a="http://schemas.openxmlformats.org/drawingml/2006/main">
               <a:ext uri="{FF2B5EF4-FFF2-40B4-BE49-F238E27FC236}">
-                <a16:creationId xmlns:a16="http://schemas.microsoft.com/office/drawing/2014/main" id="{64FFA8F2-A269-424D-8068-FEA325EAF06B}"/>
+                <a16:creationId xmlns:a16="http://schemas.microsoft.com/office/drawing/2014/main" id="{0510605A-CADE-4521-92E4-DCFA262F0971}"/>
               </a:ext>
             </a:extLst>
           </p:cNvPr>
@@ -17980,7 +17978,7 @@
     </p:spTree>
     <p:extLst>
       <p:ext uri="{BB962C8B-B14F-4D97-AF65-F5344CB8AC3E}">
-        <p14:creationId xmlns:p14="http://schemas.microsoft.com/office/powerpoint/2010/main" val="377695604"/>
+        <p14:creationId xmlns:p14="http://schemas.microsoft.com/office/powerpoint/2010/main" val="754847324"/>
       </p:ext>
     </p:extLst>
   </p:cSld>
@@ -18004,7 +18002,7 @@
           <p:cNvPr id="1" name="">
             <a:extLst xmlns:a="http://schemas.openxmlformats.org/drawingml/2006/main">
               <a:ext uri="{FF2B5EF4-FFF2-40B4-BE49-F238E27FC236}">
-                <a16:creationId xmlns:a16="http://schemas.microsoft.com/office/drawing/2014/main" id="{4F63342D-D981-417A-A18F-1110999BE1EC}"/>
+                <a16:creationId xmlns:a16="http://schemas.microsoft.com/office/drawing/2014/main" id="{CEE5F4C7-F66F-4839-9C0A-559AA767516B}"/>
               </a:ext>
             </a:extLst>
           </p:cNvPr>
@@ -18039,7 +18037,7 @@
           <p:cNvPr id="2" name="">
             <a:extLst xmlns:a="http://schemas.openxmlformats.org/drawingml/2006/main">
               <a:ext uri="{FF2B5EF4-FFF2-40B4-BE49-F238E27FC236}">
-                <a16:creationId xmlns:a16="http://schemas.microsoft.com/office/drawing/2014/main" id="{923AD4D5-F3A6-4877-911B-9C3A39065374}"/>
+                <a16:creationId xmlns:a16="http://schemas.microsoft.com/office/drawing/2014/main" id="{FE0127A5-0F9D-45C1-B55E-0FC0C69A9F8F}"/>
               </a:ext>
             </a:extLst>
           </p:cNvPr>
@@ -18074,7 +18072,7 @@
           <p:cNvPr id="3" name="">
             <a:extLst xmlns:a="http://schemas.openxmlformats.org/drawingml/2006/main">
               <a:ext uri="{FF2B5EF4-FFF2-40B4-BE49-F238E27FC236}">
-                <a16:creationId xmlns:a16="http://schemas.microsoft.com/office/drawing/2014/main" id="{DA1F6299-E815-4C52-A546-E84052FC3FE6}"/>
+                <a16:creationId xmlns:a16="http://schemas.microsoft.com/office/drawing/2014/main" id="{9462EF9E-1C88-4071-8B33-22AA18175937}"/>
               </a:ext>
             </a:extLst>
           </p:cNvPr>
@@ -18109,7 +18107,7 @@
           <p:cNvPr id="4" name="kicker-05-marker">
             <a:extLst xmlns:a="http://schemas.openxmlformats.org/drawingml/2006/main">
               <a:ext uri="{FF2B5EF4-FFF2-40B4-BE49-F238E27FC236}">
-                <a16:creationId xmlns:a16="http://schemas.microsoft.com/office/drawing/2014/main" id="{D04C297D-A5EA-4AA3-BD62-1627E0162D0B}"/>
+                <a16:creationId xmlns:a16="http://schemas.microsoft.com/office/drawing/2014/main" id="{C4AB0DC6-3A06-4787-BC6F-E657E71E8684}"/>
               </a:ext>
             </a:extLst>
           </p:cNvPr>
@@ -18144,7 +18142,7 @@
           <p:cNvPr id="5" name="kicker-05-label">
             <a:extLst xmlns:a="http://schemas.openxmlformats.org/drawingml/2006/main">
               <a:ext uri="{FF2B5EF4-FFF2-40B4-BE49-F238E27FC236}">
-                <a16:creationId xmlns:a16="http://schemas.microsoft.com/office/drawing/2014/main" id="{02D71586-C7B3-45DA-A8A2-4AE6333F1C68}"/>
+                <a16:creationId xmlns:a16="http://schemas.microsoft.com/office/drawing/2014/main" id="{F38FFC01-F434-408F-B62C-E7105B2EC1CD}"/>
               </a:ext>
             </a:extLst>
           </p:cNvPr>
@@ -18208,7 +18206,7 @@
           <p:cNvPr id="6" name="">
             <a:extLst xmlns:a="http://schemas.openxmlformats.org/drawingml/2006/main">
               <a:ext uri="{FF2B5EF4-FFF2-40B4-BE49-F238E27FC236}">
-                <a16:creationId xmlns:a16="http://schemas.microsoft.com/office/drawing/2014/main" id="{39B5B782-C12F-40BA-8A3C-BF9B13F3784D}"/>
+                <a16:creationId xmlns:a16="http://schemas.microsoft.com/office/drawing/2014/main" id="{B327A559-46D4-4E6A-A126-79C994891DE6}"/>
               </a:ext>
             </a:extLst>
           </p:cNvPr>
@@ -18272,7 +18270,7 @@
           <p:cNvPr id="7" name="">
             <a:extLst xmlns:a="http://schemas.openxmlformats.org/drawingml/2006/main">
               <a:ext uri="{FF2B5EF4-FFF2-40B4-BE49-F238E27FC236}">
-                <a16:creationId xmlns:a16="http://schemas.microsoft.com/office/drawing/2014/main" id="{52067D38-DB9D-4238-8337-006FCE3CE70F}"/>
+                <a16:creationId xmlns:a16="http://schemas.microsoft.com/office/drawing/2014/main" id="{81D13F21-8598-4BA5-8760-45D8398C4B06}"/>
               </a:ext>
             </a:extLst>
           </p:cNvPr>
@@ -18336,7 +18334,7 @@
           <p:cNvPr id="8" name="">
             <a:extLst xmlns:a="http://schemas.openxmlformats.org/drawingml/2006/main">
               <a:ext uri="{FF2B5EF4-FFF2-40B4-BE49-F238E27FC236}">
-                <a16:creationId xmlns:a16="http://schemas.microsoft.com/office/drawing/2014/main" id="{24CCB333-DBDF-4D74-B091-73678F9AE120}"/>
+                <a16:creationId xmlns:a16="http://schemas.microsoft.com/office/drawing/2014/main" id="{B2D6C17A-DFDB-4767-AD98-9CD253AD71FC}"/>
               </a:ext>
             </a:extLst>
           </p:cNvPr>
@@ -18371,7 +18369,7 @@
           <p:cNvPr id="9" name="">
             <a:extLst xmlns:a="http://schemas.openxmlformats.org/drawingml/2006/main">
               <a:ext uri="{FF2B5EF4-FFF2-40B4-BE49-F238E27FC236}">
-                <a16:creationId xmlns:a16="http://schemas.microsoft.com/office/drawing/2014/main" id="{E938B7C9-0614-4783-ADDF-1E84AD634FCD}"/>
+                <a16:creationId xmlns:a16="http://schemas.microsoft.com/office/drawing/2014/main" id="{A32C7F7C-1BC4-4FD7-8805-4BD5416D4DFD}"/>
               </a:ext>
             </a:extLst>
           </p:cNvPr>
@@ -18435,7 +18433,7 @@
           <p:cNvPr id="10" name="">
             <a:extLst xmlns:a="http://schemas.openxmlformats.org/drawingml/2006/main">
               <a:ext uri="{FF2B5EF4-FFF2-40B4-BE49-F238E27FC236}">
-                <a16:creationId xmlns:a16="http://schemas.microsoft.com/office/drawing/2014/main" id="{C5F21734-0B00-479D-B9A1-1BB456F21100}"/>
+                <a16:creationId xmlns:a16="http://schemas.microsoft.com/office/drawing/2014/main" id="{97815C4B-89B9-4963-A8C7-EAEECD7D04C0}"/>
               </a:ext>
             </a:extLst>
           </p:cNvPr>
@@ -18499,7 +18497,7 @@
           <p:cNvPr id="11" name="">
             <a:extLst xmlns:a="http://schemas.openxmlformats.org/drawingml/2006/main">
               <a:ext uri="{FF2B5EF4-FFF2-40B4-BE49-F238E27FC236}">
-                <a16:creationId xmlns:a16="http://schemas.microsoft.com/office/drawing/2014/main" id="{53A1B7B9-592F-4E02-9C6E-E905BD5B3D50}"/>
+                <a16:creationId xmlns:a16="http://schemas.microsoft.com/office/drawing/2014/main" id="{1428CDA5-D75D-46B8-960D-6F601AA88570}"/>
               </a:ext>
             </a:extLst>
           </p:cNvPr>
@@ -18563,7 +18561,7 @@
           <p:cNvPr id="12" name="">
             <a:extLst xmlns:a="http://schemas.openxmlformats.org/drawingml/2006/main">
               <a:ext uri="{FF2B5EF4-FFF2-40B4-BE49-F238E27FC236}">
-                <a16:creationId xmlns:a16="http://schemas.microsoft.com/office/drawing/2014/main" id="{C5938294-5E71-48FE-A1E1-4E7CD83E730E}"/>
+                <a16:creationId xmlns:a16="http://schemas.microsoft.com/office/drawing/2014/main" id="{12D81874-3AC5-4C15-87CA-12924BC9A717}"/>
               </a:ext>
             </a:extLst>
           </p:cNvPr>
@@ -18596,7 +18594,7 @@
           <p:cNvPr id="13" name="">
             <a:extLst xmlns:a="http://schemas.openxmlformats.org/drawingml/2006/main">
               <a:ext uri="{FF2B5EF4-FFF2-40B4-BE49-F238E27FC236}">
-                <a16:creationId xmlns:a16="http://schemas.microsoft.com/office/drawing/2014/main" id="{62645E19-4041-44B6-AC9E-CD6EAC58B114}"/>
+                <a16:creationId xmlns:a16="http://schemas.microsoft.com/office/drawing/2014/main" id="{4BFA2C0E-A6E1-431A-919A-5A5E116289F2}"/>
               </a:ext>
             </a:extLst>
           </p:cNvPr>
@@ -18631,7 +18629,7 @@
           <p:cNvPr id="14" name="">
             <a:extLst xmlns:a="http://schemas.openxmlformats.org/drawingml/2006/main">
               <a:ext uri="{FF2B5EF4-FFF2-40B4-BE49-F238E27FC236}">
-                <a16:creationId xmlns:a16="http://schemas.microsoft.com/office/drawing/2014/main" id="{21A3B270-1926-47EE-9D26-646075B55A2E}"/>
+                <a16:creationId xmlns:a16="http://schemas.microsoft.com/office/drawing/2014/main" id="{B089D68A-7816-4EAF-9CC7-44AFF45BA8E6}"/>
               </a:ext>
             </a:extLst>
           </p:cNvPr>
@@ -18695,7 +18693,7 @@
           <p:cNvPr id="15" name="">
             <a:extLst xmlns:a="http://schemas.openxmlformats.org/drawingml/2006/main">
               <a:ext uri="{FF2B5EF4-FFF2-40B4-BE49-F238E27FC236}">
-                <a16:creationId xmlns:a16="http://schemas.microsoft.com/office/drawing/2014/main" id="{0F4E9F28-38D8-4503-AE34-36F9C5DC894A}"/>
+                <a16:creationId xmlns:a16="http://schemas.microsoft.com/office/drawing/2014/main" id="{DF3E34C8-B624-4930-823D-7F72D1A89409}"/>
               </a:ext>
             </a:extLst>
           </p:cNvPr>
@@ -18730,7 +18728,7 @@
           <p:cNvPr id="16" name="">
             <a:extLst xmlns:a="http://schemas.openxmlformats.org/drawingml/2006/main">
               <a:ext uri="{FF2B5EF4-FFF2-40B4-BE49-F238E27FC236}">
-                <a16:creationId xmlns:a16="http://schemas.microsoft.com/office/drawing/2014/main" id="{1A434871-D28B-4413-8E8F-27D146B774E5}"/>
+                <a16:creationId xmlns:a16="http://schemas.microsoft.com/office/drawing/2014/main" id="{C27E5E76-E4E5-4D74-9133-0F85E28AA106}"/>
               </a:ext>
             </a:extLst>
           </p:cNvPr>
@@ -18794,7 +18792,7 @@
           <p:cNvPr id="17" name="">
             <a:extLst xmlns:a="http://schemas.openxmlformats.org/drawingml/2006/main">
               <a:ext uri="{FF2B5EF4-FFF2-40B4-BE49-F238E27FC236}">
-                <a16:creationId xmlns:a16="http://schemas.microsoft.com/office/drawing/2014/main" id="{87039643-2A87-4D5F-AFBD-A6DA7986CCB3}"/>
+                <a16:creationId xmlns:a16="http://schemas.microsoft.com/office/drawing/2014/main" id="{DEEB4183-C527-452E-8B30-F97272B72DE9}"/>
               </a:ext>
             </a:extLst>
           </p:cNvPr>
@@ -18829,7 +18827,7 @@
           <p:cNvPr id="18" name="">
             <a:extLst xmlns:a="http://schemas.openxmlformats.org/drawingml/2006/main">
               <a:ext uri="{FF2B5EF4-FFF2-40B4-BE49-F238E27FC236}">
-                <a16:creationId xmlns:a16="http://schemas.microsoft.com/office/drawing/2014/main" id="{C8F5FACD-D6F8-4DBA-AFCE-0F0C4C0B4719}"/>
+                <a16:creationId xmlns:a16="http://schemas.microsoft.com/office/drawing/2014/main" id="{5D4E6FB1-9958-4D00-8CAE-EE2CE9697319}"/>
               </a:ext>
             </a:extLst>
           </p:cNvPr>
@@ -18893,7 +18891,7 @@
           <p:cNvPr id="19" name="">
             <a:extLst xmlns:a="http://schemas.openxmlformats.org/drawingml/2006/main">
               <a:ext uri="{FF2B5EF4-FFF2-40B4-BE49-F238E27FC236}">
-                <a16:creationId xmlns:a16="http://schemas.microsoft.com/office/drawing/2014/main" id="{CD5AA814-41F6-4669-B1BA-22FDB1157A00}"/>
+                <a16:creationId xmlns:a16="http://schemas.microsoft.com/office/drawing/2014/main" id="{0B7D19A8-5CCD-479D-AB98-741FB3C42646}"/>
               </a:ext>
             </a:extLst>
           </p:cNvPr>
@@ -18928,7 +18926,7 @@
           <p:cNvPr id="20" name="">
             <a:extLst xmlns:a="http://schemas.openxmlformats.org/drawingml/2006/main">
               <a:ext uri="{FF2B5EF4-FFF2-40B4-BE49-F238E27FC236}">
-                <a16:creationId xmlns:a16="http://schemas.microsoft.com/office/drawing/2014/main" id="{0826966A-F19E-4CA4-ABD9-49391AC8D05C}"/>
+                <a16:creationId xmlns:a16="http://schemas.microsoft.com/office/drawing/2014/main" id="{4F8B7C29-C809-4EED-857A-6A6702314962}"/>
               </a:ext>
             </a:extLst>
           </p:cNvPr>
@@ -18992,7 +18990,7 @@
           <p:cNvPr id="21" name="">
             <a:extLst xmlns:a="http://schemas.openxmlformats.org/drawingml/2006/main">
               <a:ext uri="{FF2B5EF4-FFF2-40B4-BE49-F238E27FC236}">
-                <a16:creationId xmlns:a16="http://schemas.microsoft.com/office/drawing/2014/main" id="{CB47E2B7-DAB9-4C6D-AF44-09CC51292A7D}"/>
+                <a16:creationId xmlns:a16="http://schemas.microsoft.com/office/drawing/2014/main" id="{D2BAB12B-1220-4EE0-9357-5731274187D1}"/>
               </a:ext>
             </a:extLst>
           </p:cNvPr>
@@ -19027,7 +19025,7 @@
           <p:cNvPr id="22" name="">
             <a:extLst xmlns:a="http://schemas.openxmlformats.org/drawingml/2006/main">
               <a:ext uri="{FF2B5EF4-FFF2-40B4-BE49-F238E27FC236}">
-                <a16:creationId xmlns:a16="http://schemas.microsoft.com/office/drawing/2014/main" id="{385B3667-8C47-49D5-B10C-5B06CBEAD4F5}"/>
+                <a16:creationId xmlns:a16="http://schemas.microsoft.com/office/drawing/2014/main" id="{30F1523F-1538-47CC-A272-976FD7D4BCA0}"/>
               </a:ext>
             </a:extLst>
           </p:cNvPr>
@@ -19091,7 +19089,7 @@
           <p:cNvPr id="23" name="">
             <a:extLst xmlns:a="http://schemas.openxmlformats.org/drawingml/2006/main">
               <a:ext uri="{FF2B5EF4-FFF2-40B4-BE49-F238E27FC236}">
-                <a16:creationId xmlns:a16="http://schemas.microsoft.com/office/drawing/2014/main" id="{37AD314E-D2D1-446F-8FE5-87BAB52D7E35}"/>
+                <a16:creationId xmlns:a16="http://schemas.microsoft.com/office/drawing/2014/main" id="{25FEF433-00B1-4981-B7A8-1B476F0E3EA4}"/>
               </a:ext>
             </a:extLst>
           </p:cNvPr>
@@ -19124,7 +19122,7 @@
           <p:cNvPr id="24" name="">
             <a:extLst xmlns:a="http://schemas.openxmlformats.org/drawingml/2006/main">
               <a:ext uri="{FF2B5EF4-FFF2-40B4-BE49-F238E27FC236}">
-                <a16:creationId xmlns:a16="http://schemas.microsoft.com/office/drawing/2014/main" id="{E66A34B6-11EB-4A72-9C8C-342D8F52F3A4}"/>
+                <a16:creationId xmlns:a16="http://schemas.microsoft.com/office/drawing/2014/main" id="{D2430E44-3EC8-4B24-A5E5-F7DC5F360997}"/>
               </a:ext>
             </a:extLst>
           </p:cNvPr>
@@ -19159,7 +19157,7 @@
           <p:cNvPr id="25" name="">
             <a:extLst xmlns:a="http://schemas.openxmlformats.org/drawingml/2006/main">
               <a:ext uri="{FF2B5EF4-FFF2-40B4-BE49-F238E27FC236}">
-                <a16:creationId xmlns:a16="http://schemas.microsoft.com/office/drawing/2014/main" id="{48024E6C-A2B2-4A83-BC96-1F949F39C297}"/>
+                <a16:creationId xmlns:a16="http://schemas.microsoft.com/office/drawing/2014/main" id="{56769978-A8BB-4BCA-9398-F70192B5851E}"/>
               </a:ext>
             </a:extLst>
           </p:cNvPr>
@@ -19223,7 +19221,7 @@
           <p:cNvPr id="26" name="">
             <a:extLst xmlns:a="http://schemas.openxmlformats.org/drawingml/2006/main">
               <a:ext uri="{FF2B5EF4-FFF2-40B4-BE49-F238E27FC236}">
-                <a16:creationId xmlns:a16="http://schemas.microsoft.com/office/drawing/2014/main" id="{C3B6AB52-8AB7-4E3E-8403-43D203F75D51}"/>
+                <a16:creationId xmlns:a16="http://schemas.microsoft.com/office/drawing/2014/main" id="{FE5A7766-C5D4-487B-AF6A-45D152A48885}"/>
               </a:ext>
             </a:extLst>
           </p:cNvPr>
@@ -19256,7 +19254,7 @@
           <p:cNvPr id="27" name="">
             <a:extLst xmlns:a="http://schemas.openxmlformats.org/drawingml/2006/main">
               <a:ext uri="{FF2B5EF4-FFF2-40B4-BE49-F238E27FC236}">
-                <a16:creationId xmlns:a16="http://schemas.microsoft.com/office/drawing/2014/main" id="{894028DB-8E48-44EA-AAA9-3736492422BA}"/>
+                <a16:creationId xmlns:a16="http://schemas.microsoft.com/office/drawing/2014/main" id="{584AB971-0EE4-4DC6-AF63-C4269069C5A4}"/>
               </a:ext>
             </a:extLst>
           </p:cNvPr>
@@ -19320,7 +19318,7 @@
           <p:cNvPr id="28" name="">
             <a:extLst xmlns:a="http://schemas.openxmlformats.org/drawingml/2006/main">
               <a:ext uri="{FF2B5EF4-FFF2-40B4-BE49-F238E27FC236}">
-                <a16:creationId xmlns:a16="http://schemas.microsoft.com/office/drawing/2014/main" id="{4FEFE43A-83DB-4A59-971F-45C9DCBFBF28}"/>
+                <a16:creationId xmlns:a16="http://schemas.microsoft.com/office/drawing/2014/main" id="{D4712D91-6FB2-4AD0-A3E2-CEBBDA239454}"/>
               </a:ext>
             </a:extLst>
           </p:cNvPr>
@@ -19384,7 +19382,7 @@
           <p:cNvPr id="29" name="">
             <a:extLst xmlns:a="http://schemas.openxmlformats.org/drawingml/2006/main">
               <a:ext uri="{FF2B5EF4-FFF2-40B4-BE49-F238E27FC236}">
-                <a16:creationId xmlns:a16="http://schemas.microsoft.com/office/drawing/2014/main" id="{D8DE363A-6487-4552-8C72-C086BE0913D0}"/>
+                <a16:creationId xmlns:a16="http://schemas.microsoft.com/office/drawing/2014/main" id="{C89F4815-BBB1-43AB-9428-BD900C9AF2F9}"/>
               </a:ext>
             </a:extLst>
           </p:cNvPr>
@@ -19417,7 +19415,7 @@
           <p:cNvPr id="30" name="">
             <a:extLst xmlns:a="http://schemas.openxmlformats.org/drawingml/2006/main">
               <a:ext uri="{FF2B5EF4-FFF2-40B4-BE49-F238E27FC236}">
-                <a16:creationId xmlns:a16="http://schemas.microsoft.com/office/drawing/2014/main" id="{5FBD1112-A86A-4971-8013-D681D275A6C7}"/>
+                <a16:creationId xmlns:a16="http://schemas.microsoft.com/office/drawing/2014/main" id="{C9131CDE-D1B5-47A2-84E2-42FFB454225B}"/>
               </a:ext>
             </a:extLst>
           </p:cNvPr>
@@ -19481,7 +19479,7 @@
           <p:cNvPr id="31" name="">
             <a:extLst xmlns:a="http://schemas.openxmlformats.org/drawingml/2006/main">
               <a:ext uri="{FF2B5EF4-FFF2-40B4-BE49-F238E27FC236}">
-                <a16:creationId xmlns:a16="http://schemas.microsoft.com/office/drawing/2014/main" id="{3A03CA0D-0150-4D51-8A06-F87568F745F8}"/>
+                <a16:creationId xmlns:a16="http://schemas.microsoft.com/office/drawing/2014/main" id="{5B37BAF5-C23F-463F-95E6-8457AB1B17BE}"/>
               </a:ext>
             </a:extLst>
           </p:cNvPr>
@@ -19545,7 +19543,7 @@
           <p:cNvPr id="32" name="">
             <a:extLst xmlns:a="http://schemas.openxmlformats.org/drawingml/2006/main">
               <a:ext uri="{FF2B5EF4-FFF2-40B4-BE49-F238E27FC236}">
-                <a16:creationId xmlns:a16="http://schemas.microsoft.com/office/drawing/2014/main" id="{65783E3E-07E8-4464-9080-AE1C525DC6AE}"/>
+                <a16:creationId xmlns:a16="http://schemas.microsoft.com/office/drawing/2014/main" id="{EBFC7B5E-C618-4684-8217-F18B89D03314}"/>
               </a:ext>
             </a:extLst>
           </p:cNvPr>
@@ -19578,7 +19576,7 @@
           <p:cNvPr id="33" name="">
             <a:extLst xmlns:a="http://schemas.openxmlformats.org/drawingml/2006/main">
               <a:ext uri="{FF2B5EF4-FFF2-40B4-BE49-F238E27FC236}">
-                <a16:creationId xmlns:a16="http://schemas.microsoft.com/office/drawing/2014/main" id="{CFE422AB-36EC-46CC-87FA-4467A7028AB7}"/>
+                <a16:creationId xmlns:a16="http://schemas.microsoft.com/office/drawing/2014/main" id="{02BD5CFD-6F54-4A4B-B89A-40DA499FEE5A}"/>
               </a:ext>
             </a:extLst>
           </p:cNvPr>
@@ -19642,7 +19640,7 @@
           <p:cNvPr id="34" name="">
             <a:extLst xmlns:a="http://schemas.openxmlformats.org/drawingml/2006/main">
               <a:ext uri="{FF2B5EF4-FFF2-40B4-BE49-F238E27FC236}">
-                <a16:creationId xmlns:a16="http://schemas.microsoft.com/office/drawing/2014/main" id="{4966FEB6-A845-456F-AE44-1BB99341077D}"/>
+                <a16:creationId xmlns:a16="http://schemas.microsoft.com/office/drawing/2014/main" id="{3BE2B12E-1A8E-4077-9DF3-A66DC4E37F15}"/>
               </a:ext>
             </a:extLst>
           </p:cNvPr>
@@ -19706,7 +19704,7 @@
           <p:cNvPr id="35" name="">
             <a:extLst xmlns:a="http://schemas.openxmlformats.org/drawingml/2006/main">
               <a:ext uri="{FF2B5EF4-FFF2-40B4-BE49-F238E27FC236}">
-                <a16:creationId xmlns:a16="http://schemas.microsoft.com/office/drawing/2014/main" id="{E2845916-2ACC-4E1F-8E92-70FCAAE0132A}"/>
+                <a16:creationId xmlns:a16="http://schemas.microsoft.com/office/drawing/2014/main" id="{4B893CA0-8624-4408-BA57-1F1B87DD1CD9}"/>
               </a:ext>
             </a:extLst>
           </p:cNvPr>
@@ -19739,7 +19737,7 @@
           <p:cNvPr id="36" name="">
             <a:extLst xmlns:a="http://schemas.openxmlformats.org/drawingml/2006/main">
               <a:ext uri="{FF2B5EF4-FFF2-40B4-BE49-F238E27FC236}">
-                <a16:creationId xmlns:a16="http://schemas.microsoft.com/office/drawing/2014/main" id="{2E9D05B0-7F69-4509-BA5A-8BDF76CDC515}"/>
+                <a16:creationId xmlns:a16="http://schemas.microsoft.com/office/drawing/2014/main" id="{E8B79DC5-63A9-442E-91F9-800A91465F0E}"/>
               </a:ext>
             </a:extLst>
           </p:cNvPr>
@@ -19803,7 +19801,7 @@
           <p:cNvPr id="37" name="">
             <a:extLst xmlns:a="http://schemas.openxmlformats.org/drawingml/2006/main">
               <a:ext uri="{FF2B5EF4-FFF2-40B4-BE49-F238E27FC236}">
-                <a16:creationId xmlns:a16="http://schemas.microsoft.com/office/drawing/2014/main" id="{564ADBBF-BC4A-4EB9-AAE6-165FBD9223CE}"/>
+                <a16:creationId xmlns:a16="http://schemas.microsoft.com/office/drawing/2014/main" id="{72E940A1-949B-40F1-B9A8-C32E28726B8A}"/>
               </a:ext>
             </a:extLst>
           </p:cNvPr>
@@ -19867,7 +19865,7 @@
           <p:cNvPr id="38" name="">
             <a:extLst xmlns:a="http://schemas.openxmlformats.org/drawingml/2006/main">
               <a:ext uri="{FF2B5EF4-FFF2-40B4-BE49-F238E27FC236}">
-                <a16:creationId xmlns:a16="http://schemas.microsoft.com/office/drawing/2014/main" id="{425B1A91-BE48-487C-80DE-791D270B00F9}"/>
+                <a16:creationId xmlns:a16="http://schemas.microsoft.com/office/drawing/2014/main" id="{B2625180-24F8-4A1A-A67D-0516F1EF1104}"/>
               </a:ext>
             </a:extLst>
           </p:cNvPr>
@@ -19900,7 +19898,7 @@
           <p:cNvPr id="39" name="">
             <a:extLst xmlns:a="http://schemas.openxmlformats.org/drawingml/2006/main">
               <a:ext uri="{FF2B5EF4-FFF2-40B4-BE49-F238E27FC236}">
-                <a16:creationId xmlns:a16="http://schemas.microsoft.com/office/drawing/2014/main" id="{92035677-1423-49F2-9984-C1EC495DF790}"/>
+                <a16:creationId xmlns:a16="http://schemas.microsoft.com/office/drawing/2014/main" id="{23A26971-8BAC-4576-BDEC-F3C1C82E65DB}"/>
               </a:ext>
             </a:extLst>
           </p:cNvPr>
@@ -19964,7 +19962,7 @@
           <p:cNvPr id="40" name="">
             <a:extLst xmlns:a="http://schemas.openxmlformats.org/drawingml/2006/main">
               <a:ext uri="{FF2B5EF4-FFF2-40B4-BE49-F238E27FC236}">
-                <a16:creationId xmlns:a16="http://schemas.microsoft.com/office/drawing/2014/main" id="{B9850FEA-C1AF-4AF6-9699-D3F8B8049020}"/>
+                <a16:creationId xmlns:a16="http://schemas.microsoft.com/office/drawing/2014/main" id="{B57C4060-0F7C-4487-AD77-81243A7690C8}"/>
               </a:ext>
             </a:extLst>
           </p:cNvPr>
@@ -20028,7 +20026,7 @@
           <p:cNvPr id="41" name="">
             <a:extLst xmlns:a="http://schemas.openxmlformats.org/drawingml/2006/main">
               <a:ext uri="{FF2B5EF4-FFF2-40B4-BE49-F238E27FC236}">
-                <a16:creationId xmlns:a16="http://schemas.microsoft.com/office/drawing/2014/main" id="{7DBBC0AA-BB0C-4A24-A7B1-923E8DEAA9F6}"/>
+                <a16:creationId xmlns:a16="http://schemas.microsoft.com/office/drawing/2014/main" id="{DCC6F8C2-E7EF-4930-9A6A-57D6C45D4535}"/>
               </a:ext>
             </a:extLst>
           </p:cNvPr>
@@ -20063,7 +20061,7 @@
           <p:cNvPr id="42" name="">
             <a:extLst xmlns:a="http://schemas.openxmlformats.org/drawingml/2006/main">
               <a:ext uri="{FF2B5EF4-FFF2-40B4-BE49-F238E27FC236}">
-                <a16:creationId xmlns:a16="http://schemas.microsoft.com/office/drawing/2014/main" id="{A8C4AA1A-6399-40F9-9303-2C53AF4A912D}"/>
+                <a16:creationId xmlns:a16="http://schemas.microsoft.com/office/drawing/2014/main" id="{F002E341-45B5-4511-9DC7-7EF1BED8D539}"/>
               </a:ext>
             </a:extLst>
           </p:cNvPr>
@@ -20127,7 +20125,7 @@
           <p:cNvPr id="43" name="">
             <a:extLst xmlns:a="http://schemas.openxmlformats.org/drawingml/2006/main">
               <a:ext uri="{FF2B5EF4-FFF2-40B4-BE49-F238E27FC236}">
-                <a16:creationId xmlns:a16="http://schemas.microsoft.com/office/drawing/2014/main" id="{1D474C56-4D5D-4433-BB88-55301DECCA25}"/>
+                <a16:creationId xmlns:a16="http://schemas.microsoft.com/office/drawing/2014/main" id="{9C6F63CB-88CD-4A44-9627-959A3104EC28}"/>
               </a:ext>
             </a:extLst>
           </p:cNvPr>
@@ -20191,7 +20189,7 @@
           <p:cNvPr id="44" name="">
             <a:extLst xmlns:a="http://schemas.openxmlformats.org/drawingml/2006/main">
               <a:ext uri="{FF2B5EF4-FFF2-40B4-BE49-F238E27FC236}">
-                <a16:creationId xmlns:a16="http://schemas.microsoft.com/office/drawing/2014/main" id="{3921F619-42B9-4138-BE26-A7E64253ECBE}"/>
+                <a16:creationId xmlns:a16="http://schemas.microsoft.com/office/drawing/2014/main" id="{D8FADD57-BA7A-4774-B312-C5E7410A1319}"/>
               </a:ext>
             </a:extLst>
           </p:cNvPr>
@@ -20253,7 +20251,7 @@
     </p:spTree>
     <p:extLst>
       <p:ext uri="{BB962C8B-B14F-4D97-AF65-F5344CB8AC3E}">
-        <p14:creationId xmlns:p14="http://schemas.microsoft.com/office/powerpoint/2010/main" val="975957691"/>
+        <p14:creationId xmlns:p14="http://schemas.microsoft.com/office/powerpoint/2010/main" val="804400240"/>
       </p:ext>
     </p:extLst>
   </p:cSld>
@@ -20277,7 +20275,7 @@
           <p:cNvPr id="1" name="">
             <a:extLst xmlns:a="http://schemas.openxmlformats.org/drawingml/2006/main">
               <a:ext uri="{FF2B5EF4-FFF2-40B4-BE49-F238E27FC236}">
-                <a16:creationId xmlns:a16="http://schemas.microsoft.com/office/drawing/2014/main" id="{13030537-A2BB-4954-B3CB-BDBD90C07A03}"/>
+                <a16:creationId xmlns:a16="http://schemas.microsoft.com/office/drawing/2014/main" id="{F50F5E70-02D1-429F-9CCA-37D65543E85E}"/>
               </a:ext>
             </a:extLst>
           </p:cNvPr>
@@ -20312,7 +20310,7 @@
           <p:cNvPr id="2" name="">
             <a:extLst xmlns:a="http://schemas.openxmlformats.org/drawingml/2006/main">
               <a:ext uri="{FF2B5EF4-FFF2-40B4-BE49-F238E27FC236}">
-                <a16:creationId xmlns:a16="http://schemas.microsoft.com/office/drawing/2014/main" id="{BD64D665-1910-4F41-8CD0-1752F426D8FA}"/>
+                <a16:creationId xmlns:a16="http://schemas.microsoft.com/office/drawing/2014/main" id="{7DE58056-0DAC-4D7F-9A0D-5275FAFB488F}"/>
               </a:ext>
             </a:extLst>
           </p:cNvPr>
@@ -20347,7 +20345,7 @@
           <p:cNvPr id="3" name="">
             <a:extLst xmlns:a="http://schemas.openxmlformats.org/drawingml/2006/main">
               <a:ext uri="{FF2B5EF4-FFF2-40B4-BE49-F238E27FC236}">
-                <a16:creationId xmlns:a16="http://schemas.microsoft.com/office/drawing/2014/main" id="{CE20374A-57C8-4EBE-80AE-F70E75DE1BFB}"/>
+                <a16:creationId xmlns:a16="http://schemas.microsoft.com/office/drawing/2014/main" id="{91A4A850-96F7-4471-BD2D-3779ED31B89F}"/>
               </a:ext>
             </a:extLst>
           </p:cNvPr>
@@ -20382,7 +20380,7 @@
           <p:cNvPr id="4" name="kicker-05-marker">
             <a:extLst xmlns:a="http://schemas.openxmlformats.org/drawingml/2006/main">
               <a:ext uri="{FF2B5EF4-FFF2-40B4-BE49-F238E27FC236}">
-                <a16:creationId xmlns:a16="http://schemas.microsoft.com/office/drawing/2014/main" id="{5CD7ACC1-0602-4FD3-9A6C-8F247250CB79}"/>
+                <a16:creationId xmlns:a16="http://schemas.microsoft.com/office/drawing/2014/main" id="{7F9826E5-F7A9-403C-9804-E5358310957C}"/>
               </a:ext>
             </a:extLst>
           </p:cNvPr>
@@ -20417,7 +20415,7 @@
           <p:cNvPr id="5" name="kicker-05-label">
             <a:extLst xmlns:a="http://schemas.openxmlformats.org/drawingml/2006/main">
               <a:ext uri="{FF2B5EF4-FFF2-40B4-BE49-F238E27FC236}">
-                <a16:creationId xmlns:a16="http://schemas.microsoft.com/office/drawing/2014/main" id="{37AAB2C1-57B9-4EB4-85A3-4A6CA6C8D45F}"/>
+                <a16:creationId xmlns:a16="http://schemas.microsoft.com/office/drawing/2014/main" id="{91F2BE3F-C613-4186-9449-DF27303C32DF}"/>
               </a:ext>
             </a:extLst>
           </p:cNvPr>
@@ -20481,7 +20479,7 @@
           <p:cNvPr id="6" name="">
             <a:extLst xmlns:a="http://schemas.openxmlformats.org/drawingml/2006/main">
               <a:ext uri="{FF2B5EF4-FFF2-40B4-BE49-F238E27FC236}">
-                <a16:creationId xmlns:a16="http://schemas.microsoft.com/office/drawing/2014/main" id="{007A1EC3-C009-44EE-9E7B-EF362A8804B4}"/>
+                <a16:creationId xmlns:a16="http://schemas.microsoft.com/office/drawing/2014/main" id="{AEB17704-FA69-4850-8E3E-D58C0385DF7B}"/>
               </a:ext>
             </a:extLst>
           </p:cNvPr>
@@ -20545,7 +20543,7 @@
           <p:cNvPr id="7" name="">
             <a:extLst xmlns:a="http://schemas.openxmlformats.org/drawingml/2006/main">
               <a:ext uri="{FF2B5EF4-FFF2-40B4-BE49-F238E27FC236}">
-                <a16:creationId xmlns:a16="http://schemas.microsoft.com/office/drawing/2014/main" id="{5FB5FD87-7875-40E8-A1C0-8658BCF1F9B6}"/>
+                <a16:creationId xmlns:a16="http://schemas.microsoft.com/office/drawing/2014/main" id="{CC6317FA-8932-4921-B628-A1594A8C2E82}"/>
               </a:ext>
             </a:extLst>
           </p:cNvPr>
@@ -20609,7 +20607,7 @@
           <p:cNvPr id="8" name="">
             <a:extLst xmlns:a="http://schemas.openxmlformats.org/drawingml/2006/main">
               <a:ext uri="{FF2B5EF4-FFF2-40B4-BE49-F238E27FC236}">
-                <a16:creationId xmlns:a16="http://schemas.microsoft.com/office/drawing/2014/main" id="{8D8355C4-9896-4A6B-97C7-8F624B534683}"/>
+                <a16:creationId xmlns:a16="http://schemas.microsoft.com/office/drawing/2014/main" id="{4A49FA2B-8A47-476C-8F92-38A448AB10AE}"/>
               </a:ext>
             </a:extLst>
           </p:cNvPr>
@@ -20644,7 +20642,7 @@
           <p:cNvPr id="9" name="">
             <a:extLst xmlns:a="http://schemas.openxmlformats.org/drawingml/2006/main">
               <a:ext uri="{FF2B5EF4-FFF2-40B4-BE49-F238E27FC236}">
-                <a16:creationId xmlns:a16="http://schemas.microsoft.com/office/drawing/2014/main" id="{08D693BF-07C0-4CC9-AC78-E170FF53E258}"/>
+                <a16:creationId xmlns:a16="http://schemas.microsoft.com/office/drawing/2014/main" id="{0AA4B595-0A60-48B5-AAFC-D36147E388F8}"/>
               </a:ext>
             </a:extLst>
           </p:cNvPr>
@@ -20708,7 +20706,7 @@
           <p:cNvPr id="10" name="">
             <a:extLst xmlns:a="http://schemas.openxmlformats.org/drawingml/2006/main">
               <a:ext uri="{FF2B5EF4-FFF2-40B4-BE49-F238E27FC236}">
-                <a16:creationId xmlns:a16="http://schemas.microsoft.com/office/drawing/2014/main" id="{26D4EDDF-4097-460D-9554-47FF5AA53EB2}"/>
+                <a16:creationId xmlns:a16="http://schemas.microsoft.com/office/drawing/2014/main" id="{EB202118-2B5E-42DC-A07B-0399911E614E}"/>
               </a:ext>
             </a:extLst>
           </p:cNvPr>
@@ -20772,7 +20770,7 @@
           <p:cNvPr id="11" name="">
             <a:extLst xmlns:a="http://schemas.openxmlformats.org/drawingml/2006/main">
               <a:ext uri="{FF2B5EF4-FFF2-40B4-BE49-F238E27FC236}">
-                <a16:creationId xmlns:a16="http://schemas.microsoft.com/office/drawing/2014/main" id="{20B303D7-44AA-40E9-B0BC-9D97F944A0E4}"/>
+                <a16:creationId xmlns:a16="http://schemas.microsoft.com/office/drawing/2014/main" id="{57C3B2F9-9AA2-43D4-A113-B0243342BF32}"/>
               </a:ext>
             </a:extLst>
           </p:cNvPr>
@@ -20836,7 +20834,7 @@
           <p:cNvPr id="12" name="">
             <a:extLst xmlns:a="http://schemas.openxmlformats.org/drawingml/2006/main">
               <a:ext uri="{FF2B5EF4-FFF2-40B4-BE49-F238E27FC236}">
-                <a16:creationId xmlns:a16="http://schemas.microsoft.com/office/drawing/2014/main" id="{C9ECAF8B-EE48-48A2-9E44-88B2F5068D8D}"/>
+                <a16:creationId xmlns:a16="http://schemas.microsoft.com/office/drawing/2014/main" id="{17FBC47A-B2B4-4935-BEDE-F1FF9E10E9A4}"/>
               </a:ext>
             </a:extLst>
           </p:cNvPr>
@@ -20871,7 +20869,7 @@
           <p:cNvPr id="13" name="">
             <a:extLst xmlns:a="http://schemas.openxmlformats.org/drawingml/2006/main">
               <a:ext uri="{FF2B5EF4-FFF2-40B4-BE49-F238E27FC236}">
-                <a16:creationId xmlns:a16="http://schemas.microsoft.com/office/drawing/2014/main" id="{88EE5C63-9FF7-4BC4-8BDB-262E570E73A5}"/>
+                <a16:creationId xmlns:a16="http://schemas.microsoft.com/office/drawing/2014/main" id="{8199C6EC-3881-43C6-A232-7A7C4A7110B8}"/>
               </a:ext>
             </a:extLst>
           </p:cNvPr>
@@ -20904,7 +20902,7 @@
           <p:cNvPr id="14" name="">
             <a:extLst xmlns:a="http://schemas.openxmlformats.org/drawingml/2006/main">
               <a:ext uri="{FF2B5EF4-FFF2-40B4-BE49-F238E27FC236}">
-                <a16:creationId xmlns:a16="http://schemas.microsoft.com/office/drawing/2014/main" id="{6614C492-D67D-43E9-BFC1-1FA6B03DE113}"/>
+                <a16:creationId xmlns:a16="http://schemas.microsoft.com/office/drawing/2014/main" id="{F46F5AB2-8186-4B04-8676-F3B5AE786743}"/>
               </a:ext>
             </a:extLst>
           </p:cNvPr>
@@ -20939,7 +20937,7 @@
           <p:cNvPr id="15" name="">
             <a:extLst xmlns:a="http://schemas.openxmlformats.org/drawingml/2006/main">
               <a:ext uri="{FF2B5EF4-FFF2-40B4-BE49-F238E27FC236}">
-                <a16:creationId xmlns:a16="http://schemas.microsoft.com/office/drawing/2014/main" id="{48638551-E29D-450B-944A-A977FA0E035E}"/>
+                <a16:creationId xmlns:a16="http://schemas.microsoft.com/office/drawing/2014/main" id="{89486A5A-8C22-497A-8EB4-B7DF491756AF}"/>
               </a:ext>
             </a:extLst>
           </p:cNvPr>
@@ -21003,7 +21001,7 @@
           <p:cNvPr id="16" name="">
             <a:extLst xmlns:a="http://schemas.openxmlformats.org/drawingml/2006/main">
               <a:ext uri="{FF2B5EF4-FFF2-40B4-BE49-F238E27FC236}">
-                <a16:creationId xmlns:a16="http://schemas.microsoft.com/office/drawing/2014/main" id="{D6B7CBA6-5BA5-4E43-9F71-A41BE6F6577F}"/>
+                <a16:creationId xmlns:a16="http://schemas.microsoft.com/office/drawing/2014/main" id="{8B6142F1-B2E7-4265-A12B-FD0EE5F9EF31}"/>
               </a:ext>
             </a:extLst>
           </p:cNvPr>
@@ -21036,7 +21034,7 @@
           <p:cNvPr id="17" name="">
             <a:extLst xmlns:a="http://schemas.openxmlformats.org/drawingml/2006/main">
               <a:ext uri="{FF2B5EF4-FFF2-40B4-BE49-F238E27FC236}">
-                <a16:creationId xmlns:a16="http://schemas.microsoft.com/office/drawing/2014/main" id="{ABB32609-4A21-468B-A040-C2548BEF7AC0}"/>
+                <a16:creationId xmlns:a16="http://schemas.microsoft.com/office/drawing/2014/main" id="{786230E7-DABC-474A-9C4E-C4B1D9162568}"/>
               </a:ext>
             </a:extLst>
           </p:cNvPr>
@@ -21071,7 +21069,7 @@
           <p:cNvPr id="18" name="">
             <a:extLst xmlns:a="http://schemas.openxmlformats.org/drawingml/2006/main">
               <a:ext uri="{FF2B5EF4-FFF2-40B4-BE49-F238E27FC236}">
-                <a16:creationId xmlns:a16="http://schemas.microsoft.com/office/drawing/2014/main" id="{025D3325-6799-41AD-8E8E-A21AB8302453}"/>
+                <a16:creationId xmlns:a16="http://schemas.microsoft.com/office/drawing/2014/main" id="{57A15189-DCD8-4B4B-9817-517BB3A79413}"/>
               </a:ext>
             </a:extLst>
           </p:cNvPr>
@@ -21135,7 +21133,7 @@
           <p:cNvPr id="19" name="">
             <a:extLst xmlns:a="http://schemas.openxmlformats.org/drawingml/2006/main">
               <a:ext uri="{FF2B5EF4-FFF2-40B4-BE49-F238E27FC236}">
-                <a16:creationId xmlns:a16="http://schemas.microsoft.com/office/drawing/2014/main" id="{747D4D9D-1EBC-4192-A3FF-B8A71CA33E7D}"/>
+                <a16:creationId xmlns:a16="http://schemas.microsoft.com/office/drawing/2014/main" id="{F5F010F5-EA54-41C0-AE33-2C9EE111AD1C}"/>
               </a:ext>
             </a:extLst>
           </p:cNvPr>
@@ -21199,7 +21197,7 @@
           <p:cNvPr id="20" name="">
             <a:extLst xmlns:a="http://schemas.openxmlformats.org/drawingml/2006/main">
               <a:ext uri="{FF2B5EF4-FFF2-40B4-BE49-F238E27FC236}">
-                <a16:creationId xmlns:a16="http://schemas.microsoft.com/office/drawing/2014/main" id="{C2AC8398-5CB7-4479-85DB-FE5C9EDAAB17}"/>
+                <a16:creationId xmlns:a16="http://schemas.microsoft.com/office/drawing/2014/main" id="{5430C4EF-BD6F-4F7A-9189-91F104792F05}"/>
               </a:ext>
             </a:extLst>
           </p:cNvPr>
@@ -21234,7 +21232,7 @@
           <p:cNvPr id="21" name="">
             <a:extLst xmlns:a="http://schemas.openxmlformats.org/drawingml/2006/main">
               <a:ext uri="{FF2B5EF4-FFF2-40B4-BE49-F238E27FC236}">
-                <a16:creationId xmlns:a16="http://schemas.microsoft.com/office/drawing/2014/main" id="{F8022E4F-E1A1-4C01-A800-D82D91509F01}"/>
+                <a16:creationId xmlns:a16="http://schemas.microsoft.com/office/drawing/2014/main" id="{DAE83756-2AE7-47D3-A496-434C3304B9F2}"/>
               </a:ext>
             </a:extLst>
           </p:cNvPr>
@@ -21267,7 +21265,7 @@
           <p:cNvPr id="22" name="">
             <a:extLst xmlns:a="http://schemas.openxmlformats.org/drawingml/2006/main">
               <a:ext uri="{FF2B5EF4-FFF2-40B4-BE49-F238E27FC236}">
-                <a16:creationId xmlns:a16="http://schemas.microsoft.com/office/drawing/2014/main" id="{37A969DA-6374-4510-A744-1DD3523FE6D0}"/>
+                <a16:creationId xmlns:a16="http://schemas.microsoft.com/office/drawing/2014/main" id="{22C3BE53-6DA6-4577-870D-EF7CB482121A}"/>
               </a:ext>
             </a:extLst>
           </p:cNvPr>
@@ -21302,7 +21300,7 @@
           <p:cNvPr id="23" name="">
             <a:extLst xmlns:a="http://schemas.openxmlformats.org/drawingml/2006/main">
               <a:ext uri="{FF2B5EF4-FFF2-40B4-BE49-F238E27FC236}">
-                <a16:creationId xmlns:a16="http://schemas.microsoft.com/office/drawing/2014/main" id="{ABCB3406-76A9-4F85-9174-7C501EE122EA}"/>
+                <a16:creationId xmlns:a16="http://schemas.microsoft.com/office/drawing/2014/main" id="{52D8B3B9-8A1D-47FC-AEAB-B986D7C4B7BF}"/>
               </a:ext>
             </a:extLst>
           </p:cNvPr>
@@ -21366,7 +21364,7 @@
           <p:cNvPr id="24" name="">
             <a:extLst xmlns:a="http://schemas.openxmlformats.org/drawingml/2006/main">
               <a:ext uri="{FF2B5EF4-FFF2-40B4-BE49-F238E27FC236}">
-                <a16:creationId xmlns:a16="http://schemas.microsoft.com/office/drawing/2014/main" id="{E8CBDED8-80EC-439C-9CF7-0BC09A1ADA28}"/>
+                <a16:creationId xmlns:a16="http://schemas.microsoft.com/office/drawing/2014/main" id="{E62E563E-E856-4B55-B110-FA26818A8DBB}"/>
               </a:ext>
             </a:extLst>
           </p:cNvPr>
@@ -21430,7 +21428,7 @@
           <p:cNvPr id="25" name="">
             <a:extLst xmlns:a="http://schemas.openxmlformats.org/drawingml/2006/main">
               <a:ext uri="{FF2B5EF4-FFF2-40B4-BE49-F238E27FC236}">
-                <a16:creationId xmlns:a16="http://schemas.microsoft.com/office/drawing/2014/main" id="{37DDAD79-CC67-4E10-8DD9-8C039C3142CC}"/>
+                <a16:creationId xmlns:a16="http://schemas.microsoft.com/office/drawing/2014/main" id="{4BC232F0-F647-49E1-9B1C-A4009240E7A8}"/>
               </a:ext>
             </a:extLst>
           </p:cNvPr>
@@ -21465,7 +21463,7 @@
           <p:cNvPr id="26" name="">
             <a:extLst xmlns:a="http://schemas.openxmlformats.org/drawingml/2006/main">
               <a:ext uri="{FF2B5EF4-FFF2-40B4-BE49-F238E27FC236}">
-                <a16:creationId xmlns:a16="http://schemas.microsoft.com/office/drawing/2014/main" id="{570145DE-17E7-4045-AAB3-B01824F4219C}"/>
+                <a16:creationId xmlns:a16="http://schemas.microsoft.com/office/drawing/2014/main" id="{A65550FE-B4FC-4207-994E-30FB96ACFA2B}"/>
               </a:ext>
             </a:extLst>
           </p:cNvPr>
@@ -21498,7 +21496,7 @@
           <p:cNvPr id="27" name="">
             <a:extLst xmlns:a="http://schemas.openxmlformats.org/drawingml/2006/main">
               <a:ext uri="{FF2B5EF4-FFF2-40B4-BE49-F238E27FC236}">
-                <a16:creationId xmlns:a16="http://schemas.microsoft.com/office/drawing/2014/main" id="{672CF296-E6C0-4D51-941F-1E1489D28E03}"/>
+                <a16:creationId xmlns:a16="http://schemas.microsoft.com/office/drawing/2014/main" id="{32B9F874-A80D-4B4A-ACD6-49164F97CD0A}"/>
               </a:ext>
             </a:extLst>
           </p:cNvPr>
@@ -21533,7 +21531,7 @@
           <p:cNvPr id="28" name="">
             <a:extLst xmlns:a="http://schemas.openxmlformats.org/drawingml/2006/main">
               <a:ext uri="{FF2B5EF4-FFF2-40B4-BE49-F238E27FC236}">
-                <a16:creationId xmlns:a16="http://schemas.microsoft.com/office/drawing/2014/main" id="{5C27801D-54CF-4791-BC1D-19BEDC155F7D}"/>
+                <a16:creationId xmlns:a16="http://schemas.microsoft.com/office/drawing/2014/main" id="{9A1A8552-F46D-4A13-89A4-E9A035F73A5E}"/>
               </a:ext>
             </a:extLst>
           </p:cNvPr>
@@ -21597,7 +21595,7 @@
           <p:cNvPr id="29" name="">
             <a:extLst xmlns:a="http://schemas.openxmlformats.org/drawingml/2006/main">
               <a:ext uri="{FF2B5EF4-FFF2-40B4-BE49-F238E27FC236}">
-                <a16:creationId xmlns:a16="http://schemas.microsoft.com/office/drawing/2014/main" id="{466C3D3F-7E53-4F69-98B2-BF8C13E94B40}"/>
+                <a16:creationId xmlns:a16="http://schemas.microsoft.com/office/drawing/2014/main" id="{63260938-46F0-41CB-90C4-A351BD043DB3}"/>
               </a:ext>
             </a:extLst>
           </p:cNvPr>
@@ -21661,7 +21659,7 @@
           <p:cNvPr id="30" name="">
             <a:extLst xmlns:a="http://schemas.openxmlformats.org/drawingml/2006/main">
               <a:ext uri="{FF2B5EF4-FFF2-40B4-BE49-F238E27FC236}">
-                <a16:creationId xmlns:a16="http://schemas.microsoft.com/office/drawing/2014/main" id="{91B3DDF5-146B-4E65-BC2E-ADF1EE727688}"/>
+                <a16:creationId xmlns:a16="http://schemas.microsoft.com/office/drawing/2014/main" id="{E5DFE9BC-4E60-4763-A63D-D69A1E3CEF1F}"/>
               </a:ext>
             </a:extLst>
           </p:cNvPr>
@@ -21696,7 +21694,7 @@
           <p:cNvPr id="31" name="">
             <a:extLst xmlns:a="http://schemas.openxmlformats.org/drawingml/2006/main">
               <a:ext uri="{FF2B5EF4-FFF2-40B4-BE49-F238E27FC236}">
-                <a16:creationId xmlns:a16="http://schemas.microsoft.com/office/drawing/2014/main" id="{D3961173-16BF-45BD-AF59-1A60F47EA73F}"/>
+                <a16:creationId xmlns:a16="http://schemas.microsoft.com/office/drawing/2014/main" id="{42145C7A-32FB-46EF-9D89-41C8FA258EFC}"/>
               </a:ext>
             </a:extLst>
           </p:cNvPr>
@@ -21729,7 +21727,7 @@
           <p:cNvPr id="32" name="">
             <a:extLst xmlns:a="http://schemas.openxmlformats.org/drawingml/2006/main">
               <a:ext uri="{FF2B5EF4-FFF2-40B4-BE49-F238E27FC236}">
-                <a16:creationId xmlns:a16="http://schemas.microsoft.com/office/drawing/2014/main" id="{60CA8299-2D65-4EC7-8932-E32A112DEA01}"/>
+                <a16:creationId xmlns:a16="http://schemas.microsoft.com/office/drawing/2014/main" id="{E6F383EF-DE7A-4025-812E-841D24E518D4}"/>
               </a:ext>
             </a:extLst>
           </p:cNvPr>
@@ -21764,7 +21762,7 @@
           <p:cNvPr id="33" name="">
             <a:extLst xmlns:a="http://schemas.openxmlformats.org/drawingml/2006/main">
               <a:ext uri="{FF2B5EF4-FFF2-40B4-BE49-F238E27FC236}">
-                <a16:creationId xmlns:a16="http://schemas.microsoft.com/office/drawing/2014/main" id="{2AE9F206-C9CD-437E-9BD5-B54B3C865106}"/>
+                <a16:creationId xmlns:a16="http://schemas.microsoft.com/office/drawing/2014/main" id="{128BFB1F-068A-4A77-BAA0-E3269F451B96}"/>
               </a:ext>
             </a:extLst>
           </p:cNvPr>
@@ -21828,7 +21826,7 @@
           <p:cNvPr id="34" name="">
             <a:extLst xmlns:a="http://schemas.openxmlformats.org/drawingml/2006/main">
               <a:ext uri="{FF2B5EF4-FFF2-40B4-BE49-F238E27FC236}">
-                <a16:creationId xmlns:a16="http://schemas.microsoft.com/office/drawing/2014/main" id="{A571B31D-D17D-4AA8-A189-5A0012D86D90}"/>
+                <a16:creationId xmlns:a16="http://schemas.microsoft.com/office/drawing/2014/main" id="{A92C42F7-1C00-4164-A68E-DF9468C32CC7}"/>
               </a:ext>
             </a:extLst>
           </p:cNvPr>
@@ -21892,7 +21890,7 @@
           <p:cNvPr id="35" name="">
             <a:extLst xmlns:a="http://schemas.openxmlformats.org/drawingml/2006/main">
               <a:ext uri="{FF2B5EF4-FFF2-40B4-BE49-F238E27FC236}">
-                <a16:creationId xmlns:a16="http://schemas.microsoft.com/office/drawing/2014/main" id="{4C60C773-FF2F-4CAD-B495-701E8112D178}"/>
+                <a16:creationId xmlns:a16="http://schemas.microsoft.com/office/drawing/2014/main" id="{BCF3AEE3-6D58-45E1-9BA4-B9CA67C5EB0E}"/>
               </a:ext>
             </a:extLst>
           </p:cNvPr>
@@ -21925,7 +21923,7 @@
           <p:cNvPr id="36" name="">
             <a:extLst xmlns:a="http://schemas.openxmlformats.org/drawingml/2006/main">
               <a:ext uri="{FF2B5EF4-FFF2-40B4-BE49-F238E27FC236}">
-                <a16:creationId xmlns:a16="http://schemas.microsoft.com/office/drawing/2014/main" id="{1A0D0066-716F-441E-BC59-684FFDBAE7DD}"/>
+                <a16:creationId xmlns:a16="http://schemas.microsoft.com/office/drawing/2014/main" id="{6E3E9AF7-7ECE-472B-B6BD-5DBE330E4F33}"/>
               </a:ext>
             </a:extLst>
           </p:cNvPr>
@@ -21960,7 +21958,7 @@
           <p:cNvPr id="37" name="">
             <a:extLst xmlns:a="http://schemas.openxmlformats.org/drawingml/2006/main">
               <a:ext uri="{FF2B5EF4-FFF2-40B4-BE49-F238E27FC236}">
-                <a16:creationId xmlns:a16="http://schemas.microsoft.com/office/drawing/2014/main" id="{47462673-2235-4A42-8DBA-F2F9581755B1}"/>
+                <a16:creationId xmlns:a16="http://schemas.microsoft.com/office/drawing/2014/main" id="{D49FAF8F-121A-41EA-84DC-02CAF3BBCFB1}"/>
               </a:ext>
             </a:extLst>
           </p:cNvPr>
@@ -22024,7 +22022,7 @@
           <p:cNvPr id="38" name="">
             <a:extLst xmlns:a="http://schemas.openxmlformats.org/drawingml/2006/main">
               <a:ext uri="{FF2B5EF4-FFF2-40B4-BE49-F238E27FC236}">
-                <a16:creationId xmlns:a16="http://schemas.microsoft.com/office/drawing/2014/main" id="{3CC4074B-955B-4699-A2B8-8249D6F2899C}"/>
+                <a16:creationId xmlns:a16="http://schemas.microsoft.com/office/drawing/2014/main" id="{5B802DD1-8A54-4E42-AB93-69B558B4154A}"/>
               </a:ext>
             </a:extLst>
           </p:cNvPr>
@@ -22088,7 +22086,7 @@
           <p:cNvPr id="39" name="">
             <a:extLst xmlns:a="http://schemas.openxmlformats.org/drawingml/2006/main">
               <a:ext uri="{FF2B5EF4-FFF2-40B4-BE49-F238E27FC236}">
-                <a16:creationId xmlns:a16="http://schemas.microsoft.com/office/drawing/2014/main" id="{1C6D3F21-9CA9-4C6C-9011-105CF9098983}"/>
+                <a16:creationId xmlns:a16="http://schemas.microsoft.com/office/drawing/2014/main" id="{4BB988E5-E6A6-44D8-9F91-6169F29DE833}"/>
               </a:ext>
             </a:extLst>
           </p:cNvPr>
@@ -22123,7 +22121,7 @@
           <p:cNvPr id="40" name="">
             <a:extLst xmlns:a="http://schemas.openxmlformats.org/drawingml/2006/main">
               <a:ext uri="{FF2B5EF4-FFF2-40B4-BE49-F238E27FC236}">
-                <a16:creationId xmlns:a16="http://schemas.microsoft.com/office/drawing/2014/main" id="{84C61A00-E0BA-420B-A9B4-CD41D9ACA575}"/>
+                <a16:creationId xmlns:a16="http://schemas.microsoft.com/office/drawing/2014/main" id="{EF9B82A7-F84F-4F61-831F-95456CD4E29A}"/>
               </a:ext>
             </a:extLst>
           </p:cNvPr>
@@ -22156,7 +22154,7 @@
           <p:cNvPr id="41" name="">
             <a:extLst xmlns:a="http://schemas.openxmlformats.org/drawingml/2006/main">
               <a:ext uri="{FF2B5EF4-FFF2-40B4-BE49-F238E27FC236}">
-                <a16:creationId xmlns:a16="http://schemas.microsoft.com/office/drawing/2014/main" id="{5758E3A7-C98B-4372-A37B-66CC40CF5898}"/>
+                <a16:creationId xmlns:a16="http://schemas.microsoft.com/office/drawing/2014/main" id="{04956B71-C658-4DF4-9511-35F7A5DBA164}"/>
               </a:ext>
             </a:extLst>
           </p:cNvPr>
@@ -22191,7 +22189,7 @@
           <p:cNvPr id="42" name="">
             <a:extLst xmlns:a="http://schemas.openxmlformats.org/drawingml/2006/main">
               <a:ext uri="{FF2B5EF4-FFF2-40B4-BE49-F238E27FC236}">
-                <a16:creationId xmlns:a16="http://schemas.microsoft.com/office/drawing/2014/main" id="{7BBFCEFE-6D45-4968-8E47-471E67522FBC}"/>
+                <a16:creationId xmlns:a16="http://schemas.microsoft.com/office/drawing/2014/main" id="{2124C01D-EBE4-4F03-BBFF-B4F9A7D215CF}"/>
               </a:ext>
             </a:extLst>
           </p:cNvPr>
@@ -22255,7 +22253,7 @@
           <p:cNvPr id="43" name="">
             <a:extLst xmlns:a="http://schemas.openxmlformats.org/drawingml/2006/main">
               <a:ext uri="{FF2B5EF4-FFF2-40B4-BE49-F238E27FC236}">
-                <a16:creationId xmlns:a16="http://schemas.microsoft.com/office/drawing/2014/main" id="{F3A3E502-B13E-4C58-B9B7-0B046D3718FA}"/>
+                <a16:creationId xmlns:a16="http://schemas.microsoft.com/office/drawing/2014/main" id="{7829CE7D-38DF-4623-8B84-6A3F30ABD27D}"/>
               </a:ext>
             </a:extLst>
           </p:cNvPr>
@@ -22319,7 +22317,7 @@
           <p:cNvPr id="44" name="">
             <a:extLst xmlns:a="http://schemas.openxmlformats.org/drawingml/2006/main">
               <a:ext uri="{FF2B5EF4-FFF2-40B4-BE49-F238E27FC236}">
-                <a16:creationId xmlns:a16="http://schemas.microsoft.com/office/drawing/2014/main" id="{DD0F355F-8024-4617-9EC0-7997B1A8001D}"/>
+                <a16:creationId xmlns:a16="http://schemas.microsoft.com/office/drawing/2014/main" id="{B9139C27-0F3E-4358-A1BB-786CE5435092}"/>
               </a:ext>
             </a:extLst>
           </p:cNvPr>
@@ -22354,7 +22352,7 @@
           <p:cNvPr id="45" name="">
             <a:extLst xmlns:a="http://schemas.openxmlformats.org/drawingml/2006/main">
               <a:ext uri="{FF2B5EF4-FFF2-40B4-BE49-F238E27FC236}">
-                <a16:creationId xmlns:a16="http://schemas.microsoft.com/office/drawing/2014/main" id="{B6A65F78-9B45-43D5-AA77-62CF57A7908B}"/>
+                <a16:creationId xmlns:a16="http://schemas.microsoft.com/office/drawing/2014/main" id="{3D22DCEF-B969-483F-A326-0CEFDCEBD7F3}"/>
               </a:ext>
             </a:extLst>
           </p:cNvPr>
@@ -22387,7 +22385,7 @@
           <p:cNvPr id="46" name="">
             <a:extLst xmlns:a="http://schemas.openxmlformats.org/drawingml/2006/main">
               <a:ext uri="{FF2B5EF4-FFF2-40B4-BE49-F238E27FC236}">
-                <a16:creationId xmlns:a16="http://schemas.microsoft.com/office/drawing/2014/main" id="{02655307-F49D-449E-BC26-4A9ED9DE6F16}"/>
+                <a16:creationId xmlns:a16="http://schemas.microsoft.com/office/drawing/2014/main" id="{0D443616-73D7-42A1-8526-1CF468BA070C}"/>
               </a:ext>
             </a:extLst>
           </p:cNvPr>
@@ -22422,7 +22420,7 @@
           <p:cNvPr id="47" name="">
             <a:extLst xmlns:a="http://schemas.openxmlformats.org/drawingml/2006/main">
               <a:ext uri="{FF2B5EF4-FFF2-40B4-BE49-F238E27FC236}">
-                <a16:creationId xmlns:a16="http://schemas.microsoft.com/office/drawing/2014/main" id="{63CC9E4F-C98D-4876-B53E-99025727DC44}"/>
+                <a16:creationId xmlns:a16="http://schemas.microsoft.com/office/drawing/2014/main" id="{92CAE7B3-0FBC-41C1-BFA3-DDB1D3D4DE4E}"/>
               </a:ext>
             </a:extLst>
           </p:cNvPr>
@@ -22486,7 +22484,7 @@
           <p:cNvPr id="48" name="">
             <a:extLst xmlns:a="http://schemas.openxmlformats.org/drawingml/2006/main">
               <a:ext uri="{FF2B5EF4-FFF2-40B4-BE49-F238E27FC236}">
-                <a16:creationId xmlns:a16="http://schemas.microsoft.com/office/drawing/2014/main" id="{8D155AD9-8432-4D82-AA44-E3078BA1FF67}"/>
+                <a16:creationId xmlns:a16="http://schemas.microsoft.com/office/drawing/2014/main" id="{6819AE08-723F-42D9-B668-FB21442242A8}"/>
               </a:ext>
             </a:extLst>
           </p:cNvPr>
@@ -22550,7 +22548,7 @@
           <p:cNvPr id="49" name="">
             <a:extLst xmlns:a="http://schemas.openxmlformats.org/drawingml/2006/main">
               <a:ext uri="{FF2B5EF4-FFF2-40B4-BE49-F238E27FC236}">
-                <a16:creationId xmlns:a16="http://schemas.microsoft.com/office/drawing/2014/main" id="{B9DC37BD-3C27-412F-A2FA-CBBBE435E5FB}"/>
+                <a16:creationId xmlns:a16="http://schemas.microsoft.com/office/drawing/2014/main" id="{4C16B61E-2451-40B2-A68A-1D54DE976C2B}"/>
               </a:ext>
             </a:extLst>
           </p:cNvPr>
@@ -22583,7 +22581,7 @@
           <p:cNvPr id="50" name="">
             <a:extLst xmlns:a="http://schemas.openxmlformats.org/drawingml/2006/main">
               <a:ext uri="{FF2B5EF4-FFF2-40B4-BE49-F238E27FC236}">
-                <a16:creationId xmlns:a16="http://schemas.microsoft.com/office/drawing/2014/main" id="{334DE5D9-B8B7-42FE-B86F-EDA7D96D9AEA}"/>
+                <a16:creationId xmlns:a16="http://schemas.microsoft.com/office/drawing/2014/main" id="{562D006D-1499-4B8E-95A3-89E994A85643}"/>
               </a:ext>
             </a:extLst>
           </p:cNvPr>
@@ -22647,7 +22645,7 @@
           <p:cNvPr id="51" name="">
             <a:extLst xmlns:a="http://schemas.openxmlformats.org/drawingml/2006/main">
               <a:ext uri="{FF2B5EF4-FFF2-40B4-BE49-F238E27FC236}">
-                <a16:creationId xmlns:a16="http://schemas.microsoft.com/office/drawing/2014/main" id="{66468F38-B19B-403C-844F-09FE17B50D6D}"/>
+                <a16:creationId xmlns:a16="http://schemas.microsoft.com/office/drawing/2014/main" id="{2B3982AB-CD94-4312-982B-9B07993F1A7E}"/>
               </a:ext>
             </a:extLst>
           </p:cNvPr>
@@ -22682,7 +22680,7 @@
           <p:cNvPr id="52" name="">
             <a:extLst xmlns:a="http://schemas.openxmlformats.org/drawingml/2006/main">
               <a:ext uri="{FF2B5EF4-FFF2-40B4-BE49-F238E27FC236}">
-                <a16:creationId xmlns:a16="http://schemas.microsoft.com/office/drawing/2014/main" id="{FE365859-7CF7-4D94-921A-3EA5A8695FB4}"/>
+                <a16:creationId xmlns:a16="http://schemas.microsoft.com/office/drawing/2014/main" id="{CFCF514F-2AE5-4AA7-A7DC-8F9082C88B43}"/>
               </a:ext>
             </a:extLst>
           </p:cNvPr>
@@ -22746,7 +22744,7 @@
           <p:cNvPr id="53" name="">
             <a:extLst xmlns:a="http://schemas.openxmlformats.org/drawingml/2006/main">
               <a:ext uri="{FF2B5EF4-FFF2-40B4-BE49-F238E27FC236}">
-                <a16:creationId xmlns:a16="http://schemas.microsoft.com/office/drawing/2014/main" id="{C97E7E72-F7B0-49F0-94C7-BBE2040021B7}"/>
+                <a16:creationId xmlns:a16="http://schemas.microsoft.com/office/drawing/2014/main" id="{E61C9F6E-4D5C-4176-B1B9-A10E4EE2BA19}"/>
               </a:ext>
             </a:extLst>
           </p:cNvPr>
@@ -22810,7 +22808,7 @@
           <p:cNvPr id="54" name="">
             <a:extLst xmlns:a="http://schemas.openxmlformats.org/drawingml/2006/main">
               <a:ext uri="{FF2B5EF4-FFF2-40B4-BE49-F238E27FC236}">
-                <a16:creationId xmlns:a16="http://schemas.microsoft.com/office/drawing/2014/main" id="{48E599EF-8CC2-4755-B0C6-802AF0BC3FB5}"/>
+                <a16:creationId xmlns:a16="http://schemas.microsoft.com/office/drawing/2014/main" id="{AAC8433F-7EEB-466A-BCA0-836F9E04AC97}"/>
               </a:ext>
             </a:extLst>
           </p:cNvPr>
@@ -22874,7 +22872,7 @@
           <p:cNvPr id="55" name="">
             <a:extLst xmlns:a="http://schemas.openxmlformats.org/drawingml/2006/main">
               <a:ext uri="{FF2B5EF4-FFF2-40B4-BE49-F238E27FC236}">
-                <a16:creationId xmlns:a16="http://schemas.microsoft.com/office/drawing/2014/main" id="{735B1C22-5B24-4FA0-98FE-616C99799FE3}"/>
+                <a16:creationId xmlns:a16="http://schemas.microsoft.com/office/drawing/2014/main" id="{909BD2E2-39C2-4928-9ED5-D8898AD020F5}"/>
               </a:ext>
             </a:extLst>
           </p:cNvPr>
@@ -22909,7 +22907,7 @@
           <p:cNvPr id="56" name="">
             <a:extLst xmlns:a="http://schemas.openxmlformats.org/drawingml/2006/main">
               <a:ext uri="{FF2B5EF4-FFF2-40B4-BE49-F238E27FC236}">
-                <a16:creationId xmlns:a16="http://schemas.microsoft.com/office/drawing/2014/main" id="{5841A9F0-5662-4B78-9F3B-975410CC2526}"/>
+                <a16:creationId xmlns:a16="http://schemas.microsoft.com/office/drawing/2014/main" id="{CB3F21F0-A0F9-4143-95DD-FAB2652EA5CC}"/>
               </a:ext>
             </a:extLst>
           </p:cNvPr>
@@ -22944,7 +22942,7 @@
           <p:cNvPr id="57" name="">
             <a:extLst xmlns:a="http://schemas.openxmlformats.org/drawingml/2006/main">
               <a:ext uri="{FF2B5EF4-FFF2-40B4-BE49-F238E27FC236}">
-                <a16:creationId xmlns:a16="http://schemas.microsoft.com/office/drawing/2014/main" id="{9F12410C-6034-4294-ADDA-A272042EB3AE}"/>
+                <a16:creationId xmlns:a16="http://schemas.microsoft.com/office/drawing/2014/main" id="{CA305418-1B93-44B6-BF2D-BA0E1DB157F0}"/>
               </a:ext>
             </a:extLst>
           </p:cNvPr>
@@ -22979,7 +22977,7 @@
           <p:cNvPr id="58" name="kicker-05-marker">
             <a:extLst xmlns:a="http://schemas.openxmlformats.org/drawingml/2006/main">
               <a:ext uri="{FF2B5EF4-FFF2-40B4-BE49-F238E27FC236}">
-                <a16:creationId xmlns:a16="http://schemas.microsoft.com/office/drawing/2014/main" id="{34DC5250-7543-433A-8E06-6350798B4B43}"/>
+                <a16:creationId xmlns:a16="http://schemas.microsoft.com/office/drawing/2014/main" id="{67B5BDED-B85F-4C04-80DB-EBB8719BF9C5}"/>
               </a:ext>
             </a:extLst>
           </p:cNvPr>
@@ -23014,7 +23012,7 @@
           <p:cNvPr id="59" name="kicker-05-label">
             <a:extLst xmlns:a="http://schemas.openxmlformats.org/drawingml/2006/main">
               <a:ext uri="{FF2B5EF4-FFF2-40B4-BE49-F238E27FC236}">
-                <a16:creationId xmlns:a16="http://schemas.microsoft.com/office/drawing/2014/main" id="{743A89D2-EA2E-4E45-B673-2B0C00A715D7}"/>
+                <a16:creationId xmlns:a16="http://schemas.microsoft.com/office/drawing/2014/main" id="{07AC5965-FEB9-4732-8B33-0C10C033B739}"/>
               </a:ext>
             </a:extLst>
           </p:cNvPr>
@@ -23078,7 +23076,7 @@
           <p:cNvPr id="60" name="">
             <a:extLst xmlns:a="http://schemas.openxmlformats.org/drawingml/2006/main">
               <a:ext uri="{FF2B5EF4-FFF2-40B4-BE49-F238E27FC236}">
-                <a16:creationId xmlns:a16="http://schemas.microsoft.com/office/drawing/2014/main" id="{4EECB080-C735-4703-9633-C11D4EF94EA8}"/>
+                <a16:creationId xmlns:a16="http://schemas.microsoft.com/office/drawing/2014/main" id="{99F3A054-A293-4E36-ACF4-116E55E55586}"/>
               </a:ext>
             </a:extLst>
           </p:cNvPr>
@@ -23142,7 +23140,7 @@
           <p:cNvPr id="61" name="">
             <a:extLst xmlns:a="http://schemas.openxmlformats.org/drawingml/2006/main">
               <a:ext uri="{FF2B5EF4-FFF2-40B4-BE49-F238E27FC236}">
-                <a16:creationId xmlns:a16="http://schemas.microsoft.com/office/drawing/2014/main" id="{5FDA8410-B966-4047-B739-9CAA9C7995DF}"/>
+                <a16:creationId xmlns:a16="http://schemas.microsoft.com/office/drawing/2014/main" id="{E5C6E031-986D-4CA8-85FD-47D42398C561}"/>
               </a:ext>
             </a:extLst>
           </p:cNvPr>
@@ -23206,7 +23204,7 @@
           <p:cNvPr id="62" name="">
             <a:extLst xmlns:a="http://schemas.openxmlformats.org/drawingml/2006/main">
               <a:ext uri="{FF2B5EF4-FFF2-40B4-BE49-F238E27FC236}">
-                <a16:creationId xmlns:a16="http://schemas.microsoft.com/office/drawing/2014/main" id="{ABF77658-9483-4B51-8054-75B6410685B5}"/>
+                <a16:creationId xmlns:a16="http://schemas.microsoft.com/office/drawing/2014/main" id="{D85F5297-7808-4D67-BED0-87AC98AB1351}"/>
               </a:ext>
             </a:extLst>
           </p:cNvPr>
@@ -23241,7 +23239,7 @@
           <p:cNvPr id="63" name="">
             <a:extLst xmlns:a="http://schemas.openxmlformats.org/drawingml/2006/main">
               <a:ext uri="{FF2B5EF4-FFF2-40B4-BE49-F238E27FC236}">
-                <a16:creationId xmlns:a16="http://schemas.microsoft.com/office/drawing/2014/main" id="{0FABE114-CB13-486C-8254-89B813DF749F}"/>
+                <a16:creationId xmlns:a16="http://schemas.microsoft.com/office/drawing/2014/main" id="{4B68CD50-5E38-426F-B240-05136D4A1CD1}"/>
               </a:ext>
             </a:extLst>
           </p:cNvPr>
@@ -23276,7 +23274,7 @@
           <p:cNvPr id="64" name="">
             <a:extLst xmlns:a="http://schemas.openxmlformats.org/drawingml/2006/main">
               <a:ext uri="{FF2B5EF4-FFF2-40B4-BE49-F238E27FC236}">
-                <a16:creationId xmlns:a16="http://schemas.microsoft.com/office/drawing/2014/main" id="{B08FD746-ABC4-4808-95E9-C8B666B2D514}"/>
+                <a16:creationId xmlns:a16="http://schemas.microsoft.com/office/drawing/2014/main" id="{DA218277-707D-41FC-B9F4-427068D3546F}"/>
               </a:ext>
             </a:extLst>
           </p:cNvPr>
@@ -23311,7 +23309,7 @@
           <p:cNvPr id="65" name="">
             <a:extLst xmlns:a="http://schemas.openxmlformats.org/drawingml/2006/main">
               <a:ext uri="{FF2B5EF4-FFF2-40B4-BE49-F238E27FC236}">
-                <a16:creationId xmlns:a16="http://schemas.microsoft.com/office/drawing/2014/main" id="{B41060AD-3B3A-4FF9-974E-B837A974429F}"/>
+                <a16:creationId xmlns:a16="http://schemas.microsoft.com/office/drawing/2014/main" id="{A401F8C0-F713-48B6-B5E8-A67C8BAEFDE0}"/>
               </a:ext>
             </a:extLst>
           </p:cNvPr>
@@ -23346,7 +23344,7 @@
           <p:cNvPr id="66" name="">
             <a:extLst xmlns:a="http://schemas.openxmlformats.org/drawingml/2006/main">
               <a:ext uri="{FF2B5EF4-FFF2-40B4-BE49-F238E27FC236}">
-                <a16:creationId xmlns:a16="http://schemas.microsoft.com/office/drawing/2014/main" id="{7B3B6340-4C82-4DD5-A803-B36556BE9D72}"/>
+                <a16:creationId xmlns:a16="http://schemas.microsoft.com/office/drawing/2014/main" id="{C7CC21EF-BB5C-4C58-8D68-06A1A2B651B7}"/>
               </a:ext>
             </a:extLst>
           </p:cNvPr>
@@ -23410,7 +23408,7 @@
           <p:cNvPr id="67" name="">
             <a:extLst xmlns:a="http://schemas.openxmlformats.org/drawingml/2006/main">
               <a:ext uri="{FF2B5EF4-FFF2-40B4-BE49-F238E27FC236}">
-                <a16:creationId xmlns:a16="http://schemas.microsoft.com/office/drawing/2014/main" id="{9699728F-A6B9-4704-B6C9-0FF5D0DC4150}"/>
+                <a16:creationId xmlns:a16="http://schemas.microsoft.com/office/drawing/2014/main" id="{5BC31CAC-111E-4DF6-9EA1-3034C1438C39}"/>
               </a:ext>
             </a:extLst>
           </p:cNvPr>
@@ -23474,7 +23472,7 @@
           <p:cNvPr id="68" name="">
             <a:extLst xmlns:a="http://schemas.openxmlformats.org/drawingml/2006/main">
               <a:ext uri="{FF2B5EF4-FFF2-40B4-BE49-F238E27FC236}">
-                <a16:creationId xmlns:a16="http://schemas.microsoft.com/office/drawing/2014/main" id="{EB58151E-FCA3-4DF8-BCF3-A539DCD12CC6}"/>
+                <a16:creationId xmlns:a16="http://schemas.microsoft.com/office/drawing/2014/main" id="{A9E1D774-B11C-4669-9B87-1F477EC9DF3F}"/>
               </a:ext>
             </a:extLst>
           </p:cNvPr>
@@ -23536,7 +23534,7 @@
     </p:spTree>
     <p:extLst>
       <p:ext uri="{BB962C8B-B14F-4D97-AF65-F5344CB8AC3E}">
-        <p14:creationId xmlns:p14="http://schemas.microsoft.com/office/powerpoint/2010/main" val="239245637"/>
+        <p14:creationId xmlns:p14="http://schemas.microsoft.com/office/powerpoint/2010/main" val="2139978744"/>
       </p:ext>
     </p:extLst>
   </p:cSld>
@@ -23560,7 +23558,7 @@
           <p:cNvPr id="1" name="">
             <a:extLst xmlns:a="http://schemas.openxmlformats.org/drawingml/2006/main">
               <a:ext uri="{FF2B5EF4-FFF2-40B4-BE49-F238E27FC236}">
-                <a16:creationId xmlns:a16="http://schemas.microsoft.com/office/drawing/2014/main" id="{A0FE5B97-23A8-4671-96D1-2E2CE2A5F3B6}"/>
+                <a16:creationId xmlns:a16="http://schemas.microsoft.com/office/drawing/2014/main" id="{2BCD47A8-E386-41A0-95D8-E5B96B0F735F}"/>
               </a:ext>
             </a:extLst>
           </p:cNvPr>
@@ -23595,7 +23593,7 @@
           <p:cNvPr id="2" name="">
             <a:extLst xmlns:a="http://schemas.openxmlformats.org/drawingml/2006/main">
               <a:ext uri="{FF2B5EF4-FFF2-40B4-BE49-F238E27FC236}">
-                <a16:creationId xmlns:a16="http://schemas.microsoft.com/office/drawing/2014/main" id="{443820DF-4639-4662-86E9-C270AB0E5055}"/>
+                <a16:creationId xmlns:a16="http://schemas.microsoft.com/office/drawing/2014/main" id="{0AA4197B-5630-426E-A96C-854ED243CE1B}"/>
               </a:ext>
             </a:extLst>
           </p:cNvPr>
@@ -23630,7 +23628,7 @@
           <p:cNvPr id="3" name="">
             <a:extLst xmlns:a="http://schemas.openxmlformats.org/drawingml/2006/main">
               <a:ext uri="{FF2B5EF4-FFF2-40B4-BE49-F238E27FC236}">
-                <a16:creationId xmlns:a16="http://schemas.microsoft.com/office/drawing/2014/main" id="{C8AE45E0-2E03-415F-A4FC-4FA611D3CF52}"/>
+                <a16:creationId xmlns:a16="http://schemas.microsoft.com/office/drawing/2014/main" id="{198CBA3E-4424-472D-94FD-964DA9CAE095}"/>
               </a:ext>
             </a:extLst>
           </p:cNvPr>
@@ -23665,7 +23663,7 @@
           <p:cNvPr id="4" name="kicker-05-marker">
             <a:extLst xmlns:a="http://schemas.openxmlformats.org/drawingml/2006/main">
               <a:ext uri="{FF2B5EF4-FFF2-40B4-BE49-F238E27FC236}">
-                <a16:creationId xmlns:a16="http://schemas.microsoft.com/office/drawing/2014/main" id="{1CCAFB04-7237-431B-B13A-C24144BFECCD}"/>
+                <a16:creationId xmlns:a16="http://schemas.microsoft.com/office/drawing/2014/main" id="{538F4A4C-68AB-43BE-B256-672F46402400}"/>
               </a:ext>
             </a:extLst>
           </p:cNvPr>
@@ -23700,7 +23698,7 @@
           <p:cNvPr id="5" name="kicker-05-label">
             <a:extLst xmlns:a="http://schemas.openxmlformats.org/drawingml/2006/main">
               <a:ext uri="{FF2B5EF4-FFF2-40B4-BE49-F238E27FC236}">
-                <a16:creationId xmlns:a16="http://schemas.microsoft.com/office/drawing/2014/main" id="{35F54A04-41F1-4985-A630-C70FA63F5ABE}"/>
+                <a16:creationId xmlns:a16="http://schemas.microsoft.com/office/drawing/2014/main" id="{8AA7B9E9-5180-43E9-86E0-81E7C4F23C95}"/>
               </a:ext>
             </a:extLst>
           </p:cNvPr>
@@ -23764,7 +23762,7 @@
           <p:cNvPr id="6" name="">
             <a:extLst xmlns:a="http://schemas.openxmlformats.org/drawingml/2006/main">
               <a:ext uri="{FF2B5EF4-FFF2-40B4-BE49-F238E27FC236}">
-                <a16:creationId xmlns:a16="http://schemas.microsoft.com/office/drawing/2014/main" id="{F008F8B0-0FAF-4BEE-9EB2-28570E743063}"/>
+                <a16:creationId xmlns:a16="http://schemas.microsoft.com/office/drawing/2014/main" id="{052CF3BE-768D-41F6-BD8D-C11E218D4BF5}"/>
               </a:ext>
             </a:extLst>
           </p:cNvPr>
@@ -23828,7 +23826,7 @@
           <p:cNvPr id="7" name="">
             <a:extLst xmlns:a="http://schemas.openxmlformats.org/drawingml/2006/main">
               <a:ext uri="{FF2B5EF4-FFF2-40B4-BE49-F238E27FC236}">
-                <a16:creationId xmlns:a16="http://schemas.microsoft.com/office/drawing/2014/main" id="{ECE1D610-10D7-4036-AF4C-0A6B173626CB}"/>
+                <a16:creationId xmlns:a16="http://schemas.microsoft.com/office/drawing/2014/main" id="{5D40D971-0305-4754-A089-FF74E711E486}"/>
               </a:ext>
             </a:extLst>
           </p:cNvPr>
@@ -23892,7 +23890,7 @@
           <p:cNvPr id="8" name="">
             <a:extLst xmlns:a="http://schemas.openxmlformats.org/drawingml/2006/main">
               <a:ext uri="{FF2B5EF4-FFF2-40B4-BE49-F238E27FC236}">
-                <a16:creationId xmlns:a16="http://schemas.microsoft.com/office/drawing/2014/main" id="{C1E88AB0-A638-4AD3-9F89-AB47797DC0E7}"/>
+                <a16:creationId xmlns:a16="http://schemas.microsoft.com/office/drawing/2014/main" id="{6C28521F-3FCE-4ACC-BF62-93A247500BCA}"/>
               </a:ext>
             </a:extLst>
           </p:cNvPr>
@@ -23927,7 +23925,7 @@
           <p:cNvPr id="9" name="">
             <a:extLst xmlns:a="http://schemas.openxmlformats.org/drawingml/2006/main">
               <a:ext uri="{FF2B5EF4-FFF2-40B4-BE49-F238E27FC236}">
-                <a16:creationId xmlns:a16="http://schemas.microsoft.com/office/drawing/2014/main" id="{A404C72D-7B93-4C32-9262-841C5846B6DB}"/>
+                <a16:creationId xmlns:a16="http://schemas.microsoft.com/office/drawing/2014/main" id="{5F7F04FF-6E60-4F70-B654-54F5731253C3}"/>
               </a:ext>
             </a:extLst>
           </p:cNvPr>
@@ -23991,7 +23989,7 @@
           <p:cNvPr id="10" name="">
             <a:extLst xmlns:a="http://schemas.openxmlformats.org/drawingml/2006/main">
               <a:ext uri="{FF2B5EF4-FFF2-40B4-BE49-F238E27FC236}">
-                <a16:creationId xmlns:a16="http://schemas.microsoft.com/office/drawing/2014/main" id="{9D9D19C2-46C0-4501-B5BE-02139EE54AFA}"/>
+                <a16:creationId xmlns:a16="http://schemas.microsoft.com/office/drawing/2014/main" id="{86A12388-591B-4EF7-9C71-69E26CB7D71D}"/>
               </a:ext>
             </a:extLst>
           </p:cNvPr>
@@ -24055,7 +24053,7 @@
           <p:cNvPr id="11" name="">
             <a:extLst xmlns:a="http://schemas.openxmlformats.org/drawingml/2006/main">
               <a:ext uri="{FF2B5EF4-FFF2-40B4-BE49-F238E27FC236}">
-                <a16:creationId xmlns:a16="http://schemas.microsoft.com/office/drawing/2014/main" id="{26DDFB1E-C9BA-4FB8-BFA2-DA73C4EE6818}"/>
+                <a16:creationId xmlns:a16="http://schemas.microsoft.com/office/drawing/2014/main" id="{C9CF1437-1DC0-4047-B346-75BFA1E2B04F}"/>
               </a:ext>
             </a:extLst>
           </p:cNvPr>
@@ -24119,7 +24117,7 @@
           <p:cNvPr id="12" name="">
             <a:extLst xmlns:a="http://schemas.openxmlformats.org/drawingml/2006/main">
               <a:ext uri="{FF2B5EF4-FFF2-40B4-BE49-F238E27FC236}">
-                <a16:creationId xmlns:a16="http://schemas.microsoft.com/office/drawing/2014/main" id="{E64EB4C2-C211-4220-98C0-C3BCF5E98B8A}"/>
+                <a16:creationId xmlns:a16="http://schemas.microsoft.com/office/drawing/2014/main" id="{970C5736-7A80-4D6D-A77B-833F4FF10836}"/>
               </a:ext>
             </a:extLst>
           </p:cNvPr>
@@ -24152,7 +24150,7 @@
           <p:cNvPr id="13" name="">
             <a:extLst xmlns:a="http://schemas.openxmlformats.org/drawingml/2006/main">
               <a:ext uri="{FF2B5EF4-FFF2-40B4-BE49-F238E27FC236}">
-                <a16:creationId xmlns:a16="http://schemas.microsoft.com/office/drawing/2014/main" id="{EE1FFBD2-9C7A-4EBD-837E-066C777F8DD5}"/>
+                <a16:creationId xmlns:a16="http://schemas.microsoft.com/office/drawing/2014/main" id="{4E3C9044-B4AE-4F43-8636-73A563053149}"/>
               </a:ext>
             </a:extLst>
           </p:cNvPr>
@@ -24187,7 +24185,7 @@
           <p:cNvPr id="14" name="">
             <a:extLst xmlns:a="http://schemas.openxmlformats.org/drawingml/2006/main">
               <a:ext uri="{FF2B5EF4-FFF2-40B4-BE49-F238E27FC236}">
-                <a16:creationId xmlns:a16="http://schemas.microsoft.com/office/drawing/2014/main" id="{28133FFB-9718-4A38-BFA2-FEDBF5B75E84}"/>
+                <a16:creationId xmlns:a16="http://schemas.microsoft.com/office/drawing/2014/main" id="{A0E0C2D6-B925-45C8-80C8-CAE3553BDCB3}"/>
               </a:ext>
             </a:extLst>
           </p:cNvPr>
@@ -24251,7 +24249,7 @@
           <p:cNvPr id="15" name="">
             <a:extLst xmlns:a="http://schemas.openxmlformats.org/drawingml/2006/main">
               <a:ext uri="{FF2B5EF4-FFF2-40B4-BE49-F238E27FC236}">
-                <a16:creationId xmlns:a16="http://schemas.microsoft.com/office/drawing/2014/main" id="{1A596D16-36A0-4656-A745-5B0D7DA23C08}"/>
+                <a16:creationId xmlns:a16="http://schemas.microsoft.com/office/drawing/2014/main" id="{60CDAAB4-FA04-4080-8D43-C553586BC065}"/>
               </a:ext>
             </a:extLst>
           </p:cNvPr>
@@ -24315,7 +24313,7 @@
           <p:cNvPr id="16" name="">
             <a:extLst xmlns:a="http://schemas.openxmlformats.org/drawingml/2006/main">
               <a:ext uri="{FF2B5EF4-FFF2-40B4-BE49-F238E27FC236}">
-                <a16:creationId xmlns:a16="http://schemas.microsoft.com/office/drawing/2014/main" id="{58083433-B459-44E5-83F8-453F229D7E16}"/>
+                <a16:creationId xmlns:a16="http://schemas.microsoft.com/office/drawing/2014/main" id="{D4AAE750-F43E-4EFD-9F0E-5DEBC3FA26C6}"/>
               </a:ext>
             </a:extLst>
           </p:cNvPr>
@@ -24348,7 +24346,7 @@
           <p:cNvPr id="17" name="">
             <a:extLst xmlns:a="http://schemas.openxmlformats.org/drawingml/2006/main">
               <a:ext uri="{FF2B5EF4-FFF2-40B4-BE49-F238E27FC236}">
-                <a16:creationId xmlns:a16="http://schemas.microsoft.com/office/drawing/2014/main" id="{59411B04-ED96-42C5-9E69-833BC70F3630}"/>
+                <a16:creationId xmlns:a16="http://schemas.microsoft.com/office/drawing/2014/main" id="{AC8AACE4-B6AC-4C21-B511-73BB013BE3A5}"/>
               </a:ext>
             </a:extLst>
           </p:cNvPr>
@@ -24383,7 +24381,7 @@
           <p:cNvPr id="18" name="">
             <a:extLst xmlns:a="http://schemas.openxmlformats.org/drawingml/2006/main">
               <a:ext uri="{FF2B5EF4-FFF2-40B4-BE49-F238E27FC236}">
-                <a16:creationId xmlns:a16="http://schemas.microsoft.com/office/drawing/2014/main" id="{70931029-CAFB-4951-A565-66324A93C283}"/>
+                <a16:creationId xmlns:a16="http://schemas.microsoft.com/office/drawing/2014/main" id="{B4976D21-F594-420E-9A4B-6D72A6F82003}"/>
               </a:ext>
             </a:extLst>
           </p:cNvPr>
@@ -24447,7 +24445,7 @@
           <p:cNvPr id="19" name="">
             <a:extLst xmlns:a="http://schemas.openxmlformats.org/drawingml/2006/main">
               <a:ext uri="{FF2B5EF4-FFF2-40B4-BE49-F238E27FC236}">
-                <a16:creationId xmlns:a16="http://schemas.microsoft.com/office/drawing/2014/main" id="{C4095CC5-F169-44DE-9C53-99420E40098B}"/>
+                <a16:creationId xmlns:a16="http://schemas.microsoft.com/office/drawing/2014/main" id="{AAABF3D0-4108-4CED-BA5E-401E49101D6B}"/>
               </a:ext>
             </a:extLst>
           </p:cNvPr>
@@ -24511,7 +24509,7 @@
           <p:cNvPr id="20" name="">
             <a:extLst xmlns:a="http://schemas.openxmlformats.org/drawingml/2006/main">
               <a:ext uri="{FF2B5EF4-FFF2-40B4-BE49-F238E27FC236}">
-                <a16:creationId xmlns:a16="http://schemas.microsoft.com/office/drawing/2014/main" id="{F37F6ABA-D40E-4865-9B94-BF7C9EF7FF80}"/>
+                <a16:creationId xmlns:a16="http://schemas.microsoft.com/office/drawing/2014/main" id="{C8D200B9-0E75-451A-9E6C-A71CE60F3962}"/>
               </a:ext>
             </a:extLst>
           </p:cNvPr>
@@ -24544,7 +24542,7 @@
           <p:cNvPr id="21" name="">
             <a:extLst xmlns:a="http://schemas.openxmlformats.org/drawingml/2006/main">
               <a:ext uri="{FF2B5EF4-FFF2-40B4-BE49-F238E27FC236}">
-                <a16:creationId xmlns:a16="http://schemas.microsoft.com/office/drawing/2014/main" id="{6E03F28B-B07E-4FF0-8BEC-DD3B31DF1559}"/>
+                <a16:creationId xmlns:a16="http://schemas.microsoft.com/office/drawing/2014/main" id="{8E795672-83D3-470B-A506-60C1B1A69DEA}"/>
               </a:ext>
             </a:extLst>
           </p:cNvPr>
@@ -24579,7 +24577,7 @@
           <p:cNvPr id="22" name="">
             <a:extLst xmlns:a="http://schemas.openxmlformats.org/drawingml/2006/main">
               <a:ext uri="{FF2B5EF4-FFF2-40B4-BE49-F238E27FC236}">
-                <a16:creationId xmlns:a16="http://schemas.microsoft.com/office/drawing/2014/main" id="{664D70A1-425D-4E81-AC87-CACFC874680A}"/>
+                <a16:creationId xmlns:a16="http://schemas.microsoft.com/office/drawing/2014/main" id="{79689BF6-9CE6-4CC1-8170-BF931C7EFA30}"/>
               </a:ext>
             </a:extLst>
           </p:cNvPr>
@@ -24643,7 +24641,7 @@
           <p:cNvPr id="23" name="">
             <a:extLst xmlns:a="http://schemas.openxmlformats.org/drawingml/2006/main">
               <a:ext uri="{FF2B5EF4-FFF2-40B4-BE49-F238E27FC236}">
-                <a16:creationId xmlns:a16="http://schemas.microsoft.com/office/drawing/2014/main" id="{01C93787-1553-4916-B4F3-FD73AEF71C5C}"/>
+                <a16:creationId xmlns:a16="http://schemas.microsoft.com/office/drawing/2014/main" id="{D26C29DF-4A79-4AE3-8872-58839284DE79}"/>
               </a:ext>
             </a:extLst>
           </p:cNvPr>
@@ -24707,7 +24705,7 @@
           <p:cNvPr id="24" name="">
             <a:extLst xmlns:a="http://schemas.openxmlformats.org/drawingml/2006/main">
               <a:ext uri="{FF2B5EF4-FFF2-40B4-BE49-F238E27FC236}">
-                <a16:creationId xmlns:a16="http://schemas.microsoft.com/office/drawing/2014/main" id="{0331DF25-CD38-4DE6-9F52-29BB0DF71AD9}"/>
+                <a16:creationId xmlns:a16="http://schemas.microsoft.com/office/drawing/2014/main" id="{D61E4DF5-D74A-4C32-B39D-E7EDA192FF0A}"/>
               </a:ext>
             </a:extLst>
           </p:cNvPr>
@@ -24740,7 +24738,7 @@
           <p:cNvPr id="25" name="">
             <a:extLst xmlns:a="http://schemas.openxmlformats.org/drawingml/2006/main">
               <a:ext uri="{FF2B5EF4-FFF2-40B4-BE49-F238E27FC236}">
-                <a16:creationId xmlns:a16="http://schemas.microsoft.com/office/drawing/2014/main" id="{49F7D1D0-BBFA-4251-89F4-6934D42435AF}"/>
+                <a16:creationId xmlns:a16="http://schemas.microsoft.com/office/drawing/2014/main" id="{9ED50C97-4128-40F7-B2A6-252FF100F725}"/>
               </a:ext>
             </a:extLst>
           </p:cNvPr>
@@ -24775,7 +24773,7 @@
           <p:cNvPr id="26" name="">
             <a:extLst xmlns:a="http://schemas.openxmlformats.org/drawingml/2006/main">
               <a:ext uri="{FF2B5EF4-FFF2-40B4-BE49-F238E27FC236}">
-                <a16:creationId xmlns:a16="http://schemas.microsoft.com/office/drawing/2014/main" id="{76E13A58-0B98-4324-BEBA-793CD0C98AED}"/>
+                <a16:creationId xmlns:a16="http://schemas.microsoft.com/office/drawing/2014/main" id="{BFDEDBFE-CF5D-4CB2-ACB8-224908E2AC9A}"/>
               </a:ext>
             </a:extLst>
           </p:cNvPr>
@@ -24839,7 +24837,7 @@
           <p:cNvPr id="27" name="">
             <a:extLst xmlns:a="http://schemas.openxmlformats.org/drawingml/2006/main">
               <a:ext uri="{FF2B5EF4-FFF2-40B4-BE49-F238E27FC236}">
-                <a16:creationId xmlns:a16="http://schemas.microsoft.com/office/drawing/2014/main" id="{199EF5D6-075D-4934-863B-00F17F256390}"/>
+                <a16:creationId xmlns:a16="http://schemas.microsoft.com/office/drawing/2014/main" id="{6D99C60F-8ABC-4138-8F6C-3E667672F860}"/>
               </a:ext>
             </a:extLst>
           </p:cNvPr>
@@ -24903,7 +24901,7 @@
           <p:cNvPr id="28" name="">
             <a:extLst xmlns:a="http://schemas.openxmlformats.org/drawingml/2006/main">
               <a:ext uri="{FF2B5EF4-FFF2-40B4-BE49-F238E27FC236}">
-                <a16:creationId xmlns:a16="http://schemas.microsoft.com/office/drawing/2014/main" id="{C0FEA04D-5AC8-4B74-8248-FAC5CF0DC705}"/>
+                <a16:creationId xmlns:a16="http://schemas.microsoft.com/office/drawing/2014/main" id="{C1FC4000-4812-431F-9041-1AD24998ECFC}"/>
               </a:ext>
             </a:extLst>
           </p:cNvPr>
@@ -24936,7 +24934,7 @@
           <p:cNvPr id="29" name="">
             <a:extLst xmlns:a="http://schemas.openxmlformats.org/drawingml/2006/main">
               <a:ext uri="{FF2B5EF4-FFF2-40B4-BE49-F238E27FC236}">
-                <a16:creationId xmlns:a16="http://schemas.microsoft.com/office/drawing/2014/main" id="{D1F01E52-1D5C-4382-9ADE-5EC20D6988FA}"/>
+                <a16:creationId xmlns:a16="http://schemas.microsoft.com/office/drawing/2014/main" id="{763F11AE-7E47-4D8A-8B84-2025EF73EECF}"/>
               </a:ext>
             </a:extLst>
           </p:cNvPr>
@@ -25000,7 +24998,7 @@
           <p:cNvPr id="30" name="">
             <a:extLst xmlns:a="http://schemas.openxmlformats.org/drawingml/2006/main">
               <a:ext uri="{FF2B5EF4-FFF2-40B4-BE49-F238E27FC236}">
-                <a16:creationId xmlns:a16="http://schemas.microsoft.com/office/drawing/2014/main" id="{9D942968-8A39-420C-9B78-3C66ECD55720}"/>
+                <a16:creationId xmlns:a16="http://schemas.microsoft.com/office/drawing/2014/main" id="{1306D32A-DC8A-4CCC-A0A7-01DBD8C37949}"/>
               </a:ext>
             </a:extLst>
           </p:cNvPr>
@@ -25064,7 +25062,7 @@
           <p:cNvPr id="31" name="">
             <a:extLst xmlns:a="http://schemas.openxmlformats.org/drawingml/2006/main">
               <a:ext uri="{FF2B5EF4-FFF2-40B4-BE49-F238E27FC236}">
-                <a16:creationId xmlns:a16="http://schemas.microsoft.com/office/drawing/2014/main" id="{3451EE3E-1D22-416A-9598-06D9758F5EF7}"/>
+                <a16:creationId xmlns:a16="http://schemas.microsoft.com/office/drawing/2014/main" id="{C399F926-B49B-41BA-8043-1BDBA9EEB10A}"/>
               </a:ext>
             </a:extLst>
           </p:cNvPr>
@@ -25099,7 +25097,7 @@
           <p:cNvPr id="32" name="">
             <a:extLst xmlns:a="http://schemas.openxmlformats.org/drawingml/2006/main">
               <a:ext uri="{FF2B5EF4-FFF2-40B4-BE49-F238E27FC236}">
-                <a16:creationId xmlns:a16="http://schemas.microsoft.com/office/drawing/2014/main" id="{AA056CE3-999A-4920-8CEC-E6A24042F7D8}"/>
+                <a16:creationId xmlns:a16="http://schemas.microsoft.com/office/drawing/2014/main" id="{01B9429D-C04A-4DDB-883A-29C028103104}"/>
               </a:ext>
             </a:extLst>
           </p:cNvPr>
@@ -25163,7 +25161,7 @@
           <p:cNvPr id="33" name="">
             <a:extLst xmlns:a="http://schemas.openxmlformats.org/drawingml/2006/main">
               <a:ext uri="{FF2B5EF4-FFF2-40B4-BE49-F238E27FC236}">
-                <a16:creationId xmlns:a16="http://schemas.microsoft.com/office/drawing/2014/main" id="{2211C5A9-C26C-4DEE-81F0-AFCA3BF2CCD9}"/>
+                <a16:creationId xmlns:a16="http://schemas.microsoft.com/office/drawing/2014/main" id="{91204972-7C66-4B46-80CE-166B70B9CE02}"/>
               </a:ext>
             </a:extLst>
           </p:cNvPr>
@@ -25227,7 +25225,7 @@
           <p:cNvPr id="34" name="">
             <a:extLst xmlns:a="http://schemas.openxmlformats.org/drawingml/2006/main">
               <a:ext uri="{FF2B5EF4-FFF2-40B4-BE49-F238E27FC236}">
-                <a16:creationId xmlns:a16="http://schemas.microsoft.com/office/drawing/2014/main" id="{B1DF2415-1B92-48ED-A3E3-A80EBE7BE647}"/>
+                <a16:creationId xmlns:a16="http://schemas.microsoft.com/office/drawing/2014/main" id="{641C16E0-D0DC-4DD5-B266-C87D0ABEA4CF}"/>
               </a:ext>
             </a:extLst>
           </p:cNvPr>
@@ -25289,7 +25287,7 @@
     </p:spTree>
     <p:extLst>
       <p:ext uri="{BB962C8B-B14F-4D97-AF65-F5344CB8AC3E}">
-        <p14:creationId xmlns:p14="http://schemas.microsoft.com/office/powerpoint/2010/main" val="1447434691"/>
+        <p14:creationId xmlns:p14="http://schemas.microsoft.com/office/powerpoint/2010/main" val="1430327049"/>
       </p:ext>
     </p:extLst>
   </p:cSld>
@@ -25313,7 +25311,7 @@
           <p:cNvPr id="1" name="">
             <a:extLst xmlns:a="http://schemas.openxmlformats.org/drawingml/2006/main">
               <a:ext uri="{FF2B5EF4-FFF2-40B4-BE49-F238E27FC236}">
-                <a16:creationId xmlns:a16="http://schemas.microsoft.com/office/drawing/2014/main" id="{59817EAE-E4D1-4BF7-AC79-864874C5ECA6}"/>
+                <a16:creationId xmlns:a16="http://schemas.microsoft.com/office/drawing/2014/main" id="{A3DE210C-AAF6-4DD1-8A11-EA7BC19E3F2B}"/>
               </a:ext>
             </a:extLst>
           </p:cNvPr>
@@ -25348,7 +25346,7 @@
           <p:cNvPr id="2" name="">
             <a:extLst xmlns:a="http://schemas.openxmlformats.org/drawingml/2006/main">
               <a:ext uri="{FF2B5EF4-FFF2-40B4-BE49-F238E27FC236}">
-                <a16:creationId xmlns:a16="http://schemas.microsoft.com/office/drawing/2014/main" id="{8DB7E207-164A-40D6-A049-F7ED37CBE39D}"/>
+                <a16:creationId xmlns:a16="http://schemas.microsoft.com/office/drawing/2014/main" id="{2E122017-F6E6-4E78-AE7A-80E80BD09265}"/>
               </a:ext>
             </a:extLst>
           </p:cNvPr>
@@ -25383,7 +25381,7 @@
           <p:cNvPr id="3" name="">
             <a:extLst xmlns:a="http://schemas.openxmlformats.org/drawingml/2006/main">
               <a:ext uri="{FF2B5EF4-FFF2-40B4-BE49-F238E27FC236}">
-                <a16:creationId xmlns:a16="http://schemas.microsoft.com/office/drawing/2014/main" id="{D4CB88F8-1FAC-480C-BA1D-D195BFAE42FB}"/>
+                <a16:creationId xmlns:a16="http://schemas.microsoft.com/office/drawing/2014/main" id="{05C57486-BCB7-4F7B-9065-80CEF9DD81A9}"/>
               </a:ext>
             </a:extLst>
           </p:cNvPr>
@@ -25418,7 +25416,7 @@
           <p:cNvPr id="4" name="kicker-05-marker">
             <a:extLst xmlns:a="http://schemas.openxmlformats.org/drawingml/2006/main">
               <a:ext uri="{FF2B5EF4-FFF2-40B4-BE49-F238E27FC236}">
-                <a16:creationId xmlns:a16="http://schemas.microsoft.com/office/drawing/2014/main" id="{C34CD514-403B-4473-9853-809838AAF1BB}"/>
+                <a16:creationId xmlns:a16="http://schemas.microsoft.com/office/drawing/2014/main" id="{33B4EBD1-166F-47B7-B74F-15EE9163BB85}"/>
               </a:ext>
             </a:extLst>
           </p:cNvPr>
@@ -25453,7 +25451,7 @@
           <p:cNvPr id="5" name="kicker-05-label">
             <a:extLst xmlns:a="http://schemas.openxmlformats.org/drawingml/2006/main">
               <a:ext uri="{FF2B5EF4-FFF2-40B4-BE49-F238E27FC236}">
-                <a16:creationId xmlns:a16="http://schemas.microsoft.com/office/drawing/2014/main" id="{4A166E9E-54D6-49DC-A611-F34491E802D3}"/>
+                <a16:creationId xmlns:a16="http://schemas.microsoft.com/office/drawing/2014/main" id="{B71BE759-CD5C-4682-92EA-67BAAE4A1CA8}"/>
               </a:ext>
             </a:extLst>
           </p:cNvPr>
@@ -25517,7 +25515,7 @@
           <p:cNvPr id="6" name="">
             <a:extLst xmlns:a="http://schemas.openxmlformats.org/drawingml/2006/main">
               <a:ext uri="{FF2B5EF4-FFF2-40B4-BE49-F238E27FC236}">
-                <a16:creationId xmlns:a16="http://schemas.microsoft.com/office/drawing/2014/main" id="{CF783421-F29F-4A05-9AA7-A6F6A14EBB7E}"/>
+                <a16:creationId xmlns:a16="http://schemas.microsoft.com/office/drawing/2014/main" id="{5C5CD0AA-3580-4996-88A3-67857177A775}"/>
               </a:ext>
             </a:extLst>
           </p:cNvPr>
@@ -25581,7 +25579,7 @@
           <p:cNvPr id="7" name="">
             <a:extLst xmlns:a="http://schemas.openxmlformats.org/drawingml/2006/main">
               <a:ext uri="{FF2B5EF4-FFF2-40B4-BE49-F238E27FC236}">
-                <a16:creationId xmlns:a16="http://schemas.microsoft.com/office/drawing/2014/main" id="{D45A5205-87C7-4EF9-96DE-F3EA42538289}"/>
+                <a16:creationId xmlns:a16="http://schemas.microsoft.com/office/drawing/2014/main" id="{8AA257C8-7A4A-4D6C-BCD3-76C1BFC8BC14}"/>
               </a:ext>
             </a:extLst>
           </p:cNvPr>
@@ -25645,7 +25643,7 @@
           <p:cNvPr id="8" name="">
             <a:extLst xmlns:a="http://schemas.openxmlformats.org/drawingml/2006/main">
               <a:ext uri="{FF2B5EF4-FFF2-40B4-BE49-F238E27FC236}">
-                <a16:creationId xmlns:a16="http://schemas.microsoft.com/office/drawing/2014/main" id="{88A3F47A-10AC-4D1E-B74E-6132EA7412A0}"/>
+                <a16:creationId xmlns:a16="http://schemas.microsoft.com/office/drawing/2014/main" id="{A8586B0F-EABD-4C49-9113-FDAA31D6D7CF}"/>
               </a:ext>
             </a:extLst>
           </p:cNvPr>
@@ -25680,7 +25678,7 @@
           <p:cNvPr id="9" name="">
             <a:extLst xmlns:a="http://schemas.openxmlformats.org/drawingml/2006/main">
               <a:ext uri="{FF2B5EF4-FFF2-40B4-BE49-F238E27FC236}">
-                <a16:creationId xmlns:a16="http://schemas.microsoft.com/office/drawing/2014/main" id="{B6FEACD7-C6E8-429A-A131-19619FE63606}"/>
+                <a16:creationId xmlns:a16="http://schemas.microsoft.com/office/drawing/2014/main" id="{7DECE5B5-8B92-433E-A7FC-099F9ADDFCC3}"/>
               </a:ext>
             </a:extLst>
           </p:cNvPr>
@@ -25744,7 +25742,7 @@
           <p:cNvPr id="10" name="">
             <a:extLst xmlns:a="http://schemas.openxmlformats.org/drawingml/2006/main">
               <a:ext uri="{FF2B5EF4-FFF2-40B4-BE49-F238E27FC236}">
-                <a16:creationId xmlns:a16="http://schemas.microsoft.com/office/drawing/2014/main" id="{3F8F7946-20ED-4382-8A3F-4B9CF62270C4}"/>
+                <a16:creationId xmlns:a16="http://schemas.microsoft.com/office/drawing/2014/main" id="{0EEEC6EB-3FB5-4374-B6CC-41EB923EEC92}"/>
               </a:ext>
             </a:extLst>
           </p:cNvPr>
@@ -25808,7 +25806,7 @@
           <p:cNvPr id="11" name="">
             <a:extLst xmlns:a="http://schemas.openxmlformats.org/drawingml/2006/main">
               <a:ext uri="{FF2B5EF4-FFF2-40B4-BE49-F238E27FC236}">
-                <a16:creationId xmlns:a16="http://schemas.microsoft.com/office/drawing/2014/main" id="{2DC6F42F-383A-498B-9E66-905AD78A6B94}"/>
+                <a16:creationId xmlns:a16="http://schemas.microsoft.com/office/drawing/2014/main" id="{01758B94-786C-4B8C-980B-28F99358238B}"/>
               </a:ext>
             </a:extLst>
           </p:cNvPr>
@@ -25872,7 +25870,7 @@
           <p:cNvPr id="12" name="">
             <a:extLst xmlns:a="http://schemas.openxmlformats.org/drawingml/2006/main">
               <a:ext uri="{FF2B5EF4-FFF2-40B4-BE49-F238E27FC236}">
-                <a16:creationId xmlns:a16="http://schemas.microsoft.com/office/drawing/2014/main" id="{0EE80FA7-F9FB-4BDC-A4D8-68B72013DD58}"/>
+                <a16:creationId xmlns:a16="http://schemas.microsoft.com/office/drawing/2014/main" id="{A988D7D9-7B82-4B07-A7CF-D3968DD770AD}"/>
               </a:ext>
             </a:extLst>
           </p:cNvPr>
@@ -25907,7 +25905,7 @@
           <p:cNvPr id="13" name="">
             <a:extLst xmlns:a="http://schemas.openxmlformats.org/drawingml/2006/main">
               <a:ext uri="{FF2B5EF4-FFF2-40B4-BE49-F238E27FC236}">
-                <a16:creationId xmlns:a16="http://schemas.microsoft.com/office/drawing/2014/main" id="{152527BE-8169-4DC7-9DBE-3800F64E2A91}"/>
+                <a16:creationId xmlns:a16="http://schemas.microsoft.com/office/drawing/2014/main" id="{FBD49EAB-CC0D-4B59-883B-B913B619BA78}"/>
               </a:ext>
             </a:extLst>
           </p:cNvPr>
@@ -25940,7 +25938,7 @@
           <p:cNvPr id="14" name="">
             <a:extLst xmlns:a="http://schemas.openxmlformats.org/drawingml/2006/main">
               <a:ext uri="{FF2B5EF4-FFF2-40B4-BE49-F238E27FC236}">
-                <a16:creationId xmlns:a16="http://schemas.microsoft.com/office/drawing/2014/main" id="{04723B2D-5F36-4314-8BCA-358FEF11E389}"/>
+                <a16:creationId xmlns:a16="http://schemas.microsoft.com/office/drawing/2014/main" id="{C794F7A5-64CC-4778-81DF-1650EF6DC90E}"/>
               </a:ext>
             </a:extLst>
           </p:cNvPr>
@@ -25975,7 +25973,7 @@
           <p:cNvPr id="15" name="">
             <a:extLst xmlns:a="http://schemas.openxmlformats.org/drawingml/2006/main">
               <a:ext uri="{FF2B5EF4-FFF2-40B4-BE49-F238E27FC236}">
-                <a16:creationId xmlns:a16="http://schemas.microsoft.com/office/drawing/2014/main" id="{0606F5D5-3A14-4BC7-856C-6D64F466A283}"/>
+                <a16:creationId xmlns:a16="http://schemas.microsoft.com/office/drawing/2014/main" id="{0FAC82BE-6C68-4DBE-83F5-772AD3A796CE}"/>
               </a:ext>
             </a:extLst>
           </p:cNvPr>
@@ -26039,7 +26037,7 @@
           <p:cNvPr id="16" name="">
             <a:extLst xmlns:a="http://schemas.openxmlformats.org/drawingml/2006/main">
               <a:ext uri="{FF2B5EF4-FFF2-40B4-BE49-F238E27FC236}">
-                <a16:creationId xmlns:a16="http://schemas.microsoft.com/office/drawing/2014/main" id="{1C78AFF5-28B5-4C66-B715-124D2DFE5A2A}"/>
+                <a16:creationId xmlns:a16="http://schemas.microsoft.com/office/drawing/2014/main" id="{E6D0C6CC-0342-46D4-B74E-FC9CD8C14930}"/>
               </a:ext>
             </a:extLst>
           </p:cNvPr>
@@ -26074,7 +26072,7 @@
           <p:cNvPr id="17" name="">
             <a:extLst xmlns:a="http://schemas.openxmlformats.org/drawingml/2006/main">
               <a:ext uri="{FF2B5EF4-FFF2-40B4-BE49-F238E27FC236}">
-                <a16:creationId xmlns:a16="http://schemas.microsoft.com/office/drawing/2014/main" id="{DD8A0DD6-6F3A-40AF-A56E-BBC23BB29C9E}"/>
+                <a16:creationId xmlns:a16="http://schemas.microsoft.com/office/drawing/2014/main" id="{69385443-3C65-4034-AA36-90BE3431C545}"/>
               </a:ext>
             </a:extLst>
           </p:cNvPr>
@@ -26138,7 +26136,7 @@
           <p:cNvPr id="18" name="">
             <a:extLst xmlns:a="http://schemas.openxmlformats.org/drawingml/2006/main">
               <a:ext uri="{FF2B5EF4-FFF2-40B4-BE49-F238E27FC236}">
-                <a16:creationId xmlns:a16="http://schemas.microsoft.com/office/drawing/2014/main" id="{359C8363-F2FE-418E-BB54-9063C2D48259}"/>
+                <a16:creationId xmlns:a16="http://schemas.microsoft.com/office/drawing/2014/main" id="{F5F31180-39BD-4AD5-978E-9A748685319B}"/>
               </a:ext>
             </a:extLst>
           </p:cNvPr>
@@ -26173,7 +26171,7 @@
           <p:cNvPr id="19" name="">
             <a:extLst xmlns:a="http://schemas.openxmlformats.org/drawingml/2006/main">
               <a:ext uri="{FF2B5EF4-FFF2-40B4-BE49-F238E27FC236}">
-                <a16:creationId xmlns:a16="http://schemas.microsoft.com/office/drawing/2014/main" id="{C4809C25-9D53-44E8-B699-F12828CDD4DB}"/>
+                <a16:creationId xmlns:a16="http://schemas.microsoft.com/office/drawing/2014/main" id="{EC1E54B0-561B-4CD9-8CAD-02ECAF1BFB79}"/>
               </a:ext>
             </a:extLst>
           </p:cNvPr>
@@ -26237,7 +26235,7 @@
           <p:cNvPr id="20" name="">
             <a:extLst xmlns:a="http://schemas.openxmlformats.org/drawingml/2006/main">
               <a:ext uri="{FF2B5EF4-FFF2-40B4-BE49-F238E27FC236}">
-                <a16:creationId xmlns:a16="http://schemas.microsoft.com/office/drawing/2014/main" id="{0BD06415-91AB-4A21-8ADA-C4349A7B5003}"/>
+                <a16:creationId xmlns:a16="http://schemas.microsoft.com/office/drawing/2014/main" id="{B4CA1F86-BE1E-4009-9D5E-A8712A1F48C8}"/>
               </a:ext>
             </a:extLst>
           </p:cNvPr>
@@ -26272,7 +26270,7 @@
           <p:cNvPr id="21" name="">
             <a:extLst xmlns:a="http://schemas.openxmlformats.org/drawingml/2006/main">
               <a:ext uri="{FF2B5EF4-FFF2-40B4-BE49-F238E27FC236}">
-                <a16:creationId xmlns:a16="http://schemas.microsoft.com/office/drawing/2014/main" id="{9E4B8AA8-E278-416E-8EF8-2CF8F375C876}"/>
+                <a16:creationId xmlns:a16="http://schemas.microsoft.com/office/drawing/2014/main" id="{BB9D772C-8ABB-44C1-B032-6CDC99CF58BD}"/>
               </a:ext>
             </a:extLst>
           </p:cNvPr>
@@ -26336,7 +26334,7 @@
           <p:cNvPr id="22" name="">
             <a:extLst xmlns:a="http://schemas.openxmlformats.org/drawingml/2006/main">
               <a:ext uri="{FF2B5EF4-FFF2-40B4-BE49-F238E27FC236}">
-                <a16:creationId xmlns:a16="http://schemas.microsoft.com/office/drawing/2014/main" id="{45E99369-6B25-408D-9405-45818E5880BA}"/>
+                <a16:creationId xmlns:a16="http://schemas.microsoft.com/office/drawing/2014/main" id="{F3BAD8BA-0E41-4897-82C5-C1B71F037744}"/>
               </a:ext>
             </a:extLst>
           </p:cNvPr>
@@ -26371,7 +26369,7 @@
           <p:cNvPr id="23" name="">
             <a:extLst xmlns:a="http://schemas.openxmlformats.org/drawingml/2006/main">
               <a:ext uri="{FF2B5EF4-FFF2-40B4-BE49-F238E27FC236}">
-                <a16:creationId xmlns:a16="http://schemas.microsoft.com/office/drawing/2014/main" id="{13F542B5-4FAE-4E2E-9229-674496FC699B}"/>
+                <a16:creationId xmlns:a16="http://schemas.microsoft.com/office/drawing/2014/main" id="{B205F17A-E6BB-45AE-8215-95B545E212C4}"/>
               </a:ext>
             </a:extLst>
           </p:cNvPr>
@@ -26435,7 +26433,7 @@
           <p:cNvPr id="24" name="">
             <a:extLst xmlns:a="http://schemas.openxmlformats.org/drawingml/2006/main">
               <a:ext uri="{FF2B5EF4-FFF2-40B4-BE49-F238E27FC236}">
-                <a16:creationId xmlns:a16="http://schemas.microsoft.com/office/drawing/2014/main" id="{A5A1B1AA-0545-4958-BFBA-5672E7D2D887}"/>
+                <a16:creationId xmlns:a16="http://schemas.microsoft.com/office/drawing/2014/main" id="{2FCB2309-9E72-46BB-92B9-7ACCE1A4A46B}"/>
               </a:ext>
             </a:extLst>
           </p:cNvPr>
@@ -26470,7 +26468,7 @@
           <p:cNvPr id="25" name="">
             <a:extLst xmlns:a="http://schemas.openxmlformats.org/drawingml/2006/main">
               <a:ext uri="{FF2B5EF4-FFF2-40B4-BE49-F238E27FC236}">
-                <a16:creationId xmlns:a16="http://schemas.microsoft.com/office/drawing/2014/main" id="{BE4FE7EE-9869-4F44-8E39-45623EF6FB8A}"/>
+                <a16:creationId xmlns:a16="http://schemas.microsoft.com/office/drawing/2014/main" id="{973EB520-BCCF-4A10-96ED-39C888D77E20}"/>
               </a:ext>
             </a:extLst>
           </p:cNvPr>
@@ -26534,7 +26532,7 @@
           <p:cNvPr id="26" name="">
             <a:extLst xmlns:a="http://schemas.openxmlformats.org/drawingml/2006/main">
               <a:ext uri="{FF2B5EF4-FFF2-40B4-BE49-F238E27FC236}">
-                <a16:creationId xmlns:a16="http://schemas.microsoft.com/office/drawing/2014/main" id="{E5D2AC10-7B7E-4B44-A662-AD20D175A4A0}"/>
+                <a16:creationId xmlns:a16="http://schemas.microsoft.com/office/drawing/2014/main" id="{70CF0C1B-6759-4A3F-83D9-FA16C3947E6B}"/>
               </a:ext>
             </a:extLst>
           </p:cNvPr>
@@ -26598,7 +26596,7 @@
           <p:cNvPr id="27" name="">
             <a:extLst xmlns:a="http://schemas.openxmlformats.org/drawingml/2006/main">
               <a:ext uri="{FF2B5EF4-FFF2-40B4-BE49-F238E27FC236}">
-                <a16:creationId xmlns:a16="http://schemas.microsoft.com/office/drawing/2014/main" id="{B8E3D9AF-39EE-4310-9F18-CF25F6FFBD4C}"/>
+                <a16:creationId xmlns:a16="http://schemas.microsoft.com/office/drawing/2014/main" id="{A93B0C8E-1F79-46E8-8E9E-C05BCB534C12}"/>
               </a:ext>
             </a:extLst>
           </p:cNvPr>
@@ -26662,7 +26660,7 @@
           <p:cNvPr id="28" name="">
             <a:extLst xmlns:a="http://schemas.openxmlformats.org/drawingml/2006/main">
               <a:ext uri="{FF2B5EF4-FFF2-40B4-BE49-F238E27FC236}">
-                <a16:creationId xmlns:a16="http://schemas.microsoft.com/office/drawing/2014/main" id="{88A4B3A8-698D-47AD-990A-7C3CC3BE2A44}"/>
+                <a16:creationId xmlns:a16="http://schemas.microsoft.com/office/drawing/2014/main" id="{E120D0F3-317D-4020-B579-E8CD539E6104}"/>
               </a:ext>
             </a:extLst>
           </p:cNvPr>
@@ -26697,7 +26695,7 @@
           <p:cNvPr id="29" name="">
             <a:extLst xmlns:a="http://schemas.openxmlformats.org/drawingml/2006/main">
               <a:ext uri="{FF2B5EF4-FFF2-40B4-BE49-F238E27FC236}">
-                <a16:creationId xmlns:a16="http://schemas.microsoft.com/office/drawing/2014/main" id="{1D7D63BD-CE97-49EE-860E-D9B3382942EA}"/>
+                <a16:creationId xmlns:a16="http://schemas.microsoft.com/office/drawing/2014/main" id="{995F7892-227B-4CF5-BFE7-5338525B2F7B}"/>
               </a:ext>
             </a:extLst>
           </p:cNvPr>
@@ -26732,7 +26730,7 @@
           <p:cNvPr id="30" name="">
             <a:extLst xmlns:a="http://schemas.openxmlformats.org/drawingml/2006/main">
               <a:ext uri="{FF2B5EF4-FFF2-40B4-BE49-F238E27FC236}">
-                <a16:creationId xmlns:a16="http://schemas.microsoft.com/office/drawing/2014/main" id="{69E3F8B9-8DBB-4437-AD6A-33F96FA32FDF}"/>
+                <a16:creationId xmlns:a16="http://schemas.microsoft.com/office/drawing/2014/main" id="{AB29606A-F79A-41AD-BBBF-53E63C72ED54}"/>
               </a:ext>
             </a:extLst>
           </p:cNvPr>
@@ -26767,7 +26765,7 @@
           <p:cNvPr id="31" name="kicker-05-marker">
             <a:extLst xmlns:a="http://schemas.openxmlformats.org/drawingml/2006/main">
               <a:ext uri="{FF2B5EF4-FFF2-40B4-BE49-F238E27FC236}">
-                <a16:creationId xmlns:a16="http://schemas.microsoft.com/office/drawing/2014/main" id="{5A4D7EEF-994D-4F20-80C9-284E1F752B47}"/>
+                <a16:creationId xmlns:a16="http://schemas.microsoft.com/office/drawing/2014/main" id="{3DBC5C3A-433A-42A8-BAF5-7B2D4DFFBCB2}"/>
               </a:ext>
             </a:extLst>
           </p:cNvPr>
@@ -26802,7 +26800,7 @@
           <p:cNvPr id="32" name="kicker-05-label">
             <a:extLst xmlns:a="http://schemas.openxmlformats.org/drawingml/2006/main">
               <a:ext uri="{FF2B5EF4-FFF2-40B4-BE49-F238E27FC236}">
-                <a16:creationId xmlns:a16="http://schemas.microsoft.com/office/drawing/2014/main" id="{B257A327-8827-44A3-9E37-482993A8E432}"/>
+                <a16:creationId xmlns:a16="http://schemas.microsoft.com/office/drawing/2014/main" id="{37B120F0-43E8-4153-839F-134F76C10D18}"/>
               </a:ext>
             </a:extLst>
           </p:cNvPr>
@@ -26866,7 +26864,7 @@
           <p:cNvPr id="33" name="">
             <a:extLst xmlns:a="http://schemas.openxmlformats.org/drawingml/2006/main">
               <a:ext uri="{FF2B5EF4-FFF2-40B4-BE49-F238E27FC236}">
-                <a16:creationId xmlns:a16="http://schemas.microsoft.com/office/drawing/2014/main" id="{E5D466B4-33F2-4B1C-B923-79453DBD0846}"/>
+                <a16:creationId xmlns:a16="http://schemas.microsoft.com/office/drawing/2014/main" id="{EFBB18CD-0080-47A7-8D4A-2E2EBAA3ADC7}"/>
               </a:ext>
             </a:extLst>
           </p:cNvPr>
@@ -26930,7 +26928,7 @@
           <p:cNvPr id="34" name="">
             <a:extLst xmlns:a="http://schemas.openxmlformats.org/drawingml/2006/main">
               <a:ext uri="{FF2B5EF4-FFF2-40B4-BE49-F238E27FC236}">
-                <a16:creationId xmlns:a16="http://schemas.microsoft.com/office/drawing/2014/main" id="{57E60624-132C-4B0D-93C0-969BF3C76AFE}"/>
+                <a16:creationId xmlns:a16="http://schemas.microsoft.com/office/drawing/2014/main" id="{1B1D6C26-EB86-4DF4-B524-2D53C64D9AEF}"/>
               </a:ext>
             </a:extLst>
           </p:cNvPr>
@@ -26994,7 +26992,7 @@
           <p:cNvPr id="35" name="">
             <a:extLst xmlns:a="http://schemas.openxmlformats.org/drawingml/2006/main">
               <a:ext uri="{FF2B5EF4-FFF2-40B4-BE49-F238E27FC236}">
-                <a16:creationId xmlns:a16="http://schemas.microsoft.com/office/drawing/2014/main" id="{6E3657B8-205F-4DC7-A9C7-4955D19A1CA5}"/>
+                <a16:creationId xmlns:a16="http://schemas.microsoft.com/office/drawing/2014/main" id="{6BCBD488-752D-4204-9B36-DFABD1DE5BE6}"/>
               </a:ext>
             </a:extLst>
           </p:cNvPr>
@@ -27029,7 +27027,7 @@
           <p:cNvPr id="36" name="">
             <a:extLst xmlns:a="http://schemas.openxmlformats.org/drawingml/2006/main">
               <a:ext uri="{FF2B5EF4-FFF2-40B4-BE49-F238E27FC236}">
-                <a16:creationId xmlns:a16="http://schemas.microsoft.com/office/drawing/2014/main" id="{17233AB2-50DB-403E-9F3D-921E98DCACD5}"/>
+                <a16:creationId xmlns:a16="http://schemas.microsoft.com/office/drawing/2014/main" id="{C8653DD9-3868-49A3-95FD-013553CEB8DF}"/>
               </a:ext>
             </a:extLst>
           </p:cNvPr>
@@ -27064,7 +27062,7 @@
           <p:cNvPr id="37" name="">
             <a:extLst xmlns:a="http://schemas.openxmlformats.org/drawingml/2006/main">
               <a:ext uri="{FF2B5EF4-FFF2-40B4-BE49-F238E27FC236}">
-                <a16:creationId xmlns:a16="http://schemas.microsoft.com/office/drawing/2014/main" id="{846CA0E7-4429-46CC-978F-1F6E4F8FC52F}"/>
+                <a16:creationId xmlns:a16="http://schemas.microsoft.com/office/drawing/2014/main" id="{5F2E2F96-44E1-4D49-8F14-D5B8D71CBAE5}"/>
               </a:ext>
             </a:extLst>
           </p:cNvPr>
@@ -27099,7 +27097,7 @@
           <p:cNvPr id="38" name="">
             <a:extLst xmlns:a="http://schemas.openxmlformats.org/drawingml/2006/main">
               <a:ext uri="{FF2B5EF4-FFF2-40B4-BE49-F238E27FC236}">
-                <a16:creationId xmlns:a16="http://schemas.microsoft.com/office/drawing/2014/main" id="{883AA2F3-82A9-4884-A7F9-A09932A3D26D}"/>
+                <a16:creationId xmlns:a16="http://schemas.microsoft.com/office/drawing/2014/main" id="{52657885-FD93-4AE0-9C95-BA62541063D8}"/>
               </a:ext>
             </a:extLst>
           </p:cNvPr>
@@ -27134,7 +27132,7 @@
           <p:cNvPr id="39" name="">
             <a:extLst xmlns:a="http://schemas.openxmlformats.org/drawingml/2006/main">
               <a:ext uri="{FF2B5EF4-FFF2-40B4-BE49-F238E27FC236}">
-                <a16:creationId xmlns:a16="http://schemas.microsoft.com/office/drawing/2014/main" id="{DDE4C38B-F8B0-4563-A026-7471C00A136E}"/>
+                <a16:creationId xmlns:a16="http://schemas.microsoft.com/office/drawing/2014/main" id="{23F438C9-F6EC-4FC6-A7C8-C71C3EF206EA}"/>
               </a:ext>
             </a:extLst>
           </p:cNvPr>
@@ -27198,7 +27196,7 @@
           <p:cNvPr id="40" name="">
             <a:extLst xmlns:a="http://schemas.openxmlformats.org/drawingml/2006/main">
               <a:ext uri="{FF2B5EF4-FFF2-40B4-BE49-F238E27FC236}">
-                <a16:creationId xmlns:a16="http://schemas.microsoft.com/office/drawing/2014/main" id="{9D1C2BEA-46B3-4601-A7C5-977FFDF641F9}"/>
+                <a16:creationId xmlns:a16="http://schemas.microsoft.com/office/drawing/2014/main" id="{1DC5E6B7-33F1-46C2-9AD0-73EFC062C987}"/>
               </a:ext>
             </a:extLst>
           </p:cNvPr>
@@ -27262,7 +27260,7 @@
           <p:cNvPr id="41" name="">
             <a:extLst xmlns:a="http://schemas.openxmlformats.org/drawingml/2006/main">
               <a:ext uri="{FF2B5EF4-FFF2-40B4-BE49-F238E27FC236}">
-                <a16:creationId xmlns:a16="http://schemas.microsoft.com/office/drawing/2014/main" id="{BCAF1702-A5C6-4F3E-A5DE-255AA6F0C4E3}"/>
+                <a16:creationId xmlns:a16="http://schemas.microsoft.com/office/drawing/2014/main" id="{DD9A3F34-C3A1-49AE-9426-C1F8C19EDF11}"/>
               </a:ext>
             </a:extLst>
           </p:cNvPr>
@@ -27324,7 +27322,7 @@
     </p:spTree>
     <p:extLst>
       <p:ext uri="{BB962C8B-B14F-4D97-AF65-F5344CB8AC3E}">
-        <p14:creationId xmlns:p14="http://schemas.microsoft.com/office/powerpoint/2010/main" val="677540576"/>
+        <p14:creationId xmlns:p14="http://schemas.microsoft.com/office/powerpoint/2010/main" val="1690888347"/>
       </p:ext>
     </p:extLst>
   </p:cSld>
@@ -27348,7 +27346,7 @@
           <p:cNvPr id="1" name="">
             <a:extLst xmlns:a="http://schemas.openxmlformats.org/drawingml/2006/main">
               <a:ext uri="{FF2B5EF4-FFF2-40B4-BE49-F238E27FC236}">
-                <a16:creationId xmlns:a16="http://schemas.microsoft.com/office/drawing/2014/main" id="{CCFDDC70-870A-418C-BB5B-D15A096DE8EF}"/>
+                <a16:creationId xmlns:a16="http://schemas.microsoft.com/office/drawing/2014/main" id="{08368F49-EA87-4309-A92D-8E5630A740E3}"/>
               </a:ext>
             </a:extLst>
           </p:cNvPr>
@@ -27383,7 +27381,7 @@
           <p:cNvPr id="2" name="">
             <a:extLst xmlns:a="http://schemas.openxmlformats.org/drawingml/2006/main">
               <a:ext uri="{FF2B5EF4-FFF2-40B4-BE49-F238E27FC236}">
-                <a16:creationId xmlns:a16="http://schemas.microsoft.com/office/drawing/2014/main" id="{4E55F05A-4B85-48B9-B79A-6567E3B8FB9B}"/>
+                <a16:creationId xmlns:a16="http://schemas.microsoft.com/office/drawing/2014/main" id="{5BBA7F36-CA83-48C5-A022-D7D21E3164E7}"/>
               </a:ext>
             </a:extLst>
           </p:cNvPr>
@@ -27418,7 +27416,7 @@
           <p:cNvPr id="3" name="">
             <a:extLst xmlns:a="http://schemas.openxmlformats.org/drawingml/2006/main">
               <a:ext uri="{FF2B5EF4-FFF2-40B4-BE49-F238E27FC236}">
-                <a16:creationId xmlns:a16="http://schemas.microsoft.com/office/drawing/2014/main" id="{4741AE69-8F6F-445A-8023-D16306585E3D}"/>
+                <a16:creationId xmlns:a16="http://schemas.microsoft.com/office/drawing/2014/main" id="{1EE2C49F-43F6-4323-8DFE-195FF432ECBF}"/>
               </a:ext>
             </a:extLst>
           </p:cNvPr>
@@ -27453,7 +27451,7 @@
           <p:cNvPr id="4" name="kicker-05-marker">
             <a:extLst xmlns:a="http://schemas.openxmlformats.org/drawingml/2006/main">
               <a:ext uri="{FF2B5EF4-FFF2-40B4-BE49-F238E27FC236}">
-                <a16:creationId xmlns:a16="http://schemas.microsoft.com/office/drawing/2014/main" id="{97895118-4CC9-4BA4-A41F-0A6B877338A2}"/>
+                <a16:creationId xmlns:a16="http://schemas.microsoft.com/office/drawing/2014/main" id="{1C81725B-64A5-45B1-A1D7-A80CDAB98535}"/>
               </a:ext>
             </a:extLst>
           </p:cNvPr>
@@ -27488,7 +27486,7 @@
           <p:cNvPr id="5" name="kicker-05-label">
             <a:extLst xmlns:a="http://schemas.openxmlformats.org/drawingml/2006/main">
               <a:ext uri="{FF2B5EF4-FFF2-40B4-BE49-F238E27FC236}">
-                <a16:creationId xmlns:a16="http://schemas.microsoft.com/office/drawing/2014/main" id="{737BF3BA-DB02-4DB1-A08C-7B753FC3D819}"/>
+                <a16:creationId xmlns:a16="http://schemas.microsoft.com/office/drawing/2014/main" id="{4A5534B9-6EFF-4676-BCAE-3DFAD4A59B39}"/>
               </a:ext>
             </a:extLst>
           </p:cNvPr>
@@ -27552,7 +27550,7 @@
           <p:cNvPr id="6" name="">
             <a:extLst xmlns:a="http://schemas.openxmlformats.org/drawingml/2006/main">
               <a:ext uri="{FF2B5EF4-FFF2-40B4-BE49-F238E27FC236}">
-                <a16:creationId xmlns:a16="http://schemas.microsoft.com/office/drawing/2014/main" id="{44B8E251-7778-4EE9-9A0E-799B3C636798}"/>
+                <a16:creationId xmlns:a16="http://schemas.microsoft.com/office/drawing/2014/main" id="{CB2D7392-A10C-4197-AA69-D1BD06BEBE9F}"/>
               </a:ext>
             </a:extLst>
           </p:cNvPr>
@@ -27616,7 +27614,7 @@
           <p:cNvPr id="7" name="">
             <a:extLst xmlns:a="http://schemas.openxmlformats.org/drawingml/2006/main">
               <a:ext uri="{FF2B5EF4-FFF2-40B4-BE49-F238E27FC236}">
-                <a16:creationId xmlns:a16="http://schemas.microsoft.com/office/drawing/2014/main" id="{753A828C-E6F3-4323-B837-7BC52B64D61A}"/>
+                <a16:creationId xmlns:a16="http://schemas.microsoft.com/office/drawing/2014/main" id="{FCEDB2DA-B209-4701-A11B-3C4B1CB769DD}"/>
               </a:ext>
             </a:extLst>
           </p:cNvPr>
@@ -27680,7 +27678,7 @@
           <p:cNvPr id="8" name="">
             <a:extLst xmlns:a="http://schemas.openxmlformats.org/drawingml/2006/main">
               <a:ext uri="{FF2B5EF4-FFF2-40B4-BE49-F238E27FC236}">
-                <a16:creationId xmlns:a16="http://schemas.microsoft.com/office/drawing/2014/main" id="{EAA96F8D-5F22-4C9D-9205-F4DD5F0C1D52}"/>
+                <a16:creationId xmlns:a16="http://schemas.microsoft.com/office/drawing/2014/main" id="{C4C4F88A-4351-435D-AA12-62F3AEAD97CC}"/>
               </a:ext>
             </a:extLst>
           </p:cNvPr>
@@ -27715,7 +27713,7 @@
           <p:cNvPr id="9" name="">
             <a:extLst xmlns:a="http://schemas.openxmlformats.org/drawingml/2006/main">
               <a:ext uri="{FF2B5EF4-FFF2-40B4-BE49-F238E27FC236}">
-                <a16:creationId xmlns:a16="http://schemas.microsoft.com/office/drawing/2014/main" id="{B8DF998E-C529-437D-9313-D7FFEDAD6583}"/>
+                <a16:creationId xmlns:a16="http://schemas.microsoft.com/office/drawing/2014/main" id="{888D0F20-136C-4216-A7A5-3F3481B3A465}"/>
               </a:ext>
             </a:extLst>
           </p:cNvPr>
@@ -27779,7 +27777,7 @@
           <p:cNvPr id="10" name="">
             <a:extLst xmlns:a="http://schemas.openxmlformats.org/drawingml/2006/main">
               <a:ext uri="{FF2B5EF4-FFF2-40B4-BE49-F238E27FC236}">
-                <a16:creationId xmlns:a16="http://schemas.microsoft.com/office/drawing/2014/main" id="{EDA2442C-33DD-40CC-9CE9-C7BAEF165F80}"/>
+                <a16:creationId xmlns:a16="http://schemas.microsoft.com/office/drawing/2014/main" id="{824BD933-AFC3-4F1E-87A0-D1FAFACEA04D}"/>
               </a:ext>
             </a:extLst>
           </p:cNvPr>
@@ -27843,7 +27841,7 @@
           <p:cNvPr id="11" name="">
             <a:extLst xmlns:a="http://schemas.openxmlformats.org/drawingml/2006/main">
               <a:ext uri="{FF2B5EF4-FFF2-40B4-BE49-F238E27FC236}">
-                <a16:creationId xmlns:a16="http://schemas.microsoft.com/office/drawing/2014/main" id="{1407D6B0-31EA-4D51-81BA-759A740FDD04}"/>
+                <a16:creationId xmlns:a16="http://schemas.microsoft.com/office/drawing/2014/main" id="{B4053879-BE9D-49AC-A35F-8A36DB684D07}"/>
               </a:ext>
             </a:extLst>
           </p:cNvPr>
@@ -27907,7 +27905,7 @@
           <p:cNvPr id="12" name="">
             <a:extLst xmlns:a="http://schemas.openxmlformats.org/drawingml/2006/main">
               <a:ext uri="{FF2B5EF4-FFF2-40B4-BE49-F238E27FC236}">
-                <a16:creationId xmlns:a16="http://schemas.microsoft.com/office/drawing/2014/main" id="{670835C5-7461-4BE4-B4F1-C4284F9A4506}"/>
+                <a16:creationId xmlns:a16="http://schemas.microsoft.com/office/drawing/2014/main" id="{34309754-2F36-405B-B2EB-0E106BC20EBF}"/>
               </a:ext>
             </a:extLst>
           </p:cNvPr>
@@ -27940,7 +27938,7 @@
           <p:cNvPr id="13" name="">
             <a:extLst xmlns:a="http://schemas.openxmlformats.org/drawingml/2006/main">
               <a:ext uri="{FF2B5EF4-FFF2-40B4-BE49-F238E27FC236}">
-                <a16:creationId xmlns:a16="http://schemas.microsoft.com/office/drawing/2014/main" id="{BFFF4920-8A53-4CDA-9F3C-A2ECE66CB4F6}"/>
+                <a16:creationId xmlns:a16="http://schemas.microsoft.com/office/drawing/2014/main" id="{8C4FF0B7-A19B-4692-8E60-356F68A4234E}"/>
               </a:ext>
             </a:extLst>
           </p:cNvPr>
@@ -28004,7 +28002,7 @@
           <p:cNvPr id="14" name="">
             <a:extLst xmlns:a="http://schemas.openxmlformats.org/drawingml/2006/main">
               <a:ext uri="{FF2B5EF4-FFF2-40B4-BE49-F238E27FC236}">
-                <a16:creationId xmlns:a16="http://schemas.microsoft.com/office/drawing/2014/main" id="{B48C69D1-1E9D-4745-AF4B-7C359052EC3A}"/>
+                <a16:creationId xmlns:a16="http://schemas.microsoft.com/office/drawing/2014/main" id="{04DE8E4A-C86B-4086-B350-E4BD4B63481E}"/>
               </a:ext>
             </a:extLst>
           </p:cNvPr>
@@ -28039,7 +28037,7 @@
           <p:cNvPr id="15" name="">
             <a:extLst xmlns:a="http://schemas.openxmlformats.org/drawingml/2006/main">
               <a:ext uri="{FF2B5EF4-FFF2-40B4-BE49-F238E27FC236}">
-                <a16:creationId xmlns:a16="http://schemas.microsoft.com/office/drawing/2014/main" id="{1A185C8C-9758-419D-995A-163D96F7A0F1}"/>
+                <a16:creationId xmlns:a16="http://schemas.microsoft.com/office/drawing/2014/main" id="{396D65AE-CB8E-448F-AE40-16CE225574B4}"/>
               </a:ext>
             </a:extLst>
           </p:cNvPr>
@@ -28093,7 +28091,7 @@
                 <a:ea typeface="Aptos"/>
                 <a:cs typeface="Aptos"/>
               </a:rPr>
-              <a:t>PROMPT STACK</a:t>
+              <a:t>QUESTION STACK</a:t>
             </a:r>
           </a:p>
         </p:txBody>
@@ -28103,7 +28101,7 @@
           <p:cNvPr id="16" name="">
             <a:extLst xmlns:a="http://schemas.openxmlformats.org/drawingml/2006/main">
               <a:ext uri="{FF2B5EF4-FFF2-40B4-BE49-F238E27FC236}">
-                <a16:creationId xmlns:a16="http://schemas.microsoft.com/office/drawing/2014/main" id="{73CAE957-76C7-4182-A543-2AEAAA9971F7}"/>
+                <a16:creationId xmlns:a16="http://schemas.microsoft.com/office/drawing/2014/main" id="{B567A22B-C1E6-4114-B9F5-D94BC47DFF9A}"/>
               </a:ext>
             </a:extLst>
           </p:cNvPr>
@@ -28138,7 +28136,7 @@
           <p:cNvPr id="17" name="">
             <a:extLst xmlns:a="http://schemas.openxmlformats.org/drawingml/2006/main">
               <a:ext uri="{FF2B5EF4-FFF2-40B4-BE49-F238E27FC236}">
-                <a16:creationId xmlns:a16="http://schemas.microsoft.com/office/drawing/2014/main" id="{85727B8D-844B-44F0-AEA7-84D4598153CB}"/>
+                <a16:creationId xmlns:a16="http://schemas.microsoft.com/office/drawing/2014/main" id="{720D2BAF-A203-4FA1-BE55-7DA353C8D7BD}"/>
               </a:ext>
             </a:extLst>
           </p:cNvPr>
@@ -28202,7 +28200,7 @@
           <p:cNvPr id="18" name="">
             <a:extLst xmlns:a="http://schemas.openxmlformats.org/drawingml/2006/main">
               <a:ext uri="{FF2B5EF4-FFF2-40B4-BE49-F238E27FC236}">
-                <a16:creationId xmlns:a16="http://schemas.microsoft.com/office/drawing/2014/main" id="{4690461A-B141-47F1-B33B-91201DD39D7C}"/>
+                <a16:creationId xmlns:a16="http://schemas.microsoft.com/office/drawing/2014/main" id="{27D0484C-4510-462C-AA7A-8BFA0D400B3D}"/>
               </a:ext>
             </a:extLst>
           </p:cNvPr>
@@ -28237,7 +28235,7 @@
           <p:cNvPr id="19" name="">
             <a:extLst xmlns:a="http://schemas.openxmlformats.org/drawingml/2006/main">
               <a:ext uri="{FF2B5EF4-FFF2-40B4-BE49-F238E27FC236}">
-                <a16:creationId xmlns:a16="http://schemas.microsoft.com/office/drawing/2014/main" id="{ED8F6906-3FC4-4269-8C49-A5507F7B6D40}"/>
+                <a16:creationId xmlns:a16="http://schemas.microsoft.com/office/drawing/2014/main" id="{1C224F67-DE63-451E-A2AB-47DDC2978745}"/>
               </a:ext>
             </a:extLst>
           </p:cNvPr>
@@ -28301,7 +28299,7 @@
           <p:cNvPr id="20" name="">
             <a:extLst xmlns:a="http://schemas.openxmlformats.org/drawingml/2006/main">
               <a:ext uri="{FF2B5EF4-FFF2-40B4-BE49-F238E27FC236}">
-                <a16:creationId xmlns:a16="http://schemas.microsoft.com/office/drawing/2014/main" id="{171ACE41-539E-4DE1-823B-84992262F08F}"/>
+                <a16:creationId xmlns:a16="http://schemas.microsoft.com/office/drawing/2014/main" id="{CAE0157C-9086-491B-91C2-3BFD6F24B469}"/>
               </a:ext>
             </a:extLst>
           </p:cNvPr>
@@ -28336,7 +28334,7 @@
           <p:cNvPr id="21" name="">
             <a:extLst xmlns:a="http://schemas.openxmlformats.org/drawingml/2006/main">
               <a:ext uri="{FF2B5EF4-FFF2-40B4-BE49-F238E27FC236}">
-                <a16:creationId xmlns:a16="http://schemas.microsoft.com/office/drawing/2014/main" id="{F3600E9B-18C5-4FFF-81EF-A573B04A6FF2}"/>
+                <a16:creationId xmlns:a16="http://schemas.microsoft.com/office/drawing/2014/main" id="{42F30990-46BF-4239-A738-7A12FD4C0770}"/>
               </a:ext>
             </a:extLst>
           </p:cNvPr>
@@ -28400,7 +28398,7 @@
           <p:cNvPr id="22" name="">
             <a:extLst xmlns:a="http://schemas.openxmlformats.org/drawingml/2006/main">
               <a:ext uri="{FF2B5EF4-FFF2-40B4-BE49-F238E27FC236}">
-                <a16:creationId xmlns:a16="http://schemas.microsoft.com/office/drawing/2014/main" id="{67BA0AF6-82D1-4938-B885-7C33A9C615CA}"/>
+                <a16:creationId xmlns:a16="http://schemas.microsoft.com/office/drawing/2014/main" id="{46C46541-D973-4E84-9FB2-C2B2D7D9A5B0}"/>
               </a:ext>
             </a:extLst>
           </p:cNvPr>
@@ -28435,7 +28433,7 @@
           <p:cNvPr id="23" name="">
             <a:extLst xmlns:a="http://schemas.openxmlformats.org/drawingml/2006/main">
               <a:ext uri="{FF2B5EF4-FFF2-40B4-BE49-F238E27FC236}">
-                <a16:creationId xmlns:a16="http://schemas.microsoft.com/office/drawing/2014/main" id="{93CA13F0-5038-4BA4-957A-EF4063C0E5C1}"/>
+                <a16:creationId xmlns:a16="http://schemas.microsoft.com/office/drawing/2014/main" id="{ECE38A30-6777-496C-941D-9EE1328DDF89}"/>
               </a:ext>
             </a:extLst>
           </p:cNvPr>
@@ -28499,7 +28497,7 @@
           <p:cNvPr id="24" name="">
             <a:extLst xmlns:a="http://schemas.openxmlformats.org/drawingml/2006/main">
               <a:ext uri="{FF2B5EF4-FFF2-40B4-BE49-F238E27FC236}">
-                <a16:creationId xmlns:a16="http://schemas.microsoft.com/office/drawing/2014/main" id="{F1A6EDD4-6275-4073-A329-CD629990ACDB}"/>
+                <a16:creationId xmlns:a16="http://schemas.microsoft.com/office/drawing/2014/main" id="{88AEBAD5-719C-46C0-A8A2-B3327AEEF74A}"/>
               </a:ext>
             </a:extLst>
           </p:cNvPr>
@@ -28534,7 +28532,7 @@
           <p:cNvPr id="25" name="">
             <a:extLst xmlns:a="http://schemas.openxmlformats.org/drawingml/2006/main">
               <a:ext uri="{FF2B5EF4-FFF2-40B4-BE49-F238E27FC236}">
-                <a16:creationId xmlns:a16="http://schemas.microsoft.com/office/drawing/2014/main" id="{572B0DBE-43D8-4E2B-991F-1D5FA0BDF70F}"/>
+                <a16:creationId xmlns:a16="http://schemas.microsoft.com/office/drawing/2014/main" id="{E021CBF5-8617-4D75-87D8-9097EAE6BEB1}"/>
               </a:ext>
             </a:extLst>
           </p:cNvPr>
@@ -28588,7 +28586,7 @@
                 <a:ea typeface="Aptos"/>
                 <a:cs typeface="Aptos"/>
               </a:rPr>
-              <a:t>Which asset requires SME insight before AI can draft it?</a:t>
+              <a:t>Which asset requires SME insight before any draft is credible?</a:t>
             </a:r>
           </a:p>
         </p:txBody>
@@ -28598,7 +28596,7 @@
           <p:cNvPr id="26" name="">
             <a:extLst xmlns:a="http://schemas.openxmlformats.org/drawingml/2006/main">
               <a:ext uri="{FF2B5EF4-FFF2-40B4-BE49-F238E27FC236}">
-                <a16:creationId xmlns:a16="http://schemas.microsoft.com/office/drawing/2014/main" id="{F67FA467-8FFE-4A27-8688-E5DFF40D6C75}"/>
+                <a16:creationId xmlns:a16="http://schemas.microsoft.com/office/drawing/2014/main" id="{C9BE6522-76E4-4BF9-927B-DC87D5924920}"/>
               </a:ext>
             </a:extLst>
           </p:cNvPr>
@@ -28633,7 +28631,7 @@
           <p:cNvPr id="27" name="">
             <a:extLst xmlns:a="http://schemas.openxmlformats.org/drawingml/2006/main">
               <a:ext uri="{FF2B5EF4-FFF2-40B4-BE49-F238E27FC236}">
-                <a16:creationId xmlns:a16="http://schemas.microsoft.com/office/drawing/2014/main" id="{FD0BD952-65FA-4567-ACEA-2B481BB3EEFC}"/>
+                <a16:creationId xmlns:a16="http://schemas.microsoft.com/office/drawing/2014/main" id="{284BA3D9-2F40-4070-B96D-ADB43743F598}"/>
               </a:ext>
             </a:extLst>
           </p:cNvPr>
@@ -28697,7 +28695,7 @@
           <p:cNvPr id="28" name="">
             <a:extLst xmlns:a="http://schemas.openxmlformats.org/drawingml/2006/main">
               <a:ext uri="{FF2B5EF4-FFF2-40B4-BE49-F238E27FC236}">
-                <a16:creationId xmlns:a16="http://schemas.microsoft.com/office/drawing/2014/main" id="{0DD8092C-8807-40EC-8A37-8B0C038EA588}"/>
+                <a16:creationId xmlns:a16="http://schemas.microsoft.com/office/drawing/2014/main" id="{791C8BD7-D7FF-4499-9A34-ADB8D5A180B3}"/>
               </a:ext>
             </a:extLst>
           </p:cNvPr>
@@ -28732,7 +28730,7 @@
           <p:cNvPr id="29" name="">
             <a:extLst xmlns:a="http://schemas.openxmlformats.org/drawingml/2006/main">
               <a:ext uri="{FF2B5EF4-FFF2-40B4-BE49-F238E27FC236}">
-                <a16:creationId xmlns:a16="http://schemas.microsoft.com/office/drawing/2014/main" id="{E5569B4C-4BD9-40E5-B9BA-9E5C79DD6DDF}"/>
+                <a16:creationId xmlns:a16="http://schemas.microsoft.com/office/drawing/2014/main" id="{2DF76180-165A-4A48-952F-73AE7B7BFACC}"/>
               </a:ext>
             </a:extLst>
           </p:cNvPr>
@@ -28796,7 +28794,7 @@
           <p:cNvPr id="30" name="">
             <a:extLst xmlns:a="http://schemas.openxmlformats.org/drawingml/2006/main">
               <a:ext uri="{FF2B5EF4-FFF2-40B4-BE49-F238E27FC236}">
-                <a16:creationId xmlns:a16="http://schemas.microsoft.com/office/drawing/2014/main" id="{F56EB80B-8905-4733-9BBF-79EBC24F8D93}"/>
+                <a16:creationId xmlns:a16="http://schemas.microsoft.com/office/drawing/2014/main" id="{BC2F8816-B6C5-4206-8FDE-562F8CBE05A1}"/>
               </a:ext>
             </a:extLst>
           </p:cNvPr>
@@ -28860,7 +28858,7 @@
           <p:cNvPr id="31" name="">
             <a:extLst xmlns:a="http://schemas.openxmlformats.org/drawingml/2006/main">
               <a:ext uri="{FF2B5EF4-FFF2-40B4-BE49-F238E27FC236}">
-                <a16:creationId xmlns:a16="http://schemas.microsoft.com/office/drawing/2014/main" id="{0B9D0C90-1951-4E57-8CB8-CBB0D0AACAA9}"/>
+                <a16:creationId xmlns:a16="http://schemas.microsoft.com/office/drawing/2014/main" id="{C40DFE01-47CD-4EBD-9047-C29F9C008B4C}"/>
               </a:ext>
             </a:extLst>
           </p:cNvPr>
@@ -28922,7 +28920,7 @@
     </p:spTree>
     <p:extLst>
       <p:ext uri="{BB962C8B-B14F-4D97-AF65-F5344CB8AC3E}">
-        <p14:creationId xmlns:p14="http://schemas.microsoft.com/office/powerpoint/2010/main" val="1682947892"/>
+        <p14:creationId xmlns:p14="http://schemas.microsoft.com/office/powerpoint/2010/main" val="895256841"/>
       </p:ext>
     </p:extLst>
   </p:cSld>
@@ -28946,7 +28944,7 @@
           <p:cNvPr id="1" name="">
             <a:extLst xmlns:a="http://schemas.openxmlformats.org/drawingml/2006/main">
               <a:ext uri="{FF2B5EF4-FFF2-40B4-BE49-F238E27FC236}">
-                <a16:creationId xmlns:a16="http://schemas.microsoft.com/office/drawing/2014/main" id="{6D354FD3-C144-4152-9783-11E43D5EEB4D}"/>
+                <a16:creationId xmlns:a16="http://schemas.microsoft.com/office/drawing/2014/main" id="{84284F2B-FF30-4801-93F5-377FA166FDE6}"/>
               </a:ext>
             </a:extLst>
           </p:cNvPr>
@@ -28981,7 +28979,7 @@
           <p:cNvPr id="2" name="">
             <a:extLst xmlns:a="http://schemas.openxmlformats.org/drawingml/2006/main">
               <a:ext uri="{FF2B5EF4-FFF2-40B4-BE49-F238E27FC236}">
-                <a16:creationId xmlns:a16="http://schemas.microsoft.com/office/drawing/2014/main" id="{8481F77C-CD9E-4300-8C85-2CB046995C42}"/>
+                <a16:creationId xmlns:a16="http://schemas.microsoft.com/office/drawing/2014/main" id="{0DB89099-2CCB-4FBF-AD4C-D3F8628F539F}"/>
               </a:ext>
             </a:extLst>
           </p:cNvPr>
@@ -29016,7 +29014,7 @@
           <p:cNvPr id="3" name="">
             <a:extLst xmlns:a="http://schemas.openxmlformats.org/drawingml/2006/main">
               <a:ext uri="{FF2B5EF4-FFF2-40B4-BE49-F238E27FC236}">
-                <a16:creationId xmlns:a16="http://schemas.microsoft.com/office/drawing/2014/main" id="{A107CD49-E4C3-4E7A-9B35-A8D911B52B70}"/>
+                <a16:creationId xmlns:a16="http://schemas.microsoft.com/office/drawing/2014/main" id="{6F2830E0-0A0D-4B9E-ADA7-FF246468F6FF}"/>
               </a:ext>
             </a:extLst>
           </p:cNvPr>
@@ -29051,7 +29049,7 @@
           <p:cNvPr id="4" name="kicker-05-marker">
             <a:extLst xmlns:a="http://schemas.openxmlformats.org/drawingml/2006/main">
               <a:ext uri="{FF2B5EF4-FFF2-40B4-BE49-F238E27FC236}">
-                <a16:creationId xmlns:a16="http://schemas.microsoft.com/office/drawing/2014/main" id="{D1309B3C-E3AE-4088-9AD2-B41045638C72}"/>
+                <a16:creationId xmlns:a16="http://schemas.microsoft.com/office/drawing/2014/main" id="{5F5B5B82-AC76-4BA7-A9AA-841D1AE666B4}"/>
               </a:ext>
             </a:extLst>
           </p:cNvPr>
@@ -29086,7 +29084,7 @@
           <p:cNvPr id="5" name="kicker-05-label">
             <a:extLst xmlns:a="http://schemas.openxmlformats.org/drawingml/2006/main">
               <a:ext uri="{FF2B5EF4-FFF2-40B4-BE49-F238E27FC236}">
-                <a16:creationId xmlns:a16="http://schemas.microsoft.com/office/drawing/2014/main" id="{7AF565FD-B37D-4E53-9D6C-FC53240809D4}"/>
+                <a16:creationId xmlns:a16="http://schemas.microsoft.com/office/drawing/2014/main" id="{7B754710-825A-4219-B2C1-F60248B54686}"/>
               </a:ext>
             </a:extLst>
           </p:cNvPr>
@@ -29150,7 +29148,7 @@
           <p:cNvPr id="6" name="">
             <a:extLst xmlns:a="http://schemas.openxmlformats.org/drawingml/2006/main">
               <a:ext uri="{FF2B5EF4-FFF2-40B4-BE49-F238E27FC236}">
-                <a16:creationId xmlns:a16="http://schemas.microsoft.com/office/drawing/2014/main" id="{663EBC54-D85E-46E9-AA27-0675F86DE504}"/>
+                <a16:creationId xmlns:a16="http://schemas.microsoft.com/office/drawing/2014/main" id="{88CB0516-A16E-4629-A02F-96D22F4FD0B1}"/>
               </a:ext>
             </a:extLst>
           </p:cNvPr>
@@ -29214,7 +29212,7 @@
           <p:cNvPr id="7" name="">
             <a:extLst xmlns:a="http://schemas.openxmlformats.org/drawingml/2006/main">
               <a:ext uri="{FF2B5EF4-FFF2-40B4-BE49-F238E27FC236}">
-                <a16:creationId xmlns:a16="http://schemas.microsoft.com/office/drawing/2014/main" id="{3FFDD73B-92E2-41C0-9510-957F8350C222}"/>
+                <a16:creationId xmlns:a16="http://schemas.microsoft.com/office/drawing/2014/main" id="{24963ADD-6265-42C0-8ACB-F8855531B949}"/>
               </a:ext>
             </a:extLst>
           </p:cNvPr>
@@ -29278,7 +29276,7 @@
           <p:cNvPr id="8" name="">
             <a:extLst xmlns:a="http://schemas.openxmlformats.org/drawingml/2006/main">
               <a:ext uri="{FF2B5EF4-FFF2-40B4-BE49-F238E27FC236}">
-                <a16:creationId xmlns:a16="http://schemas.microsoft.com/office/drawing/2014/main" id="{A6E44281-0421-4620-861C-55C1D2252FBC}"/>
+                <a16:creationId xmlns:a16="http://schemas.microsoft.com/office/drawing/2014/main" id="{9B02B5C3-E313-427A-A683-888E85DC59CB}"/>
               </a:ext>
             </a:extLst>
           </p:cNvPr>
@@ -29313,7 +29311,7 @@
           <p:cNvPr id="9" name="">
             <a:extLst xmlns:a="http://schemas.openxmlformats.org/drawingml/2006/main">
               <a:ext uri="{FF2B5EF4-FFF2-40B4-BE49-F238E27FC236}">
-                <a16:creationId xmlns:a16="http://schemas.microsoft.com/office/drawing/2014/main" id="{9A0A50F9-2C34-424E-A2A6-A733C0D62169}"/>
+                <a16:creationId xmlns:a16="http://schemas.microsoft.com/office/drawing/2014/main" id="{693C9D07-D344-4D62-8C2A-D81180459624}"/>
               </a:ext>
             </a:extLst>
           </p:cNvPr>
@@ -29377,7 +29375,7 @@
           <p:cNvPr id="10" name="">
             <a:extLst xmlns:a="http://schemas.openxmlformats.org/drawingml/2006/main">
               <a:ext uri="{FF2B5EF4-FFF2-40B4-BE49-F238E27FC236}">
-                <a16:creationId xmlns:a16="http://schemas.microsoft.com/office/drawing/2014/main" id="{DB3EDC9E-92D9-4DC6-B4C7-3C8F284AB04B}"/>
+                <a16:creationId xmlns:a16="http://schemas.microsoft.com/office/drawing/2014/main" id="{AB17C0DA-1E69-4630-BA06-45AD5979EE52}"/>
               </a:ext>
             </a:extLst>
           </p:cNvPr>
@@ -29441,7 +29439,7 @@
           <p:cNvPr id="11" name="">
             <a:extLst xmlns:a="http://schemas.openxmlformats.org/drawingml/2006/main">
               <a:ext uri="{FF2B5EF4-FFF2-40B4-BE49-F238E27FC236}">
-                <a16:creationId xmlns:a16="http://schemas.microsoft.com/office/drawing/2014/main" id="{A2C0E1DD-2316-445A-8BF1-04486BFD7382}"/>
+                <a16:creationId xmlns:a16="http://schemas.microsoft.com/office/drawing/2014/main" id="{A38B97DA-452B-4C66-AB1B-1127E2D42E6E}"/>
               </a:ext>
             </a:extLst>
           </p:cNvPr>
@@ -29505,7 +29503,7 @@
           <p:cNvPr id="12" name="">
             <a:extLst xmlns:a="http://schemas.openxmlformats.org/drawingml/2006/main">
               <a:ext uri="{FF2B5EF4-FFF2-40B4-BE49-F238E27FC236}">
-                <a16:creationId xmlns:a16="http://schemas.microsoft.com/office/drawing/2014/main" id="{ED219C29-34B9-4C2D-AEF0-24E4238AE4DD}"/>
+                <a16:creationId xmlns:a16="http://schemas.microsoft.com/office/drawing/2014/main" id="{32BC4C9F-1E77-4143-A5C2-E59005A84EBF}"/>
               </a:ext>
             </a:extLst>
           </p:cNvPr>
@@ -29538,7 +29536,7 @@
           <p:cNvPr id="13" name="">
             <a:extLst xmlns:a="http://schemas.openxmlformats.org/drawingml/2006/main">
               <a:ext uri="{FF2B5EF4-FFF2-40B4-BE49-F238E27FC236}">
-                <a16:creationId xmlns:a16="http://schemas.microsoft.com/office/drawing/2014/main" id="{95D18020-AEC9-4DAB-90DD-65CE24BF9C81}"/>
+                <a16:creationId xmlns:a16="http://schemas.microsoft.com/office/drawing/2014/main" id="{E7A8F390-08D0-42DE-9932-0B9C75CEECDA}"/>
               </a:ext>
             </a:extLst>
           </p:cNvPr>
@@ -29573,7 +29571,7 @@
           <p:cNvPr id="14" name="">
             <a:extLst xmlns:a="http://schemas.openxmlformats.org/drawingml/2006/main">
               <a:ext uri="{FF2B5EF4-FFF2-40B4-BE49-F238E27FC236}">
-                <a16:creationId xmlns:a16="http://schemas.microsoft.com/office/drawing/2014/main" id="{38653736-C4E3-4A59-8417-96998FF4A01E}"/>
+                <a16:creationId xmlns:a16="http://schemas.microsoft.com/office/drawing/2014/main" id="{4456295E-BF9D-4B1D-A259-BFA9B5B943B5}"/>
               </a:ext>
             </a:extLst>
           </p:cNvPr>
@@ -29637,7 +29635,7 @@
           <p:cNvPr id="15" name="">
             <a:extLst xmlns:a="http://schemas.openxmlformats.org/drawingml/2006/main">
               <a:ext uri="{FF2B5EF4-FFF2-40B4-BE49-F238E27FC236}">
-                <a16:creationId xmlns:a16="http://schemas.microsoft.com/office/drawing/2014/main" id="{2EA4A2E4-8A32-43CE-8E15-A87FD98729E0}"/>
+                <a16:creationId xmlns:a16="http://schemas.microsoft.com/office/drawing/2014/main" id="{B3D93894-33E1-4BA8-A976-2882A90F6CAD}"/>
               </a:ext>
             </a:extLst>
           </p:cNvPr>
@@ -29701,7 +29699,7 @@
           <p:cNvPr id="16" name="">
             <a:extLst xmlns:a="http://schemas.openxmlformats.org/drawingml/2006/main">
               <a:ext uri="{FF2B5EF4-FFF2-40B4-BE49-F238E27FC236}">
-                <a16:creationId xmlns:a16="http://schemas.microsoft.com/office/drawing/2014/main" id="{BB77D3D5-EAC2-4743-8C39-566CF91C0114}"/>
+                <a16:creationId xmlns:a16="http://schemas.microsoft.com/office/drawing/2014/main" id="{129F49A9-D86B-4813-B74B-2F21FE8439F4}"/>
               </a:ext>
             </a:extLst>
           </p:cNvPr>
@@ -29736,7 +29734,7 @@
           <p:cNvPr id="17" name="">
             <a:extLst xmlns:a="http://schemas.openxmlformats.org/drawingml/2006/main">
               <a:ext uri="{FF2B5EF4-FFF2-40B4-BE49-F238E27FC236}">
-                <a16:creationId xmlns:a16="http://schemas.microsoft.com/office/drawing/2014/main" id="{C9A25662-4D86-4DA5-AD7A-F7EBDC032DE4}"/>
+                <a16:creationId xmlns:a16="http://schemas.microsoft.com/office/drawing/2014/main" id="{12E8F6E3-204F-481C-8B38-2BB56F0C2827}"/>
               </a:ext>
             </a:extLst>
           </p:cNvPr>
@@ -29800,7 +29798,7 @@
           <p:cNvPr id="18" name="">
             <a:extLst xmlns:a="http://schemas.openxmlformats.org/drawingml/2006/main">
               <a:ext uri="{FF2B5EF4-FFF2-40B4-BE49-F238E27FC236}">
-                <a16:creationId xmlns:a16="http://schemas.microsoft.com/office/drawing/2014/main" id="{2B63CB64-8520-48F7-9F97-261CC102B061}"/>
+                <a16:creationId xmlns:a16="http://schemas.microsoft.com/office/drawing/2014/main" id="{B2C6F917-DB92-4614-BB90-7B968D74E202}"/>
               </a:ext>
             </a:extLst>
           </p:cNvPr>
@@ -29864,7 +29862,7 @@
           <p:cNvPr id="19" name="">
             <a:extLst xmlns:a="http://schemas.openxmlformats.org/drawingml/2006/main">
               <a:ext uri="{FF2B5EF4-FFF2-40B4-BE49-F238E27FC236}">
-                <a16:creationId xmlns:a16="http://schemas.microsoft.com/office/drawing/2014/main" id="{637EBCCA-47A6-4A24-844D-D0B803722C72}"/>
+                <a16:creationId xmlns:a16="http://schemas.microsoft.com/office/drawing/2014/main" id="{B6A34C34-DD38-4EDA-B450-9501FBC6DDDD}"/>
               </a:ext>
             </a:extLst>
           </p:cNvPr>
@@ -29897,7 +29895,7 @@
           <p:cNvPr id="20" name="">
             <a:extLst xmlns:a="http://schemas.openxmlformats.org/drawingml/2006/main">
               <a:ext uri="{FF2B5EF4-FFF2-40B4-BE49-F238E27FC236}">
-                <a16:creationId xmlns:a16="http://schemas.microsoft.com/office/drawing/2014/main" id="{2E0033DB-6588-4334-B456-5C662086DAA2}"/>
+                <a16:creationId xmlns:a16="http://schemas.microsoft.com/office/drawing/2014/main" id="{BAF93EF8-FE85-4BF7-9E08-9986CFF2310E}"/>
               </a:ext>
             </a:extLst>
           </p:cNvPr>
@@ -29932,7 +29930,7 @@
           <p:cNvPr id="21" name="">
             <a:extLst xmlns:a="http://schemas.openxmlformats.org/drawingml/2006/main">
               <a:ext uri="{FF2B5EF4-FFF2-40B4-BE49-F238E27FC236}">
-                <a16:creationId xmlns:a16="http://schemas.microsoft.com/office/drawing/2014/main" id="{E519C117-A26C-4A67-9876-D231C8028878}"/>
+                <a16:creationId xmlns:a16="http://schemas.microsoft.com/office/drawing/2014/main" id="{B5105766-C119-4493-A0F2-3B736F320C46}"/>
               </a:ext>
             </a:extLst>
           </p:cNvPr>
@@ -29996,7 +29994,7 @@
           <p:cNvPr id="22" name="">
             <a:extLst xmlns:a="http://schemas.openxmlformats.org/drawingml/2006/main">
               <a:ext uri="{FF2B5EF4-FFF2-40B4-BE49-F238E27FC236}">
-                <a16:creationId xmlns:a16="http://schemas.microsoft.com/office/drawing/2014/main" id="{81D24E38-8CC2-4D1B-8617-D9C85E2D8909}"/>
+                <a16:creationId xmlns:a16="http://schemas.microsoft.com/office/drawing/2014/main" id="{E7A5AC61-718F-4DDE-B9A1-A61F35570E74}"/>
               </a:ext>
             </a:extLst>
           </p:cNvPr>
@@ -30029,7 +30027,7 @@
           <p:cNvPr id="23" name="">
             <a:extLst xmlns:a="http://schemas.openxmlformats.org/drawingml/2006/main">
               <a:ext uri="{FF2B5EF4-FFF2-40B4-BE49-F238E27FC236}">
-                <a16:creationId xmlns:a16="http://schemas.microsoft.com/office/drawing/2014/main" id="{E84AE7AC-C27E-4928-A59B-09163090754A}"/>
+                <a16:creationId xmlns:a16="http://schemas.microsoft.com/office/drawing/2014/main" id="{1E7818F2-C42A-4CD7-84FE-1CF574FD7CE6}"/>
               </a:ext>
             </a:extLst>
           </p:cNvPr>
@@ -30093,7 +30091,7 @@
           <p:cNvPr id="24" name="">
             <a:extLst xmlns:a="http://schemas.openxmlformats.org/drawingml/2006/main">
               <a:ext uri="{FF2B5EF4-FFF2-40B4-BE49-F238E27FC236}">
-                <a16:creationId xmlns:a16="http://schemas.microsoft.com/office/drawing/2014/main" id="{974F8589-897E-44A1-AE6F-77AF247DE031}"/>
+                <a16:creationId xmlns:a16="http://schemas.microsoft.com/office/drawing/2014/main" id="{C4A882B3-BAB3-4805-B653-505FFFAA19E6}"/>
               </a:ext>
             </a:extLst>
           </p:cNvPr>
@@ -30157,7 +30155,7 @@
           <p:cNvPr id="25" name="">
             <a:extLst xmlns:a="http://schemas.openxmlformats.org/drawingml/2006/main">
               <a:ext uri="{FF2B5EF4-FFF2-40B4-BE49-F238E27FC236}">
-                <a16:creationId xmlns:a16="http://schemas.microsoft.com/office/drawing/2014/main" id="{BFA9E463-2C93-46C0-B804-E05FF6C669D8}"/>
+                <a16:creationId xmlns:a16="http://schemas.microsoft.com/office/drawing/2014/main" id="{50F13224-859D-4D55-95FE-17E9A5FC45B1}"/>
               </a:ext>
             </a:extLst>
           </p:cNvPr>
@@ -30190,7 +30188,7 @@
           <p:cNvPr id="26" name="">
             <a:extLst xmlns:a="http://schemas.openxmlformats.org/drawingml/2006/main">
               <a:ext uri="{FF2B5EF4-FFF2-40B4-BE49-F238E27FC236}">
-                <a16:creationId xmlns:a16="http://schemas.microsoft.com/office/drawing/2014/main" id="{D8B511F6-FB8B-4BCA-B876-0606914B6117}"/>
+                <a16:creationId xmlns:a16="http://schemas.microsoft.com/office/drawing/2014/main" id="{8DC00A28-4DEA-4DDD-8B2E-801C6AE75BAF}"/>
               </a:ext>
             </a:extLst>
           </p:cNvPr>
@@ -30254,7 +30252,7 @@
           <p:cNvPr id="27" name="">
             <a:extLst xmlns:a="http://schemas.openxmlformats.org/drawingml/2006/main">
               <a:ext uri="{FF2B5EF4-FFF2-40B4-BE49-F238E27FC236}">
-                <a16:creationId xmlns:a16="http://schemas.microsoft.com/office/drawing/2014/main" id="{57EE3F77-506E-4154-A081-E1583869FA71}"/>
+                <a16:creationId xmlns:a16="http://schemas.microsoft.com/office/drawing/2014/main" id="{F67EC4D6-254B-4065-8299-188BE4ACDF9E}"/>
               </a:ext>
             </a:extLst>
           </p:cNvPr>
@@ -30318,7 +30316,7 @@
           <p:cNvPr id="28" name="">
             <a:extLst xmlns:a="http://schemas.openxmlformats.org/drawingml/2006/main">
               <a:ext uri="{FF2B5EF4-FFF2-40B4-BE49-F238E27FC236}">
-                <a16:creationId xmlns:a16="http://schemas.microsoft.com/office/drawing/2014/main" id="{4E9E10B0-BAFF-476B-AABD-89247C563432}"/>
+                <a16:creationId xmlns:a16="http://schemas.microsoft.com/office/drawing/2014/main" id="{16CAF254-57C2-4B8B-BA53-065B0AB1D949}"/>
               </a:ext>
             </a:extLst>
           </p:cNvPr>
@@ -30351,7 +30349,7 @@
           <p:cNvPr id="29" name="">
             <a:extLst xmlns:a="http://schemas.openxmlformats.org/drawingml/2006/main">
               <a:ext uri="{FF2B5EF4-FFF2-40B4-BE49-F238E27FC236}">
-                <a16:creationId xmlns:a16="http://schemas.microsoft.com/office/drawing/2014/main" id="{87BC5487-D572-4A55-8A58-5515BC9FC045}"/>
+                <a16:creationId xmlns:a16="http://schemas.microsoft.com/office/drawing/2014/main" id="{B0994B88-0063-4B72-A5C0-4F20711019F0}"/>
               </a:ext>
             </a:extLst>
           </p:cNvPr>
@@ -30415,7 +30413,7 @@
           <p:cNvPr id="30" name="">
             <a:extLst xmlns:a="http://schemas.openxmlformats.org/drawingml/2006/main">
               <a:ext uri="{FF2B5EF4-FFF2-40B4-BE49-F238E27FC236}">
-                <a16:creationId xmlns:a16="http://schemas.microsoft.com/office/drawing/2014/main" id="{98205E3D-CDF8-4079-89CB-AF5246B05E98}"/>
+                <a16:creationId xmlns:a16="http://schemas.microsoft.com/office/drawing/2014/main" id="{425EC8B8-8344-4C39-9A6F-C02207AB392B}"/>
               </a:ext>
             </a:extLst>
           </p:cNvPr>
@@ -30479,7 +30477,7 @@
           <p:cNvPr id="31" name="">
             <a:extLst xmlns:a="http://schemas.openxmlformats.org/drawingml/2006/main">
               <a:ext uri="{FF2B5EF4-FFF2-40B4-BE49-F238E27FC236}">
-                <a16:creationId xmlns:a16="http://schemas.microsoft.com/office/drawing/2014/main" id="{C45E36B5-DD64-4386-852A-2DF7025F3AA7}"/>
+                <a16:creationId xmlns:a16="http://schemas.microsoft.com/office/drawing/2014/main" id="{3B4A2FD9-6E36-4403-B6DA-25B7BD66E5E3}"/>
               </a:ext>
             </a:extLst>
           </p:cNvPr>
@@ -30514,7 +30512,7 @@
           <p:cNvPr id="32" name="">
             <a:extLst xmlns:a="http://schemas.openxmlformats.org/drawingml/2006/main">
               <a:ext uri="{FF2B5EF4-FFF2-40B4-BE49-F238E27FC236}">
-                <a16:creationId xmlns:a16="http://schemas.microsoft.com/office/drawing/2014/main" id="{D961CD1D-2D84-40C7-BF3A-63CB2AC8FAB7}"/>
+                <a16:creationId xmlns:a16="http://schemas.microsoft.com/office/drawing/2014/main" id="{C189D17D-C49D-4BF2-A65D-B2DFC640E20B}"/>
               </a:ext>
             </a:extLst>
           </p:cNvPr>
@@ -30578,7 +30576,7 @@
           <p:cNvPr id="33" name="">
             <a:extLst xmlns:a="http://schemas.openxmlformats.org/drawingml/2006/main">
               <a:ext uri="{FF2B5EF4-FFF2-40B4-BE49-F238E27FC236}">
-                <a16:creationId xmlns:a16="http://schemas.microsoft.com/office/drawing/2014/main" id="{85FD53EF-472E-4176-8157-D8692DC14CFC}"/>
+                <a16:creationId xmlns:a16="http://schemas.microsoft.com/office/drawing/2014/main" id="{9EBBF019-2325-4BE8-B970-5BE45B4DF58E}"/>
               </a:ext>
             </a:extLst>
           </p:cNvPr>
@@ -30642,7 +30640,7 @@
           <p:cNvPr id="34" name="">
             <a:extLst xmlns:a="http://schemas.openxmlformats.org/drawingml/2006/main">
               <a:ext uri="{FF2B5EF4-FFF2-40B4-BE49-F238E27FC236}">
-                <a16:creationId xmlns:a16="http://schemas.microsoft.com/office/drawing/2014/main" id="{398845F4-0E58-4304-90E0-331BF289B0FA}"/>
+                <a16:creationId xmlns:a16="http://schemas.microsoft.com/office/drawing/2014/main" id="{31CCA67F-607A-4E4C-9889-E635D2558949}"/>
               </a:ext>
             </a:extLst>
           </p:cNvPr>
@@ -30704,7 +30702,7 @@
     </p:spTree>
     <p:extLst>
       <p:ext uri="{BB962C8B-B14F-4D97-AF65-F5344CB8AC3E}">
-        <p14:creationId xmlns:p14="http://schemas.microsoft.com/office/powerpoint/2010/main" val="308854716"/>
+        <p14:creationId xmlns:p14="http://schemas.microsoft.com/office/powerpoint/2010/main" val="493540249"/>
       </p:ext>
     </p:extLst>
   </p:cSld>
@@ -30728,7 +30726,7 @@
           <p:cNvPr id="1" name="">
             <a:extLst xmlns:a="http://schemas.openxmlformats.org/drawingml/2006/main">
               <a:ext uri="{FF2B5EF4-FFF2-40B4-BE49-F238E27FC236}">
-                <a16:creationId xmlns:a16="http://schemas.microsoft.com/office/drawing/2014/main" id="{9601B758-00FC-4389-809C-C48C7B0AE676}"/>
+                <a16:creationId xmlns:a16="http://schemas.microsoft.com/office/drawing/2014/main" id="{0ACB192C-9923-4C47-BEF5-8C3D69B31530}"/>
               </a:ext>
             </a:extLst>
           </p:cNvPr>
@@ -30763,7 +30761,7 @@
           <p:cNvPr id="2" name="">
             <a:extLst xmlns:a="http://schemas.openxmlformats.org/drawingml/2006/main">
               <a:ext uri="{FF2B5EF4-FFF2-40B4-BE49-F238E27FC236}">
-                <a16:creationId xmlns:a16="http://schemas.microsoft.com/office/drawing/2014/main" id="{9503BF15-CBFD-4C46-9D92-70F56C9A7FE6}"/>
+                <a16:creationId xmlns:a16="http://schemas.microsoft.com/office/drawing/2014/main" id="{945BB14B-2903-499D-A61E-BF260637363C}"/>
               </a:ext>
             </a:extLst>
           </p:cNvPr>
@@ -30798,7 +30796,7 @@
           <p:cNvPr id="3" name="">
             <a:extLst xmlns:a="http://schemas.openxmlformats.org/drawingml/2006/main">
               <a:ext uri="{FF2B5EF4-FFF2-40B4-BE49-F238E27FC236}">
-                <a16:creationId xmlns:a16="http://schemas.microsoft.com/office/drawing/2014/main" id="{9AF75B13-5004-4386-934A-1F335DABEEEC}"/>
+                <a16:creationId xmlns:a16="http://schemas.microsoft.com/office/drawing/2014/main" id="{AB8688E1-46C4-4391-BD15-444DDC661922}"/>
               </a:ext>
             </a:extLst>
           </p:cNvPr>
@@ -30833,7 +30831,7 @@
           <p:cNvPr id="4" name="kicker-05-marker">
             <a:extLst xmlns:a="http://schemas.openxmlformats.org/drawingml/2006/main">
               <a:ext uri="{FF2B5EF4-FFF2-40B4-BE49-F238E27FC236}">
-                <a16:creationId xmlns:a16="http://schemas.microsoft.com/office/drawing/2014/main" id="{FEA5698B-30AA-4544-B425-EEACB562050A}"/>
+                <a16:creationId xmlns:a16="http://schemas.microsoft.com/office/drawing/2014/main" id="{01A74EC3-2F43-46C2-B32E-F4EA48155B6B}"/>
               </a:ext>
             </a:extLst>
           </p:cNvPr>
@@ -30868,7 +30866,7 @@
           <p:cNvPr id="5" name="kicker-05-label">
             <a:extLst xmlns:a="http://schemas.openxmlformats.org/drawingml/2006/main">
               <a:ext uri="{FF2B5EF4-FFF2-40B4-BE49-F238E27FC236}">
-                <a16:creationId xmlns:a16="http://schemas.microsoft.com/office/drawing/2014/main" id="{31A4F1ED-58A4-4000-86B7-59D1554FDB75}"/>
+                <a16:creationId xmlns:a16="http://schemas.microsoft.com/office/drawing/2014/main" id="{81E89F3F-1941-4068-97C0-F2A381178E33}"/>
               </a:ext>
             </a:extLst>
           </p:cNvPr>
@@ -30932,7 +30930,7 @@
           <p:cNvPr id="6" name="">
             <a:extLst xmlns:a="http://schemas.openxmlformats.org/drawingml/2006/main">
               <a:ext uri="{FF2B5EF4-FFF2-40B4-BE49-F238E27FC236}">
-                <a16:creationId xmlns:a16="http://schemas.microsoft.com/office/drawing/2014/main" id="{AB138C30-859A-40B7-9484-BA15F842005D}"/>
+                <a16:creationId xmlns:a16="http://schemas.microsoft.com/office/drawing/2014/main" id="{CFEBAA57-5ABF-4F75-AE36-6B46D08550DE}"/>
               </a:ext>
             </a:extLst>
           </p:cNvPr>
@@ -30996,7 +30994,7 @@
           <p:cNvPr id="7" name="">
             <a:extLst xmlns:a="http://schemas.openxmlformats.org/drawingml/2006/main">
               <a:ext uri="{FF2B5EF4-FFF2-40B4-BE49-F238E27FC236}">
-                <a16:creationId xmlns:a16="http://schemas.microsoft.com/office/drawing/2014/main" id="{FFB05CA8-0C02-483F-81FF-0B5ADC62FB41}"/>
+                <a16:creationId xmlns:a16="http://schemas.microsoft.com/office/drawing/2014/main" id="{CC07A9A1-3BA7-41D4-9E77-6192E303A668}"/>
               </a:ext>
             </a:extLst>
           </p:cNvPr>
@@ -31060,7 +31058,7 @@
           <p:cNvPr id="8" name="">
             <a:extLst xmlns:a="http://schemas.openxmlformats.org/drawingml/2006/main">
               <a:ext uri="{FF2B5EF4-FFF2-40B4-BE49-F238E27FC236}">
-                <a16:creationId xmlns:a16="http://schemas.microsoft.com/office/drawing/2014/main" id="{29733E46-41AE-4AF4-B039-D247545F3CC2}"/>
+                <a16:creationId xmlns:a16="http://schemas.microsoft.com/office/drawing/2014/main" id="{664BED7C-6741-45AB-A27F-B1203FDF4E1F}"/>
               </a:ext>
             </a:extLst>
           </p:cNvPr>
@@ -31095,7 +31093,7 @@
           <p:cNvPr id="9" name="">
             <a:extLst xmlns:a="http://schemas.openxmlformats.org/drawingml/2006/main">
               <a:ext uri="{FF2B5EF4-FFF2-40B4-BE49-F238E27FC236}">
-                <a16:creationId xmlns:a16="http://schemas.microsoft.com/office/drawing/2014/main" id="{69C58D1B-B855-47D9-A991-C52350FAC198}"/>
+                <a16:creationId xmlns:a16="http://schemas.microsoft.com/office/drawing/2014/main" id="{BED499CA-0A01-4406-8E03-3232C31C1FC2}"/>
               </a:ext>
             </a:extLst>
           </p:cNvPr>
@@ -31159,7 +31157,7 @@
           <p:cNvPr id="10" name="">
             <a:extLst xmlns:a="http://schemas.openxmlformats.org/drawingml/2006/main">
               <a:ext uri="{FF2B5EF4-FFF2-40B4-BE49-F238E27FC236}">
-                <a16:creationId xmlns:a16="http://schemas.microsoft.com/office/drawing/2014/main" id="{250A493F-E41B-4ED4-81E7-88A219E29536}"/>
+                <a16:creationId xmlns:a16="http://schemas.microsoft.com/office/drawing/2014/main" id="{AE4CEF39-7B55-4106-9C51-6C993EF3E38A}"/>
               </a:ext>
             </a:extLst>
           </p:cNvPr>
@@ -31223,7 +31221,7 @@
           <p:cNvPr id="11" name="">
             <a:extLst xmlns:a="http://schemas.openxmlformats.org/drawingml/2006/main">
               <a:ext uri="{FF2B5EF4-FFF2-40B4-BE49-F238E27FC236}">
-                <a16:creationId xmlns:a16="http://schemas.microsoft.com/office/drawing/2014/main" id="{6260ACB1-2FFC-4331-A480-199F89A08D43}"/>
+                <a16:creationId xmlns:a16="http://schemas.microsoft.com/office/drawing/2014/main" id="{FCCF6B2F-8D35-4025-8B3B-84FE6EF4CAED}"/>
               </a:ext>
             </a:extLst>
           </p:cNvPr>
@@ -31287,7 +31285,7 @@
           <p:cNvPr id="12" name="">
             <a:extLst xmlns:a="http://schemas.openxmlformats.org/drawingml/2006/main">
               <a:ext uri="{FF2B5EF4-FFF2-40B4-BE49-F238E27FC236}">
-                <a16:creationId xmlns:a16="http://schemas.microsoft.com/office/drawing/2014/main" id="{E1B3A564-E350-4065-B0AF-DC4C5089D859}"/>
+                <a16:creationId xmlns:a16="http://schemas.microsoft.com/office/drawing/2014/main" id="{AD6227F2-1CB5-4C34-AC59-53043185A108}"/>
               </a:ext>
             </a:extLst>
           </p:cNvPr>
@@ -31322,7 +31320,7 @@
           <p:cNvPr id="13" name="">
             <a:extLst xmlns:a="http://schemas.openxmlformats.org/drawingml/2006/main">
               <a:ext uri="{FF2B5EF4-FFF2-40B4-BE49-F238E27FC236}">
-                <a16:creationId xmlns:a16="http://schemas.microsoft.com/office/drawing/2014/main" id="{FA8B76B8-9CE2-451B-8D4D-C59A4B275EF9}"/>
+                <a16:creationId xmlns:a16="http://schemas.microsoft.com/office/drawing/2014/main" id="{F833B1BB-2482-45D4-B288-847827B8CB03}"/>
               </a:ext>
             </a:extLst>
           </p:cNvPr>
@@ -31355,7 +31353,7 @@
           <p:cNvPr id="14" name="">
             <a:extLst xmlns:a="http://schemas.openxmlformats.org/drawingml/2006/main">
               <a:ext uri="{FF2B5EF4-FFF2-40B4-BE49-F238E27FC236}">
-                <a16:creationId xmlns:a16="http://schemas.microsoft.com/office/drawing/2014/main" id="{0F3730D8-72BD-4B14-B4A5-4F782F0CA074}"/>
+                <a16:creationId xmlns:a16="http://schemas.microsoft.com/office/drawing/2014/main" id="{7295EFE5-5851-44E0-9E65-7E69902224C6}"/>
               </a:ext>
             </a:extLst>
           </p:cNvPr>
@@ -31390,7 +31388,7 @@
           <p:cNvPr id="15" name="">
             <a:extLst xmlns:a="http://schemas.openxmlformats.org/drawingml/2006/main">
               <a:ext uri="{FF2B5EF4-FFF2-40B4-BE49-F238E27FC236}">
-                <a16:creationId xmlns:a16="http://schemas.microsoft.com/office/drawing/2014/main" id="{8C9E715F-A963-474A-872A-83A8C385A2FC}"/>
+                <a16:creationId xmlns:a16="http://schemas.microsoft.com/office/drawing/2014/main" id="{4E1B0CDA-83FF-4030-B58A-E8384C6A7C96}"/>
               </a:ext>
             </a:extLst>
           </p:cNvPr>
@@ -31454,7 +31452,7 @@
           <p:cNvPr id="16" name="">
             <a:extLst xmlns:a="http://schemas.openxmlformats.org/drawingml/2006/main">
               <a:ext uri="{FF2B5EF4-FFF2-40B4-BE49-F238E27FC236}">
-                <a16:creationId xmlns:a16="http://schemas.microsoft.com/office/drawing/2014/main" id="{3BF06194-2AC1-4FC7-A11C-47CC0D8445F0}"/>
+                <a16:creationId xmlns:a16="http://schemas.microsoft.com/office/drawing/2014/main" id="{12BC7FBE-A9BB-467E-A255-4D65D1818570}"/>
               </a:ext>
             </a:extLst>
           </p:cNvPr>
@@ -31487,7 +31485,7 @@
           <p:cNvPr id="17" name="">
             <a:extLst xmlns:a="http://schemas.openxmlformats.org/drawingml/2006/main">
               <a:ext uri="{FF2B5EF4-FFF2-40B4-BE49-F238E27FC236}">
-                <a16:creationId xmlns:a16="http://schemas.microsoft.com/office/drawing/2014/main" id="{D4875C50-58C2-41C3-95BF-3F449A56D2E9}"/>
+                <a16:creationId xmlns:a16="http://schemas.microsoft.com/office/drawing/2014/main" id="{FD513E34-E13A-4B57-8050-A3C4A2AC7DD9}"/>
               </a:ext>
             </a:extLst>
           </p:cNvPr>
@@ -31551,7 +31549,7 @@
           <p:cNvPr id="18" name="">
             <a:extLst xmlns:a="http://schemas.openxmlformats.org/drawingml/2006/main">
               <a:ext uri="{FF2B5EF4-FFF2-40B4-BE49-F238E27FC236}">
-                <a16:creationId xmlns:a16="http://schemas.microsoft.com/office/drawing/2014/main" id="{22E3E797-FB08-4228-A83C-EDC4372C1EC4}"/>
+                <a16:creationId xmlns:a16="http://schemas.microsoft.com/office/drawing/2014/main" id="{36A26D8C-122E-49CF-8C7D-91E789DF8B06}"/>
               </a:ext>
             </a:extLst>
           </p:cNvPr>
@@ -31615,7 +31613,7 @@
           <p:cNvPr id="19" name="">
             <a:extLst xmlns:a="http://schemas.openxmlformats.org/drawingml/2006/main">
               <a:ext uri="{FF2B5EF4-FFF2-40B4-BE49-F238E27FC236}">
-                <a16:creationId xmlns:a16="http://schemas.microsoft.com/office/drawing/2014/main" id="{195AFF9E-7CDC-4609-B707-CF2D163A1823}"/>
+                <a16:creationId xmlns:a16="http://schemas.microsoft.com/office/drawing/2014/main" id="{5051C6D2-AB18-47F1-AD41-5E06B106F6C2}"/>
               </a:ext>
             </a:extLst>
           </p:cNvPr>
@@ -31648,7 +31646,7 @@
           <p:cNvPr id="20" name="">
             <a:extLst xmlns:a="http://schemas.openxmlformats.org/drawingml/2006/main">
               <a:ext uri="{FF2B5EF4-FFF2-40B4-BE49-F238E27FC236}">
-                <a16:creationId xmlns:a16="http://schemas.microsoft.com/office/drawing/2014/main" id="{1A6CE8A1-46C5-4F7E-8EC7-A05DE93D187A}"/>
+                <a16:creationId xmlns:a16="http://schemas.microsoft.com/office/drawing/2014/main" id="{4765ECBD-AB43-4920-8B09-6F90083A1BAA}"/>
               </a:ext>
             </a:extLst>
           </p:cNvPr>
@@ -31712,7 +31710,7 @@
           <p:cNvPr id="21" name="">
             <a:extLst xmlns:a="http://schemas.openxmlformats.org/drawingml/2006/main">
               <a:ext uri="{FF2B5EF4-FFF2-40B4-BE49-F238E27FC236}">
-                <a16:creationId xmlns:a16="http://schemas.microsoft.com/office/drawing/2014/main" id="{C83AE86D-E000-4110-BC04-59A15067F06A}"/>
+                <a16:creationId xmlns:a16="http://schemas.microsoft.com/office/drawing/2014/main" id="{9CA133A7-7184-43DE-805D-F6032890964C}"/>
               </a:ext>
             </a:extLst>
           </p:cNvPr>
@@ -31776,7 +31774,7 @@
           <p:cNvPr id="22" name="">
             <a:extLst xmlns:a="http://schemas.openxmlformats.org/drawingml/2006/main">
               <a:ext uri="{FF2B5EF4-FFF2-40B4-BE49-F238E27FC236}">
-                <a16:creationId xmlns:a16="http://schemas.microsoft.com/office/drawing/2014/main" id="{14D98D88-2C30-43F4-8B53-77195A29C6B1}"/>
+                <a16:creationId xmlns:a16="http://schemas.microsoft.com/office/drawing/2014/main" id="{D581A82E-77F1-4E6F-802A-D009284CC5A9}"/>
               </a:ext>
             </a:extLst>
           </p:cNvPr>
@@ -31809,7 +31807,7 @@
           <p:cNvPr id="23" name="">
             <a:extLst xmlns:a="http://schemas.openxmlformats.org/drawingml/2006/main">
               <a:ext uri="{FF2B5EF4-FFF2-40B4-BE49-F238E27FC236}">
-                <a16:creationId xmlns:a16="http://schemas.microsoft.com/office/drawing/2014/main" id="{648A2568-C0FB-4103-B5C5-5A2DEE91ACF5}"/>
+                <a16:creationId xmlns:a16="http://schemas.microsoft.com/office/drawing/2014/main" id="{C6D42A7A-6CA5-4C13-8C8D-816B8CDD2356}"/>
               </a:ext>
             </a:extLst>
           </p:cNvPr>
@@ -31873,7 +31871,7 @@
           <p:cNvPr id="24" name="">
             <a:extLst xmlns:a="http://schemas.openxmlformats.org/drawingml/2006/main">
               <a:ext uri="{FF2B5EF4-FFF2-40B4-BE49-F238E27FC236}">
-                <a16:creationId xmlns:a16="http://schemas.microsoft.com/office/drawing/2014/main" id="{19BA83F3-C5D2-4131-BB93-103049A15825}"/>
+                <a16:creationId xmlns:a16="http://schemas.microsoft.com/office/drawing/2014/main" id="{CDEB84B0-0FE8-47FF-B647-5373A9672FEE}"/>
               </a:ext>
             </a:extLst>
           </p:cNvPr>
@@ -31937,7 +31935,7 @@
           <p:cNvPr id="25" name="">
             <a:extLst xmlns:a="http://schemas.openxmlformats.org/drawingml/2006/main">
               <a:ext uri="{FF2B5EF4-FFF2-40B4-BE49-F238E27FC236}">
-                <a16:creationId xmlns:a16="http://schemas.microsoft.com/office/drawing/2014/main" id="{89E30CA6-F2AF-485A-8FB8-94749FC8FBE7}"/>
+                <a16:creationId xmlns:a16="http://schemas.microsoft.com/office/drawing/2014/main" id="{4AE235C2-AA7F-4D15-9A77-94BC61B91D86}"/>
               </a:ext>
             </a:extLst>
           </p:cNvPr>
@@ -31972,7 +31970,7 @@
           <p:cNvPr id="26" name="">
             <a:extLst xmlns:a="http://schemas.openxmlformats.org/drawingml/2006/main">
               <a:ext uri="{FF2B5EF4-FFF2-40B4-BE49-F238E27FC236}">
-                <a16:creationId xmlns:a16="http://schemas.microsoft.com/office/drawing/2014/main" id="{D9EF7316-E2A7-4EE2-8E71-7A2F7915584D}"/>
+                <a16:creationId xmlns:a16="http://schemas.microsoft.com/office/drawing/2014/main" id="{0FEECAB7-4BBE-4843-BDC5-B7708C561EAC}"/>
               </a:ext>
             </a:extLst>
           </p:cNvPr>
@@ -32036,7 +32034,7 @@
           <p:cNvPr id="27" name="">
             <a:extLst xmlns:a="http://schemas.openxmlformats.org/drawingml/2006/main">
               <a:ext uri="{FF2B5EF4-FFF2-40B4-BE49-F238E27FC236}">
-                <a16:creationId xmlns:a16="http://schemas.microsoft.com/office/drawing/2014/main" id="{1F03F5EA-EDB4-4B4C-AF6D-8B133E1FF876}"/>
+                <a16:creationId xmlns:a16="http://schemas.microsoft.com/office/drawing/2014/main" id="{B6FC2830-5778-44D4-A0AF-74D42848B00C}"/>
               </a:ext>
             </a:extLst>
           </p:cNvPr>
@@ -32069,7 +32067,7 @@
           <p:cNvPr id="28" name="">
             <a:extLst xmlns:a="http://schemas.openxmlformats.org/drawingml/2006/main">
               <a:ext uri="{FF2B5EF4-FFF2-40B4-BE49-F238E27FC236}">
-                <a16:creationId xmlns:a16="http://schemas.microsoft.com/office/drawing/2014/main" id="{1B01F71B-2A49-42BF-91DD-713917CC2D08}"/>
+                <a16:creationId xmlns:a16="http://schemas.microsoft.com/office/drawing/2014/main" id="{FF7456A2-7AFD-4207-9B3E-B6587934D1C5}"/>
               </a:ext>
             </a:extLst>
           </p:cNvPr>
@@ -32133,7 +32131,7 @@
           <p:cNvPr id="29" name="">
             <a:extLst xmlns:a="http://schemas.openxmlformats.org/drawingml/2006/main">
               <a:ext uri="{FF2B5EF4-FFF2-40B4-BE49-F238E27FC236}">
-                <a16:creationId xmlns:a16="http://schemas.microsoft.com/office/drawing/2014/main" id="{D4D7A2F9-7A4B-4471-9995-D08A76DAB0CF}"/>
+                <a16:creationId xmlns:a16="http://schemas.microsoft.com/office/drawing/2014/main" id="{CF023AFA-0FD3-4BE5-8AEC-E7DDBFE3895D}"/>
               </a:ext>
             </a:extLst>
           </p:cNvPr>
@@ -32197,7 +32195,7 @@
           <p:cNvPr id="30" name="">
             <a:extLst xmlns:a="http://schemas.openxmlformats.org/drawingml/2006/main">
               <a:ext uri="{FF2B5EF4-FFF2-40B4-BE49-F238E27FC236}">
-                <a16:creationId xmlns:a16="http://schemas.microsoft.com/office/drawing/2014/main" id="{D5C08BB4-832B-4D50-A107-CD347EF3A8E3}"/>
+                <a16:creationId xmlns:a16="http://schemas.microsoft.com/office/drawing/2014/main" id="{6F10282E-4681-4795-A37C-7A5F0D8B04CE}"/>
               </a:ext>
             </a:extLst>
           </p:cNvPr>
@@ -32230,7 +32228,7 @@
           <p:cNvPr id="31" name="">
             <a:extLst xmlns:a="http://schemas.openxmlformats.org/drawingml/2006/main">
               <a:ext uri="{FF2B5EF4-FFF2-40B4-BE49-F238E27FC236}">
-                <a16:creationId xmlns:a16="http://schemas.microsoft.com/office/drawing/2014/main" id="{4BB87906-4981-4B45-96BE-30DA445ED9A1}"/>
+                <a16:creationId xmlns:a16="http://schemas.microsoft.com/office/drawing/2014/main" id="{FA0367A5-9EF3-4FC8-9FEA-422315A90D28}"/>
               </a:ext>
             </a:extLst>
           </p:cNvPr>
@@ -32294,7 +32292,7 @@
           <p:cNvPr id="32" name="">
             <a:extLst xmlns:a="http://schemas.openxmlformats.org/drawingml/2006/main">
               <a:ext uri="{FF2B5EF4-FFF2-40B4-BE49-F238E27FC236}">
-                <a16:creationId xmlns:a16="http://schemas.microsoft.com/office/drawing/2014/main" id="{6B8FB953-D5A6-48B6-99CF-9B1B57ECE262}"/>
+                <a16:creationId xmlns:a16="http://schemas.microsoft.com/office/drawing/2014/main" id="{CA9FA29E-EFFE-4E96-BAB0-ABF74ED69953}"/>
               </a:ext>
             </a:extLst>
           </p:cNvPr>
@@ -32358,7 +32356,7 @@
           <p:cNvPr id="33" name="">
             <a:extLst xmlns:a="http://schemas.openxmlformats.org/drawingml/2006/main">
               <a:ext uri="{FF2B5EF4-FFF2-40B4-BE49-F238E27FC236}">
-                <a16:creationId xmlns:a16="http://schemas.microsoft.com/office/drawing/2014/main" id="{4EB7F6E1-C2D2-4C18-A443-8A3AF89CBB02}"/>
+                <a16:creationId xmlns:a16="http://schemas.microsoft.com/office/drawing/2014/main" id="{11AE726C-C1BA-4012-9EDF-13521855983F}"/>
               </a:ext>
             </a:extLst>
           </p:cNvPr>
@@ -32391,7 +32389,7 @@
           <p:cNvPr id="34" name="">
             <a:extLst xmlns:a="http://schemas.openxmlformats.org/drawingml/2006/main">
               <a:ext uri="{FF2B5EF4-FFF2-40B4-BE49-F238E27FC236}">
-                <a16:creationId xmlns:a16="http://schemas.microsoft.com/office/drawing/2014/main" id="{FF04961A-143C-4497-868E-8208232D73C3}"/>
+                <a16:creationId xmlns:a16="http://schemas.microsoft.com/office/drawing/2014/main" id="{AB77B299-E05A-4754-B1E8-0517CFC3B473}"/>
               </a:ext>
             </a:extLst>
           </p:cNvPr>
@@ -32455,7 +32453,7 @@
           <p:cNvPr id="35" name="">
             <a:extLst xmlns:a="http://schemas.openxmlformats.org/drawingml/2006/main">
               <a:ext uri="{FF2B5EF4-FFF2-40B4-BE49-F238E27FC236}">
-                <a16:creationId xmlns:a16="http://schemas.microsoft.com/office/drawing/2014/main" id="{62B9A4ED-B36D-45DD-AA56-36247D2B8F92}"/>
+                <a16:creationId xmlns:a16="http://schemas.microsoft.com/office/drawing/2014/main" id="{54AD923F-BC5B-4837-8A74-202386E4FB64}"/>
               </a:ext>
             </a:extLst>
           </p:cNvPr>
@@ -32519,7 +32517,7 @@
           <p:cNvPr id="36" name="">
             <a:extLst xmlns:a="http://schemas.openxmlformats.org/drawingml/2006/main">
               <a:ext uri="{FF2B5EF4-FFF2-40B4-BE49-F238E27FC236}">
-                <a16:creationId xmlns:a16="http://schemas.microsoft.com/office/drawing/2014/main" id="{4F61F898-C034-4D42-AECA-7BF6C8766DA6}"/>
+                <a16:creationId xmlns:a16="http://schemas.microsoft.com/office/drawing/2014/main" id="{5C9F1DBF-75CA-4374-9FDA-2346A48095D0}"/>
               </a:ext>
             </a:extLst>
           </p:cNvPr>
@@ -32554,7 +32552,7 @@
           <p:cNvPr id="37" name="">
             <a:extLst xmlns:a="http://schemas.openxmlformats.org/drawingml/2006/main">
               <a:ext uri="{FF2B5EF4-FFF2-40B4-BE49-F238E27FC236}">
-                <a16:creationId xmlns:a16="http://schemas.microsoft.com/office/drawing/2014/main" id="{8AE01E85-497D-4338-8048-88DCF7190128}"/>
+                <a16:creationId xmlns:a16="http://schemas.microsoft.com/office/drawing/2014/main" id="{533040C9-1E8C-4CDB-B3B1-69073BC2795A}"/>
               </a:ext>
             </a:extLst>
           </p:cNvPr>
@@ -32618,7 +32616,7 @@
           <p:cNvPr id="38" name="">
             <a:extLst xmlns:a="http://schemas.openxmlformats.org/drawingml/2006/main">
               <a:ext uri="{FF2B5EF4-FFF2-40B4-BE49-F238E27FC236}">
-                <a16:creationId xmlns:a16="http://schemas.microsoft.com/office/drawing/2014/main" id="{F5359196-61FA-4BFB-85C6-669777043A42}"/>
+                <a16:creationId xmlns:a16="http://schemas.microsoft.com/office/drawing/2014/main" id="{BFDFD231-76CD-4B81-BD93-62A19230D1E3}"/>
               </a:ext>
             </a:extLst>
           </p:cNvPr>
@@ -32682,7 +32680,7 @@
           <p:cNvPr id="39" name="">
             <a:extLst xmlns:a="http://schemas.openxmlformats.org/drawingml/2006/main">
               <a:ext uri="{FF2B5EF4-FFF2-40B4-BE49-F238E27FC236}">
-                <a16:creationId xmlns:a16="http://schemas.microsoft.com/office/drawing/2014/main" id="{A5FFEF67-435A-4982-8C32-9AC02A6D1411}"/>
+                <a16:creationId xmlns:a16="http://schemas.microsoft.com/office/drawing/2014/main" id="{DD5CDFF9-6E2A-4D87-81EE-C71B7A7FED96}"/>
               </a:ext>
             </a:extLst>
           </p:cNvPr>
@@ -32746,7 +32744,7 @@
           <p:cNvPr id="40" name="">
             <a:extLst xmlns:a="http://schemas.openxmlformats.org/drawingml/2006/main">
               <a:ext uri="{FF2B5EF4-FFF2-40B4-BE49-F238E27FC236}">
-                <a16:creationId xmlns:a16="http://schemas.microsoft.com/office/drawing/2014/main" id="{C243747D-3872-4866-B299-3033109C91C9}"/>
+                <a16:creationId xmlns:a16="http://schemas.microsoft.com/office/drawing/2014/main" id="{612C4EEF-AE24-4B3A-86A8-72BF6E06ADDB}"/>
               </a:ext>
             </a:extLst>
           </p:cNvPr>
@@ -32781,7 +32779,7 @@
           <p:cNvPr id="41" name="">
             <a:extLst xmlns:a="http://schemas.openxmlformats.org/drawingml/2006/main">
               <a:ext uri="{FF2B5EF4-FFF2-40B4-BE49-F238E27FC236}">
-                <a16:creationId xmlns:a16="http://schemas.microsoft.com/office/drawing/2014/main" id="{3BD52EF2-3BDB-44B0-9686-8CEDF69EA414}"/>
+                <a16:creationId xmlns:a16="http://schemas.microsoft.com/office/drawing/2014/main" id="{F95AF1FD-672A-48F0-873D-14C8DBBCAA7B}"/>
               </a:ext>
             </a:extLst>
           </p:cNvPr>
@@ -32816,7 +32814,7 @@
           <p:cNvPr id="42" name="">
             <a:extLst xmlns:a="http://schemas.openxmlformats.org/drawingml/2006/main">
               <a:ext uri="{FF2B5EF4-FFF2-40B4-BE49-F238E27FC236}">
-                <a16:creationId xmlns:a16="http://schemas.microsoft.com/office/drawing/2014/main" id="{62454A05-9DC9-4D34-A144-E65C8D0FA88F}"/>
+                <a16:creationId xmlns:a16="http://schemas.microsoft.com/office/drawing/2014/main" id="{6545250A-A769-46E5-AEA3-D8A4B01397C7}"/>
               </a:ext>
             </a:extLst>
           </p:cNvPr>
@@ -32851,7 +32849,7 @@
           <p:cNvPr id="43" name="kicker-05-marker">
             <a:extLst xmlns:a="http://schemas.openxmlformats.org/drawingml/2006/main">
               <a:ext uri="{FF2B5EF4-FFF2-40B4-BE49-F238E27FC236}">
-                <a16:creationId xmlns:a16="http://schemas.microsoft.com/office/drawing/2014/main" id="{4187F457-D9C0-4055-AC1B-FC44BA82B68C}"/>
+                <a16:creationId xmlns:a16="http://schemas.microsoft.com/office/drawing/2014/main" id="{552C8BBF-3468-4A94-ABFB-06F9C0ED1857}"/>
               </a:ext>
             </a:extLst>
           </p:cNvPr>
@@ -32886,7 +32884,7 @@
           <p:cNvPr id="44" name="kicker-05-label">
             <a:extLst xmlns:a="http://schemas.openxmlformats.org/drawingml/2006/main">
               <a:ext uri="{FF2B5EF4-FFF2-40B4-BE49-F238E27FC236}">
-                <a16:creationId xmlns:a16="http://schemas.microsoft.com/office/drawing/2014/main" id="{C42F51C9-DCF7-46B6-96D5-48701FE37997}"/>
+                <a16:creationId xmlns:a16="http://schemas.microsoft.com/office/drawing/2014/main" id="{0094A818-A84C-430A-8E6D-E9151DB375DB}"/>
               </a:ext>
             </a:extLst>
           </p:cNvPr>
@@ -32950,7 +32948,7 @@
           <p:cNvPr id="45" name="">
             <a:extLst xmlns:a="http://schemas.openxmlformats.org/drawingml/2006/main">
               <a:ext uri="{FF2B5EF4-FFF2-40B4-BE49-F238E27FC236}">
-                <a16:creationId xmlns:a16="http://schemas.microsoft.com/office/drawing/2014/main" id="{145F21F3-CFC8-464A-BBB6-5573DBA95796}"/>
+                <a16:creationId xmlns:a16="http://schemas.microsoft.com/office/drawing/2014/main" id="{E2C3987E-D3E4-4A40-9C59-D7A13154A44D}"/>
               </a:ext>
             </a:extLst>
           </p:cNvPr>
@@ -33014,7 +33012,7 @@
           <p:cNvPr id="46" name="">
             <a:extLst xmlns:a="http://schemas.openxmlformats.org/drawingml/2006/main">
               <a:ext uri="{FF2B5EF4-FFF2-40B4-BE49-F238E27FC236}">
-                <a16:creationId xmlns:a16="http://schemas.microsoft.com/office/drawing/2014/main" id="{37BD1FB6-6C76-4308-9F0C-0FBE0EE9CC05}"/>
+                <a16:creationId xmlns:a16="http://schemas.microsoft.com/office/drawing/2014/main" id="{E0F257F6-F197-4748-8BB4-2CF1FADA8AC6}"/>
               </a:ext>
             </a:extLst>
           </p:cNvPr>
@@ -33078,7 +33076,7 @@
           <p:cNvPr id="47" name="">
             <a:extLst xmlns:a="http://schemas.openxmlformats.org/drawingml/2006/main">
               <a:ext uri="{FF2B5EF4-FFF2-40B4-BE49-F238E27FC236}">
-                <a16:creationId xmlns:a16="http://schemas.microsoft.com/office/drawing/2014/main" id="{C356CFA6-F6AE-4496-84A3-0508DDBB34E1}"/>
+                <a16:creationId xmlns:a16="http://schemas.microsoft.com/office/drawing/2014/main" id="{5FCCDE8D-D3DA-492D-907E-56D6F84F5B91}"/>
               </a:ext>
             </a:extLst>
           </p:cNvPr>
@@ -33113,7 +33111,7 @@
           <p:cNvPr id="48" name="">
             <a:extLst xmlns:a="http://schemas.openxmlformats.org/drawingml/2006/main">
               <a:ext uri="{FF2B5EF4-FFF2-40B4-BE49-F238E27FC236}">
-                <a16:creationId xmlns:a16="http://schemas.microsoft.com/office/drawing/2014/main" id="{CC4ACC7D-A9B0-4B1E-B228-E3BF82A565DF}"/>
+                <a16:creationId xmlns:a16="http://schemas.microsoft.com/office/drawing/2014/main" id="{77CE7CA7-B779-469A-82D0-6DC2B6657871}"/>
               </a:ext>
             </a:extLst>
           </p:cNvPr>
@@ -33148,7 +33146,7 @@
           <p:cNvPr id="49" name="">
             <a:extLst xmlns:a="http://schemas.openxmlformats.org/drawingml/2006/main">
               <a:ext uri="{FF2B5EF4-FFF2-40B4-BE49-F238E27FC236}">
-                <a16:creationId xmlns:a16="http://schemas.microsoft.com/office/drawing/2014/main" id="{5CA7FF5F-3887-413E-AC1A-ADFE6D8220A7}"/>
+                <a16:creationId xmlns:a16="http://schemas.microsoft.com/office/drawing/2014/main" id="{D7BFA48D-06E3-405F-9C04-E96CA97335F1}"/>
               </a:ext>
             </a:extLst>
           </p:cNvPr>
@@ -33183,7 +33181,7 @@
           <p:cNvPr id="50" name="">
             <a:extLst xmlns:a="http://schemas.openxmlformats.org/drawingml/2006/main">
               <a:ext uri="{FF2B5EF4-FFF2-40B4-BE49-F238E27FC236}">
-                <a16:creationId xmlns:a16="http://schemas.microsoft.com/office/drawing/2014/main" id="{99198678-F2A2-49BE-BF73-B06E7161D0CE}"/>
+                <a16:creationId xmlns:a16="http://schemas.microsoft.com/office/drawing/2014/main" id="{4A9BB10A-572A-4E4C-B2C3-36A2D4A8CA1B}"/>
               </a:ext>
             </a:extLst>
           </p:cNvPr>
@@ -33218,7 +33216,7 @@
           <p:cNvPr id="51" name="">
             <a:extLst xmlns:a="http://schemas.openxmlformats.org/drawingml/2006/main">
               <a:ext uri="{FF2B5EF4-FFF2-40B4-BE49-F238E27FC236}">
-                <a16:creationId xmlns:a16="http://schemas.microsoft.com/office/drawing/2014/main" id="{051F073A-A8D8-422A-A237-91BDD84148B2}"/>
+                <a16:creationId xmlns:a16="http://schemas.microsoft.com/office/drawing/2014/main" id="{2DDD4921-4829-4045-9460-F0EC0A8CC131}"/>
               </a:ext>
             </a:extLst>
           </p:cNvPr>
@@ -33282,7 +33280,7 @@
           <p:cNvPr id="52" name="">
             <a:extLst xmlns:a="http://schemas.openxmlformats.org/drawingml/2006/main">
               <a:ext uri="{FF2B5EF4-FFF2-40B4-BE49-F238E27FC236}">
-                <a16:creationId xmlns:a16="http://schemas.microsoft.com/office/drawing/2014/main" id="{3DCC5F0E-9A39-420B-8483-1A9F08F91996}"/>
+                <a16:creationId xmlns:a16="http://schemas.microsoft.com/office/drawing/2014/main" id="{95D488DF-2345-40EE-8069-A135EFDACF7B}"/>
               </a:ext>
             </a:extLst>
           </p:cNvPr>
@@ -33346,7 +33344,7 @@
           <p:cNvPr id="53" name="">
             <a:extLst xmlns:a="http://schemas.openxmlformats.org/drawingml/2006/main">
               <a:ext uri="{FF2B5EF4-FFF2-40B4-BE49-F238E27FC236}">
-                <a16:creationId xmlns:a16="http://schemas.microsoft.com/office/drawing/2014/main" id="{643989C0-DB77-46B2-9D5F-4A77D76215C2}"/>
+                <a16:creationId xmlns:a16="http://schemas.microsoft.com/office/drawing/2014/main" id="{668193C3-71CB-42FB-AEDD-12A02E088CBA}"/>
               </a:ext>
             </a:extLst>
           </p:cNvPr>
@@ -33408,7 +33406,7 @@
     </p:spTree>
     <p:extLst>
       <p:ext uri="{BB962C8B-B14F-4D97-AF65-F5344CB8AC3E}">
-        <p14:creationId xmlns:p14="http://schemas.microsoft.com/office/powerpoint/2010/main" val="512849105"/>
+        <p14:creationId xmlns:p14="http://schemas.microsoft.com/office/powerpoint/2010/main" val="375790460"/>
       </p:ext>
     </p:extLst>
   </p:cSld>
